--- a/assets/结构图/矩阵象限-001/example.pptx
+++ b/assets/结构图/矩阵象限-001/example.pptx
@@ -2,13 +2,13 @@
 <file path=ppt/presentation.xml><?xml version="1.0" encoding="utf-8"?>
 <p:presentation xmlns:p="http://schemas.openxmlformats.org/presentationml/2006/main">
   <p:sldMasterIdLst>
-    <p:sldMasterId xmlns:r="http://schemas.openxmlformats.org/officeDocument/2006/relationships" id="2147483648" r:id="Re00b512de56c4bbb"/>
+    <p:sldMasterId xmlns:r="http://schemas.openxmlformats.org/officeDocument/2006/relationships" id="2147483648" r:id="R11ef4a100c5b4e55"/>
   </p:sldMasterIdLst>
   <p:notesMasterIdLst>
-    <p:notesMasterId xmlns:r="http://schemas.openxmlformats.org/officeDocument/2006/relationships" r:id="Rf5216b4ef4b5429f"/>
+    <p:notesMasterId xmlns:r="http://schemas.openxmlformats.org/officeDocument/2006/relationships" r:id="R1c15e78f248c41f4"/>
   </p:notesMasterIdLst>
   <p:sldIdLst>
-    <p:sldId xmlns:r="http://schemas.openxmlformats.org/officeDocument/2006/relationships" id="256" r:id="R2c700442abd5494d"/>
+    <p:sldId xmlns:r="http://schemas.openxmlformats.org/officeDocument/2006/relationships" id="256" r:id="Rf1d0117511cc4177"/>
   </p:sldIdLst>
   <p:sldSz cx="12192000" cy="6858000"/>
   <p:notesSz cx="6858000" cy="9144000"/>
@@ -360,6 +360,78 @@
         </a:effectStyle>
         <a:effectStyle>
           <a:effectLst>
+            <a:outerShdw blurRad="266700" dist="114300" dir="5400000">
+              <a:srgbClr val="2F5EA8">
+                <a:alpha val="22000"/>
+              </a:srgbClr>
+            </a:outerShdw>
+          </a:effectLst>
+        </a:effectStyle>
+        <a:effectStyle>
+          <a:effectLst>
+            <a:outerShdw blurRad="152400" dist="66675" dir="5400000">
+              <a:srgbClr val="2F5EA8">
+                <a:alpha val="9000"/>
+              </a:srgbClr>
+            </a:outerShdw>
+          </a:effectLst>
+        </a:effectStyle>
+        <a:effectStyle>
+          <a:effectLst>
+            <a:outerShdw blurRad="152400" dist="66675" dir="5400000">
+              <a:srgbClr val="2F5EA8">
+                <a:alpha val="10000"/>
+              </a:srgbClr>
+            </a:outerShdw>
+          </a:effectLst>
+        </a:effectStyle>
+        <a:effectStyle>
+          <a:effectLst>
+            <a:outerShdw blurRad="171450" dist="76200" dir="5400000">
+              <a:srgbClr val="2F5EA8">
+                <a:alpha val="16000"/>
+              </a:srgbClr>
+            </a:outerShdw>
+          </a:effectLst>
+        </a:effectStyle>
+        <a:effectStyle>
+          <a:effectLst>
+            <a:outerShdw blurRad="114300" dist="47625" dir="5400000">
+              <a:srgbClr val="2F5EA8">
+                <a:alpha val="7000"/>
+              </a:srgbClr>
+            </a:outerShdw>
+          </a:effectLst>
+        </a:effectStyle>
+        <a:effectStyle>
+          <a:effectLst>
+            <a:outerShdw blurRad="95250" dist="38100" dir="5400000">
+              <a:srgbClr val="2F5EA8">
+                <a:alpha val="8000"/>
+              </a:srgbClr>
+            </a:outerShdw>
+          </a:effectLst>
+        </a:effectStyle>
+        <a:effectStyle>
+          <a:effectLst>
+            <a:outerShdw blurRad="209550" dist="95250" dir="5400000">
+              <a:srgbClr val="2F5EA8">
+                <a:alpha val="8000"/>
+              </a:srgbClr>
+            </a:outerShdw>
+          </a:effectLst>
+        </a:effectStyle>
+        <a:effectStyle>
+          <a:effectLst>
+            <a:outerShdw blurRad="133350" dist="57150" dir="5400000">
+              <a:srgbClr val="2F5EA8">
+                <a:alpha val="18000"/>
+              </a:srgbClr>
+            </a:outerShdw>
+          </a:effectLst>
+        </a:effectStyle>
+        <a:effectStyle>
+          <a:effectLst>
             <a:outerShdw blurRad="200025" dist="85725" dir="5400000">
               <a:srgbClr val="2F5EA8">
                 <a:alpha val="14000"/>
@@ -533,7 +605,7 @@
   </p:cSld>
   <p:clrMap bg1="lt1" tx1="dk1" bg2="lt2" tx2="dk2" accent1="accent1" accent2="accent2" accent3="accent3" accent4="accent4" accent5="accent5" accent6="accent6" hlink="hlink" folHlink="folHlink"/>
   <p:sldLayoutIdLst>
-    <p:sldLayoutId xmlns:r="http://schemas.openxmlformats.org/officeDocument/2006/relationships" id="2147483649" r:id="R5b65361c1fd94772"/>
+    <p:sldLayoutId xmlns:r="http://schemas.openxmlformats.org/officeDocument/2006/relationships" id="2147483649" r:id="R69802212995c4ca0"/>
   </p:sldLayoutIdLst>
   <p:txStyles>
     <p:titleStyle>
@@ -1018,6 +1090,78 @@
         </a:effectStyle>
         <a:effectStyle>
           <a:effectLst>
+            <a:outerShdw blurRad="266700" dist="114300" dir="5400000">
+              <a:srgbClr val="2F5EA8">
+                <a:alpha val="22000"/>
+              </a:srgbClr>
+            </a:outerShdw>
+          </a:effectLst>
+        </a:effectStyle>
+        <a:effectStyle>
+          <a:effectLst>
+            <a:outerShdw blurRad="152400" dist="66675" dir="5400000">
+              <a:srgbClr val="2F5EA8">
+                <a:alpha val="9000"/>
+              </a:srgbClr>
+            </a:outerShdw>
+          </a:effectLst>
+        </a:effectStyle>
+        <a:effectStyle>
+          <a:effectLst>
+            <a:outerShdw blurRad="152400" dist="66675" dir="5400000">
+              <a:srgbClr val="2F5EA8">
+                <a:alpha val="10000"/>
+              </a:srgbClr>
+            </a:outerShdw>
+          </a:effectLst>
+        </a:effectStyle>
+        <a:effectStyle>
+          <a:effectLst>
+            <a:outerShdw blurRad="171450" dist="76200" dir="5400000">
+              <a:srgbClr val="2F5EA8">
+                <a:alpha val="16000"/>
+              </a:srgbClr>
+            </a:outerShdw>
+          </a:effectLst>
+        </a:effectStyle>
+        <a:effectStyle>
+          <a:effectLst>
+            <a:outerShdw blurRad="114300" dist="47625" dir="5400000">
+              <a:srgbClr val="2F5EA8">
+                <a:alpha val="7000"/>
+              </a:srgbClr>
+            </a:outerShdw>
+          </a:effectLst>
+        </a:effectStyle>
+        <a:effectStyle>
+          <a:effectLst>
+            <a:outerShdw blurRad="95250" dist="38100" dir="5400000">
+              <a:srgbClr val="2F5EA8">
+                <a:alpha val="8000"/>
+              </a:srgbClr>
+            </a:outerShdw>
+          </a:effectLst>
+        </a:effectStyle>
+        <a:effectStyle>
+          <a:effectLst>
+            <a:outerShdw blurRad="209550" dist="95250" dir="5400000">
+              <a:srgbClr val="2F5EA8">
+                <a:alpha val="8000"/>
+              </a:srgbClr>
+            </a:outerShdw>
+          </a:effectLst>
+        </a:effectStyle>
+        <a:effectStyle>
+          <a:effectLst>
+            <a:outerShdw blurRad="133350" dist="57150" dir="5400000">
+              <a:srgbClr val="2F5EA8">
+                <a:alpha val="18000"/>
+              </a:srgbClr>
+            </a:outerShdw>
+          </a:effectLst>
+        </a:effectStyle>
+        <a:effectStyle>
+          <a:effectLst>
             <a:outerShdw blurRad="200025" dist="85725" dir="5400000">
               <a:srgbClr val="2F5EA8">
                 <a:alpha val="14000"/>
@@ -1111,7 +1255,7 @@
           <p:cNvPr id="74" name="quadrant-field-0">
             <a:extLst xmlns:a="http://schemas.openxmlformats.org/drawingml/2006/main">
               <a:ext uri="{FF2B5EF4-FFF2-40B4-BE49-F238E27FC236}">
-                <a16:creationId xmlns:a16="http://schemas.microsoft.com/office/drawing/2014/main" id="{5C4CE930-158E-41C5-9DD3-4CCA985FE638}"/>
+                <a16:creationId xmlns:a16="http://schemas.microsoft.com/office/drawing/2014/main" id="{92E22406-68FB-48E9-A8C5-850BDB8128EE}"/>
               </a:ext>
             </a:extLst>
           </p:cNvPr>
@@ -1141,22 +1285,164 @@
       </p:sp>
       <p:sp>
         <p:nvSpPr>
-          <p:cNvPr id="2" name="quadrant-title-0">
-            <a:extLst xmlns:a="http://schemas.openxmlformats.org/drawingml/2006/main">
-              <a:ext uri="{FF2B5EF4-FFF2-40B4-BE49-F238E27FC236}">
-                <a16:creationId xmlns:a16="http://schemas.microsoft.com/office/drawing/2014/main" id="{9E6C8D53-2336-4113-A3A8-5E7D46F9D038}"/>
-              </a:ext>
-            </a:extLst>
-          </p:cNvPr>
-          <p:cNvSpPr>
-            <a:spLocks xmlns:a="http://schemas.openxmlformats.org/drawingml/2006/main" noGrp="1"/>
-          </p:cNvSpPr>
-          <p:nvPr/>
-        </p:nvSpPr>
-        <p:spPr>
-          <a:xfrm xmlns:a="http://schemas.openxmlformats.org/drawingml/2006/main" rot="0">
-            <a:off x="4879781" y="3432724"/>
-            <a:ext cx="816178" cy="243926"/>
+          <p:cNvPr id="2" name="quadrant-field-1">
+            <a:extLst xmlns:a="http://schemas.openxmlformats.org/drawingml/2006/main">
+              <a:ext uri="{FF2B5EF4-FFF2-40B4-BE49-F238E27FC236}">
+                <a16:creationId xmlns:a16="http://schemas.microsoft.com/office/drawing/2014/main" id="{C2198C65-EE03-4F61-A7A7-E85E464CABD3}"/>
+              </a:ext>
+            </a:extLst>
+          </p:cNvPr>
+          <p:cNvSpPr>
+            <a:spLocks xmlns:a="http://schemas.openxmlformats.org/drawingml/2006/main" noGrp="1"/>
+          </p:cNvSpPr>
+          <p:nvPr/>
+        </p:nvSpPr>
+        <p:spPr>
+          <a:xfrm xmlns:a="http://schemas.openxmlformats.org/drawingml/2006/main" rot="0">
+            <a:off x="6267450" y="1752600"/>
+            <a:ext cx="4905375" cy="2038350"/>
+          </a:xfrm>
+          <a:prstGeom xmlns:a="http://schemas.openxmlformats.org/drawingml/2006/main" prst="rect">
+            <a:avLst/>
+          </a:prstGeom>
+          <a:solidFill xmlns:a="http://schemas.openxmlformats.org/drawingml/2006/main">
+            <a:srgbClr val="EEF4FB">
+              <a:alpha val="8000"/>
+            </a:srgbClr>
+          </a:solidFill>
+          <a:ln xmlns:a="http://schemas.openxmlformats.org/drawingml/2006/main" w="0">
+            <a:noFill/>
+            <a:prstDash val="solid"/>
+          </a:ln>
+        </p:spPr>
+      </p:sp>
+      <p:sp>
+        <p:nvSpPr>
+          <p:cNvPr id="3" name="quadrant-field-2">
+            <a:extLst xmlns:a="http://schemas.openxmlformats.org/drawingml/2006/main">
+              <a:ext uri="{FF2B5EF4-FFF2-40B4-BE49-F238E27FC236}">
+                <a16:creationId xmlns:a16="http://schemas.microsoft.com/office/drawing/2014/main" id="{02F9D897-1D0A-40E1-89AA-6FC95BF6C10A}"/>
+              </a:ext>
+            </a:extLst>
+          </p:cNvPr>
+          <p:cNvSpPr>
+            <a:spLocks xmlns:a="http://schemas.openxmlformats.org/drawingml/2006/main" noGrp="1"/>
+          </p:cNvSpPr>
+          <p:nvPr/>
+        </p:nvSpPr>
+        <p:spPr>
+          <a:xfrm xmlns:a="http://schemas.openxmlformats.org/drawingml/2006/main" rot="0">
+            <a:off x="657225" y="4057650"/>
+            <a:ext cx="5267325" cy="2038350"/>
+          </a:xfrm>
+          <a:prstGeom xmlns:a="http://schemas.openxmlformats.org/drawingml/2006/main" prst="rect">
+            <a:avLst/>
+          </a:prstGeom>
+          <a:solidFill xmlns:a="http://schemas.openxmlformats.org/drawingml/2006/main">
+            <a:srgbClr val="EEF4FB">
+              <a:alpha val="8000"/>
+            </a:srgbClr>
+          </a:solidFill>
+          <a:ln xmlns:a="http://schemas.openxmlformats.org/drawingml/2006/main" w="0">
+            <a:noFill/>
+            <a:prstDash val="solid"/>
+          </a:ln>
+        </p:spPr>
+      </p:sp>
+      <p:sp>
+        <p:nvSpPr>
+          <p:cNvPr id="4" name="quadrant-field-3">
+            <a:extLst xmlns:a="http://schemas.openxmlformats.org/drawingml/2006/main">
+              <a:ext uri="{FF2B5EF4-FFF2-40B4-BE49-F238E27FC236}">
+                <a16:creationId xmlns:a16="http://schemas.microsoft.com/office/drawing/2014/main" id="{E384E825-5FF6-46B4-8787-5808E225DCEC}"/>
+              </a:ext>
+            </a:extLst>
+          </p:cNvPr>
+          <p:cNvSpPr>
+            <a:spLocks xmlns:a="http://schemas.openxmlformats.org/drawingml/2006/main" noGrp="1"/>
+          </p:cNvSpPr>
+          <p:nvPr/>
+        </p:nvSpPr>
+        <p:spPr>
+          <a:xfrm xmlns:a="http://schemas.openxmlformats.org/drawingml/2006/main" rot="0">
+            <a:off x="6267450" y="4057650"/>
+            <a:ext cx="4905375" cy="2038350"/>
+          </a:xfrm>
+          <a:prstGeom xmlns:a="http://schemas.openxmlformats.org/drawingml/2006/main" prst="rect">
+            <a:avLst/>
+          </a:prstGeom>
+          <a:solidFill xmlns:a="http://schemas.openxmlformats.org/drawingml/2006/main">
+            <a:srgbClr val="E2EEFC">
+              <a:alpha val="14000"/>
+            </a:srgbClr>
+          </a:solidFill>
+          <a:ln xmlns:a="http://schemas.openxmlformats.org/drawingml/2006/main" w="0">
+            <a:noFill/>
+            <a:prstDash val="solid"/>
+          </a:ln>
+        </p:spPr>
+      </p:sp>
+      <p:sp>
+        <p:nvSpPr>
+          <p:cNvPr id="5" name="matrix-item-0-0">
+            <a:extLst xmlns:a="http://schemas.openxmlformats.org/drawingml/2006/main">
+              <a:ext uri="{FF2B5EF4-FFF2-40B4-BE49-F238E27FC236}">
+                <a16:creationId xmlns:a16="http://schemas.microsoft.com/office/drawing/2014/main" id="{8F8296BC-8369-4084-A274-2ACC57DE5005}"/>
+              </a:ext>
+            </a:extLst>
+          </p:cNvPr>
+          <p:cNvSpPr>
+            <a:spLocks xmlns:a="http://schemas.openxmlformats.org/drawingml/2006/main" noGrp="1"/>
+          </p:cNvSpPr>
+          <p:nvPr/>
+        </p:nvSpPr>
+        <p:spPr>
+          <a:xfrm xmlns:a="http://schemas.openxmlformats.org/drawingml/2006/main" rot="0">
+            <a:off x="3952875" y="2371725"/>
+            <a:ext cx="895350" cy="895350"/>
+          </a:xfrm>
+          <a:prstGeom xmlns:a="http://schemas.openxmlformats.org/drawingml/2006/main" prst="ellipse">
+            <a:avLst/>
+          </a:prstGeom>
+          <a:solidFill xmlns:a="http://schemas.openxmlformats.org/drawingml/2006/main">
+            <a:srgbClr val="2F5EA8">
+              <a:alpha val="79000"/>
+            </a:srgbClr>
+          </a:solidFill>
+          <a:ln xmlns:a="http://schemas.openxmlformats.org/drawingml/2006/main" w="9525">
+            <a:solidFill>
+              <a:srgbClr val="FFFFFF">
+                <a:alpha val="88000"/>
+              </a:srgbClr>
+            </a:solidFill>
+            <a:prstDash val="solid"/>
+          </a:ln>
+        </p:spPr>
+        <p:style>
+          <a:lnRef xmlns:a="http://schemas.openxmlformats.org/drawingml/2006/main" idx="0"/>
+          <a:fillRef xmlns:a="http://schemas.openxmlformats.org/drawingml/2006/main" idx="0"/>
+          <a:effectRef xmlns:a="http://schemas.openxmlformats.org/drawingml/2006/main" idx="18"/>
+          <a:fontRef xmlns:a="http://schemas.openxmlformats.org/drawingml/2006/main" idx="major"/>
+        </p:style>
+      </p:sp>
+      <p:sp>
+        <p:nvSpPr>
+          <p:cNvPr id="6" name="matrix-item-title-0-0">
+            <a:extLst xmlns:a="http://schemas.openxmlformats.org/drawingml/2006/main">
+              <a:ext uri="{FF2B5EF4-FFF2-40B4-BE49-F238E27FC236}">
+                <a16:creationId xmlns:a16="http://schemas.microsoft.com/office/drawing/2014/main" id="{BB260187-28A3-4EAE-BEC6-31AC607F7D9C}"/>
+              </a:ext>
+            </a:extLst>
+          </p:cNvPr>
+          <p:cNvSpPr>
+            <a:spLocks xmlns:a="http://schemas.openxmlformats.org/drawingml/2006/main" noGrp="1"/>
+          </p:cNvSpPr>
+          <p:nvPr/>
+        </p:nvSpPr>
+        <p:spPr>
+          <a:xfrm xmlns:a="http://schemas.openxmlformats.org/drawingml/2006/main" rot="0">
+            <a:off x="4076700" y="2590800"/>
+            <a:ext cx="647700" cy="457200"/>
           </a:xfrm>
           <a:prstGeom xmlns:a="http://schemas.openxmlformats.org/drawingml/2006/main" prst="rect">
             <a:avLst/>
@@ -1168,7 +1454,804 @@
           </a:ln>
         </p:spPr>
         <p:txBody>
-          <a:bodyPr xmlns:a="http://schemas.openxmlformats.org/drawingml/2006/main" lIns="0" tIns="0" rIns="0" bIns="0" anchor="ctr">
+          <a:bodyPr xmlns:a="http://schemas.openxmlformats.org/drawingml/2006/main" wrap="square" lIns="0" tIns="0" rIns="0" bIns="0" anchor="ctr">
+            <a:noAutofit/>
+          </a:bodyPr>
+          <a:lstStyle xmlns:a="http://schemas.openxmlformats.org/drawingml/2006/main"/>
+          <a:p xmlns:a="http://schemas.openxmlformats.org/drawingml/2006/main">
+            <a:pPr algn="ctr">
+              <a:lnSpc>
+                <a:spcPct val="120000"/>
+              </a:lnSpc>
+              <a:buNone/>
+              <a:defRPr sz="1500" b="1" i="0">
+                <a:solidFill>
+                  <a:srgbClr val="FFFFFF"/>
+                </a:solidFill>
+                <a:latin typeface="Microsoft YaHei"/>
+                <a:ea typeface="Microsoft YaHei"/>
+                <a:cs typeface="Microsoft YaHei"/>
+              </a:defRPr>
+            </a:pPr>
+            <a:r>
+              <a:rPr sz="1500" b="1" i="0">
+                <a:solidFill>
+                  <a:srgbClr val="FFFFFF"/>
+                </a:solidFill>
+                <a:latin typeface="Microsoft YaHei"/>
+                <a:ea typeface="Microsoft YaHei"/>
+                <a:cs typeface="Microsoft YaHei"/>
+              </a:rPr>
+              <a:t>异常预警</a:t>
+            </a:r>
+          </a:p>
+        </p:txBody>
+      </p:sp>
+      <p:sp>
+        <p:nvSpPr>
+          <p:cNvPr id="7" name="matrix-item-0-1">
+            <a:extLst xmlns:a="http://schemas.openxmlformats.org/drawingml/2006/main">
+              <a:ext uri="{FF2B5EF4-FFF2-40B4-BE49-F238E27FC236}">
+                <a16:creationId xmlns:a16="http://schemas.microsoft.com/office/drawing/2014/main" id="{29B32667-94FA-41E5-AB3F-D02A5EAF6BEF}"/>
+              </a:ext>
+            </a:extLst>
+          </p:cNvPr>
+          <p:cNvSpPr>
+            <a:spLocks xmlns:a="http://schemas.openxmlformats.org/drawingml/2006/main" noGrp="1"/>
+          </p:cNvSpPr>
+          <p:nvPr/>
+        </p:nvSpPr>
+        <p:spPr>
+          <a:xfrm xmlns:a="http://schemas.openxmlformats.org/drawingml/2006/main" rot="0">
+            <a:off x="4676775" y="2009775"/>
+            <a:ext cx="1162050" cy="1162050"/>
+          </a:xfrm>
+          <a:prstGeom xmlns:a="http://schemas.openxmlformats.org/drawingml/2006/main" prst="ellipse">
+            <a:avLst/>
+          </a:prstGeom>
+          <a:solidFill xmlns:a="http://schemas.openxmlformats.org/drawingml/2006/main">
+            <a:srgbClr val="2F5EA8">
+              <a:alpha val="79000"/>
+            </a:srgbClr>
+          </a:solidFill>
+          <a:ln xmlns:a="http://schemas.openxmlformats.org/drawingml/2006/main" w="9525">
+            <a:solidFill>
+              <a:srgbClr val="FFFFFF">
+                <a:alpha val="88000"/>
+              </a:srgbClr>
+            </a:solidFill>
+            <a:prstDash val="solid"/>
+          </a:ln>
+        </p:spPr>
+        <p:style>
+          <a:lnRef xmlns:a="http://schemas.openxmlformats.org/drawingml/2006/main" idx="0"/>
+          <a:fillRef xmlns:a="http://schemas.openxmlformats.org/drawingml/2006/main" idx="0"/>
+          <a:effectRef xmlns:a="http://schemas.openxmlformats.org/drawingml/2006/main" idx="18"/>
+          <a:fontRef xmlns:a="http://schemas.openxmlformats.org/drawingml/2006/main" idx="major"/>
+        </p:style>
+      </p:sp>
+      <p:sp>
+        <p:nvSpPr>
+          <p:cNvPr id="8" name="matrix-item-title-0-1">
+            <a:extLst xmlns:a="http://schemas.openxmlformats.org/drawingml/2006/main">
+              <a:ext uri="{FF2B5EF4-FFF2-40B4-BE49-F238E27FC236}">
+                <a16:creationId xmlns:a16="http://schemas.microsoft.com/office/drawing/2014/main" id="{1D20AF7A-8336-4CDF-A094-7A62FE4B2317}"/>
+              </a:ext>
+            </a:extLst>
+          </p:cNvPr>
+          <p:cNvSpPr>
+            <a:spLocks xmlns:a="http://schemas.openxmlformats.org/drawingml/2006/main" noGrp="1"/>
+          </p:cNvSpPr>
+          <p:nvPr/>
+        </p:nvSpPr>
+        <p:spPr>
+          <a:xfrm xmlns:a="http://schemas.openxmlformats.org/drawingml/2006/main" rot="0">
+            <a:off x="4800600" y="2461174"/>
+            <a:ext cx="914400" cy="259109"/>
+          </a:xfrm>
+          <a:prstGeom xmlns:a="http://schemas.openxmlformats.org/drawingml/2006/main" prst="rect">
+            <a:avLst/>
+          </a:prstGeom>
+          <a:noFill xmlns:a="http://schemas.openxmlformats.org/drawingml/2006/main"/>
+          <a:ln xmlns:a="http://schemas.openxmlformats.org/drawingml/2006/main" w="0">
+            <a:noFill/>
+            <a:prstDash val="solid"/>
+          </a:ln>
+        </p:spPr>
+        <p:txBody>
+          <a:bodyPr xmlns:a="http://schemas.openxmlformats.org/drawingml/2006/main" wrap="none" lIns="0" tIns="0" rIns="0" bIns="0" anchor="ctr">
+            <a:noAutofit/>
+          </a:bodyPr>
+          <a:lstStyle xmlns:a="http://schemas.openxmlformats.org/drawingml/2006/main"/>
+          <a:p xmlns:a="http://schemas.openxmlformats.org/drawingml/2006/main">
+            <a:pPr algn="ctr">
+              <a:lnSpc>
+                <a:spcPct val="120000"/>
+              </a:lnSpc>
+              <a:buNone/>
+              <a:defRPr sz="1700" b="1" i="0">
+                <a:solidFill>
+                  <a:srgbClr val="FFFFFF"/>
+                </a:solidFill>
+                <a:latin typeface="Microsoft YaHei"/>
+                <a:ea typeface="Microsoft YaHei"/>
+                <a:cs typeface="Microsoft YaHei"/>
+              </a:defRPr>
+            </a:pPr>
+            <a:r>
+              <a:rPr sz="1700" b="1" i="0">
+                <a:solidFill>
+                  <a:srgbClr val="FFFFFF"/>
+                </a:solidFill>
+                <a:latin typeface="Microsoft YaHei"/>
+                <a:ea typeface="Microsoft YaHei"/>
+                <a:cs typeface="Microsoft YaHei"/>
+              </a:rPr>
+              <a:t>统一入口</a:t>
+            </a:r>
+          </a:p>
+        </p:txBody>
+      </p:sp>
+      <p:sp>
+        <p:nvSpPr>
+          <p:cNvPr id="9" name="matrix-item-1-0">
+            <a:extLst xmlns:a="http://schemas.openxmlformats.org/drawingml/2006/main">
+              <a:ext uri="{FF2B5EF4-FFF2-40B4-BE49-F238E27FC236}">
+                <a16:creationId xmlns:a16="http://schemas.microsoft.com/office/drawing/2014/main" id="{A5323FB6-2059-4EB9-A188-A1E03C9E1E65}"/>
+              </a:ext>
+            </a:extLst>
+          </p:cNvPr>
+          <p:cNvSpPr>
+            <a:spLocks xmlns:a="http://schemas.openxmlformats.org/drawingml/2006/main" noGrp="1"/>
+          </p:cNvSpPr>
+          <p:nvPr/>
+        </p:nvSpPr>
+        <p:spPr>
+          <a:xfrm xmlns:a="http://schemas.openxmlformats.org/drawingml/2006/main" rot="0">
+            <a:off x="7343775" y="2447925"/>
+            <a:ext cx="895350" cy="895350"/>
+          </a:xfrm>
+          <a:prstGeom xmlns:a="http://schemas.openxmlformats.org/drawingml/2006/main" prst="ellipse">
+            <a:avLst/>
+          </a:prstGeom>
+          <a:solidFill xmlns:a="http://schemas.openxmlformats.org/drawingml/2006/main">
+            <a:srgbClr val="5284C4">
+              <a:alpha val="68000"/>
+            </a:srgbClr>
+          </a:solidFill>
+          <a:ln xmlns:a="http://schemas.openxmlformats.org/drawingml/2006/main" w="9525">
+            <a:solidFill>
+              <a:srgbClr val="FFFFFF">
+                <a:alpha val="68000"/>
+              </a:srgbClr>
+            </a:solidFill>
+            <a:prstDash val="solid"/>
+          </a:ln>
+        </p:spPr>
+        <p:style>
+          <a:lnRef xmlns:a="http://schemas.openxmlformats.org/drawingml/2006/main" idx="0"/>
+          <a:fillRef xmlns:a="http://schemas.openxmlformats.org/drawingml/2006/main" idx="0"/>
+          <a:effectRef xmlns:a="http://schemas.openxmlformats.org/drawingml/2006/main" idx="19"/>
+          <a:fontRef xmlns:a="http://schemas.openxmlformats.org/drawingml/2006/main" idx="major"/>
+        </p:style>
+      </p:sp>
+      <p:sp>
+        <p:nvSpPr>
+          <p:cNvPr id="10" name="matrix-item-title-1-0">
+            <a:extLst xmlns:a="http://schemas.openxmlformats.org/drawingml/2006/main">
+              <a:ext uri="{FF2B5EF4-FFF2-40B4-BE49-F238E27FC236}">
+                <a16:creationId xmlns:a16="http://schemas.microsoft.com/office/drawing/2014/main" id="{6083E9FB-5D38-4C25-8FE5-57F9FF600731}"/>
+              </a:ext>
+            </a:extLst>
+          </p:cNvPr>
+          <p:cNvSpPr>
+            <a:spLocks xmlns:a="http://schemas.openxmlformats.org/drawingml/2006/main" noGrp="1"/>
+          </p:cNvSpPr>
+          <p:nvPr/>
+        </p:nvSpPr>
+        <p:spPr>
+          <a:xfrm xmlns:a="http://schemas.openxmlformats.org/drawingml/2006/main" rot="0">
+            <a:off x="7467600" y="2667000"/>
+            <a:ext cx="647700" cy="457200"/>
+          </a:xfrm>
+          <a:prstGeom xmlns:a="http://schemas.openxmlformats.org/drawingml/2006/main" prst="rect">
+            <a:avLst/>
+          </a:prstGeom>
+          <a:noFill xmlns:a="http://schemas.openxmlformats.org/drawingml/2006/main"/>
+          <a:ln xmlns:a="http://schemas.openxmlformats.org/drawingml/2006/main" w="0">
+            <a:noFill/>
+            <a:prstDash val="solid"/>
+          </a:ln>
+        </p:spPr>
+        <p:txBody>
+          <a:bodyPr xmlns:a="http://schemas.openxmlformats.org/drawingml/2006/main" wrap="square" lIns="0" tIns="0" rIns="0" bIns="0" anchor="ctr">
+            <a:noAutofit/>
+          </a:bodyPr>
+          <a:lstStyle xmlns:a="http://schemas.openxmlformats.org/drawingml/2006/main"/>
+          <a:p xmlns:a="http://schemas.openxmlformats.org/drawingml/2006/main">
+            <a:pPr algn="ctr">
+              <a:lnSpc>
+                <a:spcPct val="120000"/>
+              </a:lnSpc>
+              <a:buNone/>
+              <a:defRPr sz="1500" b="1" i="0">
+                <a:solidFill>
+                  <a:srgbClr val="FFFFFF"/>
+                </a:solidFill>
+                <a:latin typeface="Microsoft YaHei"/>
+                <a:ea typeface="Microsoft YaHei"/>
+                <a:cs typeface="Microsoft YaHei"/>
+              </a:defRPr>
+            </a:pPr>
+            <a:r>
+              <a:rPr sz="1500" b="1" i="0">
+                <a:solidFill>
+                  <a:srgbClr val="FFFFFF"/>
+                </a:solidFill>
+                <a:latin typeface="Microsoft YaHei"/>
+                <a:ea typeface="Microsoft YaHei"/>
+                <a:cs typeface="Microsoft YaHei"/>
+              </a:rPr>
+              <a:t>数据平台</a:t>
+            </a:r>
+          </a:p>
+        </p:txBody>
+      </p:sp>
+      <p:sp>
+        <p:nvSpPr>
+          <p:cNvPr id="11" name="matrix-item-1-1">
+            <a:extLst xmlns:a="http://schemas.openxmlformats.org/drawingml/2006/main">
+              <a:ext uri="{FF2B5EF4-FFF2-40B4-BE49-F238E27FC236}">
+                <a16:creationId xmlns:a16="http://schemas.microsoft.com/office/drawing/2014/main" id="{55A77122-DB80-43B6-A007-FEEE5809B9DF}"/>
+              </a:ext>
+            </a:extLst>
+          </p:cNvPr>
+          <p:cNvSpPr>
+            <a:spLocks xmlns:a="http://schemas.openxmlformats.org/drawingml/2006/main" noGrp="1"/>
+          </p:cNvSpPr>
+          <p:nvPr/>
+        </p:nvSpPr>
+        <p:spPr>
+          <a:xfrm xmlns:a="http://schemas.openxmlformats.org/drawingml/2006/main" rot="0">
+            <a:off x="6353175" y="1962150"/>
+            <a:ext cx="1162050" cy="1162050"/>
+          </a:xfrm>
+          <a:prstGeom xmlns:a="http://schemas.openxmlformats.org/drawingml/2006/main" prst="ellipse">
+            <a:avLst/>
+          </a:prstGeom>
+          <a:solidFill xmlns:a="http://schemas.openxmlformats.org/drawingml/2006/main">
+            <a:srgbClr val="6FA4D3">
+              <a:alpha val="64000"/>
+            </a:srgbClr>
+          </a:solidFill>
+          <a:ln xmlns:a="http://schemas.openxmlformats.org/drawingml/2006/main" w="9525">
+            <a:solidFill>
+              <a:srgbClr val="FFFFFF">
+                <a:alpha val="68000"/>
+              </a:srgbClr>
+            </a:solidFill>
+            <a:prstDash val="solid"/>
+          </a:ln>
+        </p:spPr>
+        <p:style>
+          <a:lnRef xmlns:a="http://schemas.openxmlformats.org/drawingml/2006/main" idx="0"/>
+          <a:fillRef xmlns:a="http://schemas.openxmlformats.org/drawingml/2006/main" idx="0"/>
+          <a:effectRef xmlns:a="http://schemas.openxmlformats.org/drawingml/2006/main" idx="19"/>
+          <a:fontRef xmlns:a="http://schemas.openxmlformats.org/drawingml/2006/main" idx="major"/>
+        </p:style>
+      </p:sp>
+      <p:sp>
+        <p:nvSpPr>
+          <p:cNvPr id="12" name="matrix-item-title-1-1">
+            <a:extLst xmlns:a="http://schemas.openxmlformats.org/drawingml/2006/main">
+              <a:ext uri="{FF2B5EF4-FFF2-40B4-BE49-F238E27FC236}">
+                <a16:creationId xmlns:a16="http://schemas.microsoft.com/office/drawing/2014/main" id="{E9E6E02B-B1B2-459D-9B3A-65F0D78B98F1}"/>
+              </a:ext>
+            </a:extLst>
+          </p:cNvPr>
+          <p:cNvSpPr>
+            <a:spLocks xmlns:a="http://schemas.openxmlformats.org/drawingml/2006/main" noGrp="1"/>
+          </p:cNvSpPr>
+          <p:nvPr/>
+        </p:nvSpPr>
+        <p:spPr>
+          <a:xfrm xmlns:a="http://schemas.openxmlformats.org/drawingml/2006/main" rot="0">
+            <a:off x="6477000" y="2314575"/>
+            <a:ext cx="914400" cy="457200"/>
+          </a:xfrm>
+          <a:prstGeom xmlns:a="http://schemas.openxmlformats.org/drawingml/2006/main" prst="rect">
+            <a:avLst/>
+          </a:prstGeom>
+          <a:noFill xmlns:a="http://schemas.openxmlformats.org/drawingml/2006/main"/>
+          <a:ln xmlns:a="http://schemas.openxmlformats.org/drawingml/2006/main" w="0">
+            <a:noFill/>
+            <a:prstDash val="solid"/>
+          </a:ln>
+        </p:spPr>
+        <p:txBody>
+          <a:bodyPr xmlns:a="http://schemas.openxmlformats.org/drawingml/2006/main" wrap="square" lIns="0" tIns="0" rIns="0" bIns="0" anchor="ctr">
+            <a:noAutofit/>
+          </a:bodyPr>
+          <a:lstStyle xmlns:a="http://schemas.openxmlformats.org/drawingml/2006/main"/>
+          <a:p xmlns:a="http://schemas.openxmlformats.org/drawingml/2006/main">
+            <a:pPr algn="ctr">
+              <a:lnSpc>
+                <a:spcPct val="120000"/>
+              </a:lnSpc>
+              <a:buNone/>
+              <a:defRPr sz="1500" b="1" i="0">
+                <a:solidFill>
+                  <a:srgbClr val="FFFFFF"/>
+                </a:solidFill>
+                <a:latin typeface="Microsoft YaHei"/>
+                <a:ea typeface="Microsoft YaHei"/>
+                <a:cs typeface="Microsoft YaHei"/>
+              </a:defRPr>
+            </a:pPr>
+            <a:r>
+              <a:rPr sz="1500" b="1" i="0">
+                <a:solidFill>
+                  <a:srgbClr val="FFFFFF"/>
+                </a:solidFill>
+                <a:latin typeface="Microsoft YaHei"/>
+                <a:ea typeface="Microsoft YaHei"/>
+                <a:cs typeface="Microsoft YaHei"/>
+              </a:rPr>
+              <a:t>流程自动化</a:t>
+            </a:r>
+          </a:p>
+        </p:txBody>
+      </p:sp>
+      <p:sp>
+        <p:nvSpPr>
+          <p:cNvPr id="13" name="matrix-item-2-0">
+            <a:extLst xmlns:a="http://schemas.openxmlformats.org/drawingml/2006/main">
+              <a:ext uri="{FF2B5EF4-FFF2-40B4-BE49-F238E27FC236}">
+                <a16:creationId xmlns:a16="http://schemas.microsoft.com/office/drawing/2014/main" id="{3145C51A-E553-4B15-9A10-E5E37CA50D1F}"/>
+              </a:ext>
+            </a:extLst>
+          </p:cNvPr>
+          <p:cNvSpPr>
+            <a:spLocks xmlns:a="http://schemas.openxmlformats.org/drawingml/2006/main" noGrp="1"/>
+          </p:cNvSpPr>
+          <p:nvPr/>
+        </p:nvSpPr>
+        <p:spPr>
+          <a:xfrm xmlns:a="http://schemas.openxmlformats.org/drawingml/2006/main" rot="0">
+            <a:off x="3952875" y="4581525"/>
+            <a:ext cx="895350" cy="895350"/>
+          </a:xfrm>
+          <a:prstGeom xmlns:a="http://schemas.openxmlformats.org/drawingml/2006/main" prst="ellipse">
+            <a:avLst/>
+          </a:prstGeom>
+          <a:solidFill xmlns:a="http://schemas.openxmlformats.org/drawingml/2006/main">
+            <a:srgbClr val="5284C4">
+              <a:alpha val="68000"/>
+            </a:srgbClr>
+          </a:solidFill>
+          <a:ln xmlns:a="http://schemas.openxmlformats.org/drawingml/2006/main" w="9525">
+            <a:solidFill>
+              <a:srgbClr val="FFFFFF">
+                <a:alpha val="68000"/>
+              </a:srgbClr>
+            </a:solidFill>
+            <a:prstDash val="solid"/>
+          </a:ln>
+        </p:spPr>
+        <p:style>
+          <a:lnRef xmlns:a="http://schemas.openxmlformats.org/drawingml/2006/main" idx="0"/>
+          <a:fillRef xmlns:a="http://schemas.openxmlformats.org/drawingml/2006/main" idx="0"/>
+          <a:effectRef xmlns:a="http://schemas.openxmlformats.org/drawingml/2006/main" idx="19"/>
+          <a:fontRef xmlns:a="http://schemas.openxmlformats.org/drawingml/2006/main" idx="major"/>
+        </p:style>
+      </p:sp>
+      <p:sp>
+        <p:nvSpPr>
+          <p:cNvPr id="14" name="matrix-item-title-2-0">
+            <a:extLst xmlns:a="http://schemas.openxmlformats.org/drawingml/2006/main">
+              <a:ext uri="{FF2B5EF4-FFF2-40B4-BE49-F238E27FC236}">
+                <a16:creationId xmlns:a16="http://schemas.microsoft.com/office/drawing/2014/main" id="{6B79D0D6-6D9C-4AAB-BE6F-88BE5D90F577}"/>
+              </a:ext>
+            </a:extLst>
+          </p:cNvPr>
+          <p:cNvSpPr>
+            <a:spLocks xmlns:a="http://schemas.openxmlformats.org/drawingml/2006/main" noGrp="1"/>
+          </p:cNvSpPr>
+          <p:nvPr/>
+        </p:nvSpPr>
+        <p:spPr>
+          <a:xfrm xmlns:a="http://schemas.openxmlformats.org/drawingml/2006/main" rot="0">
+            <a:off x="4076700" y="4800600"/>
+            <a:ext cx="647700" cy="457200"/>
+          </a:xfrm>
+          <a:prstGeom xmlns:a="http://schemas.openxmlformats.org/drawingml/2006/main" prst="rect">
+            <a:avLst/>
+          </a:prstGeom>
+          <a:noFill xmlns:a="http://schemas.openxmlformats.org/drawingml/2006/main"/>
+          <a:ln xmlns:a="http://schemas.openxmlformats.org/drawingml/2006/main" w="0">
+            <a:noFill/>
+            <a:prstDash val="solid"/>
+          </a:ln>
+        </p:spPr>
+        <p:txBody>
+          <a:bodyPr xmlns:a="http://schemas.openxmlformats.org/drawingml/2006/main" wrap="square" lIns="0" tIns="0" rIns="0" bIns="0" anchor="ctr">
+            <a:noAutofit/>
+          </a:bodyPr>
+          <a:lstStyle xmlns:a="http://schemas.openxmlformats.org/drawingml/2006/main"/>
+          <a:p xmlns:a="http://schemas.openxmlformats.org/drawingml/2006/main">
+            <a:pPr algn="ctr">
+              <a:lnSpc>
+                <a:spcPct val="120000"/>
+              </a:lnSpc>
+              <a:buNone/>
+              <a:defRPr sz="1500" b="1" i="0">
+                <a:solidFill>
+                  <a:srgbClr val="FFFFFF"/>
+                </a:solidFill>
+                <a:latin typeface="Microsoft YaHei"/>
+                <a:ea typeface="Microsoft YaHei"/>
+                <a:cs typeface="Microsoft YaHei"/>
+              </a:defRPr>
+            </a:pPr>
+            <a:r>
+              <a:rPr sz="1500" b="1" i="0">
+                <a:solidFill>
+                  <a:srgbClr val="FFFFFF"/>
+                </a:solidFill>
+                <a:latin typeface="Microsoft YaHei"/>
+                <a:ea typeface="Microsoft YaHei"/>
+                <a:cs typeface="Microsoft YaHei"/>
+              </a:rPr>
+              <a:t>报表美化</a:t>
+            </a:r>
+          </a:p>
+        </p:txBody>
+      </p:sp>
+      <p:sp>
+        <p:nvSpPr>
+          <p:cNvPr id="15" name="matrix-item-2-1">
+            <a:extLst xmlns:a="http://schemas.openxmlformats.org/drawingml/2006/main">
+              <a:ext uri="{FF2B5EF4-FFF2-40B4-BE49-F238E27FC236}">
+                <a16:creationId xmlns:a16="http://schemas.microsoft.com/office/drawing/2014/main" id="{4EB3E3A3-CB77-4E65-87A8-325B88FE420F}"/>
+              </a:ext>
+            </a:extLst>
+          </p:cNvPr>
+          <p:cNvSpPr>
+            <a:spLocks xmlns:a="http://schemas.openxmlformats.org/drawingml/2006/main" noGrp="1"/>
+          </p:cNvSpPr>
+          <p:nvPr/>
+        </p:nvSpPr>
+        <p:spPr>
+          <a:xfrm xmlns:a="http://schemas.openxmlformats.org/drawingml/2006/main" rot="0">
+            <a:off x="4676775" y="4676775"/>
+            <a:ext cx="1162050" cy="1162050"/>
+          </a:xfrm>
+          <a:prstGeom xmlns:a="http://schemas.openxmlformats.org/drawingml/2006/main" prst="ellipse">
+            <a:avLst/>
+          </a:prstGeom>
+          <a:solidFill xmlns:a="http://schemas.openxmlformats.org/drawingml/2006/main">
+            <a:srgbClr val="6FA4D3">
+              <a:alpha val="64000"/>
+            </a:srgbClr>
+          </a:solidFill>
+          <a:ln xmlns:a="http://schemas.openxmlformats.org/drawingml/2006/main" w="9525">
+            <a:solidFill>
+              <a:srgbClr val="FFFFFF">
+                <a:alpha val="68000"/>
+              </a:srgbClr>
+            </a:solidFill>
+            <a:prstDash val="solid"/>
+          </a:ln>
+        </p:spPr>
+        <p:style>
+          <a:lnRef xmlns:a="http://schemas.openxmlformats.org/drawingml/2006/main" idx="0"/>
+          <a:fillRef xmlns:a="http://schemas.openxmlformats.org/drawingml/2006/main" idx="0"/>
+          <a:effectRef xmlns:a="http://schemas.openxmlformats.org/drawingml/2006/main" idx="19"/>
+          <a:fontRef xmlns:a="http://schemas.openxmlformats.org/drawingml/2006/main" idx="major"/>
+        </p:style>
+      </p:sp>
+      <p:sp>
+        <p:nvSpPr>
+          <p:cNvPr id="16" name="matrix-item-title-2-1">
+            <a:extLst xmlns:a="http://schemas.openxmlformats.org/drawingml/2006/main">
+              <a:ext uri="{FF2B5EF4-FFF2-40B4-BE49-F238E27FC236}">
+                <a16:creationId xmlns:a16="http://schemas.microsoft.com/office/drawing/2014/main" id="{2620C942-522E-4170-A5DB-879183F82C03}"/>
+              </a:ext>
+            </a:extLst>
+          </p:cNvPr>
+          <p:cNvSpPr>
+            <a:spLocks xmlns:a="http://schemas.openxmlformats.org/drawingml/2006/main" noGrp="1"/>
+          </p:cNvSpPr>
+          <p:nvPr/>
+        </p:nvSpPr>
+        <p:spPr>
+          <a:xfrm xmlns:a="http://schemas.openxmlformats.org/drawingml/2006/main" rot="0">
+            <a:off x="4800600" y="5128174"/>
+            <a:ext cx="914400" cy="259109"/>
+          </a:xfrm>
+          <a:prstGeom xmlns:a="http://schemas.openxmlformats.org/drawingml/2006/main" prst="rect">
+            <a:avLst/>
+          </a:prstGeom>
+          <a:noFill xmlns:a="http://schemas.openxmlformats.org/drawingml/2006/main"/>
+          <a:ln xmlns:a="http://schemas.openxmlformats.org/drawingml/2006/main" w="0">
+            <a:noFill/>
+            <a:prstDash val="solid"/>
+          </a:ln>
+        </p:spPr>
+        <p:txBody>
+          <a:bodyPr xmlns:a="http://schemas.openxmlformats.org/drawingml/2006/main" wrap="none" lIns="0" tIns="0" rIns="0" bIns="0" anchor="ctr">
+            <a:noAutofit/>
+          </a:bodyPr>
+          <a:lstStyle xmlns:a="http://schemas.openxmlformats.org/drawingml/2006/main"/>
+          <a:p xmlns:a="http://schemas.openxmlformats.org/drawingml/2006/main">
+            <a:pPr algn="ctr">
+              <a:lnSpc>
+                <a:spcPct val="120000"/>
+              </a:lnSpc>
+              <a:buNone/>
+              <a:defRPr sz="1700" b="1" i="0">
+                <a:solidFill>
+                  <a:srgbClr val="FFFFFF"/>
+                </a:solidFill>
+                <a:latin typeface="Microsoft YaHei"/>
+                <a:ea typeface="Microsoft YaHei"/>
+                <a:cs typeface="Microsoft YaHei"/>
+              </a:defRPr>
+            </a:pPr>
+            <a:r>
+              <a:rPr sz="1700" b="1" i="0">
+                <a:solidFill>
+                  <a:srgbClr val="FFFFFF"/>
+                </a:solidFill>
+                <a:latin typeface="Microsoft YaHei"/>
+                <a:ea typeface="Microsoft YaHei"/>
+                <a:cs typeface="Microsoft YaHei"/>
+              </a:rPr>
+              <a:t>资料归档</a:t>
+            </a:r>
+          </a:p>
+        </p:txBody>
+      </p:sp>
+      <p:sp>
+        <p:nvSpPr>
+          <p:cNvPr id="17" name="matrix-item-3-0">
+            <a:extLst xmlns:a="http://schemas.openxmlformats.org/drawingml/2006/main">
+              <a:ext uri="{FF2B5EF4-FFF2-40B4-BE49-F238E27FC236}">
+                <a16:creationId xmlns:a16="http://schemas.microsoft.com/office/drawing/2014/main" id="{0E42F9E3-BE64-4B8F-BA18-E6F086E8F95F}"/>
+              </a:ext>
+            </a:extLst>
+          </p:cNvPr>
+          <p:cNvSpPr>
+            <a:spLocks xmlns:a="http://schemas.openxmlformats.org/drawingml/2006/main" noGrp="1"/>
+          </p:cNvSpPr>
+          <p:nvPr/>
+        </p:nvSpPr>
+        <p:spPr>
+          <a:xfrm xmlns:a="http://schemas.openxmlformats.org/drawingml/2006/main" rot="0">
+            <a:off x="7343775" y="4524375"/>
+            <a:ext cx="895350" cy="895350"/>
+          </a:xfrm>
+          <a:prstGeom xmlns:a="http://schemas.openxmlformats.org/drawingml/2006/main" prst="ellipse">
+            <a:avLst/>
+          </a:prstGeom>
+          <a:solidFill xmlns:a="http://schemas.openxmlformats.org/drawingml/2006/main">
+            <a:srgbClr val="4C7AB8">
+              <a:alpha val="74000"/>
+            </a:srgbClr>
+          </a:solidFill>
+          <a:ln xmlns:a="http://schemas.openxmlformats.org/drawingml/2006/main" w="9525">
+            <a:solidFill>
+              <a:srgbClr val="FFFFFF">
+                <a:alpha val="68000"/>
+              </a:srgbClr>
+            </a:solidFill>
+            <a:prstDash val="solid"/>
+          </a:ln>
+        </p:spPr>
+        <p:style>
+          <a:lnRef xmlns:a="http://schemas.openxmlformats.org/drawingml/2006/main" idx="0"/>
+          <a:fillRef xmlns:a="http://schemas.openxmlformats.org/drawingml/2006/main" idx="0"/>
+          <a:effectRef xmlns:a="http://schemas.openxmlformats.org/drawingml/2006/main" idx="19"/>
+          <a:fontRef xmlns:a="http://schemas.openxmlformats.org/drawingml/2006/main" idx="major"/>
+        </p:style>
+      </p:sp>
+      <p:sp>
+        <p:nvSpPr>
+          <p:cNvPr id="18" name="matrix-item-title-3-0">
+            <a:extLst xmlns:a="http://schemas.openxmlformats.org/drawingml/2006/main">
+              <a:ext uri="{FF2B5EF4-FFF2-40B4-BE49-F238E27FC236}">
+                <a16:creationId xmlns:a16="http://schemas.microsoft.com/office/drawing/2014/main" id="{B254B2CC-C3F8-42EA-8ED1-66C7E2AE9C9B}"/>
+              </a:ext>
+            </a:extLst>
+          </p:cNvPr>
+          <p:cNvSpPr>
+            <a:spLocks xmlns:a="http://schemas.openxmlformats.org/drawingml/2006/main" noGrp="1"/>
+          </p:cNvSpPr>
+          <p:nvPr/>
+        </p:nvSpPr>
+        <p:spPr>
+          <a:xfrm xmlns:a="http://schemas.openxmlformats.org/drawingml/2006/main" rot="0">
+            <a:off x="7467600" y="4743450"/>
+            <a:ext cx="647700" cy="457200"/>
+          </a:xfrm>
+          <a:prstGeom xmlns:a="http://schemas.openxmlformats.org/drawingml/2006/main" prst="rect">
+            <a:avLst/>
+          </a:prstGeom>
+          <a:noFill xmlns:a="http://schemas.openxmlformats.org/drawingml/2006/main"/>
+          <a:ln xmlns:a="http://schemas.openxmlformats.org/drawingml/2006/main" w="0">
+            <a:noFill/>
+            <a:prstDash val="solid"/>
+          </a:ln>
+        </p:spPr>
+        <p:txBody>
+          <a:bodyPr xmlns:a="http://schemas.openxmlformats.org/drawingml/2006/main" wrap="square" lIns="0" tIns="0" rIns="0" bIns="0" anchor="ctr">
+            <a:noAutofit/>
+          </a:bodyPr>
+          <a:lstStyle xmlns:a="http://schemas.openxmlformats.org/drawingml/2006/main"/>
+          <a:p xmlns:a="http://schemas.openxmlformats.org/drawingml/2006/main">
+            <a:pPr algn="ctr">
+              <a:lnSpc>
+                <a:spcPct val="120000"/>
+              </a:lnSpc>
+              <a:buNone/>
+              <a:defRPr sz="1500" b="1" i="0">
+                <a:solidFill>
+                  <a:srgbClr val="FFFFFF"/>
+                </a:solidFill>
+                <a:latin typeface="Microsoft YaHei"/>
+                <a:ea typeface="Microsoft YaHei"/>
+                <a:cs typeface="Microsoft YaHei"/>
+              </a:defRPr>
+            </a:pPr>
+            <a:r>
+              <a:rPr sz="1500" b="1" i="0">
+                <a:solidFill>
+                  <a:srgbClr val="FFFFFF"/>
+                </a:solidFill>
+                <a:latin typeface="Microsoft YaHei"/>
+                <a:ea typeface="Microsoft YaHei"/>
+                <a:cs typeface="Microsoft YaHei"/>
+              </a:rPr>
+              <a:t>系统重构</a:t>
+            </a:r>
+          </a:p>
+        </p:txBody>
+      </p:sp>
+      <p:sp>
+        <p:nvSpPr>
+          <p:cNvPr id="19" name="matrix-item-3-1">
+            <a:extLst xmlns:a="http://schemas.openxmlformats.org/drawingml/2006/main">
+              <a:ext uri="{FF2B5EF4-FFF2-40B4-BE49-F238E27FC236}">
+                <a16:creationId xmlns:a16="http://schemas.microsoft.com/office/drawing/2014/main" id="{72C549B5-C091-4764-878B-BD735E972C63}"/>
+              </a:ext>
+            </a:extLst>
+          </p:cNvPr>
+          <p:cNvSpPr>
+            <a:spLocks xmlns:a="http://schemas.openxmlformats.org/drawingml/2006/main" noGrp="1"/>
+          </p:cNvSpPr>
+          <p:nvPr/>
+        </p:nvSpPr>
+        <p:spPr>
+          <a:xfrm xmlns:a="http://schemas.openxmlformats.org/drawingml/2006/main" rot="0">
+            <a:off x="6353175" y="4733925"/>
+            <a:ext cx="1162050" cy="1162050"/>
+          </a:xfrm>
+          <a:prstGeom xmlns:a="http://schemas.openxmlformats.org/drawingml/2006/main" prst="ellipse">
+            <a:avLst/>
+          </a:prstGeom>
+          <a:solidFill xmlns:a="http://schemas.openxmlformats.org/drawingml/2006/main">
+            <a:srgbClr val="649BCE">
+              <a:alpha val="68000"/>
+            </a:srgbClr>
+          </a:solidFill>
+          <a:ln xmlns:a="http://schemas.openxmlformats.org/drawingml/2006/main" w="9525">
+            <a:solidFill>
+              <a:srgbClr val="FFFFFF">
+                <a:alpha val="68000"/>
+              </a:srgbClr>
+            </a:solidFill>
+            <a:prstDash val="solid"/>
+          </a:ln>
+        </p:spPr>
+        <p:style>
+          <a:lnRef xmlns:a="http://schemas.openxmlformats.org/drawingml/2006/main" idx="0"/>
+          <a:fillRef xmlns:a="http://schemas.openxmlformats.org/drawingml/2006/main" idx="0"/>
+          <a:effectRef xmlns:a="http://schemas.openxmlformats.org/drawingml/2006/main" idx="19"/>
+          <a:fontRef xmlns:a="http://schemas.openxmlformats.org/drawingml/2006/main" idx="major"/>
+        </p:style>
+      </p:sp>
+      <p:sp>
+        <p:nvSpPr>
+          <p:cNvPr id="20" name="matrix-item-title-3-1">
+            <a:extLst xmlns:a="http://schemas.openxmlformats.org/drawingml/2006/main">
+              <a:ext uri="{FF2B5EF4-FFF2-40B4-BE49-F238E27FC236}">
+                <a16:creationId xmlns:a16="http://schemas.microsoft.com/office/drawing/2014/main" id="{19C0E8E6-504E-458F-A16F-A76FCED28177}"/>
+              </a:ext>
+            </a:extLst>
+          </p:cNvPr>
+          <p:cNvSpPr>
+            <a:spLocks xmlns:a="http://schemas.openxmlformats.org/drawingml/2006/main" noGrp="1"/>
+          </p:cNvSpPr>
+          <p:nvPr/>
+        </p:nvSpPr>
+        <p:spPr>
+          <a:xfrm xmlns:a="http://schemas.openxmlformats.org/drawingml/2006/main" rot="0">
+            <a:off x="6477000" y="5185324"/>
+            <a:ext cx="914400" cy="259109"/>
+          </a:xfrm>
+          <a:prstGeom xmlns:a="http://schemas.openxmlformats.org/drawingml/2006/main" prst="rect">
+            <a:avLst/>
+          </a:prstGeom>
+          <a:noFill xmlns:a="http://schemas.openxmlformats.org/drawingml/2006/main"/>
+          <a:ln xmlns:a="http://schemas.openxmlformats.org/drawingml/2006/main" w="0">
+            <a:noFill/>
+            <a:prstDash val="solid"/>
+          </a:ln>
+        </p:spPr>
+        <p:txBody>
+          <a:bodyPr xmlns:a="http://schemas.openxmlformats.org/drawingml/2006/main" wrap="none" lIns="0" tIns="0" rIns="0" bIns="0" anchor="ctr">
+            <a:noAutofit/>
+          </a:bodyPr>
+          <a:lstStyle xmlns:a="http://schemas.openxmlformats.org/drawingml/2006/main"/>
+          <a:p xmlns:a="http://schemas.openxmlformats.org/drawingml/2006/main">
+            <a:pPr algn="ctr">
+              <a:lnSpc>
+                <a:spcPct val="120000"/>
+              </a:lnSpc>
+              <a:buNone/>
+              <a:defRPr sz="1700" b="1" i="0">
+                <a:solidFill>
+                  <a:srgbClr val="FFFFFF"/>
+                </a:solidFill>
+                <a:latin typeface="Microsoft YaHei"/>
+                <a:ea typeface="Microsoft YaHei"/>
+                <a:cs typeface="Microsoft YaHei"/>
+              </a:defRPr>
+            </a:pPr>
+            <a:r>
+              <a:rPr sz="1700" b="1" i="0">
+                <a:solidFill>
+                  <a:srgbClr val="FFFFFF"/>
+                </a:solidFill>
+                <a:latin typeface="Microsoft YaHei"/>
+                <a:ea typeface="Microsoft YaHei"/>
+                <a:cs typeface="Microsoft YaHei"/>
+              </a:rPr>
+              <a:t>全量迁移</a:t>
+            </a:r>
+          </a:p>
+        </p:txBody>
+      </p:sp>
+      <p:sp>
+        <p:nvSpPr>
+          <p:cNvPr id="21" name="quadrant-title-0">
+            <a:extLst xmlns:a="http://schemas.openxmlformats.org/drawingml/2006/main">
+              <a:ext uri="{FF2B5EF4-FFF2-40B4-BE49-F238E27FC236}">
+                <a16:creationId xmlns:a16="http://schemas.microsoft.com/office/drawing/2014/main" id="{B80E6637-24DF-4626-8235-E8E8ED543877}"/>
+              </a:ext>
+            </a:extLst>
+          </p:cNvPr>
+          <p:cNvSpPr>
+            <a:spLocks xmlns:a="http://schemas.openxmlformats.org/drawingml/2006/main" noGrp="1"/>
+          </p:cNvSpPr>
+          <p:nvPr/>
+        </p:nvSpPr>
+        <p:spPr>
+          <a:xfrm xmlns:a="http://schemas.openxmlformats.org/drawingml/2006/main" rot="0">
+            <a:off x="4607719" y="3351314"/>
+            <a:ext cx="1088231" cy="325336"/>
+          </a:xfrm>
+          <a:prstGeom xmlns:a="http://schemas.openxmlformats.org/drawingml/2006/main" prst="rect">
+            <a:avLst/>
+          </a:prstGeom>
+          <a:noFill xmlns:a="http://schemas.openxmlformats.org/drawingml/2006/main"/>
+          <a:ln xmlns:a="http://schemas.openxmlformats.org/drawingml/2006/main" w="0">
+            <a:noFill/>
+            <a:prstDash val="solid"/>
+          </a:ln>
+        </p:spPr>
+        <p:txBody>
+          <a:bodyPr xmlns:a="http://schemas.openxmlformats.org/drawingml/2006/main" wrap="none" lIns="0" tIns="0" rIns="0" bIns="0" anchor="ctr">
             <a:noAutofit/>
           </a:bodyPr>
           <a:lstStyle xmlns:a="http://schemas.openxmlformats.org/drawingml/2006/main"/>
@@ -1178,7 +2261,7 @@
                 <a:spcPct val="122000"/>
               </a:lnSpc>
               <a:buNone/>
-              <a:defRPr sz="1575" b="1" i="0">
+              <a:defRPr sz="2100" b="1" i="0">
                 <a:solidFill>
                   <a:srgbClr val="2F5EA8"/>
                 </a:solidFill>
@@ -1188,7 +2271,7 @@
               </a:defRPr>
             </a:pPr>
             <a:r>
-              <a:rPr sz="1575" b="1" i="0">
+              <a:rPr sz="2100" b="1" i="0">
                 <a:solidFill>
                   <a:srgbClr val="2F5EA8"/>
                 </a:solidFill>
@@ -1203,65 +2286,22 @@
       </p:sp>
       <p:sp>
         <p:nvSpPr>
-          <p:cNvPr id="3" name="matrix-item-0-0">
-            <a:extLst xmlns:a="http://schemas.openxmlformats.org/drawingml/2006/main">
-              <a:ext uri="{FF2B5EF4-FFF2-40B4-BE49-F238E27FC236}">
-                <a16:creationId xmlns:a16="http://schemas.microsoft.com/office/drawing/2014/main" id="{6711CBEA-933E-452A-B137-4DD99ABEFF0B}"/>
-              </a:ext>
-            </a:extLst>
-          </p:cNvPr>
-          <p:cNvSpPr>
-            <a:spLocks xmlns:a="http://schemas.openxmlformats.org/drawingml/2006/main" noGrp="1"/>
-          </p:cNvSpPr>
-          <p:nvPr/>
-        </p:nvSpPr>
-        <p:spPr>
-          <a:xfrm xmlns:a="http://schemas.openxmlformats.org/drawingml/2006/main" rot="0">
-            <a:off x="3952875" y="2371725"/>
-            <a:ext cx="895350" cy="895350"/>
-          </a:xfrm>
-          <a:prstGeom xmlns:a="http://schemas.openxmlformats.org/drawingml/2006/main" prst="ellipse">
-            <a:avLst/>
-          </a:prstGeom>
-          <a:solidFill xmlns:a="http://schemas.openxmlformats.org/drawingml/2006/main">
-            <a:srgbClr val="2F5EA8">
-              <a:alpha val="79000"/>
-            </a:srgbClr>
-          </a:solidFill>
-          <a:ln xmlns:a="http://schemas.openxmlformats.org/drawingml/2006/main" w="9525">
-            <a:solidFill>
-              <a:srgbClr val="FFFFFF">
-                <a:alpha val="88000"/>
-              </a:srgbClr>
-            </a:solidFill>
-            <a:prstDash val="solid"/>
-          </a:ln>
-        </p:spPr>
-        <p:style>
-          <a:lnRef xmlns:a="http://schemas.openxmlformats.org/drawingml/2006/main" idx="0"/>
-          <a:fillRef xmlns:a="http://schemas.openxmlformats.org/drawingml/2006/main" idx="0"/>
-          <a:effectRef xmlns:a="http://schemas.openxmlformats.org/drawingml/2006/main" idx="10"/>
-          <a:fontRef xmlns:a="http://schemas.openxmlformats.org/drawingml/2006/main" idx="major"/>
-        </p:style>
-      </p:sp>
-      <p:sp>
-        <p:nvSpPr>
-          <p:cNvPr id="4" name="matrix-item-title-0-0">
-            <a:extLst xmlns:a="http://schemas.openxmlformats.org/drawingml/2006/main">
-              <a:ext uri="{FF2B5EF4-FFF2-40B4-BE49-F238E27FC236}">
-                <a16:creationId xmlns:a16="http://schemas.microsoft.com/office/drawing/2014/main" id="{3ECCD80E-9EFD-45A1-B1F9-7C325F39DE49}"/>
-              </a:ext>
-            </a:extLst>
-          </p:cNvPr>
-          <p:cNvSpPr>
-            <a:spLocks xmlns:a="http://schemas.openxmlformats.org/drawingml/2006/main" noGrp="1"/>
-          </p:cNvSpPr>
-          <p:nvPr/>
-        </p:nvSpPr>
-        <p:spPr>
-          <a:xfrm xmlns:a="http://schemas.openxmlformats.org/drawingml/2006/main" rot="0">
-            <a:off x="4076700" y="2593181"/>
-            <a:ext cx="647700" cy="452438"/>
+          <p:cNvPr id="22" name="quadrant-title-1">
+            <a:extLst xmlns:a="http://schemas.openxmlformats.org/drawingml/2006/main">
+              <a:ext uri="{FF2B5EF4-FFF2-40B4-BE49-F238E27FC236}">
+                <a16:creationId xmlns:a16="http://schemas.microsoft.com/office/drawing/2014/main" id="{10D477FB-95F4-437B-89DB-3A2E5688D812}"/>
+              </a:ext>
+            </a:extLst>
+          </p:cNvPr>
+          <p:cNvSpPr>
+            <a:spLocks xmlns:a="http://schemas.openxmlformats.org/drawingml/2006/main" noGrp="1"/>
+          </p:cNvSpPr>
+          <p:nvPr/>
+        </p:nvSpPr>
+        <p:spPr>
+          <a:xfrm xmlns:a="http://schemas.openxmlformats.org/drawingml/2006/main" rot="0">
+            <a:off x="6496050" y="3351314"/>
+            <a:ext cx="1088231" cy="325336"/>
           </a:xfrm>
           <a:prstGeom xmlns:a="http://schemas.openxmlformats.org/drawingml/2006/main" prst="rect">
             <a:avLst/>
@@ -1273,207 +2313,7 @@
           </a:ln>
         </p:spPr>
         <p:txBody>
-          <a:bodyPr xmlns:a="http://schemas.openxmlformats.org/drawingml/2006/main" lIns="0" tIns="0" rIns="0" bIns="0" anchor="ctr">
-            <a:noAutofit/>
-          </a:bodyPr>
-          <a:lstStyle xmlns:a="http://schemas.openxmlformats.org/drawingml/2006/main"/>
-          <a:p xmlns:a="http://schemas.openxmlformats.org/drawingml/2006/main">
-            <a:pPr algn="ctr">
-              <a:lnSpc>
-                <a:spcPct val="125000"/>
-              </a:lnSpc>
-              <a:buNone/>
-              <a:defRPr sz="1425" b="1" i="0">
-                <a:solidFill>
-                  <a:srgbClr val="FFFFFF"/>
-                </a:solidFill>
-                <a:latin typeface="Microsoft YaHei"/>
-                <a:ea typeface="Microsoft YaHei"/>
-                <a:cs typeface="Microsoft YaHei"/>
-              </a:defRPr>
-            </a:pPr>
-            <a:r>
-              <a:rPr sz="1425" b="1" i="0">
-                <a:solidFill>
-                  <a:srgbClr val="FFFFFF"/>
-                </a:solidFill>
-                <a:latin typeface="Microsoft YaHei"/>
-                <a:ea typeface="Microsoft YaHei"/>
-                <a:cs typeface="Microsoft YaHei"/>
-              </a:rPr>
-              <a:t>异常预警</a:t>
-            </a:r>
-          </a:p>
-        </p:txBody>
-      </p:sp>
-      <p:sp>
-        <p:nvSpPr>
-          <p:cNvPr id="5" name="matrix-item-0-1">
-            <a:extLst xmlns:a="http://schemas.openxmlformats.org/drawingml/2006/main">
-              <a:ext uri="{FF2B5EF4-FFF2-40B4-BE49-F238E27FC236}">
-                <a16:creationId xmlns:a16="http://schemas.microsoft.com/office/drawing/2014/main" id="{C3743E66-EC73-4901-AE2E-757F3F433E00}"/>
-              </a:ext>
-            </a:extLst>
-          </p:cNvPr>
-          <p:cNvSpPr>
-            <a:spLocks xmlns:a="http://schemas.openxmlformats.org/drawingml/2006/main" noGrp="1"/>
-          </p:cNvSpPr>
-          <p:nvPr/>
-        </p:nvSpPr>
-        <p:spPr>
-          <a:xfrm xmlns:a="http://schemas.openxmlformats.org/drawingml/2006/main" rot="0">
-            <a:off x="4676775" y="2009775"/>
-            <a:ext cx="1162050" cy="1162050"/>
-          </a:xfrm>
-          <a:prstGeom xmlns:a="http://schemas.openxmlformats.org/drawingml/2006/main" prst="ellipse">
-            <a:avLst/>
-          </a:prstGeom>
-          <a:solidFill xmlns:a="http://schemas.openxmlformats.org/drawingml/2006/main">
-            <a:srgbClr val="2F5EA8">
-              <a:alpha val="79000"/>
-            </a:srgbClr>
-          </a:solidFill>
-          <a:ln xmlns:a="http://schemas.openxmlformats.org/drawingml/2006/main" w="9525">
-            <a:solidFill>
-              <a:srgbClr val="FFFFFF">
-                <a:alpha val="88000"/>
-              </a:srgbClr>
-            </a:solidFill>
-            <a:prstDash val="solid"/>
-          </a:ln>
-        </p:spPr>
-        <p:style>
-          <a:lnRef xmlns:a="http://schemas.openxmlformats.org/drawingml/2006/main" idx="0"/>
-          <a:fillRef xmlns:a="http://schemas.openxmlformats.org/drawingml/2006/main" idx="0"/>
-          <a:effectRef xmlns:a="http://schemas.openxmlformats.org/drawingml/2006/main" idx="10"/>
-          <a:fontRef xmlns:a="http://schemas.openxmlformats.org/drawingml/2006/main" idx="major"/>
-        </p:style>
-      </p:sp>
-      <p:sp>
-        <p:nvSpPr>
-          <p:cNvPr id="6" name="matrix-item-title-0-1">
-            <a:extLst xmlns:a="http://schemas.openxmlformats.org/drawingml/2006/main">
-              <a:ext uri="{FF2B5EF4-FFF2-40B4-BE49-F238E27FC236}">
-                <a16:creationId xmlns:a16="http://schemas.microsoft.com/office/drawing/2014/main" id="{6954A0AC-E3F9-49DB-9291-2EA4F95AAEF2}"/>
-              </a:ext>
-            </a:extLst>
-          </p:cNvPr>
-          <p:cNvSpPr>
-            <a:spLocks xmlns:a="http://schemas.openxmlformats.org/drawingml/2006/main" noGrp="1"/>
-          </p:cNvSpPr>
-          <p:nvPr/>
-        </p:nvSpPr>
-        <p:spPr>
-          <a:xfrm xmlns:a="http://schemas.openxmlformats.org/drawingml/2006/main" rot="0">
-            <a:off x="4800600" y="2477691"/>
-            <a:ext cx="914400" cy="226219"/>
-          </a:xfrm>
-          <a:prstGeom xmlns:a="http://schemas.openxmlformats.org/drawingml/2006/main" prst="rect">
-            <a:avLst/>
-          </a:prstGeom>
-          <a:noFill xmlns:a="http://schemas.openxmlformats.org/drawingml/2006/main"/>
-          <a:ln xmlns:a="http://schemas.openxmlformats.org/drawingml/2006/main" w="0">
-            <a:noFill/>
-            <a:prstDash val="solid"/>
-          </a:ln>
-        </p:spPr>
-        <p:txBody>
-          <a:bodyPr xmlns:a="http://schemas.openxmlformats.org/drawingml/2006/main" lIns="0" tIns="0" rIns="0" bIns="0" anchor="ctr">
-            <a:noAutofit/>
-          </a:bodyPr>
-          <a:lstStyle xmlns:a="http://schemas.openxmlformats.org/drawingml/2006/main"/>
-          <a:p xmlns:a="http://schemas.openxmlformats.org/drawingml/2006/main">
-            <a:pPr algn="ctr">
-              <a:lnSpc>
-                <a:spcPct val="125000"/>
-              </a:lnSpc>
-              <a:buNone/>
-              <a:defRPr sz="1425" b="1" i="0">
-                <a:solidFill>
-                  <a:srgbClr val="FFFFFF"/>
-                </a:solidFill>
-                <a:latin typeface="Microsoft YaHei"/>
-                <a:ea typeface="Microsoft YaHei"/>
-                <a:cs typeface="Microsoft YaHei"/>
-              </a:defRPr>
-            </a:pPr>
-            <a:r>
-              <a:rPr sz="1425" b="1" i="0">
-                <a:solidFill>
-                  <a:srgbClr val="FFFFFF"/>
-                </a:solidFill>
-                <a:latin typeface="Microsoft YaHei"/>
-                <a:ea typeface="Microsoft YaHei"/>
-                <a:cs typeface="Microsoft YaHei"/>
-              </a:rPr>
-              <a:t>统一入口</a:t>
-            </a:r>
-          </a:p>
-        </p:txBody>
-      </p:sp>
-      <p:sp>
-        <p:nvSpPr>
-          <p:cNvPr id="7" name="quadrant-field-1">
-            <a:extLst xmlns:a="http://schemas.openxmlformats.org/drawingml/2006/main">
-              <a:ext uri="{FF2B5EF4-FFF2-40B4-BE49-F238E27FC236}">
-                <a16:creationId xmlns:a16="http://schemas.microsoft.com/office/drawing/2014/main" id="{9882D535-7450-48FC-A542-AEDB5BDD3FB9}"/>
-              </a:ext>
-            </a:extLst>
-          </p:cNvPr>
-          <p:cNvSpPr>
-            <a:spLocks xmlns:a="http://schemas.openxmlformats.org/drawingml/2006/main" noGrp="1"/>
-          </p:cNvSpPr>
-          <p:nvPr/>
-        </p:nvSpPr>
-        <p:spPr>
-          <a:xfrm xmlns:a="http://schemas.openxmlformats.org/drawingml/2006/main" rot="0">
-            <a:off x="6267450" y="1752600"/>
-            <a:ext cx="4905375" cy="2038350"/>
-          </a:xfrm>
-          <a:prstGeom xmlns:a="http://schemas.openxmlformats.org/drawingml/2006/main" prst="rect">
-            <a:avLst/>
-          </a:prstGeom>
-          <a:solidFill xmlns:a="http://schemas.openxmlformats.org/drawingml/2006/main">
-            <a:srgbClr val="EEF4FB">
-              <a:alpha val="8000"/>
-            </a:srgbClr>
-          </a:solidFill>
-          <a:ln xmlns:a="http://schemas.openxmlformats.org/drawingml/2006/main" w="0">
-            <a:noFill/>
-            <a:prstDash val="solid"/>
-          </a:ln>
-        </p:spPr>
-      </p:sp>
-      <p:sp>
-        <p:nvSpPr>
-          <p:cNvPr id="8" name="quadrant-title-1">
-            <a:extLst xmlns:a="http://schemas.openxmlformats.org/drawingml/2006/main">
-              <a:ext uri="{FF2B5EF4-FFF2-40B4-BE49-F238E27FC236}">
-                <a16:creationId xmlns:a16="http://schemas.microsoft.com/office/drawing/2014/main" id="{5C99D9C1-4DD9-4CC3-A8E2-AAF9C06B1638}"/>
-              </a:ext>
-            </a:extLst>
-          </p:cNvPr>
-          <p:cNvSpPr>
-            <a:spLocks xmlns:a="http://schemas.openxmlformats.org/drawingml/2006/main" noGrp="1"/>
-          </p:cNvSpPr>
-          <p:nvPr/>
-        </p:nvSpPr>
-        <p:spPr>
-          <a:xfrm xmlns:a="http://schemas.openxmlformats.org/drawingml/2006/main" rot="0">
-            <a:off x="6496050" y="3432724"/>
-            <a:ext cx="816178" cy="243926"/>
-          </a:xfrm>
-          <a:prstGeom xmlns:a="http://schemas.openxmlformats.org/drawingml/2006/main" prst="rect">
-            <a:avLst/>
-          </a:prstGeom>
-          <a:noFill xmlns:a="http://schemas.openxmlformats.org/drawingml/2006/main"/>
-          <a:ln xmlns:a="http://schemas.openxmlformats.org/drawingml/2006/main" w="0">
-            <a:noFill/>
-            <a:prstDash val="solid"/>
-          </a:ln>
-        </p:spPr>
-        <p:txBody>
-          <a:bodyPr xmlns:a="http://schemas.openxmlformats.org/drawingml/2006/main" lIns="0" tIns="0" rIns="0" bIns="0" anchor="ctr">
+          <a:bodyPr xmlns:a="http://schemas.openxmlformats.org/drawingml/2006/main" wrap="none" lIns="0" tIns="0" rIns="0" bIns="0" anchor="ctr">
             <a:noAutofit/>
           </a:bodyPr>
           <a:lstStyle xmlns:a="http://schemas.openxmlformats.org/drawingml/2006/main"/>
@@ -1483,7 +2323,7 @@
                 <a:spcPct val="122000"/>
               </a:lnSpc>
               <a:buNone/>
-              <a:defRPr sz="1575" b="1" i="0">
+              <a:defRPr sz="2100" b="1" i="0">
                 <a:solidFill>
                   <a:srgbClr val="46688F"/>
                 </a:solidFill>
@@ -1493,7 +2333,7 @@
               </a:defRPr>
             </a:pPr>
             <a:r>
-              <a:rPr sz="1575" b="1" i="0">
+              <a:rPr sz="2100" b="1" i="0">
                 <a:solidFill>
                   <a:srgbClr val="46688F"/>
                 </a:solidFill>
@@ -1508,65 +2348,22 @@
       </p:sp>
       <p:sp>
         <p:nvSpPr>
-          <p:cNvPr id="9" name="matrix-item-1-0">
-            <a:extLst xmlns:a="http://schemas.openxmlformats.org/drawingml/2006/main">
-              <a:ext uri="{FF2B5EF4-FFF2-40B4-BE49-F238E27FC236}">
-                <a16:creationId xmlns:a16="http://schemas.microsoft.com/office/drawing/2014/main" id="{A85C2A29-CEC4-49CC-AB23-1D6D3BEBFC85}"/>
-              </a:ext>
-            </a:extLst>
-          </p:cNvPr>
-          <p:cNvSpPr>
-            <a:spLocks xmlns:a="http://schemas.openxmlformats.org/drawingml/2006/main" noGrp="1"/>
-          </p:cNvSpPr>
-          <p:nvPr/>
-        </p:nvSpPr>
-        <p:spPr>
-          <a:xfrm xmlns:a="http://schemas.openxmlformats.org/drawingml/2006/main" rot="0">
-            <a:off x="7343775" y="2447925"/>
-            <a:ext cx="895350" cy="895350"/>
-          </a:xfrm>
-          <a:prstGeom xmlns:a="http://schemas.openxmlformats.org/drawingml/2006/main" prst="ellipse">
-            <a:avLst/>
-          </a:prstGeom>
-          <a:solidFill xmlns:a="http://schemas.openxmlformats.org/drawingml/2006/main">
-            <a:srgbClr val="5284C4">
-              <a:alpha val="68000"/>
-            </a:srgbClr>
-          </a:solidFill>
-          <a:ln xmlns:a="http://schemas.openxmlformats.org/drawingml/2006/main" w="9525">
-            <a:solidFill>
-              <a:srgbClr val="FFFFFF">
-                <a:alpha val="68000"/>
-              </a:srgbClr>
-            </a:solidFill>
-            <a:prstDash val="solid"/>
-          </a:ln>
-        </p:spPr>
-        <p:style>
-          <a:lnRef xmlns:a="http://schemas.openxmlformats.org/drawingml/2006/main" idx="0"/>
-          <a:fillRef xmlns:a="http://schemas.openxmlformats.org/drawingml/2006/main" idx="0"/>
-          <a:effectRef xmlns:a="http://schemas.openxmlformats.org/drawingml/2006/main" idx="11"/>
-          <a:fontRef xmlns:a="http://schemas.openxmlformats.org/drawingml/2006/main" idx="major"/>
-        </p:style>
-      </p:sp>
-      <p:sp>
-        <p:nvSpPr>
-          <p:cNvPr id="10" name="matrix-item-title-1-0">
-            <a:extLst xmlns:a="http://schemas.openxmlformats.org/drawingml/2006/main">
-              <a:ext uri="{FF2B5EF4-FFF2-40B4-BE49-F238E27FC236}">
-                <a16:creationId xmlns:a16="http://schemas.microsoft.com/office/drawing/2014/main" id="{E3A05557-4B95-40FD-B821-4D36237DC251}"/>
-              </a:ext>
-            </a:extLst>
-          </p:cNvPr>
-          <p:cNvSpPr>
-            <a:spLocks xmlns:a="http://schemas.openxmlformats.org/drawingml/2006/main" noGrp="1"/>
-          </p:cNvSpPr>
-          <p:nvPr/>
-        </p:nvSpPr>
-        <p:spPr>
-          <a:xfrm xmlns:a="http://schemas.openxmlformats.org/drawingml/2006/main" rot="0">
-            <a:off x="7467600" y="2669381"/>
-            <a:ext cx="647700" cy="452438"/>
+          <p:cNvPr id="23" name="quadrant-title-2">
+            <a:extLst xmlns:a="http://schemas.openxmlformats.org/drawingml/2006/main">
+              <a:ext uri="{FF2B5EF4-FFF2-40B4-BE49-F238E27FC236}">
+                <a16:creationId xmlns:a16="http://schemas.microsoft.com/office/drawing/2014/main" id="{BB0583A1-33CF-42D3-84F0-0BAB0BB69916}"/>
+              </a:ext>
+            </a:extLst>
+          </p:cNvPr>
+          <p:cNvSpPr>
+            <a:spLocks xmlns:a="http://schemas.openxmlformats.org/drawingml/2006/main" noGrp="1"/>
+          </p:cNvSpPr>
+          <p:nvPr/>
+        </p:nvSpPr>
+        <p:spPr>
+          <a:xfrm xmlns:a="http://schemas.openxmlformats.org/drawingml/2006/main" rot="0">
+            <a:off x="4607719" y="4171950"/>
+            <a:ext cx="1088231" cy="325336"/>
           </a:xfrm>
           <a:prstGeom xmlns:a="http://schemas.openxmlformats.org/drawingml/2006/main" prst="rect">
             <a:avLst/>
@@ -1578,207 +2375,7 @@
           </a:ln>
         </p:spPr>
         <p:txBody>
-          <a:bodyPr xmlns:a="http://schemas.openxmlformats.org/drawingml/2006/main" lIns="0" tIns="0" rIns="0" bIns="0" anchor="ctr">
-            <a:noAutofit/>
-          </a:bodyPr>
-          <a:lstStyle xmlns:a="http://schemas.openxmlformats.org/drawingml/2006/main"/>
-          <a:p xmlns:a="http://schemas.openxmlformats.org/drawingml/2006/main">
-            <a:pPr algn="ctr">
-              <a:lnSpc>
-                <a:spcPct val="125000"/>
-              </a:lnSpc>
-              <a:buNone/>
-              <a:defRPr sz="1425" b="1" i="0">
-                <a:solidFill>
-                  <a:srgbClr val="FFFFFF"/>
-                </a:solidFill>
-                <a:latin typeface="Microsoft YaHei"/>
-                <a:ea typeface="Microsoft YaHei"/>
-                <a:cs typeface="Microsoft YaHei"/>
-              </a:defRPr>
-            </a:pPr>
-            <a:r>
-              <a:rPr sz="1425" b="1" i="0">
-                <a:solidFill>
-                  <a:srgbClr val="FFFFFF"/>
-                </a:solidFill>
-                <a:latin typeface="Microsoft YaHei"/>
-                <a:ea typeface="Microsoft YaHei"/>
-                <a:cs typeface="Microsoft YaHei"/>
-              </a:rPr>
-              <a:t>数据平台</a:t>
-            </a:r>
-          </a:p>
-        </p:txBody>
-      </p:sp>
-      <p:sp>
-        <p:nvSpPr>
-          <p:cNvPr id="11" name="matrix-item-1-1">
-            <a:extLst xmlns:a="http://schemas.openxmlformats.org/drawingml/2006/main">
-              <a:ext uri="{FF2B5EF4-FFF2-40B4-BE49-F238E27FC236}">
-                <a16:creationId xmlns:a16="http://schemas.microsoft.com/office/drawing/2014/main" id="{DA693692-4457-45CC-B95A-F684EDADB41B}"/>
-              </a:ext>
-            </a:extLst>
-          </p:cNvPr>
-          <p:cNvSpPr>
-            <a:spLocks xmlns:a="http://schemas.openxmlformats.org/drawingml/2006/main" noGrp="1"/>
-          </p:cNvSpPr>
-          <p:nvPr/>
-        </p:nvSpPr>
-        <p:spPr>
-          <a:xfrm xmlns:a="http://schemas.openxmlformats.org/drawingml/2006/main" rot="0">
-            <a:off x="6353175" y="1962150"/>
-            <a:ext cx="1162050" cy="1162050"/>
-          </a:xfrm>
-          <a:prstGeom xmlns:a="http://schemas.openxmlformats.org/drawingml/2006/main" prst="ellipse">
-            <a:avLst/>
-          </a:prstGeom>
-          <a:solidFill xmlns:a="http://schemas.openxmlformats.org/drawingml/2006/main">
-            <a:srgbClr val="6FA4D3">
-              <a:alpha val="64000"/>
-            </a:srgbClr>
-          </a:solidFill>
-          <a:ln xmlns:a="http://schemas.openxmlformats.org/drawingml/2006/main" w="9525">
-            <a:solidFill>
-              <a:srgbClr val="FFFFFF">
-                <a:alpha val="68000"/>
-              </a:srgbClr>
-            </a:solidFill>
-            <a:prstDash val="solid"/>
-          </a:ln>
-        </p:spPr>
-        <p:style>
-          <a:lnRef xmlns:a="http://schemas.openxmlformats.org/drawingml/2006/main" idx="0"/>
-          <a:fillRef xmlns:a="http://schemas.openxmlformats.org/drawingml/2006/main" idx="0"/>
-          <a:effectRef xmlns:a="http://schemas.openxmlformats.org/drawingml/2006/main" idx="11"/>
-          <a:fontRef xmlns:a="http://schemas.openxmlformats.org/drawingml/2006/main" idx="major"/>
-        </p:style>
-      </p:sp>
-      <p:sp>
-        <p:nvSpPr>
-          <p:cNvPr id="12" name="matrix-item-title-1-1">
-            <a:extLst xmlns:a="http://schemas.openxmlformats.org/drawingml/2006/main">
-              <a:ext uri="{FF2B5EF4-FFF2-40B4-BE49-F238E27FC236}">
-                <a16:creationId xmlns:a16="http://schemas.microsoft.com/office/drawing/2014/main" id="{CC1038D9-F88D-4208-A870-C052DA353F69}"/>
-              </a:ext>
-            </a:extLst>
-          </p:cNvPr>
-          <p:cNvSpPr>
-            <a:spLocks xmlns:a="http://schemas.openxmlformats.org/drawingml/2006/main" noGrp="1"/>
-          </p:cNvSpPr>
-          <p:nvPr/>
-        </p:nvSpPr>
-        <p:spPr>
-          <a:xfrm xmlns:a="http://schemas.openxmlformats.org/drawingml/2006/main" rot="0">
-            <a:off x="6477000" y="2430066"/>
-            <a:ext cx="914400" cy="226219"/>
-          </a:xfrm>
-          <a:prstGeom xmlns:a="http://schemas.openxmlformats.org/drawingml/2006/main" prst="rect">
-            <a:avLst/>
-          </a:prstGeom>
-          <a:noFill xmlns:a="http://schemas.openxmlformats.org/drawingml/2006/main"/>
-          <a:ln xmlns:a="http://schemas.openxmlformats.org/drawingml/2006/main" w="0">
-            <a:noFill/>
-            <a:prstDash val="solid"/>
-          </a:ln>
-        </p:spPr>
-        <p:txBody>
-          <a:bodyPr xmlns:a="http://schemas.openxmlformats.org/drawingml/2006/main" lIns="0" tIns="0" rIns="0" bIns="0" anchor="ctr">
-            <a:noAutofit/>
-          </a:bodyPr>
-          <a:lstStyle xmlns:a="http://schemas.openxmlformats.org/drawingml/2006/main"/>
-          <a:p xmlns:a="http://schemas.openxmlformats.org/drawingml/2006/main">
-            <a:pPr algn="ctr">
-              <a:lnSpc>
-                <a:spcPct val="125000"/>
-              </a:lnSpc>
-              <a:buNone/>
-              <a:defRPr sz="1425" b="1" i="0">
-                <a:solidFill>
-                  <a:srgbClr val="FFFFFF"/>
-                </a:solidFill>
-                <a:latin typeface="Microsoft YaHei"/>
-                <a:ea typeface="Microsoft YaHei"/>
-                <a:cs typeface="Microsoft YaHei"/>
-              </a:defRPr>
-            </a:pPr>
-            <a:r>
-              <a:rPr sz="1425" b="1" i="0">
-                <a:solidFill>
-                  <a:srgbClr val="FFFFFF"/>
-                </a:solidFill>
-                <a:latin typeface="Microsoft YaHei"/>
-                <a:ea typeface="Microsoft YaHei"/>
-                <a:cs typeface="Microsoft YaHei"/>
-              </a:rPr>
-              <a:t>流程自动化</a:t>
-            </a:r>
-          </a:p>
-        </p:txBody>
-      </p:sp>
-      <p:sp>
-        <p:nvSpPr>
-          <p:cNvPr id="13" name="quadrant-field-2">
-            <a:extLst xmlns:a="http://schemas.openxmlformats.org/drawingml/2006/main">
-              <a:ext uri="{FF2B5EF4-FFF2-40B4-BE49-F238E27FC236}">
-                <a16:creationId xmlns:a16="http://schemas.microsoft.com/office/drawing/2014/main" id="{61E0DEE2-9794-496D-8960-CBA874ED218A}"/>
-              </a:ext>
-            </a:extLst>
-          </p:cNvPr>
-          <p:cNvSpPr>
-            <a:spLocks xmlns:a="http://schemas.openxmlformats.org/drawingml/2006/main" noGrp="1"/>
-          </p:cNvSpPr>
-          <p:nvPr/>
-        </p:nvSpPr>
-        <p:spPr>
-          <a:xfrm xmlns:a="http://schemas.openxmlformats.org/drawingml/2006/main" rot="0">
-            <a:off x="657225" y="4057650"/>
-            <a:ext cx="5267325" cy="2038350"/>
-          </a:xfrm>
-          <a:prstGeom xmlns:a="http://schemas.openxmlformats.org/drawingml/2006/main" prst="rect">
-            <a:avLst/>
-          </a:prstGeom>
-          <a:solidFill xmlns:a="http://schemas.openxmlformats.org/drawingml/2006/main">
-            <a:srgbClr val="EEF4FB">
-              <a:alpha val="8000"/>
-            </a:srgbClr>
-          </a:solidFill>
-          <a:ln xmlns:a="http://schemas.openxmlformats.org/drawingml/2006/main" w="0">
-            <a:noFill/>
-            <a:prstDash val="solid"/>
-          </a:ln>
-        </p:spPr>
-      </p:sp>
-      <p:sp>
-        <p:nvSpPr>
-          <p:cNvPr id="14" name="quadrant-title-2">
-            <a:extLst xmlns:a="http://schemas.openxmlformats.org/drawingml/2006/main">
-              <a:ext uri="{FF2B5EF4-FFF2-40B4-BE49-F238E27FC236}">
-                <a16:creationId xmlns:a16="http://schemas.microsoft.com/office/drawing/2014/main" id="{2DDD6177-C359-4D57-983E-BFFA85513EB8}"/>
-              </a:ext>
-            </a:extLst>
-          </p:cNvPr>
-          <p:cNvSpPr>
-            <a:spLocks xmlns:a="http://schemas.openxmlformats.org/drawingml/2006/main" noGrp="1"/>
-          </p:cNvSpPr>
-          <p:nvPr/>
-        </p:nvSpPr>
-        <p:spPr>
-          <a:xfrm xmlns:a="http://schemas.openxmlformats.org/drawingml/2006/main" rot="0">
-            <a:off x="4879781" y="4171950"/>
-            <a:ext cx="816178" cy="243926"/>
-          </a:xfrm>
-          <a:prstGeom xmlns:a="http://schemas.openxmlformats.org/drawingml/2006/main" prst="rect">
-            <a:avLst/>
-          </a:prstGeom>
-          <a:noFill xmlns:a="http://schemas.openxmlformats.org/drawingml/2006/main"/>
-          <a:ln xmlns:a="http://schemas.openxmlformats.org/drawingml/2006/main" w="0">
-            <a:noFill/>
-            <a:prstDash val="solid"/>
-          </a:ln>
-        </p:spPr>
-        <p:txBody>
-          <a:bodyPr xmlns:a="http://schemas.openxmlformats.org/drawingml/2006/main" lIns="0" tIns="0" rIns="0" bIns="0" anchor="ctr">
+          <a:bodyPr xmlns:a="http://schemas.openxmlformats.org/drawingml/2006/main" wrap="none" lIns="0" tIns="0" rIns="0" bIns="0" anchor="ctr">
             <a:noAutofit/>
           </a:bodyPr>
           <a:lstStyle xmlns:a="http://schemas.openxmlformats.org/drawingml/2006/main"/>
@@ -1788,7 +2385,7 @@
                 <a:spcPct val="122000"/>
               </a:lnSpc>
               <a:buNone/>
-              <a:defRPr sz="1575" b="1" i="0">
+              <a:defRPr sz="2100" b="1" i="0">
                 <a:solidFill>
                   <a:srgbClr val="46688F"/>
                 </a:solidFill>
@@ -1798,7 +2395,7 @@
               </a:defRPr>
             </a:pPr>
             <a:r>
-              <a:rPr sz="1575" b="1" i="0">
+              <a:rPr sz="2100" b="1" i="0">
                 <a:solidFill>
                   <a:srgbClr val="46688F"/>
                 </a:solidFill>
@@ -1813,65 +2410,22 @@
       </p:sp>
       <p:sp>
         <p:nvSpPr>
-          <p:cNvPr id="15" name="matrix-item-2-0">
-            <a:extLst xmlns:a="http://schemas.openxmlformats.org/drawingml/2006/main">
-              <a:ext uri="{FF2B5EF4-FFF2-40B4-BE49-F238E27FC236}">
-                <a16:creationId xmlns:a16="http://schemas.microsoft.com/office/drawing/2014/main" id="{4F22749D-1BC8-48BB-A472-A06BE7646033}"/>
-              </a:ext>
-            </a:extLst>
-          </p:cNvPr>
-          <p:cNvSpPr>
-            <a:spLocks xmlns:a="http://schemas.openxmlformats.org/drawingml/2006/main" noGrp="1"/>
-          </p:cNvSpPr>
-          <p:nvPr/>
-        </p:nvSpPr>
-        <p:spPr>
-          <a:xfrm xmlns:a="http://schemas.openxmlformats.org/drawingml/2006/main" rot="0">
-            <a:off x="3952875" y="4581525"/>
-            <a:ext cx="895350" cy="895350"/>
-          </a:xfrm>
-          <a:prstGeom xmlns:a="http://schemas.openxmlformats.org/drawingml/2006/main" prst="ellipse">
-            <a:avLst/>
-          </a:prstGeom>
-          <a:solidFill xmlns:a="http://schemas.openxmlformats.org/drawingml/2006/main">
-            <a:srgbClr val="5284C4">
-              <a:alpha val="68000"/>
-            </a:srgbClr>
-          </a:solidFill>
-          <a:ln xmlns:a="http://schemas.openxmlformats.org/drawingml/2006/main" w="9525">
-            <a:solidFill>
-              <a:srgbClr val="FFFFFF">
-                <a:alpha val="68000"/>
-              </a:srgbClr>
-            </a:solidFill>
-            <a:prstDash val="solid"/>
-          </a:ln>
-        </p:spPr>
-        <p:style>
-          <a:lnRef xmlns:a="http://schemas.openxmlformats.org/drawingml/2006/main" idx="0"/>
-          <a:fillRef xmlns:a="http://schemas.openxmlformats.org/drawingml/2006/main" idx="0"/>
-          <a:effectRef xmlns:a="http://schemas.openxmlformats.org/drawingml/2006/main" idx="11"/>
-          <a:fontRef xmlns:a="http://schemas.openxmlformats.org/drawingml/2006/main" idx="major"/>
-        </p:style>
-      </p:sp>
-      <p:sp>
-        <p:nvSpPr>
-          <p:cNvPr id="16" name="matrix-item-title-2-0">
-            <a:extLst xmlns:a="http://schemas.openxmlformats.org/drawingml/2006/main">
-              <a:ext uri="{FF2B5EF4-FFF2-40B4-BE49-F238E27FC236}">
-                <a16:creationId xmlns:a16="http://schemas.microsoft.com/office/drawing/2014/main" id="{C2AD9084-37FB-4132-BF23-999C31159151}"/>
-              </a:ext>
-            </a:extLst>
-          </p:cNvPr>
-          <p:cNvSpPr>
-            <a:spLocks xmlns:a="http://schemas.openxmlformats.org/drawingml/2006/main" noGrp="1"/>
-          </p:cNvSpPr>
-          <p:nvPr/>
-        </p:nvSpPr>
-        <p:spPr>
-          <a:xfrm xmlns:a="http://schemas.openxmlformats.org/drawingml/2006/main" rot="0">
-            <a:off x="4076700" y="4802981"/>
-            <a:ext cx="647700" cy="452438"/>
+          <p:cNvPr id="24" name="quadrant-title-3">
+            <a:extLst xmlns:a="http://schemas.openxmlformats.org/drawingml/2006/main">
+              <a:ext uri="{FF2B5EF4-FFF2-40B4-BE49-F238E27FC236}">
+                <a16:creationId xmlns:a16="http://schemas.microsoft.com/office/drawing/2014/main" id="{1DC3E395-D86A-4A4B-8F04-7668E512D15A}"/>
+              </a:ext>
+            </a:extLst>
+          </p:cNvPr>
+          <p:cNvSpPr>
+            <a:spLocks xmlns:a="http://schemas.openxmlformats.org/drawingml/2006/main" noGrp="1"/>
+          </p:cNvSpPr>
+          <p:nvPr/>
+        </p:nvSpPr>
+        <p:spPr>
+          <a:xfrm xmlns:a="http://schemas.openxmlformats.org/drawingml/2006/main" rot="0">
+            <a:off x="6496050" y="4171950"/>
+            <a:ext cx="1088231" cy="325336"/>
           </a:xfrm>
           <a:prstGeom xmlns:a="http://schemas.openxmlformats.org/drawingml/2006/main" prst="rect">
             <a:avLst/>
@@ -1883,207 +2437,7 @@
           </a:ln>
         </p:spPr>
         <p:txBody>
-          <a:bodyPr xmlns:a="http://schemas.openxmlformats.org/drawingml/2006/main" lIns="0" tIns="0" rIns="0" bIns="0" anchor="ctr">
-            <a:noAutofit/>
-          </a:bodyPr>
-          <a:lstStyle xmlns:a="http://schemas.openxmlformats.org/drawingml/2006/main"/>
-          <a:p xmlns:a="http://schemas.openxmlformats.org/drawingml/2006/main">
-            <a:pPr algn="ctr">
-              <a:lnSpc>
-                <a:spcPct val="125000"/>
-              </a:lnSpc>
-              <a:buNone/>
-              <a:defRPr sz="1425" b="1" i="0">
-                <a:solidFill>
-                  <a:srgbClr val="FFFFFF"/>
-                </a:solidFill>
-                <a:latin typeface="Microsoft YaHei"/>
-                <a:ea typeface="Microsoft YaHei"/>
-                <a:cs typeface="Microsoft YaHei"/>
-              </a:defRPr>
-            </a:pPr>
-            <a:r>
-              <a:rPr sz="1425" b="1" i="0">
-                <a:solidFill>
-                  <a:srgbClr val="FFFFFF"/>
-                </a:solidFill>
-                <a:latin typeface="Microsoft YaHei"/>
-                <a:ea typeface="Microsoft YaHei"/>
-                <a:cs typeface="Microsoft YaHei"/>
-              </a:rPr>
-              <a:t>报表美化</a:t>
-            </a:r>
-          </a:p>
-        </p:txBody>
-      </p:sp>
-      <p:sp>
-        <p:nvSpPr>
-          <p:cNvPr id="17" name="matrix-item-2-1">
-            <a:extLst xmlns:a="http://schemas.openxmlformats.org/drawingml/2006/main">
-              <a:ext uri="{FF2B5EF4-FFF2-40B4-BE49-F238E27FC236}">
-                <a16:creationId xmlns:a16="http://schemas.microsoft.com/office/drawing/2014/main" id="{56B0BC99-BDB7-4936-B4D3-F333E57D0E5A}"/>
-              </a:ext>
-            </a:extLst>
-          </p:cNvPr>
-          <p:cNvSpPr>
-            <a:spLocks xmlns:a="http://schemas.openxmlformats.org/drawingml/2006/main" noGrp="1"/>
-          </p:cNvSpPr>
-          <p:nvPr/>
-        </p:nvSpPr>
-        <p:spPr>
-          <a:xfrm xmlns:a="http://schemas.openxmlformats.org/drawingml/2006/main" rot="0">
-            <a:off x="4676775" y="4676775"/>
-            <a:ext cx="1162050" cy="1162050"/>
-          </a:xfrm>
-          <a:prstGeom xmlns:a="http://schemas.openxmlformats.org/drawingml/2006/main" prst="ellipse">
-            <a:avLst/>
-          </a:prstGeom>
-          <a:solidFill xmlns:a="http://schemas.openxmlformats.org/drawingml/2006/main">
-            <a:srgbClr val="6FA4D3">
-              <a:alpha val="64000"/>
-            </a:srgbClr>
-          </a:solidFill>
-          <a:ln xmlns:a="http://schemas.openxmlformats.org/drawingml/2006/main" w="9525">
-            <a:solidFill>
-              <a:srgbClr val="FFFFFF">
-                <a:alpha val="68000"/>
-              </a:srgbClr>
-            </a:solidFill>
-            <a:prstDash val="solid"/>
-          </a:ln>
-        </p:spPr>
-        <p:style>
-          <a:lnRef xmlns:a="http://schemas.openxmlformats.org/drawingml/2006/main" idx="0"/>
-          <a:fillRef xmlns:a="http://schemas.openxmlformats.org/drawingml/2006/main" idx="0"/>
-          <a:effectRef xmlns:a="http://schemas.openxmlformats.org/drawingml/2006/main" idx="11"/>
-          <a:fontRef xmlns:a="http://schemas.openxmlformats.org/drawingml/2006/main" idx="major"/>
-        </p:style>
-      </p:sp>
-      <p:sp>
-        <p:nvSpPr>
-          <p:cNvPr id="18" name="matrix-item-title-2-1">
-            <a:extLst xmlns:a="http://schemas.openxmlformats.org/drawingml/2006/main">
-              <a:ext uri="{FF2B5EF4-FFF2-40B4-BE49-F238E27FC236}">
-                <a16:creationId xmlns:a16="http://schemas.microsoft.com/office/drawing/2014/main" id="{CB293C21-69ED-4E73-B0E1-A859B2B4F4FE}"/>
-              </a:ext>
-            </a:extLst>
-          </p:cNvPr>
-          <p:cNvSpPr>
-            <a:spLocks xmlns:a="http://schemas.openxmlformats.org/drawingml/2006/main" noGrp="1"/>
-          </p:cNvSpPr>
-          <p:nvPr/>
-        </p:nvSpPr>
-        <p:spPr>
-          <a:xfrm xmlns:a="http://schemas.openxmlformats.org/drawingml/2006/main" rot="0">
-            <a:off x="4800600" y="5144691"/>
-            <a:ext cx="914400" cy="226219"/>
-          </a:xfrm>
-          <a:prstGeom xmlns:a="http://schemas.openxmlformats.org/drawingml/2006/main" prst="rect">
-            <a:avLst/>
-          </a:prstGeom>
-          <a:noFill xmlns:a="http://schemas.openxmlformats.org/drawingml/2006/main"/>
-          <a:ln xmlns:a="http://schemas.openxmlformats.org/drawingml/2006/main" w="0">
-            <a:noFill/>
-            <a:prstDash val="solid"/>
-          </a:ln>
-        </p:spPr>
-        <p:txBody>
-          <a:bodyPr xmlns:a="http://schemas.openxmlformats.org/drawingml/2006/main" lIns="0" tIns="0" rIns="0" bIns="0" anchor="ctr">
-            <a:noAutofit/>
-          </a:bodyPr>
-          <a:lstStyle xmlns:a="http://schemas.openxmlformats.org/drawingml/2006/main"/>
-          <a:p xmlns:a="http://schemas.openxmlformats.org/drawingml/2006/main">
-            <a:pPr algn="ctr">
-              <a:lnSpc>
-                <a:spcPct val="125000"/>
-              </a:lnSpc>
-              <a:buNone/>
-              <a:defRPr sz="1425" b="1" i="0">
-                <a:solidFill>
-                  <a:srgbClr val="FFFFFF"/>
-                </a:solidFill>
-                <a:latin typeface="Microsoft YaHei"/>
-                <a:ea typeface="Microsoft YaHei"/>
-                <a:cs typeface="Microsoft YaHei"/>
-              </a:defRPr>
-            </a:pPr>
-            <a:r>
-              <a:rPr sz="1425" b="1" i="0">
-                <a:solidFill>
-                  <a:srgbClr val="FFFFFF"/>
-                </a:solidFill>
-                <a:latin typeface="Microsoft YaHei"/>
-                <a:ea typeface="Microsoft YaHei"/>
-                <a:cs typeface="Microsoft YaHei"/>
-              </a:rPr>
-              <a:t>资料归档</a:t>
-            </a:r>
-          </a:p>
-        </p:txBody>
-      </p:sp>
-      <p:sp>
-        <p:nvSpPr>
-          <p:cNvPr id="19" name="quadrant-field-3">
-            <a:extLst xmlns:a="http://schemas.openxmlformats.org/drawingml/2006/main">
-              <a:ext uri="{FF2B5EF4-FFF2-40B4-BE49-F238E27FC236}">
-                <a16:creationId xmlns:a16="http://schemas.microsoft.com/office/drawing/2014/main" id="{B13542E4-6F37-4DB3-8EDB-5EBF2452CC58}"/>
-              </a:ext>
-            </a:extLst>
-          </p:cNvPr>
-          <p:cNvSpPr>
-            <a:spLocks xmlns:a="http://schemas.openxmlformats.org/drawingml/2006/main" noGrp="1"/>
-          </p:cNvSpPr>
-          <p:nvPr/>
-        </p:nvSpPr>
-        <p:spPr>
-          <a:xfrm xmlns:a="http://schemas.openxmlformats.org/drawingml/2006/main" rot="0">
-            <a:off x="6267450" y="4057650"/>
-            <a:ext cx="4905375" cy="2038350"/>
-          </a:xfrm>
-          <a:prstGeom xmlns:a="http://schemas.openxmlformats.org/drawingml/2006/main" prst="rect">
-            <a:avLst/>
-          </a:prstGeom>
-          <a:solidFill xmlns:a="http://schemas.openxmlformats.org/drawingml/2006/main">
-            <a:srgbClr val="E2EEFC">
-              <a:alpha val="14000"/>
-            </a:srgbClr>
-          </a:solidFill>
-          <a:ln xmlns:a="http://schemas.openxmlformats.org/drawingml/2006/main" w="0">
-            <a:noFill/>
-            <a:prstDash val="solid"/>
-          </a:ln>
-        </p:spPr>
-      </p:sp>
-      <p:sp>
-        <p:nvSpPr>
-          <p:cNvPr id="20" name="quadrant-title-3">
-            <a:extLst xmlns:a="http://schemas.openxmlformats.org/drawingml/2006/main">
-              <a:ext uri="{FF2B5EF4-FFF2-40B4-BE49-F238E27FC236}">
-                <a16:creationId xmlns:a16="http://schemas.microsoft.com/office/drawing/2014/main" id="{DAF6832E-DB9D-4DA5-8A1F-8B6E4437E108}"/>
-              </a:ext>
-            </a:extLst>
-          </p:cNvPr>
-          <p:cNvSpPr>
-            <a:spLocks xmlns:a="http://schemas.openxmlformats.org/drawingml/2006/main" noGrp="1"/>
-          </p:cNvSpPr>
-          <p:nvPr/>
-        </p:nvSpPr>
-        <p:spPr>
-          <a:xfrm xmlns:a="http://schemas.openxmlformats.org/drawingml/2006/main" rot="0">
-            <a:off x="6496050" y="4171950"/>
-            <a:ext cx="816178" cy="243926"/>
-          </a:xfrm>
-          <a:prstGeom xmlns:a="http://schemas.openxmlformats.org/drawingml/2006/main" prst="rect">
-            <a:avLst/>
-          </a:prstGeom>
-          <a:noFill xmlns:a="http://schemas.openxmlformats.org/drawingml/2006/main"/>
-          <a:ln xmlns:a="http://schemas.openxmlformats.org/drawingml/2006/main" w="0">
-            <a:noFill/>
-            <a:prstDash val="solid"/>
-          </a:ln>
-        </p:spPr>
-        <p:txBody>
-          <a:bodyPr xmlns:a="http://schemas.openxmlformats.org/drawingml/2006/main" lIns="0" tIns="0" rIns="0" bIns="0" anchor="ctr">
+          <a:bodyPr xmlns:a="http://schemas.openxmlformats.org/drawingml/2006/main" wrap="none" lIns="0" tIns="0" rIns="0" bIns="0" anchor="ctr">
             <a:noAutofit/>
           </a:bodyPr>
           <a:lstStyle xmlns:a="http://schemas.openxmlformats.org/drawingml/2006/main"/>
@@ -2093,7 +2447,7 @@
                 <a:spcPct val="122000"/>
               </a:lnSpc>
               <a:buNone/>
-              <a:defRPr sz="1575" b="1" i="0">
+              <a:defRPr sz="2100" b="1" i="0">
                 <a:solidFill>
                   <a:srgbClr val="46688F"/>
                 </a:solidFill>
@@ -2103,7 +2457,7 @@
               </a:defRPr>
             </a:pPr>
             <a:r>
-              <a:rPr sz="1575" b="1" i="0">
+              <a:rPr sz="2100" b="1" i="0">
                 <a:solidFill>
                   <a:srgbClr val="46688F"/>
                 </a:solidFill>
@@ -2118,65 +2472,22 @@
       </p:sp>
       <p:sp>
         <p:nvSpPr>
-          <p:cNvPr id="21" name="matrix-item-3-0">
-            <a:extLst xmlns:a="http://schemas.openxmlformats.org/drawingml/2006/main">
-              <a:ext uri="{FF2B5EF4-FFF2-40B4-BE49-F238E27FC236}">
-                <a16:creationId xmlns:a16="http://schemas.microsoft.com/office/drawing/2014/main" id="{086A710B-D1AD-4A0F-8078-8655FE51EE3E}"/>
-              </a:ext>
-            </a:extLst>
-          </p:cNvPr>
-          <p:cNvSpPr>
-            <a:spLocks xmlns:a="http://schemas.openxmlformats.org/drawingml/2006/main" noGrp="1"/>
-          </p:cNvSpPr>
-          <p:nvPr/>
-        </p:nvSpPr>
-        <p:spPr>
-          <a:xfrm xmlns:a="http://schemas.openxmlformats.org/drawingml/2006/main" rot="0">
-            <a:off x="7343775" y="4524375"/>
-            <a:ext cx="895350" cy="895350"/>
-          </a:xfrm>
-          <a:prstGeom xmlns:a="http://schemas.openxmlformats.org/drawingml/2006/main" prst="ellipse">
-            <a:avLst/>
-          </a:prstGeom>
-          <a:solidFill xmlns:a="http://schemas.openxmlformats.org/drawingml/2006/main">
-            <a:srgbClr val="4C7AB8">
-              <a:alpha val="74000"/>
-            </a:srgbClr>
-          </a:solidFill>
-          <a:ln xmlns:a="http://schemas.openxmlformats.org/drawingml/2006/main" w="9525">
-            <a:solidFill>
-              <a:srgbClr val="FFFFFF">
-                <a:alpha val="68000"/>
-              </a:srgbClr>
-            </a:solidFill>
-            <a:prstDash val="solid"/>
-          </a:ln>
-        </p:spPr>
-        <p:style>
-          <a:lnRef xmlns:a="http://schemas.openxmlformats.org/drawingml/2006/main" idx="0"/>
-          <a:fillRef xmlns:a="http://schemas.openxmlformats.org/drawingml/2006/main" idx="0"/>
-          <a:effectRef xmlns:a="http://schemas.openxmlformats.org/drawingml/2006/main" idx="11"/>
-          <a:fontRef xmlns:a="http://schemas.openxmlformats.org/drawingml/2006/main" idx="major"/>
-        </p:style>
-      </p:sp>
-      <p:sp>
-        <p:nvSpPr>
-          <p:cNvPr id="22" name="matrix-item-title-3-0">
-            <a:extLst xmlns:a="http://schemas.openxmlformats.org/drawingml/2006/main">
-              <a:ext uri="{FF2B5EF4-FFF2-40B4-BE49-F238E27FC236}">
-                <a16:creationId xmlns:a16="http://schemas.microsoft.com/office/drawing/2014/main" id="{4859A386-7889-4A02-A691-147E9D9A83F7}"/>
-              </a:ext>
-            </a:extLst>
-          </p:cNvPr>
-          <p:cNvSpPr>
-            <a:spLocks xmlns:a="http://schemas.openxmlformats.org/drawingml/2006/main" noGrp="1"/>
-          </p:cNvSpPr>
-          <p:nvPr/>
-        </p:nvSpPr>
-        <p:spPr>
-          <a:xfrm xmlns:a="http://schemas.openxmlformats.org/drawingml/2006/main" rot="0">
-            <a:off x="7467600" y="4745831"/>
-            <a:ext cx="647700" cy="452438"/>
+          <p:cNvPr id="25" name="matrix-detail-title-0">
+            <a:extLst xmlns:a="http://schemas.openxmlformats.org/drawingml/2006/main">
+              <a:ext uri="{FF2B5EF4-FFF2-40B4-BE49-F238E27FC236}">
+                <a16:creationId xmlns:a16="http://schemas.microsoft.com/office/drawing/2014/main" id="{E68FF284-CC5C-409A-A730-7ABCC3BE8FC7}"/>
+              </a:ext>
+            </a:extLst>
+          </p:cNvPr>
+          <p:cNvSpPr>
+            <a:spLocks xmlns:a="http://schemas.openxmlformats.org/drawingml/2006/main" noGrp="1"/>
+          </p:cNvSpPr>
+          <p:nvPr/>
+        </p:nvSpPr>
+        <p:spPr>
+          <a:xfrm xmlns:a="http://schemas.openxmlformats.org/drawingml/2006/main" rot="0">
+            <a:off x="2028825" y="1752600"/>
+            <a:ext cx="1809750" cy="293341"/>
           </a:xfrm>
           <a:prstGeom xmlns:a="http://schemas.openxmlformats.org/drawingml/2006/main" prst="rect">
             <a:avLst/>
@@ -2188,174 +2499,7 @@
           </a:ln>
         </p:spPr>
         <p:txBody>
-          <a:bodyPr xmlns:a="http://schemas.openxmlformats.org/drawingml/2006/main" lIns="0" tIns="0" rIns="0" bIns="0" anchor="ctr">
-            <a:noAutofit/>
-          </a:bodyPr>
-          <a:lstStyle xmlns:a="http://schemas.openxmlformats.org/drawingml/2006/main"/>
-          <a:p xmlns:a="http://schemas.openxmlformats.org/drawingml/2006/main">
-            <a:pPr algn="ctr">
-              <a:lnSpc>
-                <a:spcPct val="125000"/>
-              </a:lnSpc>
-              <a:buNone/>
-              <a:defRPr sz="1425" b="1" i="0">
-                <a:solidFill>
-                  <a:srgbClr val="FFFFFF"/>
-                </a:solidFill>
-                <a:latin typeface="Microsoft YaHei"/>
-                <a:ea typeface="Microsoft YaHei"/>
-                <a:cs typeface="Microsoft YaHei"/>
-              </a:defRPr>
-            </a:pPr>
-            <a:r>
-              <a:rPr sz="1425" b="1" i="0">
-                <a:solidFill>
-                  <a:srgbClr val="FFFFFF"/>
-                </a:solidFill>
-                <a:latin typeface="Microsoft YaHei"/>
-                <a:ea typeface="Microsoft YaHei"/>
-                <a:cs typeface="Microsoft YaHei"/>
-              </a:rPr>
-              <a:t>系统重构</a:t>
-            </a:r>
-          </a:p>
-        </p:txBody>
-      </p:sp>
-      <p:sp>
-        <p:nvSpPr>
-          <p:cNvPr id="23" name="matrix-item-3-1">
-            <a:extLst xmlns:a="http://schemas.openxmlformats.org/drawingml/2006/main">
-              <a:ext uri="{FF2B5EF4-FFF2-40B4-BE49-F238E27FC236}">
-                <a16:creationId xmlns:a16="http://schemas.microsoft.com/office/drawing/2014/main" id="{543197FD-8369-4163-8BDC-DAF1CDCF19F1}"/>
-              </a:ext>
-            </a:extLst>
-          </p:cNvPr>
-          <p:cNvSpPr>
-            <a:spLocks xmlns:a="http://schemas.openxmlformats.org/drawingml/2006/main" noGrp="1"/>
-          </p:cNvSpPr>
-          <p:nvPr/>
-        </p:nvSpPr>
-        <p:spPr>
-          <a:xfrm xmlns:a="http://schemas.openxmlformats.org/drawingml/2006/main" rot="0">
-            <a:off x="6353175" y="4733925"/>
-            <a:ext cx="1162050" cy="1162050"/>
-          </a:xfrm>
-          <a:prstGeom xmlns:a="http://schemas.openxmlformats.org/drawingml/2006/main" prst="ellipse">
-            <a:avLst/>
-          </a:prstGeom>
-          <a:solidFill xmlns:a="http://schemas.openxmlformats.org/drawingml/2006/main">
-            <a:srgbClr val="649BCE">
-              <a:alpha val="68000"/>
-            </a:srgbClr>
-          </a:solidFill>
-          <a:ln xmlns:a="http://schemas.openxmlformats.org/drawingml/2006/main" w="9525">
-            <a:solidFill>
-              <a:srgbClr val="FFFFFF">
-                <a:alpha val="68000"/>
-              </a:srgbClr>
-            </a:solidFill>
-            <a:prstDash val="solid"/>
-          </a:ln>
-        </p:spPr>
-        <p:style>
-          <a:lnRef xmlns:a="http://schemas.openxmlformats.org/drawingml/2006/main" idx="0"/>
-          <a:fillRef xmlns:a="http://schemas.openxmlformats.org/drawingml/2006/main" idx="0"/>
-          <a:effectRef xmlns:a="http://schemas.openxmlformats.org/drawingml/2006/main" idx="11"/>
-          <a:fontRef xmlns:a="http://schemas.openxmlformats.org/drawingml/2006/main" idx="major"/>
-        </p:style>
-      </p:sp>
-      <p:sp>
-        <p:nvSpPr>
-          <p:cNvPr id="24" name="matrix-item-title-3-1">
-            <a:extLst xmlns:a="http://schemas.openxmlformats.org/drawingml/2006/main">
-              <a:ext uri="{FF2B5EF4-FFF2-40B4-BE49-F238E27FC236}">
-                <a16:creationId xmlns:a16="http://schemas.microsoft.com/office/drawing/2014/main" id="{EED471EC-B1A5-4404-A74B-52E638BF6F5A}"/>
-              </a:ext>
-            </a:extLst>
-          </p:cNvPr>
-          <p:cNvSpPr>
-            <a:spLocks xmlns:a="http://schemas.openxmlformats.org/drawingml/2006/main" noGrp="1"/>
-          </p:cNvSpPr>
-          <p:nvPr/>
-        </p:nvSpPr>
-        <p:spPr>
-          <a:xfrm xmlns:a="http://schemas.openxmlformats.org/drawingml/2006/main" rot="0">
-            <a:off x="6477000" y="5201841"/>
-            <a:ext cx="914400" cy="226219"/>
-          </a:xfrm>
-          <a:prstGeom xmlns:a="http://schemas.openxmlformats.org/drawingml/2006/main" prst="rect">
-            <a:avLst/>
-          </a:prstGeom>
-          <a:noFill xmlns:a="http://schemas.openxmlformats.org/drawingml/2006/main"/>
-          <a:ln xmlns:a="http://schemas.openxmlformats.org/drawingml/2006/main" w="0">
-            <a:noFill/>
-            <a:prstDash val="solid"/>
-          </a:ln>
-        </p:spPr>
-        <p:txBody>
-          <a:bodyPr xmlns:a="http://schemas.openxmlformats.org/drawingml/2006/main" lIns="0" tIns="0" rIns="0" bIns="0" anchor="ctr">
-            <a:noAutofit/>
-          </a:bodyPr>
-          <a:lstStyle xmlns:a="http://schemas.openxmlformats.org/drawingml/2006/main"/>
-          <a:p xmlns:a="http://schemas.openxmlformats.org/drawingml/2006/main">
-            <a:pPr algn="ctr">
-              <a:lnSpc>
-                <a:spcPct val="125000"/>
-              </a:lnSpc>
-              <a:buNone/>
-              <a:defRPr sz="1425" b="1" i="0">
-                <a:solidFill>
-                  <a:srgbClr val="FFFFFF"/>
-                </a:solidFill>
-                <a:latin typeface="Microsoft YaHei"/>
-                <a:ea typeface="Microsoft YaHei"/>
-                <a:cs typeface="Microsoft YaHei"/>
-              </a:defRPr>
-            </a:pPr>
-            <a:r>
-              <a:rPr sz="1425" b="1" i="0">
-                <a:solidFill>
-                  <a:srgbClr val="FFFFFF"/>
-                </a:solidFill>
-                <a:latin typeface="Microsoft YaHei"/>
-                <a:ea typeface="Microsoft YaHei"/>
-                <a:cs typeface="Microsoft YaHei"/>
-              </a:rPr>
-              <a:t>全量迁移</a:t>
-            </a:r>
-          </a:p>
-        </p:txBody>
-      </p:sp>
-      <p:sp>
-        <p:nvSpPr>
-          <p:cNvPr id="25" name="matrix-detail-title-0">
-            <a:extLst xmlns:a="http://schemas.openxmlformats.org/drawingml/2006/main">
-              <a:ext uri="{FF2B5EF4-FFF2-40B4-BE49-F238E27FC236}">
-                <a16:creationId xmlns:a16="http://schemas.microsoft.com/office/drawing/2014/main" id="{714B075E-A0BD-4B5D-B8DF-FF2EE889DE4F}"/>
-              </a:ext>
-            </a:extLst>
-          </p:cNvPr>
-          <p:cNvSpPr>
-            <a:spLocks xmlns:a="http://schemas.openxmlformats.org/drawingml/2006/main" noGrp="1"/>
-          </p:cNvSpPr>
-          <p:nvPr/>
-        </p:nvSpPr>
-        <p:spPr>
-          <a:xfrm xmlns:a="http://schemas.openxmlformats.org/drawingml/2006/main" rot="0">
-            <a:off x="2028825" y="1847850"/>
-            <a:ext cx="1809750" cy="178003"/>
-          </a:xfrm>
-          <a:prstGeom xmlns:a="http://schemas.openxmlformats.org/drawingml/2006/main" prst="rect">
-            <a:avLst/>
-          </a:prstGeom>
-          <a:noFill xmlns:a="http://schemas.openxmlformats.org/drawingml/2006/main"/>
-          <a:ln xmlns:a="http://schemas.openxmlformats.org/drawingml/2006/main" w="0">
-            <a:noFill/>
-            <a:prstDash val="solid"/>
-          </a:ln>
-        </p:spPr>
-        <p:txBody>
-          <a:bodyPr xmlns:a="http://schemas.openxmlformats.org/drawingml/2006/main" lIns="0" tIns="0" rIns="0" bIns="0" anchor="ctr">
+          <a:bodyPr xmlns:a="http://schemas.openxmlformats.org/drawingml/2006/main" wrap="square" lIns="0" tIns="0" rIns="0" bIns="0" anchor="ctr">
             <a:noAutofit/>
           </a:bodyPr>
           <a:lstStyle xmlns:a="http://schemas.openxmlformats.org/drawingml/2006/main"/>
@@ -2365,7 +2509,7 @@
                 <a:spcPct val="110000"/>
               </a:lnSpc>
               <a:buNone/>
-              <a:defRPr sz="1275" b="1" i="0">
+              <a:defRPr sz="2100" b="1" i="0">
                 <a:solidFill>
                   <a:srgbClr val="3E71B5"/>
                 </a:solidFill>
@@ -2375,7 +2519,7 @@
               </a:defRPr>
             </a:pPr>
             <a:r>
-              <a:rPr sz="1275" b="1" i="0">
+              <a:rPr sz="2100" b="1" i="0">
                 <a:solidFill>
                   <a:srgbClr val="3E71B5"/>
                 </a:solidFill>
@@ -2393,19 +2537,19 @@
           <p:cNvPr id="26" name="matrix-detail-body-0">
             <a:extLst xmlns:a="http://schemas.openxmlformats.org/drawingml/2006/main">
               <a:ext uri="{FF2B5EF4-FFF2-40B4-BE49-F238E27FC236}">
-                <a16:creationId xmlns:a16="http://schemas.microsoft.com/office/drawing/2014/main" id="{664353EF-C2F9-4E51-877F-68B773280005}"/>
-              </a:ext>
-            </a:extLst>
-          </p:cNvPr>
-          <p:cNvSpPr>
-            <a:spLocks xmlns:a="http://schemas.openxmlformats.org/drawingml/2006/main" noGrp="1"/>
-          </p:cNvSpPr>
-          <p:nvPr/>
-        </p:nvSpPr>
-        <p:spPr>
-          <a:xfrm xmlns:a="http://schemas.openxmlformats.org/drawingml/2006/main" rot="0">
-            <a:off x="2028825" y="2121103"/>
-            <a:ext cx="1809750" cy="400050"/>
+                <a16:creationId xmlns:a16="http://schemas.microsoft.com/office/drawing/2014/main" id="{03026D4F-E878-4411-97B4-6B4558859647}"/>
+              </a:ext>
+            </a:extLst>
+          </p:cNvPr>
+          <p:cNvSpPr>
+            <a:spLocks xmlns:a="http://schemas.openxmlformats.org/drawingml/2006/main" noGrp="1"/>
+          </p:cNvSpPr>
+          <p:nvPr/>
+        </p:nvSpPr>
+        <p:spPr>
+          <a:xfrm xmlns:a="http://schemas.openxmlformats.org/drawingml/2006/main" rot="0">
+            <a:off x="2028825" y="2093566"/>
+            <a:ext cx="1809750" cy="570014"/>
           </a:xfrm>
           <a:prstGeom xmlns:a="http://schemas.openxmlformats.org/drawingml/2006/main" prst="rect">
             <a:avLst/>
@@ -2417,17 +2561,17 @@
           </a:ln>
         </p:spPr>
         <p:txBody>
-          <a:bodyPr xmlns:a="http://schemas.openxmlformats.org/drawingml/2006/main" lIns="0" tIns="0" rIns="0" bIns="0" anchor="ctr">
+          <a:bodyPr xmlns:a="http://schemas.openxmlformats.org/drawingml/2006/main" wrap="square" lIns="0" tIns="0" rIns="0" bIns="0" anchor="ctr">
             <a:noAutofit/>
           </a:bodyPr>
           <a:lstStyle xmlns:a="http://schemas.openxmlformats.org/drawingml/2006/main"/>
           <a:p xmlns:a="http://schemas.openxmlformats.org/drawingml/2006/main">
             <a:pPr algn="l">
               <a:lnSpc>
-                <a:spcPct val="140000"/>
+                <a:spcPct val="132000"/>
               </a:lnSpc>
               <a:buNone/>
-              <a:defRPr sz="1125" b="0" i="0">
+              <a:defRPr sz="1700" b="0" i="0">
                 <a:solidFill>
                   <a:srgbClr val="748495"/>
                 </a:solidFill>
@@ -2437,7 +2581,7 @@
               </a:defRPr>
             </a:pPr>
             <a:r>
-              <a:rPr sz="1125" b="0" i="0">
+              <a:rPr sz="1700" b="0" i="0">
                 <a:solidFill>
                   <a:srgbClr val="748495"/>
                 </a:solidFill>
@@ -2445,7 +2589,34 @@
                 <a:ea typeface="Microsoft YaHei"/>
                 <a:cs typeface="Microsoft YaHei"/>
               </a:rPr>
-              <a:t>优先配置低难度、高价值项目</a:t>
+              <a:t>优先配置低难度、</a:t>
+            </a:r>
+          </a:p>
+          <a:p xmlns:a="http://schemas.openxmlformats.org/drawingml/2006/main">
+            <a:pPr algn="l">
+              <a:lnSpc>
+                <a:spcPct val="132000"/>
+              </a:lnSpc>
+              <a:buNone/>
+              <a:defRPr sz="1700" b="0" i="0">
+                <a:solidFill>
+                  <a:srgbClr val="748495"/>
+                </a:solidFill>
+                <a:latin typeface="Microsoft YaHei"/>
+                <a:ea typeface="Microsoft YaHei"/>
+                <a:cs typeface="Microsoft YaHei"/>
+              </a:defRPr>
+            </a:pPr>
+            <a:r>
+              <a:rPr sz="1700" b="0" i="0">
+                <a:solidFill>
+                  <a:srgbClr val="748495"/>
+                </a:solidFill>
+                <a:latin typeface="Microsoft YaHei"/>
+                <a:ea typeface="Microsoft YaHei"/>
+                <a:cs typeface="Microsoft YaHei"/>
+              </a:rPr>
+              <a:t>高价值项目</a:t>
             </a:r>
           </a:p>
         </p:txBody>
@@ -2455,18 +2626,18 @@
           <p:cNvPr id="27" name="matrix-detail-divider-0">
             <a:extLst xmlns:a="http://schemas.openxmlformats.org/drawingml/2006/main">
               <a:ext uri="{FF2B5EF4-FFF2-40B4-BE49-F238E27FC236}">
-                <a16:creationId xmlns:a16="http://schemas.microsoft.com/office/drawing/2014/main" id="{3970712B-1A05-44CE-AA58-477DF665517B}"/>
-              </a:ext>
-            </a:extLst>
-          </p:cNvPr>
-          <p:cNvSpPr>
-            <a:spLocks xmlns:a="http://schemas.openxmlformats.org/drawingml/2006/main" noGrp="1"/>
-          </p:cNvSpPr>
-          <p:nvPr/>
-        </p:nvSpPr>
-        <p:spPr>
-          <a:xfrm xmlns:a="http://schemas.openxmlformats.org/drawingml/2006/main" rot="0">
-            <a:off x="2028825" y="2616403"/>
+                <a16:creationId xmlns:a16="http://schemas.microsoft.com/office/drawing/2014/main" id="{C3DEE654-8564-4461-9C50-3554D738F765}"/>
+              </a:ext>
+            </a:extLst>
+          </p:cNvPr>
+          <p:cNvSpPr>
+            <a:spLocks xmlns:a="http://schemas.openxmlformats.org/drawingml/2006/main" noGrp="1"/>
+          </p:cNvSpPr>
+          <p:nvPr/>
+        </p:nvSpPr>
+        <p:spPr>
+          <a:xfrm xmlns:a="http://schemas.openxmlformats.org/drawingml/2006/main" rot="0">
+            <a:off x="2028825" y="2724150"/>
             <a:ext cx="1809750" cy="9525"/>
           </a:xfrm>
           <a:prstGeom xmlns:a="http://schemas.openxmlformats.org/drawingml/2006/main" prst="line">
@@ -2488,19 +2659,19 @@
           <p:cNvPr id="28" name="matrix-detail-caption-0">
             <a:extLst xmlns:a="http://schemas.openxmlformats.org/drawingml/2006/main">
               <a:ext uri="{FF2B5EF4-FFF2-40B4-BE49-F238E27FC236}">
-                <a16:creationId xmlns:a16="http://schemas.microsoft.com/office/drawing/2014/main" id="{244DA26D-76CB-4380-AE87-2845DCF4851E}"/>
-              </a:ext>
-            </a:extLst>
-          </p:cNvPr>
-          <p:cNvSpPr>
-            <a:spLocks xmlns:a="http://schemas.openxmlformats.org/drawingml/2006/main" noGrp="1"/>
-          </p:cNvSpPr>
-          <p:nvPr/>
-        </p:nvSpPr>
-        <p:spPr>
-          <a:xfrm xmlns:a="http://schemas.openxmlformats.org/drawingml/2006/main" rot="0">
-            <a:off x="2028825" y="2711653"/>
-            <a:ext cx="1809750" cy="142875"/>
+                <a16:creationId xmlns:a16="http://schemas.microsoft.com/office/drawing/2014/main" id="{2B29B7E5-0F4F-45A7-ACA7-67B958A77C48}"/>
+              </a:ext>
+            </a:extLst>
+          </p:cNvPr>
+          <p:cNvSpPr>
+            <a:spLocks xmlns:a="http://schemas.openxmlformats.org/drawingml/2006/main" noGrp="1"/>
+          </p:cNvSpPr>
+          <p:nvPr/>
+        </p:nvSpPr>
+        <p:spPr>
+          <a:xfrm xmlns:a="http://schemas.openxmlformats.org/drawingml/2006/main" rot="0">
+            <a:off x="2028825" y="2790825"/>
+            <a:ext cx="1809750" cy="190500"/>
           </a:xfrm>
           <a:prstGeom xmlns:a="http://schemas.openxmlformats.org/drawingml/2006/main" prst="rect">
             <a:avLst/>
@@ -2512,7 +2683,7 @@
           </a:ln>
         </p:spPr>
         <p:txBody>
-          <a:bodyPr xmlns:a="http://schemas.openxmlformats.org/drawingml/2006/main" lIns="0" tIns="0" rIns="0" bIns="0" anchor="ctr">
+          <a:bodyPr xmlns:a="http://schemas.openxmlformats.org/drawingml/2006/main" wrap="none" lIns="0" tIns="0" rIns="0" bIns="0" anchor="ctr">
             <a:noAutofit/>
           </a:bodyPr>
           <a:lstStyle xmlns:a="http://schemas.openxmlformats.org/drawingml/2006/main"/>
@@ -2522,7 +2693,7 @@
                 <a:spcPct val="100000"/>
               </a:lnSpc>
               <a:buNone/>
-              <a:defRPr sz="1125" b="1" i="0">
+              <a:defRPr sz="1500" b="1" i="0">
                 <a:solidFill>
                   <a:srgbClr val="4E6278"/>
                 </a:solidFill>
@@ -2532,7 +2703,7 @@
               </a:defRPr>
             </a:pPr>
             <a:r>
-              <a:rPr sz="1125" b="1" i="0">
+              <a:rPr sz="1500" b="1" i="0">
                 <a:solidFill>
                   <a:srgbClr val="4E6278"/>
                 </a:solidFill>
@@ -2550,19 +2721,19 @@
           <p:cNvPr id="29" name="matrix-detail-metric-label-0-0">
             <a:extLst xmlns:a="http://schemas.openxmlformats.org/drawingml/2006/main">
               <a:ext uri="{FF2B5EF4-FFF2-40B4-BE49-F238E27FC236}">
-                <a16:creationId xmlns:a16="http://schemas.microsoft.com/office/drawing/2014/main" id="{B489E345-2663-4198-BE3B-886E8DBE3B5E}"/>
-              </a:ext>
-            </a:extLst>
-          </p:cNvPr>
-          <p:cNvSpPr>
-            <a:spLocks xmlns:a="http://schemas.openxmlformats.org/drawingml/2006/main" noGrp="1"/>
-          </p:cNvSpPr>
-          <p:nvPr/>
-        </p:nvSpPr>
-        <p:spPr>
-          <a:xfrm xmlns:a="http://schemas.openxmlformats.org/drawingml/2006/main" rot="0">
-            <a:off x="2028825" y="2921203"/>
-            <a:ext cx="847725" cy="154781"/>
+                <a16:creationId xmlns:a16="http://schemas.microsoft.com/office/drawing/2014/main" id="{3961EF0E-1B84-423E-8D74-D0611DC08847}"/>
+              </a:ext>
+            </a:extLst>
+          </p:cNvPr>
+          <p:cNvSpPr>
+            <a:spLocks xmlns:a="http://schemas.openxmlformats.org/drawingml/2006/main" noGrp="1"/>
+          </p:cNvSpPr>
+          <p:nvPr/>
+        </p:nvSpPr>
+        <p:spPr>
+          <a:xfrm xmlns:a="http://schemas.openxmlformats.org/drawingml/2006/main" rot="0">
+            <a:off x="2028825" y="3028950"/>
+            <a:ext cx="866775" cy="238125"/>
           </a:xfrm>
           <a:prstGeom xmlns:a="http://schemas.openxmlformats.org/drawingml/2006/main" prst="rect">
             <a:avLst/>
@@ -2574,7 +2745,7 @@
           </a:ln>
         </p:spPr>
         <p:txBody>
-          <a:bodyPr xmlns:a="http://schemas.openxmlformats.org/drawingml/2006/main" lIns="0" tIns="0" rIns="0" bIns="0" anchor="ctr">
+          <a:bodyPr xmlns:a="http://schemas.openxmlformats.org/drawingml/2006/main" wrap="none" lIns="0" tIns="0" rIns="0" bIns="0" anchor="ctr">
             <a:noAutofit/>
           </a:bodyPr>
           <a:lstStyle xmlns:a="http://schemas.openxmlformats.org/drawingml/2006/main"/>
@@ -2584,7 +2755,7 @@
                 <a:spcPct val="125000"/>
               </a:lnSpc>
               <a:buNone/>
-              <a:defRPr sz="975" b="0" i="0">
+              <a:defRPr sz="1500" b="0" i="0">
                 <a:solidFill>
                   <a:srgbClr val="586B80"/>
                 </a:solidFill>
@@ -2594,7 +2765,7 @@
               </a:defRPr>
             </a:pPr>
             <a:r>
-              <a:rPr sz="975" b="0" i="0">
+              <a:rPr sz="1500" b="0" i="0">
                 <a:solidFill>
                   <a:srgbClr val="586B80"/>
                 </a:solidFill>
@@ -2612,19 +2783,19 @@
           <p:cNvPr id="30" name="matrix-detail-metric-value-0-0">
             <a:extLst xmlns:a="http://schemas.openxmlformats.org/drawingml/2006/main">
               <a:ext uri="{FF2B5EF4-FFF2-40B4-BE49-F238E27FC236}">
-                <a16:creationId xmlns:a16="http://schemas.microsoft.com/office/drawing/2014/main" id="{F8B3BAFA-50C1-44ED-85E8-AB8F3F8649E8}"/>
-              </a:ext>
-            </a:extLst>
-          </p:cNvPr>
-          <p:cNvSpPr>
-            <a:spLocks xmlns:a="http://schemas.openxmlformats.org/drawingml/2006/main" noGrp="1"/>
-          </p:cNvSpPr>
-          <p:nvPr/>
-        </p:nvSpPr>
-        <p:spPr>
-          <a:xfrm xmlns:a="http://schemas.openxmlformats.org/drawingml/2006/main" rot="0">
-            <a:off x="2028825" y="3104559"/>
-            <a:ext cx="847725" cy="280397"/>
+                <a16:creationId xmlns:a16="http://schemas.microsoft.com/office/drawing/2014/main" id="{567965A4-24DC-4C49-B330-A9CD039BB01A}"/>
+              </a:ext>
+            </a:extLst>
+          </p:cNvPr>
+          <p:cNvSpPr>
+            <a:spLocks xmlns:a="http://schemas.openxmlformats.org/drawingml/2006/main" noGrp="1"/>
+          </p:cNvSpPr>
+          <p:nvPr/>
+        </p:nvSpPr>
+        <p:spPr>
+          <a:xfrm xmlns:a="http://schemas.openxmlformats.org/drawingml/2006/main" rot="0">
+            <a:off x="2028825" y="3286125"/>
+            <a:ext cx="866775" cy="265357"/>
           </a:xfrm>
           <a:prstGeom xmlns:a="http://schemas.openxmlformats.org/drawingml/2006/main" prst="rect">
             <a:avLst/>
@@ -2636,17 +2807,17 @@
           </a:ln>
         </p:spPr>
         <p:txBody>
-          <a:bodyPr xmlns:a="http://schemas.openxmlformats.org/drawingml/2006/main" lIns="0" tIns="0" rIns="0" bIns="0" anchor="ctr">
+          <a:bodyPr xmlns:a="http://schemas.openxmlformats.org/drawingml/2006/main" wrap="none" lIns="0" tIns="0" rIns="0" bIns="0" anchor="ctr">
             <a:noAutofit/>
           </a:bodyPr>
           <a:lstStyle xmlns:a="http://schemas.openxmlformats.org/drawingml/2006/main"/>
           <a:p xmlns:a="http://schemas.openxmlformats.org/drawingml/2006/main">
             <a:pPr algn="l">
               <a:lnSpc>
-                <a:spcPct val="128000"/>
+                <a:spcPct val="110000"/>
               </a:lnSpc>
               <a:buNone/>
-              <a:defRPr sz="1725" b="0" i="0">
+              <a:defRPr sz="1900" b="1" i="0">
                 <a:solidFill>
                   <a:srgbClr val="3B68AB"/>
                 </a:solidFill>
@@ -2656,7 +2827,7 @@
               </a:defRPr>
             </a:pPr>
             <a:r>
-              <a:rPr sz="1725" b="0" i="0">
+              <a:rPr sz="1900" b="1" i="0">
                 <a:solidFill>
                   <a:srgbClr val="3B68AB"/>
                 </a:solidFill>
@@ -2674,19 +2845,19 @@
           <p:cNvPr id="31" name="matrix-detail-metric-label-0-1">
             <a:extLst xmlns:a="http://schemas.openxmlformats.org/drawingml/2006/main">
               <a:ext uri="{FF2B5EF4-FFF2-40B4-BE49-F238E27FC236}">
-                <a16:creationId xmlns:a16="http://schemas.microsoft.com/office/drawing/2014/main" id="{A4DA7536-247C-4E7A-B516-9920014F37DC}"/>
-              </a:ext>
-            </a:extLst>
-          </p:cNvPr>
-          <p:cNvSpPr>
-            <a:spLocks xmlns:a="http://schemas.openxmlformats.org/drawingml/2006/main" noGrp="1"/>
-          </p:cNvSpPr>
-          <p:nvPr/>
-        </p:nvSpPr>
-        <p:spPr>
-          <a:xfrm xmlns:a="http://schemas.openxmlformats.org/drawingml/2006/main" rot="0">
-            <a:off x="2990850" y="2921203"/>
-            <a:ext cx="847725" cy="154781"/>
+                <a16:creationId xmlns:a16="http://schemas.microsoft.com/office/drawing/2014/main" id="{7EC5CCCF-D206-4335-899E-4A34CA9B8CE2}"/>
+              </a:ext>
+            </a:extLst>
+          </p:cNvPr>
+          <p:cNvSpPr>
+            <a:spLocks xmlns:a="http://schemas.openxmlformats.org/drawingml/2006/main" noGrp="1"/>
+          </p:cNvSpPr>
+          <p:nvPr/>
+        </p:nvSpPr>
+        <p:spPr>
+          <a:xfrm xmlns:a="http://schemas.openxmlformats.org/drawingml/2006/main" rot="0">
+            <a:off x="2971800" y="3028950"/>
+            <a:ext cx="866775" cy="238125"/>
           </a:xfrm>
           <a:prstGeom xmlns:a="http://schemas.openxmlformats.org/drawingml/2006/main" prst="rect">
             <a:avLst/>
@@ -2698,7 +2869,7 @@
           </a:ln>
         </p:spPr>
         <p:txBody>
-          <a:bodyPr xmlns:a="http://schemas.openxmlformats.org/drawingml/2006/main" lIns="0" tIns="0" rIns="0" bIns="0" anchor="ctr">
+          <a:bodyPr xmlns:a="http://schemas.openxmlformats.org/drawingml/2006/main" wrap="none" lIns="0" tIns="0" rIns="0" bIns="0" anchor="ctr">
             <a:noAutofit/>
           </a:bodyPr>
           <a:lstStyle xmlns:a="http://schemas.openxmlformats.org/drawingml/2006/main"/>
@@ -2708,7 +2879,7 @@
                 <a:spcPct val="125000"/>
               </a:lnSpc>
               <a:buNone/>
-              <a:defRPr sz="975" b="0" i="0">
+              <a:defRPr sz="1500" b="0" i="0">
                 <a:solidFill>
                   <a:srgbClr val="586B80"/>
                 </a:solidFill>
@@ -2718,7 +2889,7 @@
               </a:defRPr>
             </a:pPr>
             <a:r>
-              <a:rPr sz="975" b="0" i="0">
+              <a:rPr sz="1500" b="0" i="0">
                 <a:solidFill>
                   <a:srgbClr val="586B80"/>
                 </a:solidFill>
@@ -2736,19 +2907,19 @@
           <p:cNvPr id="32" name="matrix-detail-metric-value-0-1">
             <a:extLst xmlns:a="http://schemas.openxmlformats.org/drawingml/2006/main">
               <a:ext uri="{FF2B5EF4-FFF2-40B4-BE49-F238E27FC236}">
-                <a16:creationId xmlns:a16="http://schemas.microsoft.com/office/drawing/2014/main" id="{3867B33A-5D91-4A25-8E15-86C48B647D2D}"/>
-              </a:ext>
-            </a:extLst>
-          </p:cNvPr>
-          <p:cNvSpPr>
-            <a:spLocks xmlns:a="http://schemas.openxmlformats.org/drawingml/2006/main" noGrp="1"/>
-          </p:cNvSpPr>
-          <p:nvPr/>
-        </p:nvSpPr>
-        <p:spPr>
-          <a:xfrm xmlns:a="http://schemas.openxmlformats.org/drawingml/2006/main" rot="0">
-            <a:off x="2990850" y="3104559"/>
-            <a:ext cx="847725" cy="280397"/>
+                <a16:creationId xmlns:a16="http://schemas.microsoft.com/office/drawing/2014/main" id="{24980545-B264-4A34-889D-7EBB27B5E575}"/>
+              </a:ext>
+            </a:extLst>
+          </p:cNvPr>
+          <p:cNvSpPr>
+            <a:spLocks xmlns:a="http://schemas.openxmlformats.org/drawingml/2006/main" noGrp="1"/>
+          </p:cNvSpPr>
+          <p:nvPr/>
+        </p:nvSpPr>
+        <p:spPr>
+          <a:xfrm xmlns:a="http://schemas.openxmlformats.org/drawingml/2006/main" rot="0">
+            <a:off x="2971800" y="3286125"/>
+            <a:ext cx="866775" cy="265357"/>
           </a:xfrm>
           <a:prstGeom xmlns:a="http://schemas.openxmlformats.org/drawingml/2006/main" prst="rect">
             <a:avLst/>
@@ -2760,69 +2931,7 @@
           </a:ln>
         </p:spPr>
         <p:txBody>
-          <a:bodyPr xmlns:a="http://schemas.openxmlformats.org/drawingml/2006/main" lIns="0" tIns="0" rIns="0" bIns="0" anchor="ctr">
-            <a:noAutofit/>
-          </a:bodyPr>
-          <a:lstStyle xmlns:a="http://schemas.openxmlformats.org/drawingml/2006/main"/>
-          <a:p xmlns:a="http://schemas.openxmlformats.org/drawingml/2006/main">
-            <a:pPr algn="l">
-              <a:lnSpc>
-                <a:spcPct val="128000"/>
-              </a:lnSpc>
-              <a:buNone/>
-              <a:defRPr sz="1725" b="0" i="0">
-                <a:solidFill>
-                  <a:srgbClr val="3B68AB"/>
-                </a:solidFill>
-                <a:latin typeface="Microsoft YaHei"/>
-                <a:ea typeface="Microsoft YaHei"/>
-                <a:cs typeface="Microsoft YaHei"/>
-              </a:defRPr>
-            </a:pPr>
-            <a:r>
-              <a:rPr sz="1725" b="0" i="0">
-                <a:solidFill>
-                  <a:srgbClr val="3B68AB"/>
-                </a:solidFill>
-                <a:latin typeface="Microsoft YaHei"/>
-                <a:ea typeface="Microsoft YaHei"/>
-                <a:cs typeface="Microsoft YaHei"/>
-              </a:rPr>
-              <a:t>2组</a:t>
-            </a:r>
-          </a:p>
-        </p:txBody>
-      </p:sp>
-      <p:sp>
-        <p:nvSpPr>
-          <p:cNvPr id="33" name="matrix-detail-title-1">
-            <a:extLst xmlns:a="http://schemas.openxmlformats.org/drawingml/2006/main">
-              <a:ext uri="{FF2B5EF4-FFF2-40B4-BE49-F238E27FC236}">
-                <a16:creationId xmlns:a16="http://schemas.microsoft.com/office/drawing/2014/main" id="{68162CB9-52EE-493B-AD93-941D4697088D}"/>
-              </a:ext>
-            </a:extLst>
-          </p:cNvPr>
-          <p:cNvSpPr>
-            <a:spLocks xmlns:a="http://schemas.openxmlformats.org/drawingml/2006/main" noGrp="1"/>
-          </p:cNvSpPr>
-          <p:nvPr/>
-        </p:nvSpPr>
-        <p:spPr>
-          <a:xfrm xmlns:a="http://schemas.openxmlformats.org/drawingml/2006/main" rot="0">
-            <a:off x="8924925" y="1847850"/>
-            <a:ext cx="2571750" cy="178003"/>
-          </a:xfrm>
-          <a:prstGeom xmlns:a="http://schemas.openxmlformats.org/drawingml/2006/main" prst="rect">
-            <a:avLst/>
-          </a:prstGeom>
-          <a:noFill xmlns:a="http://schemas.openxmlformats.org/drawingml/2006/main"/>
-          <a:ln xmlns:a="http://schemas.openxmlformats.org/drawingml/2006/main" w="0">
-            <a:noFill/>
-            <a:prstDash val="solid"/>
-          </a:ln>
-        </p:spPr>
-        <p:txBody>
-          <a:bodyPr xmlns:a="http://schemas.openxmlformats.org/drawingml/2006/main" lIns="0" tIns="0" rIns="0" bIns="0" anchor="ctr">
+          <a:bodyPr xmlns:a="http://schemas.openxmlformats.org/drawingml/2006/main" wrap="none" lIns="0" tIns="0" rIns="0" bIns="0" anchor="ctr">
             <a:noAutofit/>
           </a:bodyPr>
           <a:lstStyle xmlns:a="http://schemas.openxmlformats.org/drawingml/2006/main"/>
@@ -2832,9 +2941,9 @@
                 <a:spcPct val="110000"/>
               </a:lnSpc>
               <a:buNone/>
-              <a:defRPr sz="1275" b="1" i="0">
-                <a:solidFill>
-                  <a:srgbClr val="3E71B5"/>
+              <a:defRPr sz="1900" b="1" i="0">
+                <a:solidFill>
+                  <a:srgbClr val="3B68AB"/>
                 </a:solidFill>
                 <a:latin typeface="Microsoft YaHei"/>
                 <a:ea typeface="Microsoft YaHei"/>
@@ -2842,37 +2951,37 @@
               </a:defRPr>
             </a:pPr>
             <a:r>
-              <a:rPr sz="1275" b="1" i="0">
-                <a:solidFill>
-                  <a:srgbClr val="3E71B5"/>
+              <a:rPr sz="1900" b="1" i="0">
+                <a:solidFill>
+                  <a:srgbClr val="3B68AB"/>
                 </a:solidFill>
                 <a:latin typeface="Microsoft YaHei"/>
                 <a:ea typeface="Microsoft YaHei"/>
                 <a:cs typeface="Microsoft YaHei"/>
               </a:rPr>
-              <a:t>重点投入方案</a:t>
+              <a:t>2组</a:t>
             </a:r>
           </a:p>
         </p:txBody>
       </p:sp>
       <p:sp>
         <p:nvSpPr>
-          <p:cNvPr id="34" name="matrix-detail-body-1">
-            <a:extLst xmlns:a="http://schemas.openxmlformats.org/drawingml/2006/main">
-              <a:ext uri="{FF2B5EF4-FFF2-40B4-BE49-F238E27FC236}">
-                <a16:creationId xmlns:a16="http://schemas.microsoft.com/office/drawing/2014/main" id="{E6E8F3DF-2DDF-416D-AA6F-C6E3EBA41578}"/>
-              </a:ext>
-            </a:extLst>
-          </p:cNvPr>
-          <p:cNvSpPr>
-            <a:spLocks xmlns:a="http://schemas.openxmlformats.org/drawingml/2006/main" noGrp="1"/>
-          </p:cNvSpPr>
-          <p:nvPr/>
-        </p:nvSpPr>
-        <p:spPr>
-          <a:xfrm xmlns:a="http://schemas.openxmlformats.org/drawingml/2006/main" rot="0">
-            <a:off x="8924925" y="2121103"/>
-            <a:ext cx="2571750" cy="400050"/>
+          <p:cNvPr id="33" name="matrix-detail-title-1">
+            <a:extLst xmlns:a="http://schemas.openxmlformats.org/drawingml/2006/main">
+              <a:ext uri="{FF2B5EF4-FFF2-40B4-BE49-F238E27FC236}">
+                <a16:creationId xmlns:a16="http://schemas.microsoft.com/office/drawing/2014/main" id="{2CF6F5C1-9E14-46E9-A524-35D38DF0C82F}"/>
+              </a:ext>
+            </a:extLst>
+          </p:cNvPr>
+          <p:cNvSpPr>
+            <a:spLocks xmlns:a="http://schemas.openxmlformats.org/drawingml/2006/main" noGrp="1"/>
+          </p:cNvSpPr>
+          <p:nvPr/>
+        </p:nvSpPr>
+        <p:spPr>
+          <a:xfrm xmlns:a="http://schemas.openxmlformats.org/drawingml/2006/main" rot="0">
+            <a:off x="8924925" y="1752600"/>
+            <a:ext cx="2571750" cy="293341"/>
           </a:xfrm>
           <a:prstGeom xmlns:a="http://schemas.openxmlformats.org/drawingml/2006/main" prst="rect">
             <a:avLst/>
@@ -2884,19 +2993,19 @@
           </a:ln>
         </p:spPr>
         <p:txBody>
-          <a:bodyPr xmlns:a="http://schemas.openxmlformats.org/drawingml/2006/main" lIns="0" tIns="0" rIns="0" bIns="0" anchor="ctr">
+          <a:bodyPr xmlns:a="http://schemas.openxmlformats.org/drawingml/2006/main" wrap="square" lIns="0" tIns="0" rIns="0" bIns="0" anchor="ctr">
             <a:noAutofit/>
           </a:bodyPr>
           <a:lstStyle xmlns:a="http://schemas.openxmlformats.org/drawingml/2006/main"/>
           <a:p xmlns:a="http://schemas.openxmlformats.org/drawingml/2006/main">
             <a:pPr algn="l">
               <a:lnSpc>
-                <a:spcPct val="140000"/>
+                <a:spcPct val="110000"/>
               </a:lnSpc>
               <a:buNone/>
-              <a:defRPr sz="1125" b="0" i="0">
-                <a:solidFill>
-                  <a:srgbClr val="748495"/>
+              <a:defRPr sz="2100" b="1" i="0">
+                <a:solidFill>
+                  <a:srgbClr val="3E71B5"/>
                 </a:solidFill>
                 <a:latin typeface="Microsoft YaHei"/>
                 <a:ea typeface="Microsoft YaHei"/>
@@ -2904,36 +3013,125 @@
               </a:defRPr>
             </a:pPr>
             <a:r>
-              <a:rPr sz="1125" b="0" i="0">
-                <a:solidFill>
-                  <a:srgbClr val="748495"/>
+              <a:rPr sz="2100" b="1" i="0">
+                <a:solidFill>
+                  <a:srgbClr val="3E71B5"/>
                 </a:solidFill>
                 <a:latin typeface="Microsoft YaHei"/>
                 <a:ea typeface="Microsoft YaHei"/>
                 <a:cs typeface="Microsoft YaHei"/>
               </a:rPr>
-              <a:t>围绕高价值项目集中资源建设</a:t>
+              <a:t>重点投入方案</a:t>
             </a:r>
           </a:p>
         </p:txBody>
       </p:sp>
       <p:sp>
         <p:nvSpPr>
+          <p:cNvPr id="34" name="matrix-detail-body-1">
+            <a:extLst xmlns:a="http://schemas.openxmlformats.org/drawingml/2006/main">
+              <a:ext uri="{FF2B5EF4-FFF2-40B4-BE49-F238E27FC236}">
+                <a16:creationId xmlns:a16="http://schemas.microsoft.com/office/drawing/2014/main" id="{6CE851EC-4C5A-459C-AD74-4649938F8A00}"/>
+              </a:ext>
+            </a:extLst>
+          </p:cNvPr>
+          <p:cNvSpPr>
+            <a:spLocks xmlns:a="http://schemas.openxmlformats.org/drawingml/2006/main" noGrp="1"/>
+          </p:cNvSpPr>
+          <p:nvPr/>
+        </p:nvSpPr>
+        <p:spPr>
+          <a:xfrm xmlns:a="http://schemas.openxmlformats.org/drawingml/2006/main" rot="0">
+            <a:off x="8924925" y="2093566"/>
+            <a:ext cx="2571750" cy="570014"/>
+          </a:xfrm>
+          <a:prstGeom xmlns:a="http://schemas.openxmlformats.org/drawingml/2006/main" prst="rect">
+            <a:avLst/>
+          </a:prstGeom>
+          <a:noFill xmlns:a="http://schemas.openxmlformats.org/drawingml/2006/main"/>
+          <a:ln xmlns:a="http://schemas.openxmlformats.org/drawingml/2006/main" w="0">
+            <a:noFill/>
+            <a:prstDash val="solid"/>
+          </a:ln>
+        </p:spPr>
+        <p:txBody>
+          <a:bodyPr xmlns:a="http://schemas.openxmlformats.org/drawingml/2006/main" wrap="square" lIns="0" tIns="0" rIns="0" bIns="0" anchor="ctr">
+            <a:noAutofit/>
+          </a:bodyPr>
+          <a:lstStyle xmlns:a="http://schemas.openxmlformats.org/drawingml/2006/main"/>
+          <a:p xmlns:a="http://schemas.openxmlformats.org/drawingml/2006/main">
+            <a:pPr algn="l">
+              <a:lnSpc>
+                <a:spcPct val="132000"/>
+              </a:lnSpc>
+              <a:buNone/>
+              <a:defRPr sz="1700" b="0" i="0">
+                <a:solidFill>
+                  <a:srgbClr val="748495"/>
+                </a:solidFill>
+                <a:latin typeface="Microsoft YaHei"/>
+                <a:ea typeface="Microsoft YaHei"/>
+                <a:cs typeface="Microsoft YaHei"/>
+              </a:defRPr>
+            </a:pPr>
+            <a:r>
+              <a:rPr sz="1700" b="0" i="0">
+                <a:solidFill>
+                  <a:srgbClr val="748495"/>
+                </a:solidFill>
+                <a:latin typeface="Microsoft YaHei"/>
+                <a:ea typeface="Microsoft YaHei"/>
+                <a:cs typeface="Microsoft YaHei"/>
+              </a:rPr>
+              <a:t>围绕高价值项目集中资源</a:t>
+            </a:r>
+          </a:p>
+          <a:p xmlns:a="http://schemas.openxmlformats.org/drawingml/2006/main">
+            <a:pPr algn="l">
+              <a:lnSpc>
+                <a:spcPct val="132000"/>
+              </a:lnSpc>
+              <a:buNone/>
+              <a:defRPr sz="1700" b="0" i="0">
+                <a:solidFill>
+                  <a:srgbClr val="748495"/>
+                </a:solidFill>
+                <a:latin typeface="Microsoft YaHei"/>
+                <a:ea typeface="Microsoft YaHei"/>
+                <a:cs typeface="Microsoft YaHei"/>
+              </a:defRPr>
+            </a:pPr>
+            <a:r>
+              <a:rPr sz="1700" b="0" i="0">
+                <a:solidFill>
+                  <a:srgbClr val="748495"/>
+                </a:solidFill>
+                <a:latin typeface="Microsoft YaHei"/>
+                <a:ea typeface="Microsoft YaHei"/>
+                <a:cs typeface="Microsoft YaHei"/>
+              </a:rPr>
+              <a:t>建设</a:t>
+            </a:r>
+          </a:p>
+        </p:txBody>
+      </p:sp>
+      <p:sp>
+        <p:nvSpPr>
           <p:cNvPr id="35" name="matrix-detail-divider-1">
             <a:extLst xmlns:a="http://schemas.openxmlformats.org/drawingml/2006/main">
               <a:ext uri="{FF2B5EF4-FFF2-40B4-BE49-F238E27FC236}">
-                <a16:creationId xmlns:a16="http://schemas.microsoft.com/office/drawing/2014/main" id="{C251B853-8827-418C-84DA-3701A9044066}"/>
-              </a:ext>
-            </a:extLst>
-          </p:cNvPr>
-          <p:cNvSpPr>
-            <a:spLocks xmlns:a="http://schemas.openxmlformats.org/drawingml/2006/main" noGrp="1"/>
-          </p:cNvSpPr>
-          <p:nvPr/>
-        </p:nvSpPr>
-        <p:spPr>
-          <a:xfrm xmlns:a="http://schemas.openxmlformats.org/drawingml/2006/main" rot="0">
-            <a:off x="8924925" y="2616403"/>
+                <a16:creationId xmlns:a16="http://schemas.microsoft.com/office/drawing/2014/main" id="{F2B048C5-9DA8-4A21-B047-7EC969862711}"/>
+              </a:ext>
+            </a:extLst>
+          </p:cNvPr>
+          <p:cNvSpPr>
+            <a:spLocks xmlns:a="http://schemas.openxmlformats.org/drawingml/2006/main" noGrp="1"/>
+          </p:cNvSpPr>
+          <p:nvPr/>
+        </p:nvSpPr>
+        <p:spPr>
+          <a:xfrm xmlns:a="http://schemas.openxmlformats.org/drawingml/2006/main" rot="0">
+            <a:off x="8924925" y="2724150"/>
             <a:ext cx="2571750" cy="9525"/>
           </a:xfrm>
           <a:prstGeom xmlns:a="http://schemas.openxmlformats.org/drawingml/2006/main" prst="line">
@@ -2955,19 +3153,19 @@
           <p:cNvPr id="36" name="matrix-detail-caption-1">
             <a:extLst xmlns:a="http://schemas.openxmlformats.org/drawingml/2006/main">
               <a:ext uri="{FF2B5EF4-FFF2-40B4-BE49-F238E27FC236}">
-                <a16:creationId xmlns:a16="http://schemas.microsoft.com/office/drawing/2014/main" id="{6477A1A7-B967-43BB-B7EC-535C1E6CA623}"/>
-              </a:ext>
-            </a:extLst>
-          </p:cNvPr>
-          <p:cNvSpPr>
-            <a:spLocks xmlns:a="http://schemas.openxmlformats.org/drawingml/2006/main" noGrp="1"/>
-          </p:cNvSpPr>
-          <p:nvPr/>
-        </p:nvSpPr>
-        <p:spPr>
-          <a:xfrm xmlns:a="http://schemas.openxmlformats.org/drawingml/2006/main" rot="0">
-            <a:off x="8924925" y="2711653"/>
-            <a:ext cx="2571750" cy="142875"/>
+                <a16:creationId xmlns:a16="http://schemas.microsoft.com/office/drawing/2014/main" id="{36EDD244-7EE6-4E29-97C8-DBBA0D0CA8BD}"/>
+              </a:ext>
+            </a:extLst>
+          </p:cNvPr>
+          <p:cNvSpPr>
+            <a:spLocks xmlns:a="http://schemas.openxmlformats.org/drawingml/2006/main" noGrp="1"/>
+          </p:cNvSpPr>
+          <p:nvPr/>
+        </p:nvSpPr>
+        <p:spPr>
+          <a:xfrm xmlns:a="http://schemas.openxmlformats.org/drawingml/2006/main" rot="0">
+            <a:off x="8924925" y="2790825"/>
+            <a:ext cx="2571750" cy="190500"/>
           </a:xfrm>
           <a:prstGeom xmlns:a="http://schemas.openxmlformats.org/drawingml/2006/main" prst="rect">
             <a:avLst/>
@@ -2979,7 +3177,7 @@
           </a:ln>
         </p:spPr>
         <p:txBody>
-          <a:bodyPr xmlns:a="http://schemas.openxmlformats.org/drawingml/2006/main" lIns="0" tIns="0" rIns="0" bIns="0" anchor="ctr">
+          <a:bodyPr xmlns:a="http://schemas.openxmlformats.org/drawingml/2006/main" wrap="none" lIns="0" tIns="0" rIns="0" bIns="0" anchor="ctr">
             <a:noAutofit/>
           </a:bodyPr>
           <a:lstStyle xmlns:a="http://schemas.openxmlformats.org/drawingml/2006/main"/>
@@ -2989,7 +3187,7 @@
                 <a:spcPct val="100000"/>
               </a:lnSpc>
               <a:buNone/>
-              <a:defRPr sz="1125" b="1" i="0">
+              <a:defRPr sz="1500" b="1" i="0">
                 <a:solidFill>
                   <a:srgbClr val="4E6278"/>
                 </a:solidFill>
@@ -2999,7 +3197,7 @@
               </a:defRPr>
             </a:pPr>
             <a:r>
-              <a:rPr sz="1125" b="1" i="0">
+              <a:rPr sz="1500" b="1" i="0">
                 <a:solidFill>
                   <a:srgbClr val="4E6278"/>
                 </a:solidFill>
@@ -3017,19 +3215,19 @@
           <p:cNvPr id="37" name="matrix-detail-metric-label-1-0">
             <a:extLst xmlns:a="http://schemas.openxmlformats.org/drawingml/2006/main">
               <a:ext uri="{FF2B5EF4-FFF2-40B4-BE49-F238E27FC236}">
-                <a16:creationId xmlns:a16="http://schemas.microsoft.com/office/drawing/2014/main" id="{FF303E10-D49A-463C-B818-E5C69074C21A}"/>
-              </a:ext>
-            </a:extLst>
-          </p:cNvPr>
-          <p:cNvSpPr>
-            <a:spLocks xmlns:a="http://schemas.openxmlformats.org/drawingml/2006/main" noGrp="1"/>
-          </p:cNvSpPr>
-          <p:nvPr/>
-        </p:nvSpPr>
-        <p:spPr>
-          <a:xfrm xmlns:a="http://schemas.openxmlformats.org/drawingml/2006/main" rot="0">
-            <a:off x="8924925" y="2921203"/>
-            <a:ext cx="1228725" cy="154781"/>
+                <a16:creationId xmlns:a16="http://schemas.microsoft.com/office/drawing/2014/main" id="{586084F8-919F-4121-B4FB-8318180FF529}"/>
+              </a:ext>
+            </a:extLst>
+          </p:cNvPr>
+          <p:cNvSpPr>
+            <a:spLocks xmlns:a="http://schemas.openxmlformats.org/drawingml/2006/main" noGrp="1"/>
+          </p:cNvSpPr>
+          <p:nvPr/>
+        </p:nvSpPr>
+        <p:spPr>
+          <a:xfrm xmlns:a="http://schemas.openxmlformats.org/drawingml/2006/main" rot="0">
+            <a:off x="8924925" y="3028950"/>
+            <a:ext cx="1247775" cy="238125"/>
           </a:xfrm>
           <a:prstGeom xmlns:a="http://schemas.openxmlformats.org/drawingml/2006/main" prst="rect">
             <a:avLst/>
@@ -3041,7 +3239,7 @@
           </a:ln>
         </p:spPr>
         <p:txBody>
-          <a:bodyPr xmlns:a="http://schemas.openxmlformats.org/drawingml/2006/main" lIns="0" tIns="0" rIns="0" bIns="0" anchor="ctr">
+          <a:bodyPr xmlns:a="http://schemas.openxmlformats.org/drawingml/2006/main" wrap="none" lIns="0" tIns="0" rIns="0" bIns="0" anchor="ctr">
             <a:noAutofit/>
           </a:bodyPr>
           <a:lstStyle xmlns:a="http://schemas.openxmlformats.org/drawingml/2006/main"/>
@@ -3051,7 +3249,7 @@
                 <a:spcPct val="125000"/>
               </a:lnSpc>
               <a:buNone/>
-              <a:defRPr sz="975" b="0" i="0">
+              <a:defRPr sz="1500" b="0" i="0">
                 <a:solidFill>
                   <a:srgbClr val="586B80"/>
                 </a:solidFill>
@@ -3061,7 +3259,7 @@
               </a:defRPr>
             </a:pPr>
             <a:r>
-              <a:rPr sz="975" b="0" i="0">
+              <a:rPr sz="1500" b="0" i="0">
                 <a:solidFill>
                   <a:srgbClr val="586B80"/>
                 </a:solidFill>
@@ -3079,19 +3277,19 @@
           <p:cNvPr id="38" name="matrix-detail-metric-value-1-0">
             <a:extLst xmlns:a="http://schemas.openxmlformats.org/drawingml/2006/main">
               <a:ext uri="{FF2B5EF4-FFF2-40B4-BE49-F238E27FC236}">
-                <a16:creationId xmlns:a16="http://schemas.microsoft.com/office/drawing/2014/main" id="{726B35AB-6DD8-413F-B9C5-F01D2500B36A}"/>
-              </a:ext>
-            </a:extLst>
-          </p:cNvPr>
-          <p:cNvSpPr>
-            <a:spLocks xmlns:a="http://schemas.openxmlformats.org/drawingml/2006/main" noGrp="1"/>
-          </p:cNvSpPr>
-          <p:nvPr/>
-        </p:nvSpPr>
-        <p:spPr>
-          <a:xfrm xmlns:a="http://schemas.openxmlformats.org/drawingml/2006/main" rot="0">
-            <a:off x="8924925" y="3104559"/>
-            <a:ext cx="1228725" cy="280397"/>
+                <a16:creationId xmlns:a16="http://schemas.microsoft.com/office/drawing/2014/main" id="{7FC5DE0C-F9C5-488D-AA46-CFC1BF98FF39}"/>
+              </a:ext>
+            </a:extLst>
+          </p:cNvPr>
+          <p:cNvSpPr>
+            <a:spLocks xmlns:a="http://schemas.openxmlformats.org/drawingml/2006/main" noGrp="1"/>
+          </p:cNvSpPr>
+          <p:nvPr/>
+        </p:nvSpPr>
+        <p:spPr>
+          <a:xfrm xmlns:a="http://schemas.openxmlformats.org/drawingml/2006/main" rot="0">
+            <a:off x="8924925" y="3286125"/>
+            <a:ext cx="1247775" cy="265357"/>
           </a:xfrm>
           <a:prstGeom xmlns:a="http://schemas.openxmlformats.org/drawingml/2006/main" prst="rect">
             <a:avLst/>
@@ -3103,17 +3301,17 @@
           </a:ln>
         </p:spPr>
         <p:txBody>
-          <a:bodyPr xmlns:a="http://schemas.openxmlformats.org/drawingml/2006/main" lIns="0" tIns="0" rIns="0" bIns="0" anchor="ctr">
+          <a:bodyPr xmlns:a="http://schemas.openxmlformats.org/drawingml/2006/main" wrap="none" lIns="0" tIns="0" rIns="0" bIns="0" anchor="ctr">
             <a:noAutofit/>
           </a:bodyPr>
           <a:lstStyle xmlns:a="http://schemas.openxmlformats.org/drawingml/2006/main"/>
           <a:p xmlns:a="http://schemas.openxmlformats.org/drawingml/2006/main">
             <a:pPr algn="l">
               <a:lnSpc>
-                <a:spcPct val="128000"/>
+                <a:spcPct val="110000"/>
               </a:lnSpc>
               <a:buNone/>
-              <a:defRPr sz="1725" b="0" i="0">
+              <a:defRPr sz="1900" b="1" i="0">
                 <a:solidFill>
                   <a:srgbClr val="3B68AB"/>
                 </a:solidFill>
@@ -3123,7 +3321,7 @@
               </a:defRPr>
             </a:pPr>
             <a:r>
-              <a:rPr sz="1725" b="0" i="0">
+              <a:rPr sz="1900" b="1" i="0">
                 <a:solidFill>
                   <a:srgbClr val="3B68AB"/>
                 </a:solidFill>
@@ -3141,19 +3339,19 @@
           <p:cNvPr id="39" name="matrix-detail-metric-label-1-1">
             <a:extLst xmlns:a="http://schemas.openxmlformats.org/drawingml/2006/main">
               <a:ext uri="{FF2B5EF4-FFF2-40B4-BE49-F238E27FC236}">
-                <a16:creationId xmlns:a16="http://schemas.microsoft.com/office/drawing/2014/main" id="{FDC378D0-D298-44D8-91E8-EAAD5E1AB897}"/>
-              </a:ext>
-            </a:extLst>
-          </p:cNvPr>
-          <p:cNvSpPr>
-            <a:spLocks xmlns:a="http://schemas.openxmlformats.org/drawingml/2006/main" noGrp="1"/>
-          </p:cNvSpPr>
-          <p:nvPr/>
-        </p:nvSpPr>
-        <p:spPr>
-          <a:xfrm xmlns:a="http://schemas.openxmlformats.org/drawingml/2006/main" rot="0">
-            <a:off x="10267950" y="2921203"/>
-            <a:ext cx="1228725" cy="154781"/>
+                <a16:creationId xmlns:a16="http://schemas.microsoft.com/office/drawing/2014/main" id="{53ADE1B5-9E00-4545-A588-98267FB384A9}"/>
+              </a:ext>
+            </a:extLst>
+          </p:cNvPr>
+          <p:cNvSpPr>
+            <a:spLocks xmlns:a="http://schemas.openxmlformats.org/drawingml/2006/main" noGrp="1"/>
+          </p:cNvSpPr>
+          <p:nvPr/>
+        </p:nvSpPr>
+        <p:spPr>
+          <a:xfrm xmlns:a="http://schemas.openxmlformats.org/drawingml/2006/main" rot="0">
+            <a:off x="10248900" y="3028950"/>
+            <a:ext cx="1247775" cy="238125"/>
           </a:xfrm>
           <a:prstGeom xmlns:a="http://schemas.openxmlformats.org/drawingml/2006/main" prst="rect">
             <a:avLst/>
@@ -3165,7 +3363,7 @@
           </a:ln>
         </p:spPr>
         <p:txBody>
-          <a:bodyPr xmlns:a="http://schemas.openxmlformats.org/drawingml/2006/main" lIns="0" tIns="0" rIns="0" bIns="0" anchor="ctr">
+          <a:bodyPr xmlns:a="http://schemas.openxmlformats.org/drawingml/2006/main" wrap="none" lIns="0" tIns="0" rIns="0" bIns="0" anchor="ctr">
             <a:noAutofit/>
           </a:bodyPr>
           <a:lstStyle xmlns:a="http://schemas.openxmlformats.org/drawingml/2006/main"/>
@@ -3175,7 +3373,7 @@
                 <a:spcPct val="125000"/>
               </a:lnSpc>
               <a:buNone/>
-              <a:defRPr sz="975" b="0" i="0">
+              <a:defRPr sz="1500" b="0" i="0">
                 <a:solidFill>
                   <a:srgbClr val="586B80"/>
                 </a:solidFill>
@@ -3185,7 +3383,7 @@
               </a:defRPr>
             </a:pPr>
             <a:r>
-              <a:rPr sz="975" b="0" i="0">
+              <a:rPr sz="1500" b="0" i="0">
                 <a:solidFill>
                   <a:srgbClr val="586B80"/>
                 </a:solidFill>
@@ -3203,19 +3401,19 @@
           <p:cNvPr id="40" name="matrix-detail-metric-value-1-1">
             <a:extLst xmlns:a="http://schemas.openxmlformats.org/drawingml/2006/main">
               <a:ext uri="{FF2B5EF4-FFF2-40B4-BE49-F238E27FC236}">
-                <a16:creationId xmlns:a16="http://schemas.microsoft.com/office/drawing/2014/main" id="{8674F2D3-3220-4450-9159-3D4FE8FF5A0C}"/>
-              </a:ext>
-            </a:extLst>
-          </p:cNvPr>
-          <p:cNvSpPr>
-            <a:spLocks xmlns:a="http://schemas.openxmlformats.org/drawingml/2006/main" noGrp="1"/>
-          </p:cNvSpPr>
-          <p:nvPr/>
-        </p:nvSpPr>
-        <p:spPr>
-          <a:xfrm xmlns:a="http://schemas.openxmlformats.org/drawingml/2006/main" rot="0">
-            <a:off x="10267950" y="3104559"/>
-            <a:ext cx="1228725" cy="280397"/>
+                <a16:creationId xmlns:a16="http://schemas.microsoft.com/office/drawing/2014/main" id="{20E1FED7-F985-4D72-9035-911071B5EB5A}"/>
+              </a:ext>
+            </a:extLst>
+          </p:cNvPr>
+          <p:cNvSpPr>
+            <a:spLocks xmlns:a="http://schemas.openxmlformats.org/drawingml/2006/main" noGrp="1"/>
+          </p:cNvSpPr>
+          <p:nvPr/>
+        </p:nvSpPr>
+        <p:spPr>
+          <a:xfrm xmlns:a="http://schemas.openxmlformats.org/drawingml/2006/main" rot="0">
+            <a:off x="10248900" y="3286125"/>
+            <a:ext cx="1247775" cy="265357"/>
           </a:xfrm>
           <a:prstGeom xmlns:a="http://schemas.openxmlformats.org/drawingml/2006/main" prst="rect">
             <a:avLst/>
@@ -3227,69 +3425,7 @@
           </a:ln>
         </p:spPr>
         <p:txBody>
-          <a:bodyPr xmlns:a="http://schemas.openxmlformats.org/drawingml/2006/main" lIns="0" tIns="0" rIns="0" bIns="0" anchor="ctr">
-            <a:noAutofit/>
-          </a:bodyPr>
-          <a:lstStyle xmlns:a="http://schemas.openxmlformats.org/drawingml/2006/main"/>
-          <a:p xmlns:a="http://schemas.openxmlformats.org/drawingml/2006/main">
-            <a:pPr algn="l">
-              <a:lnSpc>
-                <a:spcPct val="128000"/>
-              </a:lnSpc>
-              <a:buNone/>
-              <a:defRPr sz="1725" b="0" i="0">
-                <a:solidFill>
-                  <a:srgbClr val="3B68AB"/>
-                </a:solidFill>
-                <a:latin typeface="Microsoft YaHei"/>
-                <a:ea typeface="Microsoft YaHei"/>
-                <a:cs typeface="Microsoft YaHei"/>
-              </a:defRPr>
-            </a:pPr>
-            <a:r>
-              <a:rPr sz="1725" b="0" i="0">
-                <a:solidFill>
-                  <a:srgbClr val="3B68AB"/>
-                </a:solidFill>
-                <a:latin typeface="Microsoft YaHei"/>
-                <a:ea typeface="Microsoft YaHei"/>
-                <a:cs typeface="Microsoft YaHei"/>
-              </a:rPr>
-              <a:t>重点</a:t>
-            </a:r>
-          </a:p>
-        </p:txBody>
-      </p:sp>
-      <p:sp>
-        <p:nvSpPr>
-          <p:cNvPr id="41" name="matrix-detail-title-2">
-            <a:extLst xmlns:a="http://schemas.openxmlformats.org/drawingml/2006/main">
-              <a:ext uri="{FF2B5EF4-FFF2-40B4-BE49-F238E27FC236}">
-                <a16:creationId xmlns:a16="http://schemas.microsoft.com/office/drawing/2014/main" id="{BA9CF1BD-0C5A-455A-A990-860B6135F434}"/>
-              </a:ext>
-            </a:extLst>
-          </p:cNvPr>
-          <p:cNvSpPr>
-            <a:spLocks xmlns:a="http://schemas.openxmlformats.org/drawingml/2006/main" noGrp="1"/>
-          </p:cNvSpPr>
-          <p:nvPr/>
-        </p:nvSpPr>
-        <p:spPr>
-          <a:xfrm xmlns:a="http://schemas.openxmlformats.org/drawingml/2006/main" rot="0">
-            <a:off x="2028825" y="4381500"/>
-            <a:ext cx="1809750" cy="178003"/>
-          </a:xfrm>
-          <a:prstGeom xmlns:a="http://schemas.openxmlformats.org/drawingml/2006/main" prst="rect">
-            <a:avLst/>
-          </a:prstGeom>
-          <a:noFill xmlns:a="http://schemas.openxmlformats.org/drawingml/2006/main"/>
-          <a:ln xmlns:a="http://schemas.openxmlformats.org/drawingml/2006/main" w="0">
-            <a:noFill/>
-            <a:prstDash val="solid"/>
-          </a:ln>
-        </p:spPr>
-        <p:txBody>
-          <a:bodyPr xmlns:a="http://schemas.openxmlformats.org/drawingml/2006/main" lIns="0" tIns="0" rIns="0" bIns="0" anchor="ctr">
+          <a:bodyPr xmlns:a="http://schemas.openxmlformats.org/drawingml/2006/main" wrap="none" lIns="0" tIns="0" rIns="0" bIns="0" anchor="ctr">
             <a:noAutofit/>
           </a:bodyPr>
           <a:lstStyle xmlns:a="http://schemas.openxmlformats.org/drawingml/2006/main"/>
@@ -3299,9 +3435,9 @@
                 <a:spcPct val="110000"/>
               </a:lnSpc>
               <a:buNone/>
-              <a:defRPr sz="1275" b="1" i="0">
-                <a:solidFill>
-                  <a:srgbClr val="3E71B5"/>
+              <a:defRPr sz="1900" b="1" i="0">
+                <a:solidFill>
+                  <a:srgbClr val="3B68AB"/>
                 </a:solidFill>
                 <a:latin typeface="Microsoft YaHei"/>
                 <a:ea typeface="Microsoft YaHei"/>
@@ -3309,37 +3445,37 @@
               </a:defRPr>
             </a:pPr>
             <a:r>
-              <a:rPr sz="1275" b="1" i="0">
-                <a:solidFill>
-                  <a:srgbClr val="3E71B5"/>
+              <a:rPr sz="1900" b="1" i="0">
+                <a:solidFill>
+                  <a:srgbClr val="3B68AB"/>
                 </a:solidFill>
                 <a:latin typeface="Microsoft YaHei"/>
                 <a:ea typeface="Microsoft YaHei"/>
                 <a:cs typeface="Microsoft YaHei"/>
               </a:rPr>
-              <a:t>常规优化方案</a:t>
+              <a:t>重点</a:t>
             </a:r>
           </a:p>
         </p:txBody>
       </p:sp>
       <p:sp>
         <p:nvSpPr>
-          <p:cNvPr id="42" name="matrix-detail-body-2">
-            <a:extLst xmlns:a="http://schemas.openxmlformats.org/drawingml/2006/main">
-              <a:ext uri="{FF2B5EF4-FFF2-40B4-BE49-F238E27FC236}">
-                <a16:creationId xmlns:a16="http://schemas.microsoft.com/office/drawing/2014/main" id="{59E2EF19-44B7-4CB6-9617-C9EA71028B24}"/>
-              </a:ext>
-            </a:extLst>
-          </p:cNvPr>
-          <p:cNvSpPr>
-            <a:spLocks xmlns:a="http://schemas.openxmlformats.org/drawingml/2006/main" noGrp="1"/>
-          </p:cNvSpPr>
-          <p:nvPr/>
-        </p:nvSpPr>
-        <p:spPr>
-          <a:xfrm xmlns:a="http://schemas.openxmlformats.org/drawingml/2006/main" rot="0">
-            <a:off x="2028825" y="4654753"/>
-            <a:ext cx="1809750" cy="400050"/>
+          <p:cNvPr id="41" name="matrix-detail-title-2">
+            <a:extLst xmlns:a="http://schemas.openxmlformats.org/drawingml/2006/main">
+              <a:ext uri="{FF2B5EF4-FFF2-40B4-BE49-F238E27FC236}">
+                <a16:creationId xmlns:a16="http://schemas.microsoft.com/office/drawing/2014/main" id="{DA75AA5E-E8EE-416C-9DB7-3ADFC3E6EE7A}"/>
+              </a:ext>
+            </a:extLst>
+          </p:cNvPr>
+          <p:cNvSpPr>
+            <a:spLocks xmlns:a="http://schemas.openxmlformats.org/drawingml/2006/main" noGrp="1"/>
+          </p:cNvSpPr>
+          <p:nvPr/>
+        </p:nvSpPr>
+        <p:spPr>
+          <a:xfrm xmlns:a="http://schemas.openxmlformats.org/drawingml/2006/main" rot="0">
+            <a:off x="2028825" y="4286250"/>
+            <a:ext cx="1809750" cy="293341"/>
           </a:xfrm>
           <a:prstGeom xmlns:a="http://schemas.openxmlformats.org/drawingml/2006/main" prst="rect">
             <a:avLst/>
@@ -3351,19 +3487,19 @@
           </a:ln>
         </p:spPr>
         <p:txBody>
-          <a:bodyPr xmlns:a="http://schemas.openxmlformats.org/drawingml/2006/main" lIns="0" tIns="0" rIns="0" bIns="0" anchor="ctr">
+          <a:bodyPr xmlns:a="http://schemas.openxmlformats.org/drawingml/2006/main" wrap="square" lIns="0" tIns="0" rIns="0" bIns="0" anchor="ctr">
             <a:noAutofit/>
           </a:bodyPr>
           <a:lstStyle xmlns:a="http://schemas.openxmlformats.org/drawingml/2006/main"/>
           <a:p xmlns:a="http://schemas.openxmlformats.org/drawingml/2006/main">
             <a:pPr algn="l">
               <a:lnSpc>
-                <a:spcPct val="140000"/>
+                <a:spcPct val="110000"/>
               </a:lnSpc>
               <a:buNone/>
-              <a:defRPr sz="1125" b="0" i="0">
-                <a:solidFill>
-                  <a:srgbClr val="748495"/>
+              <a:defRPr sz="2100" b="1" i="0">
+                <a:solidFill>
+                  <a:srgbClr val="3E71B5"/>
                 </a:solidFill>
                 <a:latin typeface="Microsoft YaHei"/>
                 <a:ea typeface="Microsoft YaHei"/>
@@ -3371,36 +3507,125 @@
               </a:defRPr>
             </a:pPr>
             <a:r>
-              <a:rPr sz="1125" b="0" i="0">
-                <a:solidFill>
-                  <a:srgbClr val="748495"/>
+              <a:rPr sz="2100" b="1" i="0">
+                <a:solidFill>
+                  <a:srgbClr val="3E71B5"/>
                 </a:solidFill>
                 <a:latin typeface="Microsoft YaHei"/>
                 <a:ea typeface="Microsoft YaHei"/>
                 <a:cs typeface="Microsoft YaHei"/>
               </a:rPr>
-              <a:t>以低成本方式择机改善体验</a:t>
+              <a:t>常规优化方案</a:t>
             </a:r>
           </a:p>
         </p:txBody>
       </p:sp>
       <p:sp>
         <p:nvSpPr>
+          <p:cNvPr id="42" name="matrix-detail-body-2">
+            <a:extLst xmlns:a="http://schemas.openxmlformats.org/drawingml/2006/main">
+              <a:ext uri="{FF2B5EF4-FFF2-40B4-BE49-F238E27FC236}">
+                <a16:creationId xmlns:a16="http://schemas.microsoft.com/office/drawing/2014/main" id="{EC88DA1C-6D25-4F86-8AA7-D955B6C5B9FB}"/>
+              </a:ext>
+            </a:extLst>
+          </p:cNvPr>
+          <p:cNvSpPr>
+            <a:spLocks xmlns:a="http://schemas.openxmlformats.org/drawingml/2006/main" noGrp="1"/>
+          </p:cNvSpPr>
+          <p:nvPr/>
+        </p:nvSpPr>
+        <p:spPr>
+          <a:xfrm xmlns:a="http://schemas.openxmlformats.org/drawingml/2006/main" rot="0">
+            <a:off x="2028825" y="4627216"/>
+            <a:ext cx="1809750" cy="570014"/>
+          </a:xfrm>
+          <a:prstGeom xmlns:a="http://schemas.openxmlformats.org/drawingml/2006/main" prst="rect">
+            <a:avLst/>
+          </a:prstGeom>
+          <a:noFill xmlns:a="http://schemas.openxmlformats.org/drawingml/2006/main"/>
+          <a:ln xmlns:a="http://schemas.openxmlformats.org/drawingml/2006/main" w="0">
+            <a:noFill/>
+            <a:prstDash val="solid"/>
+          </a:ln>
+        </p:spPr>
+        <p:txBody>
+          <a:bodyPr xmlns:a="http://schemas.openxmlformats.org/drawingml/2006/main" wrap="square" lIns="0" tIns="0" rIns="0" bIns="0" anchor="ctr">
+            <a:noAutofit/>
+          </a:bodyPr>
+          <a:lstStyle xmlns:a="http://schemas.openxmlformats.org/drawingml/2006/main"/>
+          <a:p xmlns:a="http://schemas.openxmlformats.org/drawingml/2006/main">
+            <a:pPr algn="l">
+              <a:lnSpc>
+                <a:spcPct val="132000"/>
+              </a:lnSpc>
+              <a:buNone/>
+              <a:defRPr sz="1700" b="0" i="0">
+                <a:solidFill>
+                  <a:srgbClr val="748495"/>
+                </a:solidFill>
+                <a:latin typeface="Microsoft YaHei"/>
+                <a:ea typeface="Microsoft YaHei"/>
+                <a:cs typeface="Microsoft YaHei"/>
+              </a:defRPr>
+            </a:pPr>
+            <a:r>
+              <a:rPr sz="1700" b="0" i="0">
+                <a:solidFill>
+                  <a:srgbClr val="748495"/>
+                </a:solidFill>
+                <a:latin typeface="Microsoft YaHei"/>
+                <a:ea typeface="Microsoft YaHei"/>
+                <a:cs typeface="Microsoft YaHei"/>
+              </a:rPr>
+              <a:t>以低成本方式择机</a:t>
+            </a:r>
+          </a:p>
+          <a:p xmlns:a="http://schemas.openxmlformats.org/drawingml/2006/main">
+            <a:pPr algn="l">
+              <a:lnSpc>
+                <a:spcPct val="132000"/>
+              </a:lnSpc>
+              <a:buNone/>
+              <a:defRPr sz="1700" b="0" i="0">
+                <a:solidFill>
+                  <a:srgbClr val="748495"/>
+                </a:solidFill>
+                <a:latin typeface="Microsoft YaHei"/>
+                <a:ea typeface="Microsoft YaHei"/>
+                <a:cs typeface="Microsoft YaHei"/>
+              </a:defRPr>
+            </a:pPr>
+            <a:r>
+              <a:rPr sz="1700" b="0" i="0">
+                <a:solidFill>
+                  <a:srgbClr val="748495"/>
+                </a:solidFill>
+                <a:latin typeface="Microsoft YaHei"/>
+                <a:ea typeface="Microsoft YaHei"/>
+                <a:cs typeface="Microsoft YaHei"/>
+              </a:rPr>
+              <a:t>改善体验</a:t>
+            </a:r>
+          </a:p>
+        </p:txBody>
+      </p:sp>
+      <p:sp>
+        <p:nvSpPr>
           <p:cNvPr id="43" name="matrix-detail-divider-2">
             <a:extLst xmlns:a="http://schemas.openxmlformats.org/drawingml/2006/main">
               <a:ext uri="{FF2B5EF4-FFF2-40B4-BE49-F238E27FC236}">
-                <a16:creationId xmlns:a16="http://schemas.microsoft.com/office/drawing/2014/main" id="{97FBE500-9363-4E2D-8D80-ECD3536CEF15}"/>
-              </a:ext>
-            </a:extLst>
-          </p:cNvPr>
-          <p:cNvSpPr>
-            <a:spLocks xmlns:a="http://schemas.openxmlformats.org/drawingml/2006/main" noGrp="1"/>
-          </p:cNvSpPr>
-          <p:nvPr/>
-        </p:nvSpPr>
-        <p:spPr>
-          <a:xfrm xmlns:a="http://schemas.openxmlformats.org/drawingml/2006/main" rot="0">
-            <a:off x="2028825" y="5150053"/>
+                <a16:creationId xmlns:a16="http://schemas.microsoft.com/office/drawing/2014/main" id="{4EAC7757-59D4-4EB5-BE27-B62480F8CC2E}"/>
+              </a:ext>
+            </a:extLst>
+          </p:cNvPr>
+          <p:cNvSpPr>
+            <a:spLocks xmlns:a="http://schemas.openxmlformats.org/drawingml/2006/main" noGrp="1"/>
+          </p:cNvSpPr>
+          <p:nvPr/>
+        </p:nvSpPr>
+        <p:spPr>
+          <a:xfrm xmlns:a="http://schemas.openxmlformats.org/drawingml/2006/main" rot="0">
+            <a:off x="2028825" y="5257800"/>
             <a:ext cx="1809750" cy="9525"/>
           </a:xfrm>
           <a:prstGeom xmlns:a="http://schemas.openxmlformats.org/drawingml/2006/main" prst="line">
@@ -3422,19 +3647,19 @@
           <p:cNvPr id="44" name="matrix-detail-caption-2">
             <a:extLst xmlns:a="http://schemas.openxmlformats.org/drawingml/2006/main">
               <a:ext uri="{FF2B5EF4-FFF2-40B4-BE49-F238E27FC236}">
-                <a16:creationId xmlns:a16="http://schemas.microsoft.com/office/drawing/2014/main" id="{A7B413FA-5948-427C-889E-26DC1A770C20}"/>
-              </a:ext>
-            </a:extLst>
-          </p:cNvPr>
-          <p:cNvSpPr>
-            <a:spLocks xmlns:a="http://schemas.openxmlformats.org/drawingml/2006/main" noGrp="1"/>
-          </p:cNvSpPr>
-          <p:nvPr/>
-        </p:nvSpPr>
-        <p:spPr>
-          <a:xfrm xmlns:a="http://schemas.openxmlformats.org/drawingml/2006/main" rot="0">
-            <a:off x="2028825" y="5245303"/>
-            <a:ext cx="1809750" cy="142875"/>
+                <a16:creationId xmlns:a16="http://schemas.microsoft.com/office/drawing/2014/main" id="{CAA8CC76-DD32-4677-BD6A-A71642034027}"/>
+              </a:ext>
+            </a:extLst>
+          </p:cNvPr>
+          <p:cNvSpPr>
+            <a:spLocks xmlns:a="http://schemas.openxmlformats.org/drawingml/2006/main" noGrp="1"/>
+          </p:cNvSpPr>
+          <p:nvPr/>
+        </p:nvSpPr>
+        <p:spPr>
+          <a:xfrm xmlns:a="http://schemas.openxmlformats.org/drawingml/2006/main" rot="0">
+            <a:off x="2028825" y="5324475"/>
+            <a:ext cx="1809750" cy="190500"/>
           </a:xfrm>
           <a:prstGeom xmlns:a="http://schemas.openxmlformats.org/drawingml/2006/main" prst="rect">
             <a:avLst/>
@@ -3446,7 +3671,7 @@
           </a:ln>
         </p:spPr>
         <p:txBody>
-          <a:bodyPr xmlns:a="http://schemas.openxmlformats.org/drawingml/2006/main" lIns="0" tIns="0" rIns="0" bIns="0" anchor="ctr">
+          <a:bodyPr xmlns:a="http://schemas.openxmlformats.org/drawingml/2006/main" wrap="none" lIns="0" tIns="0" rIns="0" bIns="0" anchor="ctr">
             <a:noAutofit/>
           </a:bodyPr>
           <a:lstStyle xmlns:a="http://schemas.openxmlformats.org/drawingml/2006/main"/>
@@ -3456,7 +3681,7 @@
                 <a:spcPct val="100000"/>
               </a:lnSpc>
               <a:buNone/>
-              <a:defRPr sz="1125" b="1" i="0">
+              <a:defRPr sz="1500" b="1" i="0">
                 <a:solidFill>
                   <a:srgbClr val="4E6278"/>
                 </a:solidFill>
@@ -3466,7 +3691,7 @@
               </a:defRPr>
             </a:pPr>
             <a:r>
-              <a:rPr sz="1125" b="1" i="0">
+              <a:rPr sz="1500" b="1" i="0">
                 <a:solidFill>
                   <a:srgbClr val="4E6278"/>
                 </a:solidFill>
@@ -3484,19 +3709,19 @@
           <p:cNvPr id="45" name="matrix-detail-metric-label-2-0">
             <a:extLst xmlns:a="http://schemas.openxmlformats.org/drawingml/2006/main">
               <a:ext uri="{FF2B5EF4-FFF2-40B4-BE49-F238E27FC236}">
-                <a16:creationId xmlns:a16="http://schemas.microsoft.com/office/drawing/2014/main" id="{719B6592-E9D8-4196-B2C0-A639D47F245F}"/>
-              </a:ext>
-            </a:extLst>
-          </p:cNvPr>
-          <p:cNvSpPr>
-            <a:spLocks xmlns:a="http://schemas.openxmlformats.org/drawingml/2006/main" noGrp="1"/>
-          </p:cNvSpPr>
-          <p:nvPr/>
-        </p:nvSpPr>
-        <p:spPr>
-          <a:xfrm xmlns:a="http://schemas.openxmlformats.org/drawingml/2006/main" rot="0">
-            <a:off x="2028825" y="5454853"/>
-            <a:ext cx="847725" cy="154781"/>
+                <a16:creationId xmlns:a16="http://schemas.microsoft.com/office/drawing/2014/main" id="{0E7DE704-7EBE-49A3-ADDA-477A7BB5458B}"/>
+              </a:ext>
+            </a:extLst>
+          </p:cNvPr>
+          <p:cNvSpPr>
+            <a:spLocks xmlns:a="http://schemas.openxmlformats.org/drawingml/2006/main" noGrp="1"/>
+          </p:cNvSpPr>
+          <p:nvPr/>
+        </p:nvSpPr>
+        <p:spPr>
+          <a:xfrm xmlns:a="http://schemas.openxmlformats.org/drawingml/2006/main" rot="0">
+            <a:off x="2028825" y="5562600"/>
+            <a:ext cx="866775" cy="238125"/>
           </a:xfrm>
           <a:prstGeom xmlns:a="http://schemas.openxmlformats.org/drawingml/2006/main" prst="rect">
             <a:avLst/>
@@ -3508,7 +3733,7 @@
           </a:ln>
         </p:spPr>
         <p:txBody>
-          <a:bodyPr xmlns:a="http://schemas.openxmlformats.org/drawingml/2006/main" lIns="0" tIns="0" rIns="0" bIns="0" anchor="ctr">
+          <a:bodyPr xmlns:a="http://schemas.openxmlformats.org/drawingml/2006/main" wrap="none" lIns="0" tIns="0" rIns="0" bIns="0" anchor="ctr">
             <a:noAutofit/>
           </a:bodyPr>
           <a:lstStyle xmlns:a="http://schemas.openxmlformats.org/drawingml/2006/main"/>
@@ -3518,7 +3743,7 @@
                 <a:spcPct val="125000"/>
               </a:lnSpc>
               <a:buNone/>
-              <a:defRPr sz="975" b="0" i="0">
+              <a:defRPr sz="1500" b="0" i="0">
                 <a:solidFill>
                   <a:srgbClr val="586B80"/>
                 </a:solidFill>
@@ -3528,7 +3753,7 @@
               </a:defRPr>
             </a:pPr>
             <a:r>
-              <a:rPr sz="975" b="0" i="0">
+              <a:rPr sz="1500" b="0" i="0">
                 <a:solidFill>
                   <a:srgbClr val="586B80"/>
                 </a:solidFill>
@@ -3546,19 +3771,19 @@
           <p:cNvPr id="46" name="matrix-detail-metric-value-2-0">
             <a:extLst xmlns:a="http://schemas.openxmlformats.org/drawingml/2006/main">
               <a:ext uri="{FF2B5EF4-FFF2-40B4-BE49-F238E27FC236}">
-                <a16:creationId xmlns:a16="http://schemas.microsoft.com/office/drawing/2014/main" id="{C3BDA873-C682-4AAE-AE30-697C05ABDD7D}"/>
-              </a:ext>
-            </a:extLst>
-          </p:cNvPr>
-          <p:cNvSpPr>
-            <a:spLocks xmlns:a="http://schemas.openxmlformats.org/drawingml/2006/main" noGrp="1"/>
-          </p:cNvSpPr>
-          <p:nvPr/>
-        </p:nvSpPr>
-        <p:spPr>
-          <a:xfrm xmlns:a="http://schemas.openxmlformats.org/drawingml/2006/main" rot="0">
-            <a:off x="2028825" y="5638209"/>
-            <a:ext cx="847725" cy="280397"/>
+                <a16:creationId xmlns:a16="http://schemas.microsoft.com/office/drawing/2014/main" id="{928B0925-4DF5-44E2-A496-71D9DDA2611F}"/>
+              </a:ext>
+            </a:extLst>
+          </p:cNvPr>
+          <p:cNvSpPr>
+            <a:spLocks xmlns:a="http://schemas.openxmlformats.org/drawingml/2006/main" noGrp="1"/>
+          </p:cNvSpPr>
+          <p:nvPr/>
+        </p:nvSpPr>
+        <p:spPr>
+          <a:xfrm xmlns:a="http://schemas.openxmlformats.org/drawingml/2006/main" rot="0">
+            <a:off x="2028825" y="5819775"/>
+            <a:ext cx="866775" cy="265357"/>
           </a:xfrm>
           <a:prstGeom xmlns:a="http://schemas.openxmlformats.org/drawingml/2006/main" prst="rect">
             <a:avLst/>
@@ -3570,17 +3795,17 @@
           </a:ln>
         </p:spPr>
         <p:txBody>
-          <a:bodyPr xmlns:a="http://schemas.openxmlformats.org/drawingml/2006/main" lIns="0" tIns="0" rIns="0" bIns="0" anchor="ctr">
+          <a:bodyPr xmlns:a="http://schemas.openxmlformats.org/drawingml/2006/main" wrap="none" lIns="0" tIns="0" rIns="0" bIns="0" anchor="ctr">
             <a:noAutofit/>
           </a:bodyPr>
           <a:lstStyle xmlns:a="http://schemas.openxmlformats.org/drawingml/2006/main"/>
           <a:p xmlns:a="http://schemas.openxmlformats.org/drawingml/2006/main">
             <a:pPr algn="l">
               <a:lnSpc>
-                <a:spcPct val="128000"/>
+                <a:spcPct val="110000"/>
               </a:lnSpc>
               <a:buNone/>
-              <a:defRPr sz="1725" b="0" i="0">
+              <a:defRPr sz="1900" b="1" i="0">
                 <a:solidFill>
                   <a:srgbClr val="3B68AB"/>
                 </a:solidFill>
@@ -3590,7 +3815,7 @@
               </a:defRPr>
             </a:pPr>
             <a:r>
-              <a:rPr sz="1725" b="0" i="0">
+              <a:rPr sz="1900" b="1" i="0">
                 <a:solidFill>
                   <a:srgbClr val="3B68AB"/>
                 </a:solidFill>
@@ -3608,19 +3833,19 @@
           <p:cNvPr id="47" name="matrix-detail-metric-label-2-1">
             <a:extLst xmlns:a="http://schemas.openxmlformats.org/drawingml/2006/main">
               <a:ext uri="{FF2B5EF4-FFF2-40B4-BE49-F238E27FC236}">
-                <a16:creationId xmlns:a16="http://schemas.microsoft.com/office/drawing/2014/main" id="{292E4495-C159-4840-9C65-43F803FACCF6}"/>
-              </a:ext>
-            </a:extLst>
-          </p:cNvPr>
-          <p:cNvSpPr>
-            <a:spLocks xmlns:a="http://schemas.openxmlformats.org/drawingml/2006/main" noGrp="1"/>
-          </p:cNvSpPr>
-          <p:nvPr/>
-        </p:nvSpPr>
-        <p:spPr>
-          <a:xfrm xmlns:a="http://schemas.openxmlformats.org/drawingml/2006/main" rot="0">
-            <a:off x="2990850" y="5454853"/>
-            <a:ext cx="847725" cy="154781"/>
+                <a16:creationId xmlns:a16="http://schemas.microsoft.com/office/drawing/2014/main" id="{7BF512CE-E7C2-4A5B-A9B6-828DB9D56277}"/>
+              </a:ext>
+            </a:extLst>
+          </p:cNvPr>
+          <p:cNvSpPr>
+            <a:spLocks xmlns:a="http://schemas.openxmlformats.org/drawingml/2006/main" noGrp="1"/>
+          </p:cNvSpPr>
+          <p:nvPr/>
+        </p:nvSpPr>
+        <p:spPr>
+          <a:xfrm xmlns:a="http://schemas.openxmlformats.org/drawingml/2006/main" rot="0">
+            <a:off x="2971800" y="5562600"/>
+            <a:ext cx="866775" cy="238125"/>
           </a:xfrm>
           <a:prstGeom xmlns:a="http://schemas.openxmlformats.org/drawingml/2006/main" prst="rect">
             <a:avLst/>
@@ -3632,7 +3857,7 @@
           </a:ln>
         </p:spPr>
         <p:txBody>
-          <a:bodyPr xmlns:a="http://schemas.openxmlformats.org/drawingml/2006/main" lIns="0" tIns="0" rIns="0" bIns="0" anchor="ctr">
+          <a:bodyPr xmlns:a="http://schemas.openxmlformats.org/drawingml/2006/main" wrap="none" lIns="0" tIns="0" rIns="0" bIns="0" anchor="ctr">
             <a:noAutofit/>
           </a:bodyPr>
           <a:lstStyle xmlns:a="http://schemas.openxmlformats.org/drawingml/2006/main"/>
@@ -3642,7 +3867,7 @@
                 <a:spcPct val="125000"/>
               </a:lnSpc>
               <a:buNone/>
-              <a:defRPr sz="975" b="0" i="0">
+              <a:defRPr sz="1500" b="0" i="0">
                 <a:solidFill>
                   <a:srgbClr val="586B80"/>
                 </a:solidFill>
@@ -3652,7 +3877,7 @@
               </a:defRPr>
             </a:pPr>
             <a:r>
-              <a:rPr sz="975" b="0" i="0">
+              <a:rPr sz="1500" b="0" i="0">
                 <a:solidFill>
                   <a:srgbClr val="586B80"/>
                 </a:solidFill>
@@ -3670,19 +3895,19 @@
           <p:cNvPr id="48" name="matrix-detail-metric-value-2-1">
             <a:extLst xmlns:a="http://schemas.openxmlformats.org/drawingml/2006/main">
               <a:ext uri="{FF2B5EF4-FFF2-40B4-BE49-F238E27FC236}">
-                <a16:creationId xmlns:a16="http://schemas.microsoft.com/office/drawing/2014/main" id="{7050D764-0BD5-4972-9285-7C3528123A16}"/>
-              </a:ext>
-            </a:extLst>
-          </p:cNvPr>
-          <p:cNvSpPr>
-            <a:spLocks xmlns:a="http://schemas.openxmlformats.org/drawingml/2006/main" noGrp="1"/>
-          </p:cNvSpPr>
-          <p:nvPr/>
-        </p:nvSpPr>
-        <p:spPr>
-          <a:xfrm xmlns:a="http://schemas.openxmlformats.org/drawingml/2006/main" rot="0">
-            <a:off x="2990850" y="5638209"/>
-            <a:ext cx="847725" cy="280397"/>
+                <a16:creationId xmlns:a16="http://schemas.microsoft.com/office/drawing/2014/main" id="{84CB6CAA-AFF4-4EF3-9C46-D12C0CF3BFD3}"/>
+              </a:ext>
+            </a:extLst>
+          </p:cNvPr>
+          <p:cNvSpPr>
+            <a:spLocks xmlns:a="http://schemas.openxmlformats.org/drawingml/2006/main" noGrp="1"/>
+          </p:cNvSpPr>
+          <p:nvPr/>
+        </p:nvSpPr>
+        <p:spPr>
+          <a:xfrm xmlns:a="http://schemas.openxmlformats.org/drawingml/2006/main" rot="0">
+            <a:off x="2971800" y="5819775"/>
+            <a:ext cx="866775" cy="265357"/>
           </a:xfrm>
           <a:prstGeom xmlns:a="http://schemas.openxmlformats.org/drawingml/2006/main" prst="rect">
             <a:avLst/>
@@ -3694,69 +3919,7 @@
           </a:ln>
         </p:spPr>
         <p:txBody>
-          <a:bodyPr xmlns:a="http://schemas.openxmlformats.org/drawingml/2006/main" lIns="0" tIns="0" rIns="0" bIns="0" anchor="ctr">
-            <a:noAutofit/>
-          </a:bodyPr>
-          <a:lstStyle xmlns:a="http://schemas.openxmlformats.org/drawingml/2006/main"/>
-          <a:p xmlns:a="http://schemas.openxmlformats.org/drawingml/2006/main">
-            <a:pPr algn="l">
-              <a:lnSpc>
-                <a:spcPct val="128000"/>
-              </a:lnSpc>
-              <a:buNone/>
-              <a:defRPr sz="1725" b="0" i="0">
-                <a:solidFill>
-                  <a:srgbClr val="3B68AB"/>
-                </a:solidFill>
-                <a:latin typeface="Microsoft YaHei"/>
-                <a:ea typeface="Microsoft YaHei"/>
-                <a:cs typeface="Microsoft YaHei"/>
-              </a:defRPr>
-            </a:pPr>
-            <a:r>
-              <a:rPr sz="1725" b="0" i="0">
-                <a:solidFill>
-                  <a:srgbClr val="3B68AB"/>
-                </a:solidFill>
-                <a:latin typeface="Microsoft YaHei"/>
-                <a:ea typeface="Microsoft YaHei"/>
-                <a:cs typeface="Microsoft YaHei"/>
-              </a:rPr>
-              <a:t>常规</a:t>
-            </a:r>
-          </a:p>
-        </p:txBody>
-      </p:sp>
-      <p:sp>
-        <p:nvSpPr>
-          <p:cNvPr id="49" name="matrix-detail-title-3">
-            <a:extLst xmlns:a="http://schemas.openxmlformats.org/drawingml/2006/main">
-              <a:ext uri="{FF2B5EF4-FFF2-40B4-BE49-F238E27FC236}">
-                <a16:creationId xmlns:a16="http://schemas.microsoft.com/office/drawing/2014/main" id="{487D1A0E-C210-461D-A97C-4E764922B77D}"/>
-              </a:ext>
-            </a:extLst>
-          </p:cNvPr>
-          <p:cNvSpPr>
-            <a:spLocks xmlns:a="http://schemas.openxmlformats.org/drawingml/2006/main" noGrp="1"/>
-          </p:cNvSpPr>
-          <p:nvPr/>
-        </p:nvSpPr>
-        <p:spPr>
-          <a:xfrm xmlns:a="http://schemas.openxmlformats.org/drawingml/2006/main" rot="0">
-            <a:off x="8924925" y="4381500"/>
-            <a:ext cx="2571750" cy="178003"/>
-          </a:xfrm>
-          <a:prstGeom xmlns:a="http://schemas.openxmlformats.org/drawingml/2006/main" prst="rect">
-            <a:avLst/>
-          </a:prstGeom>
-          <a:noFill xmlns:a="http://schemas.openxmlformats.org/drawingml/2006/main"/>
-          <a:ln xmlns:a="http://schemas.openxmlformats.org/drawingml/2006/main" w="0">
-            <a:noFill/>
-            <a:prstDash val="solid"/>
-          </a:ln>
-        </p:spPr>
-        <p:txBody>
-          <a:bodyPr xmlns:a="http://schemas.openxmlformats.org/drawingml/2006/main" lIns="0" tIns="0" rIns="0" bIns="0" anchor="ctr">
+          <a:bodyPr xmlns:a="http://schemas.openxmlformats.org/drawingml/2006/main" wrap="none" lIns="0" tIns="0" rIns="0" bIns="0" anchor="ctr">
             <a:noAutofit/>
           </a:bodyPr>
           <a:lstStyle xmlns:a="http://schemas.openxmlformats.org/drawingml/2006/main"/>
@@ -3766,9 +3929,9 @@
                 <a:spcPct val="110000"/>
               </a:lnSpc>
               <a:buNone/>
-              <a:defRPr sz="1275" b="1" i="0">
-                <a:solidFill>
-                  <a:srgbClr val="3E71B5"/>
+              <a:defRPr sz="1900" b="1" i="0">
+                <a:solidFill>
+                  <a:srgbClr val="3B68AB"/>
                 </a:solidFill>
                 <a:latin typeface="Microsoft YaHei"/>
                 <a:ea typeface="Microsoft YaHei"/>
@@ -3776,37 +3939,37 @@
               </a:defRPr>
             </a:pPr>
             <a:r>
-              <a:rPr sz="1275" b="1" i="0">
-                <a:solidFill>
-                  <a:srgbClr val="3E71B5"/>
+              <a:rPr sz="1900" b="1" i="0">
+                <a:solidFill>
+                  <a:srgbClr val="3B68AB"/>
                 </a:solidFill>
                 <a:latin typeface="Microsoft YaHei"/>
                 <a:ea typeface="Microsoft YaHei"/>
                 <a:cs typeface="Microsoft YaHei"/>
               </a:rPr>
-              <a:t>审慎评估方案</a:t>
+              <a:t>常规</a:t>
             </a:r>
           </a:p>
         </p:txBody>
       </p:sp>
       <p:sp>
         <p:nvSpPr>
-          <p:cNvPr id="50" name="matrix-detail-body-3">
-            <a:extLst xmlns:a="http://schemas.openxmlformats.org/drawingml/2006/main">
-              <a:ext uri="{FF2B5EF4-FFF2-40B4-BE49-F238E27FC236}">
-                <a16:creationId xmlns:a16="http://schemas.microsoft.com/office/drawing/2014/main" id="{B6202BD3-DE40-4F77-9C8F-AE2DAEDFC6A9}"/>
-              </a:ext>
-            </a:extLst>
-          </p:cNvPr>
-          <p:cNvSpPr>
-            <a:spLocks xmlns:a="http://schemas.openxmlformats.org/drawingml/2006/main" noGrp="1"/>
-          </p:cNvSpPr>
-          <p:nvPr/>
-        </p:nvSpPr>
-        <p:spPr>
-          <a:xfrm xmlns:a="http://schemas.openxmlformats.org/drawingml/2006/main" rot="0">
-            <a:off x="8924925" y="4654753"/>
-            <a:ext cx="2571750" cy="400050"/>
+          <p:cNvPr id="49" name="matrix-detail-title-3">
+            <a:extLst xmlns:a="http://schemas.openxmlformats.org/drawingml/2006/main">
+              <a:ext uri="{FF2B5EF4-FFF2-40B4-BE49-F238E27FC236}">
+                <a16:creationId xmlns:a16="http://schemas.microsoft.com/office/drawing/2014/main" id="{F100EF23-F6B7-41ED-A237-AA5AF7EDE1A8}"/>
+              </a:ext>
+            </a:extLst>
+          </p:cNvPr>
+          <p:cNvSpPr>
+            <a:spLocks xmlns:a="http://schemas.openxmlformats.org/drawingml/2006/main" noGrp="1"/>
+          </p:cNvSpPr>
+          <p:nvPr/>
+        </p:nvSpPr>
+        <p:spPr>
+          <a:xfrm xmlns:a="http://schemas.openxmlformats.org/drawingml/2006/main" rot="0">
+            <a:off x="8924925" y="4286250"/>
+            <a:ext cx="2571750" cy="293341"/>
           </a:xfrm>
           <a:prstGeom xmlns:a="http://schemas.openxmlformats.org/drawingml/2006/main" prst="rect">
             <a:avLst/>
@@ -3818,19 +3981,19 @@
           </a:ln>
         </p:spPr>
         <p:txBody>
-          <a:bodyPr xmlns:a="http://schemas.openxmlformats.org/drawingml/2006/main" lIns="0" tIns="0" rIns="0" bIns="0" anchor="ctr">
+          <a:bodyPr xmlns:a="http://schemas.openxmlformats.org/drawingml/2006/main" wrap="square" lIns="0" tIns="0" rIns="0" bIns="0" anchor="ctr">
             <a:noAutofit/>
           </a:bodyPr>
           <a:lstStyle xmlns:a="http://schemas.openxmlformats.org/drawingml/2006/main"/>
           <a:p xmlns:a="http://schemas.openxmlformats.org/drawingml/2006/main">
             <a:pPr algn="l">
               <a:lnSpc>
-                <a:spcPct val="140000"/>
+                <a:spcPct val="110000"/>
               </a:lnSpc>
               <a:buNone/>
-              <a:defRPr sz="1125" b="0" i="0">
-                <a:solidFill>
-                  <a:srgbClr val="748495"/>
+              <a:defRPr sz="2100" b="1" i="0">
+                <a:solidFill>
+                  <a:srgbClr val="3E71B5"/>
                 </a:solidFill>
                 <a:latin typeface="Microsoft YaHei"/>
                 <a:ea typeface="Microsoft YaHei"/>
@@ -3838,36 +4001,125 @@
               </a:defRPr>
             </a:pPr>
             <a:r>
-              <a:rPr sz="1125" b="0" i="0">
-                <a:solidFill>
-                  <a:srgbClr val="748495"/>
+              <a:rPr sz="2100" b="1" i="0">
+                <a:solidFill>
+                  <a:srgbClr val="3E71B5"/>
                 </a:solidFill>
                 <a:latin typeface="Microsoft YaHei"/>
                 <a:ea typeface="Microsoft YaHei"/>
                 <a:cs typeface="Microsoft YaHei"/>
               </a:rPr>
-              <a:t>投入前验证收益与复用边界</a:t>
+              <a:t>审慎评估方案</a:t>
             </a:r>
           </a:p>
         </p:txBody>
       </p:sp>
       <p:sp>
         <p:nvSpPr>
+          <p:cNvPr id="50" name="matrix-detail-body-3">
+            <a:extLst xmlns:a="http://schemas.openxmlformats.org/drawingml/2006/main">
+              <a:ext uri="{FF2B5EF4-FFF2-40B4-BE49-F238E27FC236}">
+                <a16:creationId xmlns:a16="http://schemas.microsoft.com/office/drawing/2014/main" id="{F4034539-00A3-4A69-9B56-CB079E6DA947}"/>
+              </a:ext>
+            </a:extLst>
+          </p:cNvPr>
+          <p:cNvSpPr>
+            <a:spLocks xmlns:a="http://schemas.openxmlformats.org/drawingml/2006/main" noGrp="1"/>
+          </p:cNvSpPr>
+          <p:nvPr/>
+        </p:nvSpPr>
+        <p:spPr>
+          <a:xfrm xmlns:a="http://schemas.openxmlformats.org/drawingml/2006/main" rot="0">
+            <a:off x="8924925" y="4627216"/>
+            <a:ext cx="2571750" cy="570014"/>
+          </a:xfrm>
+          <a:prstGeom xmlns:a="http://schemas.openxmlformats.org/drawingml/2006/main" prst="rect">
+            <a:avLst/>
+          </a:prstGeom>
+          <a:noFill xmlns:a="http://schemas.openxmlformats.org/drawingml/2006/main"/>
+          <a:ln xmlns:a="http://schemas.openxmlformats.org/drawingml/2006/main" w="0">
+            <a:noFill/>
+            <a:prstDash val="solid"/>
+          </a:ln>
+        </p:spPr>
+        <p:txBody>
+          <a:bodyPr xmlns:a="http://schemas.openxmlformats.org/drawingml/2006/main" wrap="square" lIns="0" tIns="0" rIns="0" bIns="0" anchor="ctr">
+            <a:noAutofit/>
+          </a:bodyPr>
+          <a:lstStyle xmlns:a="http://schemas.openxmlformats.org/drawingml/2006/main"/>
+          <a:p xmlns:a="http://schemas.openxmlformats.org/drawingml/2006/main">
+            <a:pPr algn="l">
+              <a:lnSpc>
+                <a:spcPct val="132000"/>
+              </a:lnSpc>
+              <a:buNone/>
+              <a:defRPr sz="1700" b="0" i="0">
+                <a:solidFill>
+                  <a:srgbClr val="748495"/>
+                </a:solidFill>
+                <a:latin typeface="Microsoft YaHei"/>
+                <a:ea typeface="Microsoft YaHei"/>
+                <a:cs typeface="Microsoft YaHei"/>
+              </a:defRPr>
+            </a:pPr>
+            <a:r>
+              <a:rPr sz="1700" b="0" i="0">
+                <a:solidFill>
+                  <a:srgbClr val="748495"/>
+                </a:solidFill>
+                <a:latin typeface="Microsoft YaHei"/>
+                <a:ea typeface="Microsoft YaHei"/>
+                <a:cs typeface="Microsoft YaHei"/>
+              </a:rPr>
+              <a:t>投入前验证收益与复用边</a:t>
+            </a:r>
+          </a:p>
+          <a:p xmlns:a="http://schemas.openxmlformats.org/drawingml/2006/main">
+            <a:pPr algn="l">
+              <a:lnSpc>
+                <a:spcPct val="132000"/>
+              </a:lnSpc>
+              <a:buNone/>
+              <a:defRPr sz="1700" b="0" i="0">
+                <a:solidFill>
+                  <a:srgbClr val="748495"/>
+                </a:solidFill>
+                <a:latin typeface="Microsoft YaHei"/>
+                <a:ea typeface="Microsoft YaHei"/>
+                <a:cs typeface="Microsoft YaHei"/>
+              </a:defRPr>
+            </a:pPr>
+            <a:r>
+              <a:rPr sz="1700" b="0" i="0">
+                <a:solidFill>
+                  <a:srgbClr val="748495"/>
+                </a:solidFill>
+                <a:latin typeface="Microsoft YaHei"/>
+                <a:ea typeface="Microsoft YaHei"/>
+                <a:cs typeface="Microsoft YaHei"/>
+              </a:rPr>
+              <a:t>界</a:t>
+            </a:r>
+          </a:p>
+        </p:txBody>
+      </p:sp>
+      <p:sp>
+        <p:nvSpPr>
           <p:cNvPr id="51" name="matrix-detail-divider-3">
             <a:extLst xmlns:a="http://schemas.openxmlformats.org/drawingml/2006/main">
               <a:ext uri="{FF2B5EF4-FFF2-40B4-BE49-F238E27FC236}">
-                <a16:creationId xmlns:a16="http://schemas.microsoft.com/office/drawing/2014/main" id="{9C9F1312-F727-454C-9918-9A83947D4B1F}"/>
-              </a:ext>
-            </a:extLst>
-          </p:cNvPr>
-          <p:cNvSpPr>
-            <a:spLocks xmlns:a="http://schemas.openxmlformats.org/drawingml/2006/main" noGrp="1"/>
-          </p:cNvSpPr>
-          <p:nvPr/>
-        </p:nvSpPr>
-        <p:spPr>
-          <a:xfrm xmlns:a="http://schemas.openxmlformats.org/drawingml/2006/main" rot="0">
-            <a:off x="8924925" y="5150053"/>
+                <a16:creationId xmlns:a16="http://schemas.microsoft.com/office/drawing/2014/main" id="{BC7AC5E3-9071-4E26-90B3-8FC320AA990C}"/>
+              </a:ext>
+            </a:extLst>
+          </p:cNvPr>
+          <p:cNvSpPr>
+            <a:spLocks xmlns:a="http://schemas.openxmlformats.org/drawingml/2006/main" noGrp="1"/>
+          </p:cNvSpPr>
+          <p:nvPr/>
+        </p:nvSpPr>
+        <p:spPr>
+          <a:xfrm xmlns:a="http://schemas.openxmlformats.org/drawingml/2006/main" rot="0">
+            <a:off x="8924925" y="5257800"/>
             <a:ext cx="2571750" cy="9525"/>
           </a:xfrm>
           <a:prstGeom xmlns:a="http://schemas.openxmlformats.org/drawingml/2006/main" prst="line">
@@ -3889,19 +4141,19 @@
           <p:cNvPr id="52" name="matrix-detail-caption-3">
             <a:extLst xmlns:a="http://schemas.openxmlformats.org/drawingml/2006/main">
               <a:ext uri="{FF2B5EF4-FFF2-40B4-BE49-F238E27FC236}">
-                <a16:creationId xmlns:a16="http://schemas.microsoft.com/office/drawing/2014/main" id="{52A76C21-6DBE-4A94-98F4-D5768F30CA06}"/>
-              </a:ext>
-            </a:extLst>
-          </p:cNvPr>
-          <p:cNvSpPr>
-            <a:spLocks xmlns:a="http://schemas.openxmlformats.org/drawingml/2006/main" noGrp="1"/>
-          </p:cNvSpPr>
-          <p:nvPr/>
-        </p:nvSpPr>
-        <p:spPr>
-          <a:xfrm xmlns:a="http://schemas.openxmlformats.org/drawingml/2006/main" rot="0">
-            <a:off x="8924925" y="5245303"/>
-            <a:ext cx="2571750" cy="142875"/>
+                <a16:creationId xmlns:a16="http://schemas.microsoft.com/office/drawing/2014/main" id="{A19E0247-D51C-41E8-92BC-1DE88CC311B0}"/>
+              </a:ext>
+            </a:extLst>
+          </p:cNvPr>
+          <p:cNvSpPr>
+            <a:spLocks xmlns:a="http://schemas.openxmlformats.org/drawingml/2006/main" noGrp="1"/>
+          </p:cNvSpPr>
+          <p:nvPr/>
+        </p:nvSpPr>
+        <p:spPr>
+          <a:xfrm xmlns:a="http://schemas.openxmlformats.org/drawingml/2006/main" rot="0">
+            <a:off x="8924925" y="5324475"/>
+            <a:ext cx="2571750" cy="190500"/>
           </a:xfrm>
           <a:prstGeom xmlns:a="http://schemas.openxmlformats.org/drawingml/2006/main" prst="rect">
             <a:avLst/>
@@ -3913,7 +4165,7 @@
           </a:ln>
         </p:spPr>
         <p:txBody>
-          <a:bodyPr xmlns:a="http://schemas.openxmlformats.org/drawingml/2006/main" lIns="0" tIns="0" rIns="0" bIns="0" anchor="ctr">
+          <a:bodyPr xmlns:a="http://schemas.openxmlformats.org/drawingml/2006/main" wrap="none" lIns="0" tIns="0" rIns="0" bIns="0" anchor="ctr">
             <a:noAutofit/>
           </a:bodyPr>
           <a:lstStyle xmlns:a="http://schemas.openxmlformats.org/drawingml/2006/main"/>
@@ -3923,7 +4175,7 @@
                 <a:spcPct val="100000"/>
               </a:lnSpc>
               <a:buNone/>
-              <a:defRPr sz="1125" b="1" i="0">
+              <a:defRPr sz="1500" b="1" i="0">
                 <a:solidFill>
                   <a:srgbClr val="4E6278"/>
                 </a:solidFill>
@@ -3933,7 +4185,7 @@
               </a:defRPr>
             </a:pPr>
             <a:r>
-              <a:rPr sz="1125" b="1" i="0">
+              <a:rPr sz="1500" b="1" i="0">
                 <a:solidFill>
                   <a:srgbClr val="4E6278"/>
                 </a:solidFill>
@@ -3951,19 +4203,19 @@
           <p:cNvPr id="53" name="matrix-detail-metric-label-3-0">
             <a:extLst xmlns:a="http://schemas.openxmlformats.org/drawingml/2006/main">
               <a:ext uri="{FF2B5EF4-FFF2-40B4-BE49-F238E27FC236}">
-                <a16:creationId xmlns:a16="http://schemas.microsoft.com/office/drawing/2014/main" id="{623CB64D-6975-4B2F-8CE0-7869CD507733}"/>
-              </a:ext>
-            </a:extLst>
-          </p:cNvPr>
-          <p:cNvSpPr>
-            <a:spLocks xmlns:a="http://schemas.openxmlformats.org/drawingml/2006/main" noGrp="1"/>
-          </p:cNvSpPr>
-          <p:nvPr/>
-        </p:nvSpPr>
-        <p:spPr>
-          <a:xfrm xmlns:a="http://schemas.openxmlformats.org/drawingml/2006/main" rot="0">
-            <a:off x="8924925" y="5454853"/>
-            <a:ext cx="1228725" cy="154781"/>
+                <a16:creationId xmlns:a16="http://schemas.microsoft.com/office/drawing/2014/main" id="{4C92071E-AC72-454B-9004-1C57ABF275A1}"/>
+              </a:ext>
+            </a:extLst>
+          </p:cNvPr>
+          <p:cNvSpPr>
+            <a:spLocks xmlns:a="http://schemas.openxmlformats.org/drawingml/2006/main" noGrp="1"/>
+          </p:cNvSpPr>
+          <p:nvPr/>
+        </p:nvSpPr>
+        <p:spPr>
+          <a:xfrm xmlns:a="http://schemas.openxmlformats.org/drawingml/2006/main" rot="0">
+            <a:off x="8924925" y="5562600"/>
+            <a:ext cx="1247775" cy="238125"/>
           </a:xfrm>
           <a:prstGeom xmlns:a="http://schemas.openxmlformats.org/drawingml/2006/main" prst="rect">
             <a:avLst/>
@@ -3975,7 +4227,7 @@
           </a:ln>
         </p:spPr>
         <p:txBody>
-          <a:bodyPr xmlns:a="http://schemas.openxmlformats.org/drawingml/2006/main" lIns="0" tIns="0" rIns="0" bIns="0" anchor="ctr">
+          <a:bodyPr xmlns:a="http://schemas.openxmlformats.org/drawingml/2006/main" wrap="none" lIns="0" tIns="0" rIns="0" bIns="0" anchor="ctr">
             <a:noAutofit/>
           </a:bodyPr>
           <a:lstStyle xmlns:a="http://schemas.openxmlformats.org/drawingml/2006/main"/>
@@ -3985,7 +4237,7 @@
                 <a:spcPct val="125000"/>
               </a:lnSpc>
               <a:buNone/>
-              <a:defRPr sz="975" b="0" i="0">
+              <a:defRPr sz="1500" b="0" i="0">
                 <a:solidFill>
                   <a:srgbClr val="586B80"/>
                 </a:solidFill>
@@ -3995,7 +4247,7 @@
               </a:defRPr>
             </a:pPr>
             <a:r>
-              <a:rPr sz="975" b="0" i="0">
+              <a:rPr sz="1500" b="0" i="0">
                 <a:solidFill>
                   <a:srgbClr val="586B80"/>
                 </a:solidFill>
@@ -4013,19 +4265,19 @@
           <p:cNvPr id="54" name="matrix-detail-metric-value-3-0">
             <a:extLst xmlns:a="http://schemas.openxmlformats.org/drawingml/2006/main">
               <a:ext uri="{FF2B5EF4-FFF2-40B4-BE49-F238E27FC236}">
-                <a16:creationId xmlns:a16="http://schemas.microsoft.com/office/drawing/2014/main" id="{33656B7E-860C-48B1-B91D-801C41AA0696}"/>
-              </a:ext>
-            </a:extLst>
-          </p:cNvPr>
-          <p:cNvSpPr>
-            <a:spLocks xmlns:a="http://schemas.openxmlformats.org/drawingml/2006/main" noGrp="1"/>
-          </p:cNvSpPr>
-          <p:nvPr/>
-        </p:nvSpPr>
-        <p:spPr>
-          <a:xfrm xmlns:a="http://schemas.openxmlformats.org/drawingml/2006/main" rot="0">
-            <a:off x="8924925" y="5638209"/>
-            <a:ext cx="1228725" cy="280397"/>
+                <a16:creationId xmlns:a16="http://schemas.microsoft.com/office/drawing/2014/main" id="{D48BB27F-DB18-4724-9CF0-194007610764}"/>
+              </a:ext>
+            </a:extLst>
+          </p:cNvPr>
+          <p:cNvSpPr>
+            <a:spLocks xmlns:a="http://schemas.openxmlformats.org/drawingml/2006/main" noGrp="1"/>
+          </p:cNvSpPr>
+          <p:nvPr/>
+        </p:nvSpPr>
+        <p:spPr>
+          <a:xfrm xmlns:a="http://schemas.openxmlformats.org/drawingml/2006/main" rot="0">
+            <a:off x="8924925" y="5819775"/>
+            <a:ext cx="1247775" cy="265357"/>
           </a:xfrm>
           <a:prstGeom xmlns:a="http://schemas.openxmlformats.org/drawingml/2006/main" prst="rect">
             <a:avLst/>
@@ -4037,17 +4289,17 @@
           </a:ln>
         </p:spPr>
         <p:txBody>
-          <a:bodyPr xmlns:a="http://schemas.openxmlformats.org/drawingml/2006/main" lIns="0" tIns="0" rIns="0" bIns="0" anchor="ctr">
+          <a:bodyPr xmlns:a="http://schemas.openxmlformats.org/drawingml/2006/main" wrap="none" lIns="0" tIns="0" rIns="0" bIns="0" anchor="ctr">
             <a:noAutofit/>
           </a:bodyPr>
           <a:lstStyle xmlns:a="http://schemas.openxmlformats.org/drawingml/2006/main"/>
           <a:p xmlns:a="http://schemas.openxmlformats.org/drawingml/2006/main">
             <a:pPr algn="l">
               <a:lnSpc>
-                <a:spcPct val="128000"/>
+                <a:spcPct val="110000"/>
               </a:lnSpc>
               <a:buNone/>
-              <a:defRPr sz="1725" b="0" i="0">
+              <a:defRPr sz="1900" b="1" i="0">
                 <a:solidFill>
                   <a:srgbClr val="3B68AB"/>
                 </a:solidFill>
@@ -4057,7 +4309,7 @@
               </a:defRPr>
             </a:pPr>
             <a:r>
-              <a:rPr sz="1725" b="0" i="0">
+              <a:rPr sz="1900" b="1" i="0">
                 <a:solidFill>
                   <a:srgbClr val="3B68AB"/>
                 </a:solidFill>
@@ -4075,19 +4327,19 @@
           <p:cNvPr id="55" name="matrix-detail-metric-label-3-1">
             <a:extLst xmlns:a="http://schemas.openxmlformats.org/drawingml/2006/main">
               <a:ext uri="{FF2B5EF4-FFF2-40B4-BE49-F238E27FC236}">
-                <a16:creationId xmlns:a16="http://schemas.microsoft.com/office/drawing/2014/main" id="{95E29A04-6EF7-402F-8CD4-41908EE6FC6E}"/>
-              </a:ext>
-            </a:extLst>
-          </p:cNvPr>
-          <p:cNvSpPr>
-            <a:spLocks xmlns:a="http://schemas.openxmlformats.org/drawingml/2006/main" noGrp="1"/>
-          </p:cNvSpPr>
-          <p:nvPr/>
-        </p:nvSpPr>
-        <p:spPr>
-          <a:xfrm xmlns:a="http://schemas.openxmlformats.org/drawingml/2006/main" rot="0">
-            <a:off x="10267950" y="5454853"/>
-            <a:ext cx="1228725" cy="154781"/>
+                <a16:creationId xmlns:a16="http://schemas.microsoft.com/office/drawing/2014/main" id="{564F029C-9D04-492B-9417-F0AE02EA1F3D}"/>
+              </a:ext>
+            </a:extLst>
+          </p:cNvPr>
+          <p:cNvSpPr>
+            <a:spLocks xmlns:a="http://schemas.openxmlformats.org/drawingml/2006/main" noGrp="1"/>
+          </p:cNvSpPr>
+          <p:nvPr/>
+        </p:nvSpPr>
+        <p:spPr>
+          <a:xfrm xmlns:a="http://schemas.openxmlformats.org/drawingml/2006/main" rot="0">
+            <a:off x="10248900" y="5562600"/>
+            <a:ext cx="1247775" cy="238125"/>
           </a:xfrm>
           <a:prstGeom xmlns:a="http://schemas.openxmlformats.org/drawingml/2006/main" prst="rect">
             <a:avLst/>
@@ -4099,7 +4351,7 @@
           </a:ln>
         </p:spPr>
         <p:txBody>
-          <a:bodyPr xmlns:a="http://schemas.openxmlformats.org/drawingml/2006/main" lIns="0" tIns="0" rIns="0" bIns="0" anchor="ctr">
+          <a:bodyPr xmlns:a="http://schemas.openxmlformats.org/drawingml/2006/main" wrap="none" lIns="0" tIns="0" rIns="0" bIns="0" anchor="ctr">
             <a:noAutofit/>
           </a:bodyPr>
           <a:lstStyle xmlns:a="http://schemas.openxmlformats.org/drawingml/2006/main"/>
@@ -4109,7 +4361,7 @@
                 <a:spcPct val="125000"/>
               </a:lnSpc>
               <a:buNone/>
-              <a:defRPr sz="975" b="0" i="0">
+              <a:defRPr sz="1500" b="0" i="0">
                 <a:solidFill>
                   <a:srgbClr val="586B80"/>
                 </a:solidFill>
@@ -4119,7 +4371,7 @@
               </a:defRPr>
             </a:pPr>
             <a:r>
-              <a:rPr sz="975" b="0" i="0">
+              <a:rPr sz="1500" b="0" i="0">
                 <a:solidFill>
                   <a:srgbClr val="586B80"/>
                 </a:solidFill>
@@ -4137,19 +4389,19 @@
           <p:cNvPr id="56" name="matrix-detail-metric-value-3-1">
             <a:extLst xmlns:a="http://schemas.openxmlformats.org/drawingml/2006/main">
               <a:ext uri="{FF2B5EF4-FFF2-40B4-BE49-F238E27FC236}">
-                <a16:creationId xmlns:a16="http://schemas.microsoft.com/office/drawing/2014/main" id="{7A7EDBA3-FA9C-430D-A97A-FA9A29BC69E1}"/>
-              </a:ext>
-            </a:extLst>
-          </p:cNvPr>
-          <p:cNvSpPr>
-            <a:spLocks xmlns:a="http://schemas.openxmlformats.org/drawingml/2006/main" noGrp="1"/>
-          </p:cNvSpPr>
-          <p:nvPr/>
-        </p:nvSpPr>
-        <p:spPr>
-          <a:xfrm xmlns:a="http://schemas.openxmlformats.org/drawingml/2006/main" rot="0">
-            <a:off x="10267950" y="5638209"/>
-            <a:ext cx="1228725" cy="280397"/>
+                <a16:creationId xmlns:a16="http://schemas.microsoft.com/office/drawing/2014/main" id="{597AF368-CD97-4930-9D9E-40739CF14D21}"/>
+              </a:ext>
+            </a:extLst>
+          </p:cNvPr>
+          <p:cNvSpPr>
+            <a:spLocks xmlns:a="http://schemas.openxmlformats.org/drawingml/2006/main" noGrp="1"/>
+          </p:cNvSpPr>
+          <p:nvPr/>
+        </p:nvSpPr>
+        <p:spPr>
+          <a:xfrm xmlns:a="http://schemas.openxmlformats.org/drawingml/2006/main" rot="0">
+            <a:off x="10248900" y="5819775"/>
+            <a:ext cx="1247775" cy="265357"/>
           </a:xfrm>
           <a:prstGeom xmlns:a="http://schemas.openxmlformats.org/drawingml/2006/main" prst="rect">
             <a:avLst/>
@@ -4161,17 +4413,17 @@
           </a:ln>
         </p:spPr>
         <p:txBody>
-          <a:bodyPr xmlns:a="http://schemas.openxmlformats.org/drawingml/2006/main" lIns="0" tIns="0" rIns="0" bIns="0" anchor="ctr">
+          <a:bodyPr xmlns:a="http://schemas.openxmlformats.org/drawingml/2006/main" wrap="none" lIns="0" tIns="0" rIns="0" bIns="0" anchor="ctr">
             <a:noAutofit/>
           </a:bodyPr>
           <a:lstStyle xmlns:a="http://schemas.openxmlformats.org/drawingml/2006/main"/>
           <a:p xmlns:a="http://schemas.openxmlformats.org/drawingml/2006/main">
             <a:pPr algn="l">
               <a:lnSpc>
-                <a:spcPct val="128000"/>
+                <a:spcPct val="110000"/>
               </a:lnSpc>
               <a:buNone/>
-              <a:defRPr sz="1725" b="0" i="0">
+              <a:defRPr sz="1900" b="1" i="0">
                 <a:solidFill>
                   <a:srgbClr val="3B68AB"/>
                 </a:solidFill>
@@ -4181,7 +4433,7 @@
               </a:defRPr>
             </a:pPr>
             <a:r>
-              <a:rPr sz="1725" b="0" i="0">
+              <a:rPr sz="1900" b="1" i="0">
                 <a:solidFill>
                   <a:srgbClr val="3B68AB"/>
                 </a:solidFill>
@@ -4199,7 +4451,7 @@
           <p:cNvPr id="57" name="matrix-high-band">
             <a:extLst xmlns:a="http://schemas.openxmlformats.org/drawingml/2006/main">
               <a:ext uri="{FF2B5EF4-FFF2-40B4-BE49-F238E27FC236}">
-                <a16:creationId xmlns:a16="http://schemas.microsoft.com/office/drawing/2014/main" id="{CD6FB916-6406-467E-A9E6-A256C5B5153C}"/>
+                <a16:creationId xmlns:a16="http://schemas.microsoft.com/office/drawing/2014/main" id="{04E2BC0F-2372-4EB4-AB6C-321D171049A0}"/>
               </a:ext>
             </a:extLst>
           </p:cNvPr>
@@ -4245,7 +4497,7 @@
         <p:style>
           <a:lnRef xmlns:a="http://schemas.openxmlformats.org/drawingml/2006/main" idx="0"/>
           <a:fillRef xmlns:a="http://schemas.openxmlformats.org/drawingml/2006/main" idx="0"/>
-          <a:effectRef xmlns:a="http://schemas.openxmlformats.org/drawingml/2006/main" idx="12"/>
+          <a:effectRef xmlns:a="http://schemas.openxmlformats.org/drawingml/2006/main" idx="20"/>
           <a:fontRef xmlns:a="http://schemas.openxmlformats.org/drawingml/2006/main" idx="major"/>
         </p:style>
       </p:sp>
@@ -4254,7 +4506,7 @@
           <p:cNvPr id="58" name="matrix-high-band-title">
             <a:extLst xmlns:a="http://schemas.openxmlformats.org/drawingml/2006/main">
               <a:ext uri="{FF2B5EF4-FFF2-40B4-BE49-F238E27FC236}">
-                <a16:creationId xmlns:a16="http://schemas.microsoft.com/office/drawing/2014/main" id="{58D9DD5C-E63C-4746-83FD-4620360AD54E}"/>
+                <a16:creationId xmlns:a16="http://schemas.microsoft.com/office/drawing/2014/main" id="{6FDA8C49-3FD4-4E37-9E2F-B8956F7A3EEB}"/>
               </a:ext>
             </a:extLst>
           </p:cNvPr>
@@ -4266,7 +4518,7 @@
         <p:spPr>
           <a:xfrm xmlns:a="http://schemas.openxmlformats.org/drawingml/2006/main" rot="0">
             <a:off x="723900" y="2085975"/>
-            <a:ext cx="1066800" cy="213417"/>
+            <a:ext cx="1066800" cy="224733"/>
           </a:xfrm>
           <a:prstGeom xmlns:a="http://schemas.openxmlformats.org/drawingml/2006/main" prst="rect">
             <a:avLst/>
@@ -4278,7 +4530,7 @@
           </a:ln>
         </p:spPr>
         <p:txBody>
-          <a:bodyPr xmlns:a="http://schemas.openxmlformats.org/drawingml/2006/main" lIns="0" tIns="0" rIns="0" bIns="0" anchor="ctr">
+          <a:bodyPr xmlns:a="http://schemas.openxmlformats.org/drawingml/2006/main" wrap="square" lIns="0" tIns="0" rIns="0" bIns="0" anchor="ctr">
             <a:noAutofit/>
           </a:bodyPr>
           <a:lstStyle xmlns:a="http://schemas.openxmlformats.org/drawingml/2006/main"/>
@@ -4288,7 +4540,7 @@
                 <a:spcPct val="118000"/>
               </a:lnSpc>
               <a:buNone/>
-              <a:defRPr sz="1425" b="1" i="0">
+              <a:defRPr sz="1500" b="1" i="0">
                 <a:solidFill>
                   <a:srgbClr val="FFFFFF"/>
                 </a:solidFill>
@@ -4298,7 +4550,7 @@
               </a:defRPr>
             </a:pPr>
             <a:r>
-              <a:rPr sz="1425" b="1" i="0">
+              <a:rPr sz="1500" b="1" i="0">
                 <a:solidFill>
                   <a:srgbClr val="FFFFFF"/>
                 </a:solidFill>
@@ -4320,10 +4572,10 @@
           <p:nvPr/>
         </p:nvPicPr>
         <p:blipFill>
-          <a:blip xmlns:r="http://schemas.openxmlformats.org/officeDocument/2006/relationships" xmlns:a="http://schemas.openxmlformats.org/drawingml/2006/main" r:embed="R95b6ee59f6cd49ab">
+          <a:blip xmlns:r="http://schemas.openxmlformats.org/officeDocument/2006/relationships" xmlns:a="http://schemas.openxmlformats.org/drawingml/2006/main" r:embed="Ra25167b1530f4550">
             <a:extLst>
               <a:ext uri="{96DAC541-7B7A-43D3-8B79-37D633B846F1}">
-                <asvg:svgBlip xmlns:asvg="http://schemas.microsoft.com/office/drawing/2016/SVG/main" r:embed="Ra898c26cb6904946"/>
+                <asvg:svgBlip xmlns:asvg="http://schemas.microsoft.com/office/drawing/2016/SVG/main" r:embed="R84c852d65c954d59"/>
               </a:ext>
             </a:extLst>
           </a:blip>
@@ -4344,7 +4596,7 @@
           <p:cNvPr id="60" name="matrix-low-band">
             <a:extLst xmlns:a="http://schemas.openxmlformats.org/drawingml/2006/main">
               <a:ext uri="{FF2B5EF4-FFF2-40B4-BE49-F238E27FC236}">
-                <a16:creationId xmlns:a16="http://schemas.microsoft.com/office/drawing/2014/main" id="{F0447FD3-22FA-46BE-93A0-DBEC696BD0A4}"/>
+                <a16:creationId xmlns:a16="http://schemas.microsoft.com/office/drawing/2014/main" id="{9D525591-B2A7-43ED-9636-1CECB241B784}"/>
               </a:ext>
             </a:extLst>
           </p:cNvPr>
@@ -4390,7 +4642,7 @@
         <p:style>
           <a:lnRef xmlns:a="http://schemas.openxmlformats.org/drawingml/2006/main" idx="0"/>
           <a:fillRef xmlns:a="http://schemas.openxmlformats.org/drawingml/2006/main" idx="0"/>
-          <a:effectRef xmlns:a="http://schemas.openxmlformats.org/drawingml/2006/main" idx="12"/>
+          <a:effectRef xmlns:a="http://schemas.openxmlformats.org/drawingml/2006/main" idx="20"/>
           <a:fontRef xmlns:a="http://schemas.openxmlformats.org/drawingml/2006/main" idx="major"/>
         </p:style>
       </p:sp>
@@ -4399,7 +4651,7 @@
           <p:cNvPr id="61" name="matrix-low-band-title">
             <a:extLst xmlns:a="http://schemas.openxmlformats.org/drawingml/2006/main">
               <a:ext uri="{FF2B5EF4-FFF2-40B4-BE49-F238E27FC236}">
-                <a16:creationId xmlns:a16="http://schemas.microsoft.com/office/drawing/2014/main" id="{898DD5F7-D1E4-47B3-915A-638F5D50FC2C}"/>
+                <a16:creationId xmlns:a16="http://schemas.microsoft.com/office/drawing/2014/main" id="{97812C09-A623-4634-ABE5-1E0605F597C9}"/>
               </a:ext>
             </a:extLst>
           </p:cNvPr>
@@ -4411,7 +4663,7 @@
         <p:spPr>
           <a:xfrm xmlns:a="http://schemas.openxmlformats.org/drawingml/2006/main" rot="0">
             <a:off x="723900" y="4391025"/>
-            <a:ext cx="1066800" cy="213417"/>
+            <a:ext cx="1066800" cy="224733"/>
           </a:xfrm>
           <a:prstGeom xmlns:a="http://schemas.openxmlformats.org/drawingml/2006/main" prst="rect">
             <a:avLst/>
@@ -4423,7 +4675,7 @@
           </a:ln>
         </p:spPr>
         <p:txBody>
-          <a:bodyPr xmlns:a="http://schemas.openxmlformats.org/drawingml/2006/main" lIns="0" tIns="0" rIns="0" bIns="0" anchor="ctr">
+          <a:bodyPr xmlns:a="http://schemas.openxmlformats.org/drawingml/2006/main" wrap="square" lIns="0" tIns="0" rIns="0" bIns="0" anchor="ctr">
             <a:noAutofit/>
           </a:bodyPr>
           <a:lstStyle xmlns:a="http://schemas.openxmlformats.org/drawingml/2006/main"/>
@@ -4433,7 +4685,7 @@
                 <a:spcPct val="118000"/>
               </a:lnSpc>
               <a:buNone/>
-              <a:defRPr sz="1425" b="1" i="0">
+              <a:defRPr sz="1500" b="1" i="0">
                 <a:solidFill>
                   <a:srgbClr val="FFFFFF"/>
                 </a:solidFill>
@@ -4443,7 +4695,7 @@
               </a:defRPr>
             </a:pPr>
             <a:r>
-              <a:rPr sz="1425" b="1" i="0">
+              <a:rPr sz="1500" b="1" i="0">
                 <a:solidFill>
                   <a:srgbClr val="FFFFFF"/>
                 </a:solidFill>
@@ -4465,10 +4717,10 @@
           <p:nvPr/>
         </p:nvPicPr>
         <p:blipFill>
-          <a:blip xmlns:r="http://schemas.openxmlformats.org/officeDocument/2006/relationships" xmlns:a="http://schemas.openxmlformats.org/drawingml/2006/main" r:embed="Ra6e5f5af7d1c48e8">
+          <a:blip xmlns:r="http://schemas.openxmlformats.org/officeDocument/2006/relationships" xmlns:a="http://schemas.openxmlformats.org/drawingml/2006/main" r:embed="R68eaff5d5acc4fe0">
             <a:extLst>
               <a:ext uri="{96DAC541-7B7A-43D3-8B79-37D633B846F1}">
-                <asvg:svgBlip xmlns:asvg="http://schemas.microsoft.com/office/drawing/2016/SVG/main" r:embed="Re06aaf5a3ddb4088"/>
+                <asvg:svgBlip xmlns:asvg="http://schemas.microsoft.com/office/drawing/2016/SVG/main" r:embed="R524c8db7aaae4a38"/>
               </a:ext>
             </a:extLst>
           </a:blip>
@@ -4489,7 +4741,7 @@
           <p:cNvPr id="63" name="matrix-x-axis">
             <a:extLst xmlns:a="http://schemas.openxmlformats.org/drawingml/2006/main">
               <a:ext uri="{FF2B5EF4-FFF2-40B4-BE49-F238E27FC236}">
-                <a16:creationId xmlns:a16="http://schemas.microsoft.com/office/drawing/2014/main" id="{7897DE10-93A9-4643-900D-968A10431456}"/>
+                <a16:creationId xmlns:a16="http://schemas.microsoft.com/office/drawing/2014/main" id="{F4A4F2F2-48B0-415E-A255-4C0F09DE1B67}"/>
               </a:ext>
             </a:extLst>
           </p:cNvPr>
@@ -4520,7 +4772,7 @@
           <p:cNvPr id="64" name="matrix-x-low-arrow">
             <a:extLst xmlns:a="http://schemas.openxmlformats.org/drawingml/2006/main">
               <a:ext uri="{FF2B5EF4-FFF2-40B4-BE49-F238E27FC236}">
-                <a16:creationId xmlns:a16="http://schemas.microsoft.com/office/drawing/2014/main" id="{7AB3BF9B-E92D-4E60-B710-95469DBA3E08}"/>
+                <a16:creationId xmlns:a16="http://schemas.microsoft.com/office/drawing/2014/main" id="{0388A414-9584-40FB-9664-C1996BB3ED3D}"/>
               </a:ext>
             </a:extLst>
           </p:cNvPr>
@@ -4654,7 +4906,7 @@
           <p:cNvPr id="65" name="matrix-x-high-arrow">
             <a:extLst xmlns:a="http://schemas.openxmlformats.org/drawingml/2006/main">
               <a:ext uri="{FF2B5EF4-FFF2-40B4-BE49-F238E27FC236}">
-                <a16:creationId xmlns:a16="http://schemas.microsoft.com/office/drawing/2014/main" id="{ED2AFAC2-2611-4E2A-B866-5FB78B13434F}"/>
+                <a16:creationId xmlns:a16="http://schemas.microsoft.com/office/drawing/2014/main" id="{84593F9B-904C-4C32-B1D7-021B0962CAB0}"/>
               </a:ext>
             </a:extLst>
           </p:cNvPr>
@@ -4788,7 +5040,7 @@
           <p:cNvPr id="66" name="matrix-y-axis">
             <a:extLst xmlns:a="http://schemas.openxmlformats.org/drawingml/2006/main">
               <a:ext uri="{FF2B5EF4-FFF2-40B4-BE49-F238E27FC236}">
-                <a16:creationId xmlns:a16="http://schemas.microsoft.com/office/drawing/2014/main" id="{A67ADD44-E4A3-4740-A3C7-AD3463CCBD93}"/>
+                <a16:creationId xmlns:a16="http://schemas.microsoft.com/office/drawing/2014/main" id="{F4FF7084-576E-469C-A31C-CECD9B842C19}"/>
               </a:ext>
             </a:extLst>
           </p:cNvPr>
@@ -4819,7 +5071,7 @@
           <p:cNvPr id="67" name="matrix-y-high-arrow">
             <a:extLst xmlns:a="http://schemas.openxmlformats.org/drawingml/2006/main">
               <a:ext uri="{FF2B5EF4-FFF2-40B4-BE49-F238E27FC236}">
-                <a16:creationId xmlns:a16="http://schemas.microsoft.com/office/drawing/2014/main" id="{EA090F27-4568-4006-83F9-5F59A7E83F53}"/>
+                <a16:creationId xmlns:a16="http://schemas.microsoft.com/office/drawing/2014/main" id="{CEE8F16D-A7BF-4DFE-B5AF-7743B65FDA2B}"/>
               </a:ext>
             </a:extLst>
           </p:cNvPr>
@@ -4953,7 +5205,7 @@
           <p:cNvPr id="68" name="matrix-y-low-arrow">
             <a:extLst xmlns:a="http://schemas.openxmlformats.org/drawingml/2006/main">
               <a:ext uri="{FF2B5EF4-FFF2-40B4-BE49-F238E27FC236}">
-                <a16:creationId xmlns:a16="http://schemas.microsoft.com/office/drawing/2014/main" id="{76A2650A-199F-45B3-A2A4-FDD505FB68D1}"/>
+                <a16:creationId xmlns:a16="http://schemas.microsoft.com/office/drawing/2014/main" id="{7EEF1DAA-E9D8-4B05-84BB-17BA668F3180}"/>
               </a:ext>
             </a:extLst>
           </p:cNvPr>
@@ -5084,10 +5336,43 @@
       </p:sp>
       <p:sp>
         <p:nvSpPr>
-          <p:cNvPr id="69" name="axis-x-low">
-            <a:extLst xmlns:a="http://schemas.openxmlformats.org/drawingml/2006/main">
-              <a:ext uri="{FF2B5EF4-FFF2-40B4-BE49-F238E27FC236}">
-                <a16:creationId xmlns:a16="http://schemas.microsoft.com/office/drawing/2014/main" id="{B0A2FF53-4A3E-4BE8-8F5F-0F0D611C9136}"/>
+          <p:cNvPr id="69" name="matrix-origin">
+            <a:extLst xmlns:a="http://schemas.openxmlformats.org/drawingml/2006/main">
+              <a:ext uri="{FF2B5EF4-FFF2-40B4-BE49-F238E27FC236}">
+                <a16:creationId xmlns:a16="http://schemas.microsoft.com/office/drawing/2014/main" id="{47D25C1F-D37C-45D7-81DC-CC49ACD6ADFC}"/>
+              </a:ext>
+            </a:extLst>
+          </p:cNvPr>
+          <p:cNvSpPr>
+            <a:spLocks xmlns:a="http://schemas.openxmlformats.org/drawingml/2006/main" noGrp="1"/>
+          </p:cNvSpPr>
+          <p:nvPr/>
+        </p:nvSpPr>
+        <p:spPr>
+          <a:xfrm xmlns:a="http://schemas.openxmlformats.org/drawingml/2006/main" rot="0">
+            <a:off x="6029325" y="3857625"/>
+            <a:ext cx="133350" cy="133350"/>
+          </a:xfrm>
+          <a:prstGeom xmlns:a="http://schemas.openxmlformats.org/drawingml/2006/main" prst="ellipse">
+            <a:avLst/>
+          </a:prstGeom>
+          <a:solidFill xmlns:a="http://schemas.openxmlformats.org/drawingml/2006/main">
+            <a:srgbClr val="FFFFFF"/>
+          </a:solidFill>
+          <a:ln xmlns:a="http://schemas.openxmlformats.org/drawingml/2006/main" w="28575">
+            <a:solidFill>
+              <a:srgbClr val="6F91BA"/>
+            </a:solidFill>
+            <a:prstDash val="solid"/>
+          </a:ln>
+        </p:spPr>
+      </p:sp>
+      <p:sp>
+        <p:nvSpPr>
+          <p:cNvPr id="70" name="axis-x-low">
+            <a:extLst xmlns:a="http://schemas.openxmlformats.org/drawingml/2006/main">
+              <a:ext uri="{FF2B5EF4-FFF2-40B4-BE49-F238E27FC236}">
+                <a16:creationId xmlns:a16="http://schemas.microsoft.com/office/drawing/2014/main" id="{FD3D1C76-865B-42D6-A44D-D5C5223C4713}"/>
               </a:ext>
             </a:extLst>
           </p:cNvPr>
@@ -5099,7 +5384,7 @@
         <p:spPr>
           <a:xfrm xmlns:a="http://schemas.openxmlformats.org/drawingml/2006/main" rot="0">
             <a:off x="2105025" y="4000500"/>
-            <a:ext cx="857250" cy="171450"/>
+            <a:ext cx="952500" cy="190500"/>
           </a:xfrm>
           <a:prstGeom xmlns:a="http://schemas.openxmlformats.org/drawingml/2006/main" prst="rect">
             <a:avLst/>
@@ -5111,7 +5396,7 @@
           </a:ln>
         </p:spPr>
         <p:txBody>
-          <a:bodyPr xmlns:a="http://schemas.openxmlformats.org/drawingml/2006/main" lIns="0" tIns="0" rIns="0" bIns="0" anchor="ctr">
+          <a:bodyPr xmlns:a="http://schemas.openxmlformats.org/drawingml/2006/main" wrap="none" lIns="0" tIns="0" rIns="0" bIns="0" anchor="ctr">
             <a:noAutofit/>
           </a:bodyPr>
           <a:lstStyle xmlns:a="http://schemas.openxmlformats.org/drawingml/2006/main"/>
@@ -5121,7 +5406,7 @@
                 <a:spcPct val="100000"/>
               </a:lnSpc>
               <a:buNone/>
-              <a:defRPr sz="1350" b="1" i="0">
+              <a:defRPr sz="1500" b="1" i="0">
                 <a:solidFill>
                   <a:srgbClr val="637B96"/>
                 </a:solidFill>
@@ -5131,7 +5416,7 @@
               </a:defRPr>
             </a:pPr>
             <a:r>
-              <a:rPr sz="1350" b="1" i="0">
+              <a:rPr sz="1500" b="1" i="0">
                 <a:solidFill>
                   <a:srgbClr val="637B96"/>
                 </a:solidFill>
@@ -5146,22 +5431,22 @@
       </p:sp>
       <p:sp>
         <p:nvSpPr>
-          <p:cNvPr id="70" name="axis-x-high">
-            <a:extLst xmlns:a="http://schemas.openxmlformats.org/drawingml/2006/main">
-              <a:ext uri="{FF2B5EF4-FFF2-40B4-BE49-F238E27FC236}">
-                <a16:creationId xmlns:a16="http://schemas.microsoft.com/office/drawing/2014/main" id="{71515014-1C55-4906-9430-0CD6C4FD0479}"/>
-              </a:ext>
-            </a:extLst>
-          </p:cNvPr>
-          <p:cNvSpPr>
-            <a:spLocks xmlns:a="http://schemas.openxmlformats.org/drawingml/2006/main" noGrp="1"/>
-          </p:cNvSpPr>
-          <p:nvPr/>
-        </p:nvSpPr>
-        <p:spPr>
-          <a:xfrm xmlns:a="http://schemas.openxmlformats.org/drawingml/2006/main" rot="0">
-            <a:off x="9229725" y="4000500"/>
-            <a:ext cx="857250" cy="171450"/>
+          <p:cNvPr id="71" name="axis-x-high">
+            <a:extLst xmlns:a="http://schemas.openxmlformats.org/drawingml/2006/main">
+              <a:ext uri="{FF2B5EF4-FFF2-40B4-BE49-F238E27FC236}">
+                <a16:creationId xmlns:a16="http://schemas.microsoft.com/office/drawing/2014/main" id="{A356C37F-F765-429A-921F-8EAFFC775949}"/>
+              </a:ext>
+            </a:extLst>
+          </p:cNvPr>
+          <p:cNvSpPr>
+            <a:spLocks xmlns:a="http://schemas.openxmlformats.org/drawingml/2006/main" noGrp="1"/>
+          </p:cNvSpPr>
+          <p:nvPr/>
+        </p:nvSpPr>
+        <p:spPr>
+          <a:xfrm xmlns:a="http://schemas.openxmlformats.org/drawingml/2006/main" rot="0">
+            <a:off x="9134475" y="4000500"/>
+            <a:ext cx="952500" cy="190500"/>
           </a:xfrm>
           <a:prstGeom xmlns:a="http://schemas.openxmlformats.org/drawingml/2006/main" prst="rect">
             <a:avLst/>
@@ -5173,7 +5458,7 @@
           </a:ln>
         </p:spPr>
         <p:txBody>
-          <a:bodyPr xmlns:a="http://schemas.openxmlformats.org/drawingml/2006/main" lIns="0" tIns="0" rIns="0" bIns="0" anchor="ctr">
+          <a:bodyPr xmlns:a="http://schemas.openxmlformats.org/drawingml/2006/main" wrap="none" lIns="0" tIns="0" rIns="0" bIns="0" anchor="ctr">
             <a:noAutofit/>
           </a:bodyPr>
           <a:lstStyle xmlns:a="http://schemas.openxmlformats.org/drawingml/2006/main"/>
@@ -5183,7 +5468,7 @@
                 <a:spcPct val="100000"/>
               </a:lnSpc>
               <a:buNone/>
-              <a:defRPr sz="1350" b="1" i="0">
+              <a:defRPr sz="1500" b="1" i="0">
                 <a:solidFill>
                   <a:srgbClr val="637B96"/>
                 </a:solidFill>
@@ -5193,7 +5478,7 @@
               </a:defRPr>
             </a:pPr>
             <a:r>
-              <a:rPr sz="1350" b="1" i="0">
+              <a:rPr sz="1500" b="1" i="0">
                 <a:solidFill>
                   <a:srgbClr val="637B96"/>
                 </a:solidFill>
@@ -5208,22 +5493,22 @@
       </p:sp>
       <p:sp>
         <p:nvSpPr>
-          <p:cNvPr id="71" name="axis-y-high">
-            <a:extLst xmlns:a="http://schemas.openxmlformats.org/drawingml/2006/main">
-              <a:ext uri="{FF2B5EF4-FFF2-40B4-BE49-F238E27FC236}">
-                <a16:creationId xmlns:a16="http://schemas.microsoft.com/office/drawing/2014/main" id="{B783CEB6-4A1A-4440-BBA9-D3E6F7E3A818}"/>
-              </a:ext>
-            </a:extLst>
-          </p:cNvPr>
-          <p:cNvSpPr>
-            <a:spLocks xmlns:a="http://schemas.openxmlformats.org/drawingml/2006/main" noGrp="1"/>
-          </p:cNvSpPr>
-          <p:nvPr/>
-        </p:nvSpPr>
-        <p:spPr>
-          <a:xfrm xmlns:a="http://schemas.openxmlformats.org/drawingml/2006/main" rot="0">
-            <a:off x="5667375" y="1676400"/>
-            <a:ext cx="857250" cy="171450"/>
+          <p:cNvPr id="72" name="axis-y-high">
+            <a:extLst xmlns:a="http://schemas.openxmlformats.org/drawingml/2006/main">
+              <a:ext uri="{FF2B5EF4-FFF2-40B4-BE49-F238E27FC236}">
+                <a16:creationId xmlns:a16="http://schemas.microsoft.com/office/drawing/2014/main" id="{DB74BB10-475E-43FF-A11E-435AD731F18E}"/>
+              </a:ext>
+            </a:extLst>
+          </p:cNvPr>
+          <p:cNvSpPr>
+            <a:spLocks xmlns:a="http://schemas.openxmlformats.org/drawingml/2006/main" noGrp="1"/>
+          </p:cNvSpPr>
+          <p:nvPr/>
+        </p:nvSpPr>
+        <p:spPr>
+          <a:xfrm xmlns:a="http://schemas.openxmlformats.org/drawingml/2006/main" rot="0">
+            <a:off x="5619750" y="1676400"/>
+            <a:ext cx="952500" cy="190500"/>
           </a:xfrm>
           <a:prstGeom xmlns:a="http://schemas.openxmlformats.org/drawingml/2006/main" prst="rect">
             <a:avLst/>
@@ -5235,7 +5520,7 @@
           </a:ln>
         </p:spPr>
         <p:txBody>
-          <a:bodyPr xmlns:a="http://schemas.openxmlformats.org/drawingml/2006/main" lIns="0" tIns="0" rIns="0" bIns="0" anchor="ctr">
+          <a:bodyPr xmlns:a="http://schemas.openxmlformats.org/drawingml/2006/main" wrap="none" lIns="0" tIns="0" rIns="0" bIns="0" anchor="ctr">
             <a:noAutofit/>
           </a:bodyPr>
           <a:lstStyle xmlns:a="http://schemas.openxmlformats.org/drawingml/2006/main"/>
@@ -5245,7 +5530,7 @@
                 <a:spcPct val="100000"/>
               </a:lnSpc>
               <a:buNone/>
-              <a:defRPr sz="1350" b="1" i="0">
+              <a:defRPr sz="1500" b="1" i="0">
                 <a:solidFill>
                   <a:srgbClr val="637B96"/>
                 </a:solidFill>
@@ -5255,7 +5540,7 @@
               </a:defRPr>
             </a:pPr>
             <a:r>
-              <a:rPr sz="1350" b="1" i="0">
+              <a:rPr sz="1500" b="1" i="0">
                 <a:solidFill>
                   <a:srgbClr val="637B96"/>
                 </a:solidFill>
@@ -5270,22 +5555,22 @@
       </p:sp>
       <p:sp>
         <p:nvSpPr>
-          <p:cNvPr id="72" name="axis-y-low">
-            <a:extLst xmlns:a="http://schemas.openxmlformats.org/drawingml/2006/main">
-              <a:ext uri="{FF2B5EF4-FFF2-40B4-BE49-F238E27FC236}">
-                <a16:creationId xmlns:a16="http://schemas.microsoft.com/office/drawing/2014/main" id="{A03DF35E-F6EA-49C5-A70B-C55E6E52A1D5}"/>
-              </a:ext>
-            </a:extLst>
-          </p:cNvPr>
-          <p:cNvSpPr>
-            <a:spLocks xmlns:a="http://schemas.openxmlformats.org/drawingml/2006/main" noGrp="1"/>
-          </p:cNvSpPr>
-          <p:nvPr/>
-        </p:nvSpPr>
-        <p:spPr>
-          <a:xfrm xmlns:a="http://schemas.openxmlformats.org/drawingml/2006/main" rot="0">
-            <a:off x="5667375" y="6019800"/>
-            <a:ext cx="857250" cy="171450"/>
+          <p:cNvPr id="73" name="axis-y-low">
+            <a:extLst xmlns:a="http://schemas.openxmlformats.org/drawingml/2006/main">
+              <a:ext uri="{FF2B5EF4-FFF2-40B4-BE49-F238E27FC236}">
+                <a16:creationId xmlns:a16="http://schemas.microsoft.com/office/drawing/2014/main" id="{2B3BE7AC-E1DC-4384-B2C9-405D3CE8C8E2}"/>
+              </a:ext>
+            </a:extLst>
+          </p:cNvPr>
+          <p:cNvSpPr>
+            <a:spLocks xmlns:a="http://schemas.openxmlformats.org/drawingml/2006/main" noGrp="1"/>
+          </p:cNvSpPr>
+          <p:nvPr/>
+        </p:nvSpPr>
+        <p:spPr>
+          <a:xfrm xmlns:a="http://schemas.openxmlformats.org/drawingml/2006/main" rot="0">
+            <a:off x="5619750" y="6000750"/>
+            <a:ext cx="952500" cy="190500"/>
           </a:xfrm>
           <a:prstGeom xmlns:a="http://schemas.openxmlformats.org/drawingml/2006/main" prst="rect">
             <a:avLst/>
@@ -5297,7 +5582,7 @@
           </a:ln>
         </p:spPr>
         <p:txBody>
-          <a:bodyPr xmlns:a="http://schemas.openxmlformats.org/drawingml/2006/main" lIns="0" tIns="0" rIns="0" bIns="0" anchor="ctr">
+          <a:bodyPr xmlns:a="http://schemas.openxmlformats.org/drawingml/2006/main" wrap="none" lIns="0" tIns="0" rIns="0" bIns="0" anchor="ctr">
             <a:noAutofit/>
           </a:bodyPr>
           <a:lstStyle xmlns:a="http://schemas.openxmlformats.org/drawingml/2006/main"/>
@@ -5307,7 +5592,7 @@
                 <a:spcPct val="100000"/>
               </a:lnSpc>
               <a:buNone/>
-              <a:defRPr sz="1350" b="1" i="0">
+              <a:defRPr sz="1500" b="1" i="0">
                 <a:solidFill>
                   <a:srgbClr val="637B96"/>
                 </a:solidFill>
@@ -5317,7 +5602,7 @@
               </a:defRPr>
             </a:pPr>
             <a:r>
-              <a:rPr sz="1350" b="1" i="0">
+              <a:rPr sz="1500" b="1" i="0">
                 <a:solidFill>
                   <a:srgbClr val="637B96"/>
                 </a:solidFill>
@@ -5330,43 +5615,10 @@
           </a:p>
         </p:txBody>
       </p:sp>
-      <p:sp>
-        <p:nvSpPr>
-          <p:cNvPr id="73" name="matrix-origin">
-            <a:extLst xmlns:a="http://schemas.openxmlformats.org/drawingml/2006/main">
-              <a:ext uri="{FF2B5EF4-FFF2-40B4-BE49-F238E27FC236}">
-                <a16:creationId xmlns:a16="http://schemas.microsoft.com/office/drawing/2014/main" id="{BD529C11-BF30-4A6B-94E1-5943B81A306B}"/>
-              </a:ext>
-            </a:extLst>
-          </p:cNvPr>
-          <p:cNvSpPr>
-            <a:spLocks xmlns:a="http://schemas.openxmlformats.org/drawingml/2006/main" noGrp="1"/>
-          </p:cNvSpPr>
-          <p:nvPr/>
-        </p:nvSpPr>
-        <p:spPr>
-          <a:xfrm xmlns:a="http://schemas.openxmlformats.org/drawingml/2006/main" rot="0">
-            <a:off x="6029325" y="3857625"/>
-            <a:ext cx="133350" cy="133350"/>
-          </a:xfrm>
-          <a:prstGeom xmlns:a="http://schemas.openxmlformats.org/drawingml/2006/main" prst="ellipse">
-            <a:avLst/>
-          </a:prstGeom>
-          <a:solidFill xmlns:a="http://schemas.openxmlformats.org/drawingml/2006/main">
-            <a:srgbClr val="FFFFFF"/>
-          </a:solidFill>
-          <a:ln xmlns:a="http://schemas.openxmlformats.org/drawingml/2006/main" w="28575">
-            <a:solidFill>
-              <a:srgbClr val="6F91BA"/>
-            </a:solidFill>
-            <a:prstDash val="solid"/>
-          </a:ln>
-        </p:spPr>
-      </p:sp>
     </p:spTree>
     <p:extLst>
       <p:ext uri="{BB962C8B-B14F-4D97-AF65-F5344CB8AC3E}">
-        <p14:creationId xmlns:p14="http://schemas.microsoft.com/office/powerpoint/2010/main" val="508732675"/>
+        <p14:creationId xmlns:p14="http://schemas.microsoft.com/office/powerpoint/2010/main" val="142761219"/>
       </p:ext>
     </p:extLst>
   </p:cSld>
@@ -5576,6 +5828,78 @@
         </a:effectStyle>
         <a:effectStyle>
           <a:effectLst>
+            <a:outerShdw blurRad="266700" dist="114300" dir="5400000">
+              <a:srgbClr val="2F5EA8">
+                <a:alpha val="22000"/>
+              </a:srgbClr>
+            </a:outerShdw>
+          </a:effectLst>
+        </a:effectStyle>
+        <a:effectStyle>
+          <a:effectLst>
+            <a:outerShdw blurRad="152400" dist="66675" dir="5400000">
+              <a:srgbClr val="2F5EA8">
+                <a:alpha val="9000"/>
+              </a:srgbClr>
+            </a:outerShdw>
+          </a:effectLst>
+        </a:effectStyle>
+        <a:effectStyle>
+          <a:effectLst>
+            <a:outerShdw blurRad="152400" dist="66675" dir="5400000">
+              <a:srgbClr val="2F5EA8">
+                <a:alpha val="10000"/>
+              </a:srgbClr>
+            </a:outerShdw>
+          </a:effectLst>
+        </a:effectStyle>
+        <a:effectStyle>
+          <a:effectLst>
+            <a:outerShdw blurRad="171450" dist="76200" dir="5400000">
+              <a:srgbClr val="2F5EA8">
+                <a:alpha val="16000"/>
+              </a:srgbClr>
+            </a:outerShdw>
+          </a:effectLst>
+        </a:effectStyle>
+        <a:effectStyle>
+          <a:effectLst>
+            <a:outerShdw blurRad="114300" dist="47625" dir="5400000">
+              <a:srgbClr val="2F5EA8">
+                <a:alpha val="7000"/>
+              </a:srgbClr>
+            </a:outerShdw>
+          </a:effectLst>
+        </a:effectStyle>
+        <a:effectStyle>
+          <a:effectLst>
+            <a:outerShdw blurRad="95250" dist="38100" dir="5400000">
+              <a:srgbClr val="2F5EA8">
+                <a:alpha val="8000"/>
+              </a:srgbClr>
+            </a:outerShdw>
+          </a:effectLst>
+        </a:effectStyle>
+        <a:effectStyle>
+          <a:effectLst>
+            <a:outerShdw blurRad="209550" dist="95250" dir="5400000">
+              <a:srgbClr val="2F5EA8">
+                <a:alpha val="8000"/>
+              </a:srgbClr>
+            </a:outerShdw>
+          </a:effectLst>
+        </a:effectStyle>
+        <a:effectStyle>
+          <a:effectLst>
+            <a:outerShdw blurRad="133350" dist="57150" dir="5400000">
+              <a:srgbClr val="2F5EA8">
+                <a:alpha val="18000"/>
+              </a:srgbClr>
+            </a:outerShdw>
+          </a:effectLst>
+        </a:effectStyle>
+        <a:effectStyle>
+          <a:effectLst>
             <a:outerShdw blurRad="200025" dist="85725" dir="5400000">
               <a:srgbClr val="2F5EA8">
                 <a:alpha val="14000"/>

--- a/assets/结构图/矩阵象限-001/example.pptx
+++ b/assets/结构图/矩阵象限-001/example.pptx
@@ -2,13 +2,13 @@
 <file path=ppt/presentation.xml><?xml version="1.0" encoding="utf-8"?>
 <p:presentation xmlns:p="http://schemas.openxmlformats.org/presentationml/2006/main">
   <p:sldMasterIdLst>
-    <p:sldMasterId xmlns:r="http://schemas.openxmlformats.org/officeDocument/2006/relationships" id="2147483648" r:id="R11ef4a100c5b4e55"/>
+    <p:sldMasterId xmlns:r="http://schemas.openxmlformats.org/officeDocument/2006/relationships" id="2147483648" r:id="Rc8cfde1c6d334ae8"/>
   </p:sldMasterIdLst>
   <p:notesMasterIdLst>
-    <p:notesMasterId xmlns:r="http://schemas.openxmlformats.org/officeDocument/2006/relationships" r:id="R1c15e78f248c41f4"/>
+    <p:notesMasterId xmlns:r="http://schemas.openxmlformats.org/officeDocument/2006/relationships" r:id="R0a0aada241714567"/>
   </p:notesMasterIdLst>
   <p:sldIdLst>
-    <p:sldId xmlns:r="http://schemas.openxmlformats.org/officeDocument/2006/relationships" id="256" r:id="Rf1d0117511cc4177"/>
+    <p:sldId xmlns:r="http://schemas.openxmlformats.org/officeDocument/2006/relationships" id="256" r:id="Rf503855e77c84d8b"/>
   </p:sldIdLst>
   <p:sldSz cx="12192000" cy="6858000"/>
   <p:notesSz cx="6858000" cy="9144000"/>
@@ -360,78 +360,6 @@
         </a:effectStyle>
         <a:effectStyle>
           <a:effectLst>
-            <a:outerShdw blurRad="266700" dist="114300" dir="5400000">
-              <a:srgbClr val="2F5EA8">
-                <a:alpha val="22000"/>
-              </a:srgbClr>
-            </a:outerShdw>
-          </a:effectLst>
-        </a:effectStyle>
-        <a:effectStyle>
-          <a:effectLst>
-            <a:outerShdw blurRad="152400" dist="66675" dir="5400000">
-              <a:srgbClr val="2F5EA8">
-                <a:alpha val="9000"/>
-              </a:srgbClr>
-            </a:outerShdw>
-          </a:effectLst>
-        </a:effectStyle>
-        <a:effectStyle>
-          <a:effectLst>
-            <a:outerShdw blurRad="152400" dist="66675" dir="5400000">
-              <a:srgbClr val="2F5EA8">
-                <a:alpha val="10000"/>
-              </a:srgbClr>
-            </a:outerShdw>
-          </a:effectLst>
-        </a:effectStyle>
-        <a:effectStyle>
-          <a:effectLst>
-            <a:outerShdw blurRad="171450" dist="76200" dir="5400000">
-              <a:srgbClr val="2F5EA8">
-                <a:alpha val="16000"/>
-              </a:srgbClr>
-            </a:outerShdw>
-          </a:effectLst>
-        </a:effectStyle>
-        <a:effectStyle>
-          <a:effectLst>
-            <a:outerShdw blurRad="114300" dist="47625" dir="5400000">
-              <a:srgbClr val="2F5EA8">
-                <a:alpha val="7000"/>
-              </a:srgbClr>
-            </a:outerShdw>
-          </a:effectLst>
-        </a:effectStyle>
-        <a:effectStyle>
-          <a:effectLst>
-            <a:outerShdw blurRad="95250" dist="38100" dir="5400000">
-              <a:srgbClr val="2F5EA8">
-                <a:alpha val="8000"/>
-              </a:srgbClr>
-            </a:outerShdw>
-          </a:effectLst>
-        </a:effectStyle>
-        <a:effectStyle>
-          <a:effectLst>
-            <a:outerShdw blurRad="209550" dist="95250" dir="5400000">
-              <a:srgbClr val="2F5EA8">
-                <a:alpha val="8000"/>
-              </a:srgbClr>
-            </a:outerShdw>
-          </a:effectLst>
-        </a:effectStyle>
-        <a:effectStyle>
-          <a:effectLst>
-            <a:outerShdw blurRad="133350" dist="57150" dir="5400000">
-              <a:srgbClr val="2F5EA8">
-                <a:alpha val="18000"/>
-              </a:srgbClr>
-            </a:outerShdw>
-          </a:effectLst>
-        </a:effectStyle>
-        <a:effectStyle>
-          <a:effectLst>
             <a:outerShdw blurRad="200025" dist="85725" dir="5400000">
               <a:srgbClr val="2F5EA8">
                 <a:alpha val="14000"/>
@@ -605,7 +533,7 @@
   </p:cSld>
   <p:clrMap bg1="lt1" tx1="dk1" bg2="lt2" tx2="dk2" accent1="accent1" accent2="accent2" accent3="accent3" accent4="accent4" accent5="accent5" accent6="accent6" hlink="hlink" folHlink="folHlink"/>
   <p:sldLayoutIdLst>
-    <p:sldLayoutId xmlns:r="http://schemas.openxmlformats.org/officeDocument/2006/relationships" id="2147483649" r:id="R69802212995c4ca0"/>
+    <p:sldLayoutId xmlns:r="http://schemas.openxmlformats.org/officeDocument/2006/relationships" id="2147483649" r:id="R04465d3fc4bb4f1d"/>
   </p:sldLayoutIdLst>
   <p:txStyles>
     <p:titleStyle>
@@ -1090,78 +1018,6 @@
         </a:effectStyle>
         <a:effectStyle>
           <a:effectLst>
-            <a:outerShdw blurRad="266700" dist="114300" dir="5400000">
-              <a:srgbClr val="2F5EA8">
-                <a:alpha val="22000"/>
-              </a:srgbClr>
-            </a:outerShdw>
-          </a:effectLst>
-        </a:effectStyle>
-        <a:effectStyle>
-          <a:effectLst>
-            <a:outerShdw blurRad="152400" dist="66675" dir="5400000">
-              <a:srgbClr val="2F5EA8">
-                <a:alpha val="9000"/>
-              </a:srgbClr>
-            </a:outerShdw>
-          </a:effectLst>
-        </a:effectStyle>
-        <a:effectStyle>
-          <a:effectLst>
-            <a:outerShdw blurRad="152400" dist="66675" dir="5400000">
-              <a:srgbClr val="2F5EA8">
-                <a:alpha val="10000"/>
-              </a:srgbClr>
-            </a:outerShdw>
-          </a:effectLst>
-        </a:effectStyle>
-        <a:effectStyle>
-          <a:effectLst>
-            <a:outerShdw blurRad="171450" dist="76200" dir="5400000">
-              <a:srgbClr val="2F5EA8">
-                <a:alpha val="16000"/>
-              </a:srgbClr>
-            </a:outerShdw>
-          </a:effectLst>
-        </a:effectStyle>
-        <a:effectStyle>
-          <a:effectLst>
-            <a:outerShdw blurRad="114300" dist="47625" dir="5400000">
-              <a:srgbClr val="2F5EA8">
-                <a:alpha val="7000"/>
-              </a:srgbClr>
-            </a:outerShdw>
-          </a:effectLst>
-        </a:effectStyle>
-        <a:effectStyle>
-          <a:effectLst>
-            <a:outerShdw blurRad="95250" dist="38100" dir="5400000">
-              <a:srgbClr val="2F5EA8">
-                <a:alpha val="8000"/>
-              </a:srgbClr>
-            </a:outerShdw>
-          </a:effectLst>
-        </a:effectStyle>
-        <a:effectStyle>
-          <a:effectLst>
-            <a:outerShdw blurRad="209550" dist="95250" dir="5400000">
-              <a:srgbClr val="2F5EA8">
-                <a:alpha val="8000"/>
-              </a:srgbClr>
-            </a:outerShdw>
-          </a:effectLst>
-        </a:effectStyle>
-        <a:effectStyle>
-          <a:effectLst>
-            <a:outerShdw blurRad="133350" dist="57150" dir="5400000">
-              <a:srgbClr val="2F5EA8">
-                <a:alpha val="18000"/>
-              </a:srgbClr>
-            </a:outerShdw>
-          </a:effectLst>
-        </a:effectStyle>
-        <a:effectStyle>
-          <a:effectLst>
             <a:outerShdw blurRad="200025" dist="85725" dir="5400000">
               <a:srgbClr val="2F5EA8">
                 <a:alpha val="14000"/>
@@ -1252,10 +1108,10 @@
       </p:grpSpPr>
       <p:sp>
         <p:nvSpPr>
-          <p:cNvPr id="74" name="quadrant-field-0">
-            <a:extLst xmlns:a="http://schemas.openxmlformats.org/drawingml/2006/main">
-              <a:ext uri="{FF2B5EF4-FFF2-40B4-BE49-F238E27FC236}">
-                <a16:creationId xmlns:a16="http://schemas.microsoft.com/office/drawing/2014/main" id="{92E22406-68FB-48E9-A8C5-850BDB8128EE}"/>
+          <p:cNvPr id="66" name="quadrant-field-0">
+            <a:extLst xmlns:a="http://schemas.openxmlformats.org/drawingml/2006/main">
+              <a:ext uri="{FF2B5EF4-FFF2-40B4-BE49-F238E27FC236}">
+                <a16:creationId xmlns:a16="http://schemas.microsoft.com/office/drawing/2014/main" id="{92E76AE7-83DD-471D-9824-BE5A2164B01D}"/>
               </a:ext>
             </a:extLst>
           </p:cNvPr>
@@ -1288,7 +1144,7 @@
           <p:cNvPr id="2" name="quadrant-field-1">
             <a:extLst xmlns:a="http://schemas.openxmlformats.org/drawingml/2006/main">
               <a:ext uri="{FF2B5EF4-FFF2-40B4-BE49-F238E27FC236}">
-                <a16:creationId xmlns:a16="http://schemas.microsoft.com/office/drawing/2014/main" id="{C2198C65-EE03-4F61-A7A7-E85E464CABD3}"/>
+                <a16:creationId xmlns:a16="http://schemas.microsoft.com/office/drawing/2014/main" id="{8E80111A-3DCC-4CA5-81D2-7413F849CDEC}"/>
               </a:ext>
             </a:extLst>
           </p:cNvPr>
@@ -1321,7 +1177,7 @@
           <p:cNvPr id="3" name="quadrant-field-2">
             <a:extLst xmlns:a="http://schemas.openxmlformats.org/drawingml/2006/main">
               <a:ext uri="{FF2B5EF4-FFF2-40B4-BE49-F238E27FC236}">
-                <a16:creationId xmlns:a16="http://schemas.microsoft.com/office/drawing/2014/main" id="{02F9D897-1D0A-40E1-89AA-6FC95BF6C10A}"/>
+                <a16:creationId xmlns:a16="http://schemas.microsoft.com/office/drawing/2014/main" id="{2D73B8F6-0605-4550-8AA3-1F2EC68B70CB}"/>
               </a:ext>
             </a:extLst>
           </p:cNvPr>
@@ -1354,7 +1210,7 @@
           <p:cNvPr id="4" name="quadrant-field-3">
             <a:extLst xmlns:a="http://schemas.openxmlformats.org/drawingml/2006/main">
               <a:ext uri="{FF2B5EF4-FFF2-40B4-BE49-F238E27FC236}">
-                <a16:creationId xmlns:a16="http://schemas.microsoft.com/office/drawing/2014/main" id="{E384E825-5FF6-46B4-8787-5808E225DCEC}"/>
+                <a16:creationId xmlns:a16="http://schemas.microsoft.com/office/drawing/2014/main" id="{80333A84-A974-4D89-BD14-91A857570B9B}"/>
               </a:ext>
             </a:extLst>
           </p:cNvPr>
@@ -1387,7 +1243,7 @@
           <p:cNvPr id="5" name="matrix-item-0-0">
             <a:extLst xmlns:a="http://schemas.openxmlformats.org/drawingml/2006/main">
               <a:ext uri="{FF2B5EF4-FFF2-40B4-BE49-F238E27FC236}">
-                <a16:creationId xmlns:a16="http://schemas.microsoft.com/office/drawing/2014/main" id="{8F8296BC-8369-4084-A274-2ACC57DE5005}"/>
+                <a16:creationId xmlns:a16="http://schemas.microsoft.com/office/drawing/2014/main" id="{8AB8CAEA-B9B0-4296-AB2E-DE7B72856E9C}"/>
               </a:ext>
             </a:extLst>
           </p:cNvPr>
@@ -1421,7 +1277,7 @@
         <p:style>
           <a:lnRef xmlns:a="http://schemas.openxmlformats.org/drawingml/2006/main" idx="0"/>
           <a:fillRef xmlns:a="http://schemas.openxmlformats.org/drawingml/2006/main" idx="0"/>
-          <a:effectRef xmlns:a="http://schemas.openxmlformats.org/drawingml/2006/main" idx="18"/>
+          <a:effectRef xmlns:a="http://schemas.openxmlformats.org/drawingml/2006/main" idx="10"/>
           <a:fontRef xmlns:a="http://schemas.openxmlformats.org/drawingml/2006/main" idx="major"/>
         </p:style>
       </p:sp>
@@ -1430,7 +1286,7 @@
           <p:cNvPr id="6" name="matrix-item-title-0-0">
             <a:extLst xmlns:a="http://schemas.openxmlformats.org/drawingml/2006/main">
               <a:ext uri="{FF2B5EF4-FFF2-40B4-BE49-F238E27FC236}">
-                <a16:creationId xmlns:a16="http://schemas.microsoft.com/office/drawing/2014/main" id="{BB260187-28A3-4EAE-BEC6-31AC607F7D9C}"/>
+                <a16:creationId xmlns:a16="http://schemas.microsoft.com/office/drawing/2014/main" id="{1D8DB540-EDAA-46D6-80D4-B1B62138CA76}"/>
               </a:ext>
             </a:extLst>
           </p:cNvPr>
@@ -1482,7 +1338,34 @@
                 <a:ea typeface="Microsoft YaHei"/>
                 <a:cs typeface="Microsoft YaHei"/>
               </a:rPr>
-              <a:t>异常预警</a:t>
+              <a:t>异常预</a:t>
+            </a:r>
+          </a:p>
+          <a:p xmlns:a="http://schemas.openxmlformats.org/drawingml/2006/main">
+            <a:pPr algn="ctr">
+              <a:lnSpc>
+                <a:spcPct val="120000"/>
+              </a:lnSpc>
+              <a:buNone/>
+              <a:defRPr sz="1500" b="1" i="0">
+                <a:solidFill>
+                  <a:srgbClr val="FFFFFF"/>
+                </a:solidFill>
+                <a:latin typeface="Microsoft YaHei"/>
+                <a:ea typeface="Microsoft YaHei"/>
+                <a:cs typeface="Microsoft YaHei"/>
+              </a:defRPr>
+            </a:pPr>
+            <a:r>
+              <a:rPr sz="1500" b="1" i="0">
+                <a:solidFill>
+                  <a:srgbClr val="FFFFFF"/>
+                </a:solidFill>
+                <a:latin typeface="Microsoft YaHei"/>
+                <a:ea typeface="Microsoft YaHei"/>
+                <a:cs typeface="Microsoft YaHei"/>
+              </a:rPr>
+              <a:t>警</a:t>
             </a:r>
           </a:p>
         </p:txBody>
@@ -1492,7 +1375,7 @@
           <p:cNvPr id="7" name="matrix-item-0-1">
             <a:extLst xmlns:a="http://schemas.openxmlformats.org/drawingml/2006/main">
               <a:ext uri="{FF2B5EF4-FFF2-40B4-BE49-F238E27FC236}">
-                <a16:creationId xmlns:a16="http://schemas.microsoft.com/office/drawing/2014/main" id="{29B32667-94FA-41E5-AB3F-D02A5EAF6BEF}"/>
+                <a16:creationId xmlns:a16="http://schemas.microsoft.com/office/drawing/2014/main" id="{DA4E33B5-BC48-48E9-A4ED-AC113068F15B}"/>
               </a:ext>
             </a:extLst>
           </p:cNvPr>
@@ -1526,7 +1409,7 @@
         <p:style>
           <a:lnRef xmlns:a="http://schemas.openxmlformats.org/drawingml/2006/main" idx="0"/>
           <a:fillRef xmlns:a="http://schemas.openxmlformats.org/drawingml/2006/main" idx="0"/>
-          <a:effectRef xmlns:a="http://schemas.openxmlformats.org/drawingml/2006/main" idx="18"/>
+          <a:effectRef xmlns:a="http://schemas.openxmlformats.org/drawingml/2006/main" idx="10"/>
           <a:fontRef xmlns:a="http://schemas.openxmlformats.org/drawingml/2006/main" idx="major"/>
         </p:style>
       </p:sp>
@@ -1535,7 +1418,7 @@
           <p:cNvPr id="8" name="matrix-item-title-0-1">
             <a:extLst xmlns:a="http://schemas.openxmlformats.org/drawingml/2006/main">
               <a:ext uri="{FF2B5EF4-FFF2-40B4-BE49-F238E27FC236}">
-                <a16:creationId xmlns:a16="http://schemas.microsoft.com/office/drawing/2014/main" id="{1D20AF7A-8336-4CDF-A094-7A62FE4B2317}"/>
+                <a16:creationId xmlns:a16="http://schemas.microsoft.com/office/drawing/2014/main" id="{D7075FB8-4B68-41DE-BDBA-950AE8BAE027}"/>
               </a:ext>
             </a:extLst>
           </p:cNvPr>
@@ -1597,7 +1480,7 @@
           <p:cNvPr id="9" name="matrix-item-1-0">
             <a:extLst xmlns:a="http://schemas.openxmlformats.org/drawingml/2006/main">
               <a:ext uri="{FF2B5EF4-FFF2-40B4-BE49-F238E27FC236}">
-                <a16:creationId xmlns:a16="http://schemas.microsoft.com/office/drawing/2014/main" id="{A5323FB6-2059-4EB9-A188-A1E03C9E1E65}"/>
+                <a16:creationId xmlns:a16="http://schemas.microsoft.com/office/drawing/2014/main" id="{CEC5D6BD-98B2-4D04-8E6A-2768B5713B52}"/>
               </a:ext>
             </a:extLst>
           </p:cNvPr>
@@ -1631,7 +1514,7 @@
         <p:style>
           <a:lnRef xmlns:a="http://schemas.openxmlformats.org/drawingml/2006/main" idx="0"/>
           <a:fillRef xmlns:a="http://schemas.openxmlformats.org/drawingml/2006/main" idx="0"/>
-          <a:effectRef xmlns:a="http://schemas.openxmlformats.org/drawingml/2006/main" idx="19"/>
+          <a:effectRef xmlns:a="http://schemas.openxmlformats.org/drawingml/2006/main" idx="11"/>
           <a:fontRef xmlns:a="http://schemas.openxmlformats.org/drawingml/2006/main" idx="major"/>
         </p:style>
       </p:sp>
@@ -1640,7 +1523,7 @@
           <p:cNvPr id="10" name="matrix-item-title-1-0">
             <a:extLst xmlns:a="http://schemas.openxmlformats.org/drawingml/2006/main">
               <a:ext uri="{FF2B5EF4-FFF2-40B4-BE49-F238E27FC236}">
-                <a16:creationId xmlns:a16="http://schemas.microsoft.com/office/drawing/2014/main" id="{6083E9FB-5D38-4C25-8FE5-57F9FF600731}"/>
+                <a16:creationId xmlns:a16="http://schemas.microsoft.com/office/drawing/2014/main" id="{A972C5F8-7DA9-4A07-926D-F8B839A11207}"/>
               </a:ext>
             </a:extLst>
           </p:cNvPr>
@@ -1692,7 +1575,34 @@
                 <a:ea typeface="Microsoft YaHei"/>
                 <a:cs typeface="Microsoft YaHei"/>
               </a:rPr>
-              <a:t>数据平台</a:t>
+              <a:t>数据平</a:t>
+            </a:r>
+          </a:p>
+          <a:p xmlns:a="http://schemas.openxmlformats.org/drawingml/2006/main">
+            <a:pPr algn="ctr">
+              <a:lnSpc>
+                <a:spcPct val="120000"/>
+              </a:lnSpc>
+              <a:buNone/>
+              <a:defRPr sz="1500" b="1" i="0">
+                <a:solidFill>
+                  <a:srgbClr val="FFFFFF"/>
+                </a:solidFill>
+                <a:latin typeface="Microsoft YaHei"/>
+                <a:ea typeface="Microsoft YaHei"/>
+                <a:cs typeface="Microsoft YaHei"/>
+              </a:defRPr>
+            </a:pPr>
+            <a:r>
+              <a:rPr sz="1500" b="1" i="0">
+                <a:solidFill>
+                  <a:srgbClr val="FFFFFF"/>
+                </a:solidFill>
+                <a:latin typeface="Microsoft YaHei"/>
+                <a:ea typeface="Microsoft YaHei"/>
+                <a:cs typeface="Microsoft YaHei"/>
+              </a:rPr>
+              <a:t>台</a:t>
             </a:r>
           </a:p>
         </p:txBody>
@@ -1702,7 +1612,7 @@
           <p:cNvPr id="11" name="matrix-item-1-1">
             <a:extLst xmlns:a="http://schemas.openxmlformats.org/drawingml/2006/main">
               <a:ext uri="{FF2B5EF4-FFF2-40B4-BE49-F238E27FC236}">
-                <a16:creationId xmlns:a16="http://schemas.microsoft.com/office/drawing/2014/main" id="{55A77122-DB80-43B6-A007-FEEE5809B9DF}"/>
+                <a16:creationId xmlns:a16="http://schemas.microsoft.com/office/drawing/2014/main" id="{CCCE99BB-D34D-4C9F-B732-7CF1AA083BB7}"/>
               </a:ext>
             </a:extLst>
           </p:cNvPr>
@@ -1736,7 +1646,7 @@
         <p:style>
           <a:lnRef xmlns:a="http://schemas.openxmlformats.org/drawingml/2006/main" idx="0"/>
           <a:fillRef xmlns:a="http://schemas.openxmlformats.org/drawingml/2006/main" idx="0"/>
-          <a:effectRef xmlns:a="http://schemas.openxmlformats.org/drawingml/2006/main" idx="19"/>
+          <a:effectRef xmlns:a="http://schemas.openxmlformats.org/drawingml/2006/main" idx="11"/>
           <a:fontRef xmlns:a="http://schemas.openxmlformats.org/drawingml/2006/main" idx="major"/>
         </p:style>
       </p:sp>
@@ -1745,7 +1655,7 @@
           <p:cNvPr id="12" name="matrix-item-title-1-1">
             <a:extLst xmlns:a="http://schemas.openxmlformats.org/drawingml/2006/main">
               <a:ext uri="{FF2B5EF4-FFF2-40B4-BE49-F238E27FC236}">
-                <a16:creationId xmlns:a16="http://schemas.microsoft.com/office/drawing/2014/main" id="{E9E6E02B-B1B2-459D-9B3A-65F0D78B98F1}"/>
+                <a16:creationId xmlns:a16="http://schemas.microsoft.com/office/drawing/2014/main" id="{3831A143-9AB4-4430-AEFB-0E8938675AA9}"/>
               </a:ext>
             </a:extLst>
           </p:cNvPr>
@@ -1797,7 +1707,34 @@
                 <a:ea typeface="Microsoft YaHei"/>
                 <a:cs typeface="Microsoft YaHei"/>
               </a:rPr>
-              <a:t>流程自动化</a:t>
+              <a:t>流程自动</a:t>
+            </a:r>
+          </a:p>
+          <a:p xmlns:a="http://schemas.openxmlformats.org/drawingml/2006/main">
+            <a:pPr algn="ctr">
+              <a:lnSpc>
+                <a:spcPct val="120000"/>
+              </a:lnSpc>
+              <a:buNone/>
+              <a:defRPr sz="1500" b="1" i="0">
+                <a:solidFill>
+                  <a:srgbClr val="FFFFFF"/>
+                </a:solidFill>
+                <a:latin typeface="Microsoft YaHei"/>
+                <a:ea typeface="Microsoft YaHei"/>
+                <a:cs typeface="Microsoft YaHei"/>
+              </a:defRPr>
+            </a:pPr>
+            <a:r>
+              <a:rPr sz="1500" b="1" i="0">
+                <a:solidFill>
+                  <a:srgbClr val="FFFFFF"/>
+                </a:solidFill>
+                <a:latin typeface="Microsoft YaHei"/>
+                <a:ea typeface="Microsoft YaHei"/>
+                <a:cs typeface="Microsoft YaHei"/>
+              </a:rPr>
+              <a:t>化</a:t>
             </a:r>
           </a:p>
         </p:txBody>
@@ -1807,7 +1744,7 @@
           <p:cNvPr id="13" name="matrix-item-2-0">
             <a:extLst xmlns:a="http://schemas.openxmlformats.org/drawingml/2006/main">
               <a:ext uri="{FF2B5EF4-FFF2-40B4-BE49-F238E27FC236}">
-                <a16:creationId xmlns:a16="http://schemas.microsoft.com/office/drawing/2014/main" id="{3145C51A-E553-4B15-9A10-E5E37CA50D1F}"/>
+                <a16:creationId xmlns:a16="http://schemas.microsoft.com/office/drawing/2014/main" id="{7DCD9B13-C663-4699-A234-F30C24FD9FF6}"/>
               </a:ext>
             </a:extLst>
           </p:cNvPr>
@@ -1841,7 +1778,7 @@
         <p:style>
           <a:lnRef xmlns:a="http://schemas.openxmlformats.org/drawingml/2006/main" idx="0"/>
           <a:fillRef xmlns:a="http://schemas.openxmlformats.org/drawingml/2006/main" idx="0"/>
-          <a:effectRef xmlns:a="http://schemas.openxmlformats.org/drawingml/2006/main" idx="19"/>
+          <a:effectRef xmlns:a="http://schemas.openxmlformats.org/drawingml/2006/main" idx="11"/>
           <a:fontRef xmlns:a="http://schemas.openxmlformats.org/drawingml/2006/main" idx="major"/>
         </p:style>
       </p:sp>
@@ -1850,7 +1787,7 @@
           <p:cNvPr id="14" name="matrix-item-title-2-0">
             <a:extLst xmlns:a="http://schemas.openxmlformats.org/drawingml/2006/main">
               <a:ext uri="{FF2B5EF4-FFF2-40B4-BE49-F238E27FC236}">
-                <a16:creationId xmlns:a16="http://schemas.microsoft.com/office/drawing/2014/main" id="{6B79D0D6-6D9C-4AAB-BE6F-88BE5D90F577}"/>
+                <a16:creationId xmlns:a16="http://schemas.microsoft.com/office/drawing/2014/main" id="{A36486F2-BC85-4ABD-9683-0EB2FAD4F62F}"/>
               </a:ext>
             </a:extLst>
           </p:cNvPr>
@@ -1902,7 +1839,34 @@
                 <a:ea typeface="Microsoft YaHei"/>
                 <a:cs typeface="Microsoft YaHei"/>
               </a:rPr>
-              <a:t>报表美化</a:t>
+              <a:t>报表美</a:t>
+            </a:r>
+          </a:p>
+          <a:p xmlns:a="http://schemas.openxmlformats.org/drawingml/2006/main">
+            <a:pPr algn="ctr">
+              <a:lnSpc>
+                <a:spcPct val="120000"/>
+              </a:lnSpc>
+              <a:buNone/>
+              <a:defRPr sz="1500" b="1" i="0">
+                <a:solidFill>
+                  <a:srgbClr val="FFFFFF"/>
+                </a:solidFill>
+                <a:latin typeface="Microsoft YaHei"/>
+                <a:ea typeface="Microsoft YaHei"/>
+                <a:cs typeface="Microsoft YaHei"/>
+              </a:defRPr>
+            </a:pPr>
+            <a:r>
+              <a:rPr sz="1500" b="1" i="0">
+                <a:solidFill>
+                  <a:srgbClr val="FFFFFF"/>
+                </a:solidFill>
+                <a:latin typeface="Microsoft YaHei"/>
+                <a:ea typeface="Microsoft YaHei"/>
+                <a:cs typeface="Microsoft YaHei"/>
+              </a:rPr>
+              <a:t>化</a:t>
             </a:r>
           </a:p>
         </p:txBody>
@@ -1912,7 +1876,7 @@
           <p:cNvPr id="15" name="matrix-item-2-1">
             <a:extLst xmlns:a="http://schemas.openxmlformats.org/drawingml/2006/main">
               <a:ext uri="{FF2B5EF4-FFF2-40B4-BE49-F238E27FC236}">
-                <a16:creationId xmlns:a16="http://schemas.microsoft.com/office/drawing/2014/main" id="{4EB3E3A3-CB77-4E65-87A8-325B88FE420F}"/>
+                <a16:creationId xmlns:a16="http://schemas.microsoft.com/office/drawing/2014/main" id="{B28DF5EA-E636-4AC0-B385-34A04EB455E0}"/>
               </a:ext>
             </a:extLst>
           </p:cNvPr>
@@ -1946,7 +1910,7 @@
         <p:style>
           <a:lnRef xmlns:a="http://schemas.openxmlformats.org/drawingml/2006/main" idx="0"/>
           <a:fillRef xmlns:a="http://schemas.openxmlformats.org/drawingml/2006/main" idx="0"/>
-          <a:effectRef xmlns:a="http://schemas.openxmlformats.org/drawingml/2006/main" idx="19"/>
+          <a:effectRef xmlns:a="http://schemas.openxmlformats.org/drawingml/2006/main" idx="11"/>
           <a:fontRef xmlns:a="http://schemas.openxmlformats.org/drawingml/2006/main" idx="major"/>
         </p:style>
       </p:sp>
@@ -1955,7 +1919,7 @@
           <p:cNvPr id="16" name="matrix-item-title-2-1">
             <a:extLst xmlns:a="http://schemas.openxmlformats.org/drawingml/2006/main">
               <a:ext uri="{FF2B5EF4-FFF2-40B4-BE49-F238E27FC236}">
-                <a16:creationId xmlns:a16="http://schemas.microsoft.com/office/drawing/2014/main" id="{2620C942-522E-4170-A5DB-879183F82C03}"/>
+                <a16:creationId xmlns:a16="http://schemas.microsoft.com/office/drawing/2014/main" id="{81411385-4E37-4BCC-94CA-C81B89190F52}"/>
               </a:ext>
             </a:extLst>
           </p:cNvPr>
@@ -2017,7 +1981,7 @@
           <p:cNvPr id="17" name="matrix-item-3-0">
             <a:extLst xmlns:a="http://schemas.openxmlformats.org/drawingml/2006/main">
               <a:ext uri="{FF2B5EF4-FFF2-40B4-BE49-F238E27FC236}">
-                <a16:creationId xmlns:a16="http://schemas.microsoft.com/office/drawing/2014/main" id="{0E42F9E3-BE64-4B8F-BA18-E6F086E8F95F}"/>
+                <a16:creationId xmlns:a16="http://schemas.microsoft.com/office/drawing/2014/main" id="{BC6A5481-6944-4382-B7C0-147CE71D1D5D}"/>
               </a:ext>
             </a:extLst>
           </p:cNvPr>
@@ -2051,7 +2015,7 @@
         <p:style>
           <a:lnRef xmlns:a="http://schemas.openxmlformats.org/drawingml/2006/main" idx="0"/>
           <a:fillRef xmlns:a="http://schemas.openxmlformats.org/drawingml/2006/main" idx="0"/>
-          <a:effectRef xmlns:a="http://schemas.openxmlformats.org/drawingml/2006/main" idx="19"/>
+          <a:effectRef xmlns:a="http://schemas.openxmlformats.org/drawingml/2006/main" idx="11"/>
           <a:fontRef xmlns:a="http://schemas.openxmlformats.org/drawingml/2006/main" idx="major"/>
         </p:style>
       </p:sp>
@@ -2060,7 +2024,7 @@
           <p:cNvPr id="18" name="matrix-item-title-3-0">
             <a:extLst xmlns:a="http://schemas.openxmlformats.org/drawingml/2006/main">
               <a:ext uri="{FF2B5EF4-FFF2-40B4-BE49-F238E27FC236}">
-                <a16:creationId xmlns:a16="http://schemas.microsoft.com/office/drawing/2014/main" id="{B254B2CC-C3F8-42EA-8ED1-66C7E2AE9C9B}"/>
+                <a16:creationId xmlns:a16="http://schemas.microsoft.com/office/drawing/2014/main" id="{B2CAEE6D-A621-416B-8DE4-AF840B90988F}"/>
               </a:ext>
             </a:extLst>
           </p:cNvPr>
@@ -2112,7 +2076,34 @@
                 <a:ea typeface="Microsoft YaHei"/>
                 <a:cs typeface="Microsoft YaHei"/>
               </a:rPr>
-              <a:t>系统重构</a:t>
+              <a:t>系统重</a:t>
+            </a:r>
+          </a:p>
+          <a:p xmlns:a="http://schemas.openxmlformats.org/drawingml/2006/main">
+            <a:pPr algn="ctr">
+              <a:lnSpc>
+                <a:spcPct val="120000"/>
+              </a:lnSpc>
+              <a:buNone/>
+              <a:defRPr sz="1500" b="1" i="0">
+                <a:solidFill>
+                  <a:srgbClr val="FFFFFF"/>
+                </a:solidFill>
+                <a:latin typeface="Microsoft YaHei"/>
+                <a:ea typeface="Microsoft YaHei"/>
+                <a:cs typeface="Microsoft YaHei"/>
+              </a:defRPr>
+            </a:pPr>
+            <a:r>
+              <a:rPr sz="1500" b="1" i="0">
+                <a:solidFill>
+                  <a:srgbClr val="FFFFFF"/>
+                </a:solidFill>
+                <a:latin typeface="Microsoft YaHei"/>
+                <a:ea typeface="Microsoft YaHei"/>
+                <a:cs typeface="Microsoft YaHei"/>
+              </a:rPr>
+              <a:t>构</a:t>
             </a:r>
           </a:p>
         </p:txBody>
@@ -2122,7 +2113,7 @@
           <p:cNvPr id="19" name="matrix-item-3-1">
             <a:extLst xmlns:a="http://schemas.openxmlformats.org/drawingml/2006/main">
               <a:ext uri="{FF2B5EF4-FFF2-40B4-BE49-F238E27FC236}">
-                <a16:creationId xmlns:a16="http://schemas.microsoft.com/office/drawing/2014/main" id="{72C549B5-C091-4764-878B-BD735E972C63}"/>
+                <a16:creationId xmlns:a16="http://schemas.microsoft.com/office/drawing/2014/main" id="{04430A8E-8B16-44CD-B066-D74275BB80FA}"/>
               </a:ext>
             </a:extLst>
           </p:cNvPr>
@@ -2156,7 +2147,7 @@
         <p:style>
           <a:lnRef xmlns:a="http://schemas.openxmlformats.org/drawingml/2006/main" idx="0"/>
           <a:fillRef xmlns:a="http://schemas.openxmlformats.org/drawingml/2006/main" idx="0"/>
-          <a:effectRef xmlns:a="http://schemas.openxmlformats.org/drawingml/2006/main" idx="19"/>
+          <a:effectRef xmlns:a="http://schemas.openxmlformats.org/drawingml/2006/main" idx="11"/>
           <a:fontRef xmlns:a="http://schemas.openxmlformats.org/drawingml/2006/main" idx="major"/>
         </p:style>
       </p:sp>
@@ -2165,7 +2156,7 @@
           <p:cNvPr id="20" name="matrix-item-title-3-1">
             <a:extLst xmlns:a="http://schemas.openxmlformats.org/drawingml/2006/main">
               <a:ext uri="{FF2B5EF4-FFF2-40B4-BE49-F238E27FC236}">
-                <a16:creationId xmlns:a16="http://schemas.microsoft.com/office/drawing/2014/main" id="{19C0E8E6-504E-458F-A16F-A76FCED28177}"/>
+                <a16:creationId xmlns:a16="http://schemas.microsoft.com/office/drawing/2014/main" id="{5A73EC1E-DC74-4749-B857-080877139C07}"/>
               </a:ext>
             </a:extLst>
           </p:cNvPr>
@@ -2227,7 +2218,7 @@
           <p:cNvPr id="21" name="quadrant-title-0">
             <a:extLst xmlns:a="http://schemas.openxmlformats.org/drawingml/2006/main">
               <a:ext uri="{FF2B5EF4-FFF2-40B4-BE49-F238E27FC236}">
-                <a16:creationId xmlns:a16="http://schemas.microsoft.com/office/drawing/2014/main" id="{B80E6637-24DF-4626-8235-E8E8ED543877}"/>
+                <a16:creationId xmlns:a16="http://schemas.microsoft.com/office/drawing/2014/main" id="{1C9C4448-6D9A-4E4B-AD74-54604AD57AD0}"/>
               </a:ext>
             </a:extLst>
           </p:cNvPr>
@@ -2289,7 +2280,7 @@
           <p:cNvPr id="22" name="quadrant-title-1">
             <a:extLst xmlns:a="http://schemas.openxmlformats.org/drawingml/2006/main">
               <a:ext uri="{FF2B5EF4-FFF2-40B4-BE49-F238E27FC236}">
-                <a16:creationId xmlns:a16="http://schemas.microsoft.com/office/drawing/2014/main" id="{10D477FB-95F4-437B-89DB-3A2E5688D812}"/>
+                <a16:creationId xmlns:a16="http://schemas.microsoft.com/office/drawing/2014/main" id="{87693EDD-8C45-4816-9350-01E207AA3B21}"/>
               </a:ext>
             </a:extLst>
           </p:cNvPr>
@@ -2351,7 +2342,7 @@
           <p:cNvPr id="23" name="quadrant-title-2">
             <a:extLst xmlns:a="http://schemas.openxmlformats.org/drawingml/2006/main">
               <a:ext uri="{FF2B5EF4-FFF2-40B4-BE49-F238E27FC236}">
-                <a16:creationId xmlns:a16="http://schemas.microsoft.com/office/drawing/2014/main" id="{BB0583A1-33CF-42D3-84F0-0BAB0BB69916}"/>
+                <a16:creationId xmlns:a16="http://schemas.microsoft.com/office/drawing/2014/main" id="{D58B7E9E-8D30-4A52-A46C-BE8A4AF765DD}"/>
               </a:ext>
             </a:extLst>
           </p:cNvPr>
@@ -2413,7 +2404,7 @@
           <p:cNvPr id="24" name="quadrant-title-3">
             <a:extLst xmlns:a="http://schemas.openxmlformats.org/drawingml/2006/main">
               <a:ext uri="{FF2B5EF4-FFF2-40B4-BE49-F238E27FC236}">
-                <a16:creationId xmlns:a16="http://schemas.microsoft.com/office/drawing/2014/main" id="{1DC3E395-D86A-4A4B-8F04-7668E512D15A}"/>
+                <a16:creationId xmlns:a16="http://schemas.microsoft.com/office/drawing/2014/main" id="{79B4EBB2-56FA-4857-943E-16AC808AAA82}"/>
               </a:ext>
             </a:extLst>
           </p:cNvPr>
@@ -2475,7 +2466,7 @@
           <p:cNvPr id="25" name="matrix-detail-title-0">
             <a:extLst xmlns:a="http://schemas.openxmlformats.org/drawingml/2006/main">
               <a:ext uri="{FF2B5EF4-FFF2-40B4-BE49-F238E27FC236}">
-                <a16:creationId xmlns:a16="http://schemas.microsoft.com/office/drawing/2014/main" id="{E68FF284-CC5C-409A-A730-7ABCC3BE8FC7}"/>
+                <a16:creationId xmlns:a16="http://schemas.microsoft.com/office/drawing/2014/main" id="{991AB858-CD57-4DC7-AD53-FFBDCFB02BD0}"/>
               </a:ext>
             </a:extLst>
           </p:cNvPr>
@@ -2487,315 +2478,7 @@
         <p:spPr>
           <a:xfrm xmlns:a="http://schemas.openxmlformats.org/drawingml/2006/main" rot="0">
             <a:off x="2028825" y="1752600"/>
-            <a:ext cx="1809750" cy="293341"/>
-          </a:xfrm>
-          <a:prstGeom xmlns:a="http://schemas.openxmlformats.org/drawingml/2006/main" prst="rect">
-            <a:avLst/>
-          </a:prstGeom>
-          <a:noFill xmlns:a="http://schemas.openxmlformats.org/drawingml/2006/main"/>
-          <a:ln xmlns:a="http://schemas.openxmlformats.org/drawingml/2006/main" w="0">
-            <a:noFill/>
-            <a:prstDash val="solid"/>
-          </a:ln>
-        </p:spPr>
-        <p:txBody>
-          <a:bodyPr xmlns:a="http://schemas.openxmlformats.org/drawingml/2006/main" wrap="square" lIns="0" tIns="0" rIns="0" bIns="0" anchor="ctr">
-            <a:noAutofit/>
-          </a:bodyPr>
-          <a:lstStyle xmlns:a="http://schemas.openxmlformats.org/drawingml/2006/main"/>
-          <a:p xmlns:a="http://schemas.openxmlformats.org/drawingml/2006/main">
-            <a:pPr algn="l">
-              <a:lnSpc>
-                <a:spcPct val="110000"/>
-              </a:lnSpc>
-              <a:buNone/>
-              <a:defRPr sz="2100" b="1" i="0">
-                <a:solidFill>
-                  <a:srgbClr val="3E71B5"/>
-                </a:solidFill>
-                <a:latin typeface="Microsoft YaHei"/>
-                <a:ea typeface="Microsoft YaHei"/>
-                <a:cs typeface="Microsoft YaHei"/>
-              </a:defRPr>
-            </a:pPr>
-            <a:r>
-              <a:rPr sz="2100" b="1" i="0">
-                <a:solidFill>
-                  <a:srgbClr val="3E71B5"/>
-                </a:solidFill>
-                <a:latin typeface="Microsoft YaHei"/>
-                <a:ea typeface="Microsoft YaHei"/>
-                <a:cs typeface="Microsoft YaHei"/>
-              </a:rPr>
-              <a:t>快速落地方案</a:t>
-            </a:r>
-          </a:p>
-        </p:txBody>
-      </p:sp>
-      <p:sp>
-        <p:nvSpPr>
-          <p:cNvPr id="26" name="matrix-detail-body-0">
-            <a:extLst xmlns:a="http://schemas.openxmlformats.org/drawingml/2006/main">
-              <a:ext uri="{FF2B5EF4-FFF2-40B4-BE49-F238E27FC236}">
-                <a16:creationId xmlns:a16="http://schemas.microsoft.com/office/drawing/2014/main" id="{03026D4F-E878-4411-97B4-6B4558859647}"/>
-              </a:ext>
-            </a:extLst>
-          </p:cNvPr>
-          <p:cNvSpPr>
-            <a:spLocks xmlns:a="http://schemas.openxmlformats.org/drawingml/2006/main" noGrp="1"/>
-          </p:cNvSpPr>
-          <p:nvPr/>
-        </p:nvSpPr>
-        <p:spPr>
-          <a:xfrm xmlns:a="http://schemas.openxmlformats.org/drawingml/2006/main" rot="0">
-            <a:off x="2028825" y="2093566"/>
-            <a:ext cx="1809750" cy="570014"/>
-          </a:xfrm>
-          <a:prstGeom xmlns:a="http://schemas.openxmlformats.org/drawingml/2006/main" prst="rect">
-            <a:avLst/>
-          </a:prstGeom>
-          <a:noFill xmlns:a="http://schemas.openxmlformats.org/drawingml/2006/main"/>
-          <a:ln xmlns:a="http://schemas.openxmlformats.org/drawingml/2006/main" w="0">
-            <a:noFill/>
-            <a:prstDash val="solid"/>
-          </a:ln>
-        </p:spPr>
-        <p:txBody>
-          <a:bodyPr xmlns:a="http://schemas.openxmlformats.org/drawingml/2006/main" wrap="square" lIns="0" tIns="0" rIns="0" bIns="0" anchor="ctr">
-            <a:noAutofit/>
-          </a:bodyPr>
-          <a:lstStyle xmlns:a="http://schemas.openxmlformats.org/drawingml/2006/main"/>
-          <a:p xmlns:a="http://schemas.openxmlformats.org/drawingml/2006/main">
-            <a:pPr algn="l">
-              <a:lnSpc>
-                <a:spcPct val="132000"/>
-              </a:lnSpc>
-              <a:buNone/>
-              <a:defRPr sz="1700" b="0" i="0">
-                <a:solidFill>
-                  <a:srgbClr val="748495"/>
-                </a:solidFill>
-                <a:latin typeface="Microsoft YaHei"/>
-                <a:ea typeface="Microsoft YaHei"/>
-                <a:cs typeface="Microsoft YaHei"/>
-              </a:defRPr>
-            </a:pPr>
-            <a:r>
-              <a:rPr sz="1700" b="0" i="0">
-                <a:solidFill>
-                  <a:srgbClr val="748495"/>
-                </a:solidFill>
-                <a:latin typeface="Microsoft YaHei"/>
-                <a:ea typeface="Microsoft YaHei"/>
-                <a:cs typeface="Microsoft YaHei"/>
-              </a:rPr>
-              <a:t>优先配置低难度、</a:t>
-            </a:r>
-          </a:p>
-          <a:p xmlns:a="http://schemas.openxmlformats.org/drawingml/2006/main">
-            <a:pPr algn="l">
-              <a:lnSpc>
-                <a:spcPct val="132000"/>
-              </a:lnSpc>
-              <a:buNone/>
-              <a:defRPr sz="1700" b="0" i="0">
-                <a:solidFill>
-                  <a:srgbClr val="748495"/>
-                </a:solidFill>
-                <a:latin typeface="Microsoft YaHei"/>
-                <a:ea typeface="Microsoft YaHei"/>
-                <a:cs typeface="Microsoft YaHei"/>
-              </a:defRPr>
-            </a:pPr>
-            <a:r>
-              <a:rPr sz="1700" b="0" i="0">
-                <a:solidFill>
-                  <a:srgbClr val="748495"/>
-                </a:solidFill>
-                <a:latin typeface="Microsoft YaHei"/>
-                <a:ea typeface="Microsoft YaHei"/>
-                <a:cs typeface="Microsoft YaHei"/>
-              </a:rPr>
-              <a:t>高价值项目</a:t>
-            </a:r>
-          </a:p>
-        </p:txBody>
-      </p:sp>
-      <p:sp>
-        <p:nvSpPr>
-          <p:cNvPr id="27" name="matrix-detail-divider-0">
-            <a:extLst xmlns:a="http://schemas.openxmlformats.org/drawingml/2006/main">
-              <a:ext uri="{FF2B5EF4-FFF2-40B4-BE49-F238E27FC236}">
-                <a16:creationId xmlns:a16="http://schemas.microsoft.com/office/drawing/2014/main" id="{C3DEE654-8564-4461-9C50-3554D738F765}"/>
-              </a:ext>
-            </a:extLst>
-          </p:cNvPr>
-          <p:cNvSpPr>
-            <a:spLocks xmlns:a="http://schemas.openxmlformats.org/drawingml/2006/main" noGrp="1"/>
-          </p:cNvSpPr>
-          <p:nvPr/>
-        </p:nvSpPr>
-        <p:spPr>
-          <a:xfrm xmlns:a="http://schemas.openxmlformats.org/drawingml/2006/main" rot="0">
-            <a:off x="2028825" y="2724150"/>
-            <a:ext cx="1809750" cy="9525"/>
-          </a:xfrm>
-          <a:prstGeom xmlns:a="http://schemas.openxmlformats.org/drawingml/2006/main" prst="line">
-            <a:avLst/>
-          </a:prstGeom>
-          <a:noFill xmlns:a="http://schemas.openxmlformats.org/drawingml/2006/main"/>
-          <a:ln xmlns:a="http://schemas.openxmlformats.org/drawingml/2006/main" w="9525">
-            <a:solidFill>
-              <a:srgbClr val="5B7089">
-                <a:alpha val="55000"/>
-              </a:srgbClr>
-            </a:solidFill>
-            <a:prstDash val="dash"/>
-          </a:ln>
-        </p:spPr>
-      </p:sp>
-      <p:sp>
-        <p:nvSpPr>
-          <p:cNvPr id="28" name="matrix-detail-caption-0">
-            <a:extLst xmlns:a="http://schemas.openxmlformats.org/drawingml/2006/main">
-              <a:ext uri="{FF2B5EF4-FFF2-40B4-BE49-F238E27FC236}">
-                <a16:creationId xmlns:a16="http://schemas.microsoft.com/office/drawing/2014/main" id="{2B29B7E5-0F4F-45A7-ACA7-67B958A77C48}"/>
-              </a:ext>
-            </a:extLst>
-          </p:cNvPr>
-          <p:cNvSpPr>
-            <a:spLocks xmlns:a="http://schemas.openxmlformats.org/drawingml/2006/main" noGrp="1"/>
-          </p:cNvSpPr>
-          <p:nvPr/>
-        </p:nvSpPr>
-        <p:spPr>
-          <a:xfrm xmlns:a="http://schemas.openxmlformats.org/drawingml/2006/main" rot="0">
-            <a:off x="2028825" y="2790825"/>
-            <a:ext cx="1809750" cy="190500"/>
-          </a:xfrm>
-          <a:prstGeom xmlns:a="http://schemas.openxmlformats.org/drawingml/2006/main" prst="rect">
-            <a:avLst/>
-          </a:prstGeom>
-          <a:noFill xmlns:a="http://schemas.openxmlformats.org/drawingml/2006/main"/>
-          <a:ln xmlns:a="http://schemas.openxmlformats.org/drawingml/2006/main" w="0">
-            <a:noFill/>
-            <a:prstDash val="solid"/>
-          </a:ln>
-        </p:spPr>
-        <p:txBody>
-          <a:bodyPr xmlns:a="http://schemas.openxmlformats.org/drawingml/2006/main" wrap="none" lIns="0" tIns="0" rIns="0" bIns="0" anchor="ctr">
-            <a:noAutofit/>
-          </a:bodyPr>
-          <a:lstStyle xmlns:a="http://schemas.openxmlformats.org/drawingml/2006/main"/>
-          <a:p xmlns:a="http://schemas.openxmlformats.org/drawingml/2006/main">
-            <a:pPr algn="l">
-              <a:lnSpc>
-                <a:spcPct val="100000"/>
-              </a:lnSpc>
-              <a:buNone/>
-              <a:defRPr sz="1500" b="1" i="0">
-                <a:solidFill>
-                  <a:srgbClr val="4E6278"/>
-                </a:solidFill>
-                <a:latin typeface="Microsoft YaHei"/>
-                <a:ea typeface="Microsoft YaHei"/>
-                <a:cs typeface="Microsoft YaHei"/>
-              </a:defRPr>
-            </a:pPr>
-            <a:r>
-              <a:rPr sz="1500" b="1" i="0">
-                <a:solidFill>
-                  <a:srgbClr val="4E6278"/>
-                </a:solidFill>
-                <a:latin typeface="Microsoft YaHei"/>
-                <a:ea typeface="Microsoft YaHei"/>
-                <a:cs typeface="Microsoft YaHei"/>
-              </a:rPr>
-              <a:t>关键指标</a:t>
-            </a:r>
-          </a:p>
-        </p:txBody>
-      </p:sp>
-      <p:sp>
-        <p:nvSpPr>
-          <p:cNvPr id="29" name="matrix-detail-metric-label-0-0">
-            <a:extLst xmlns:a="http://schemas.openxmlformats.org/drawingml/2006/main">
-              <a:ext uri="{FF2B5EF4-FFF2-40B4-BE49-F238E27FC236}">
-                <a16:creationId xmlns:a16="http://schemas.microsoft.com/office/drawing/2014/main" id="{3961EF0E-1B84-423E-8D74-D0611DC08847}"/>
-              </a:ext>
-            </a:extLst>
-          </p:cNvPr>
-          <p:cNvSpPr>
-            <a:spLocks xmlns:a="http://schemas.openxmlformats.org/drawingml/2006/main" noGrp="1"/>
-          </p:cNvSpPr>
-          <p:nvPr/>
-        </p:nvSpPr>
-        <p:spPr>
-          <a:xfrm xmlns:a="http://schemas.openxmlformats.org/drawingml/2006/main" rot="0">
-            <a:off x="2028825" y="3028950"/>
-            <a:ext cx="866775" cy="238125"/>
-          </a:xfrm>
-          <a:prstGeom xmlns:a="http://schemas.openxmlformats.org/drawingml/2006/main" prst="rect">
-            <a:avLst/>
-          </a:prstGeom>
-          <a:noFill xmlns:a="http://schemas.openxmlformats.org/drawingml/2006/main"/>
-          <a:ln xmlns:a="http://schemas.openxmlformats.org/drawingml/2006/main" w="0">
-            <a:noFill/>
-            <a:prstDash val="solid"/>
-          </a:ln>
-        </p:spPr>
-        <p:txBody>
-          <a:bodyPr xmlns:a="http://schemas.openxmlformats.org/drawingml/2006/main" wrap="none" lIns="0" tIns="0" rIns="0" bIns="0" anchor="ctr">
-            <a:noAutofit/>
-          </a:bodyPr>
-          <a:lstStyle xmlns:a="http://schemas.openxmlformats.org/drawingml/2006/main"/>
-          <a:p xmlns:a="http://schemas.openxmlformats.org/drawingml/2006/main">
-            <a:pPr algn="l">
-              <a:lnSpc>
-                <a:spcPct val="125000"/>
-              </a:lnSpc>
-              <a:buNone/>
-              <a:defRPr sz="1500" b="0" i="0">
-                <a:solidFill>
-                  <a:srgbClr val="586B80"/>
-                </a:solidFill>
-                <a:latin typeface="Microsoft YaHei"/>
-                <a:ea typeface="Microsoft YaHei"/>
-                <a:cs typeface="Microsoft YaHei"/>
-              </a:defRPr>
-            </a:pPr>
-            <a:r>
-              <a:rPr sz="1500" b="0" i="0">
-                <a:solidFill>
-                  <a:srgbClr val="586B80"/>
-                </a:solidFill>
-                <a:latin typeface="Microsoft YaHei"/>
-                <a:ea typeface="Microsoft YaHei"/>
-                <a:cs typeface="Microsoft YaHei"/>
-              </a:rPr>
-              <a:t>落地周期</a:t>
-            </a:r>
-          </a:p>
-        </p:txBody>
-      </p:sp>
-      <p:sp>
-        <p:nvSpPr>
-          <p:cNvPr id="30" name="matrix-detail-metric-value-0-0">
-            <a:extLst xmlns:a="http://schemas.openxmlformats.org/drawingml/2006/main">
-              <a:ext uri="{FF2B5EF4-FFF2-40B4-BE49-F238E27FC236}">
-                <a16:creationId xmlns:a16="http://schemas.microsoft.com/office/drawing/2014/main" id="{567965A4-24DC-4C49-B330-A9CD039BB01A}"/>
-              </a:ext>
-            </a:extLst>
-          </p:cNvPr>
-          <p:cNvSpPr>
-            <a:spLocks xmlns:a="http://schemas.openxmlformats.org/drawingml/2006/main" noGrp="1"/>
-          </p:cNvSpPr>
-          <p:nvPr/>
-        </p:nvSpPr>
-        <p:spPr>
-          <a:xfrm xmlns:a="http://schemas.openxmlformats.org/drawingml/2006/main" rot="0">
-            <a:off x="2028825" y="3286125"/>
-            <a:ext cx="866775" cy="265357"/>
+            <a:ext cx="1809750" cy="209550"/>
           </a:xfrm>
           <a:prstGeom xmlns:a="http://schemas.openxmlformats.org/drawingml/2006/main" prst="rect">
             <a:avLst/>
@@ -2817,9 +2500,9 @@
                 <a:spcPct val="110000"/>
               </a:lnSpc>
               <a:buNone/>
-              <a:defRPr sz="1900" b="1" i="0">
-                <a:solidFill>
-                  <a:srgbClr val="3B68AB"/>
+              <a:defRPr sz="1500" b="1" i="0">
+                <a:solidFill>
+                  <a:srgbClr val="3E71B5"/>
                 </a:solidFill>
                 <a:latin typeface="Microsoft YaHei"/>
                 <a:ea typeface="Microsoft YaHei"/>
@@ -2827,37 +2510,126 @@
               </a:defRPr>
             </a:pPr>
             <a:r>
-              <a:rPr sz="1900" b="1" i="0">
-                <a:solidFill>
-                  <a:srgbClr val="3B68AB"/>
+              <a:rPr sz="1500" b="1" i="0">
+                <a:solidFill>
+                  <a:srgbClr val="3E71B5"/>
                 </a:solidFill>
                 <a:latin typeface="Microsoft YaHei"/>
                 <a:ea typeface="Microsoft YaHei"/>
                 <a:cs typeface="Microsoft YaHei"/>
               </a:rPr>
-              <a:t>2周</a:t>
+              <a:t>快速落地方案</a:t>
             </a:r>
           </a:p>
         </p:txBody>
       </p:sp>
       <p:sp>
         <p:nvSpPr>
-          <p:cNvPr id="31" name="matrix-detail-metric-label-0-1">
-            <a:extLst xmlns:a="http://schemas.openxmlformats.org/drawingml/2006/main">
-              <a:ext uri="{FF2B5EF4-FFF2-40B4-BE49-F238E27FC236}">
-                <a16:creationId xmlns:a16="http://schemas.microsoft.com/office/drawing/2014/main" id="{7EC5CCCF-D206-4335-899E-4A34CA9B8CE2}"/>
-              </a:ext>
-            </a:extLst>
-          </p:cNvPr>
-          <p:cNvSpPr>
-            <a:spLocks xmlns:a="http://schemas.openxmlformats.org/drawingml/2006/main" noGrp="1"/>
-          </p:cNvSpPr>
-          <p:nvPr/>
-        </p:nvSpPr>
-        <p:spPr>
-          <a:xfrm xmlns:a="http://schemas.openxmlformats.org/drawingml/2006/main" rot="0">
-            <a:off x="2971800" y="3028950"/>
-            <a:ext cx="866775" cy="238125"/>
+          <p:cNvPr id="26" name="matrix-detail-body-0">
+            <a:extLst xmlns:a="http://schemas.openxmlformats.org/drawingml/2006/main">
+              <a:ext uri="{FF2B5EF4-FFF2-40B4-BE49-F238E27FC236}">
+                <a16:creationId xmlns:a16="http://schemas.microsoft.com/office/drawing/2014/main" id="{75E4A0DC-C991-4400-9EBE-09F82E26CD55}"/>
+              </a:ext>
+            </a:extLst>
+          </p:cNvPr>
+          <p:cNvSpPr>
+            <a:spLocks xmlns:a="http://schemas.openxmlformats.org/drawingml/2006/main" noGrp="1"/>
+          </p:cNvSpPr>
+          <p:nvPr/>
+        </p:nvSpPr>
+        <p:spPr>
+          <a:xfrm xmlns:a="http://schemas.openxmlformats.org/drawingml/2006/main" rot="0">
+            <a:off x="2028825" y="2019300"/>
+            <a:ext cx="1809750" cy="487566"/>
+          </a:xfrm>
+          <a:prstGeom xmlns:a="http://schemas.openxmlformats.org/drawingml/2006/main" prst="rect">
+            <a:avLst/>
+          </a:prstGeom>
+          <a:noFill xmlns:a="http://schemas.openxmlformats.org/drawingml/2006/main"/>
+          <a:ln xmlns:a="http://schemas.openxmlformats.org/drawingml/2006/main" w="0">
+            <a:noFill/>
+            <a:prstDash val="solid"/>
+          </a:ln>
+        </p:spPr>
+        <p:txBody>
+          <a:bodyPr xmlns:a="http://schemas.openxmlformats.org/drawingml/2006/main" wrap="square" lIns="0" tIns="0" rIns="0" bIns="0" anchor="ctr">
+            <a:noAutofit/>
+          </a:bodyPr>
+          <a:lstStyle xmlns:a="http://schemas.openxmlformats.org/drawingml/2006/main"/>
+          <a:p xmlns:a="http://schemas.openxmlformats.org/drawingml/2006/main">
+            <a:pPr algn="l">
+              <a:lnSpc>
+                <a:spcPct val="128000"/>
+              </a:lnSpc>
+              <a:buNone/>
+              <a:defRPr sz="1500" b="0" i="0">
+                <a:solidFill>
+                  <a:srgbClr val="748495"/>
+                </a:solidFill>
+                <a:latin typeface="Microsoft YaHei"/>
+                <a:ea typeface="Microsoft YaHei"/>
+                <a:cs typeface="Microsoft YaHei"/>
+              </a:defRPr>
+            </a:pPr>
+            <a:r>
+              <a:rPr sz="1500" b="0" i="0">
+                <a:solidFill>
+                  <a:srgbClr val="748495"/>
+                </a:solidFill>
+                <a:latin typeface="Microsoft YaHei"/>
+                <a:ea typeface="Microsoft YaHei"/>
+                <a:cs typeface="Microsoft YaHei"/>
+              </a:rPr>
+              <a:t>优先配置低难度、高</a:t>
+            </a:r>
+          </a:p>
+          <a:p xmlns:a="http://schemas.openxmlformats.org/drawingml/2006/main">
+            <a:pPr algn="l">
+              <a:lnSpc>
+                <a:spcPct val="128000"/>
+              </a:lnSpc>
+              <a:buNone/>
+              <a:defRPr sz="1500" b="0" i="0">
+                <a:solidFill>
+                  <a:srgbClr val="748495"/>
+                </a:solidFill>
+                <a:latin typeface="Microsoft YaHei"/>
+                <a:ea typeface="Microsoft YaHei"/>
+                <a:cs typeface="Microsoft YaHei"/>
+              </a:defRPr>
+            </a:pPr>
+            <a:r>
+              <a:rPr sz="1500" b="0" i="0">
+                <a:solidFill>
+                  <a:srgbClr val="748495"/>
+                </a:solidFill>
+                <a:latin typeface="Microsoft YaHei"/>
+                <a:ea typeface="Microsoft YaHei"/>
+                <a:cs typeface="Microsoft YaHei"/>
+              </a:rPr>
+              <a:t>价值项目</a:t>
+            </a:r>
+          </a:p>
+        </p:txBody>
+      </p:sp>
+      <p:sp>
+        <p:nvSpPr>
+          <p:cNvPr id="27" name="quadrant-0-detail-region-metric-0">
+            <a:extLst xmlns:a="http://schemas.openxmlformats.org/drawingml/2006/main">
+              <a:ext uri="{FF2B5EF4-FFF2-40B4-BE49-F238E27FC236}">
+                <a16:creationId xmlns:a16="http://schemas.microsoft.com/office/drawing/2014/main" id="{44955185-35F0-409F-9ACF-811A37A5F144}"/>
+              </a:ext>
+            </a:extLst>
+          </p:cNvPr>
+          <p:cNvSpPr>
+            <a:spLocks xmlns:a="http://schemas.openxmlformats.org/drawingml/2006/main" noGrp="1"/>
+          </p:cNvSpPr>
+          <p:nvPr/>
+        </p:nvSpPr>
+        <p:spPr>
+          <a:xfrm xmlns:a="http://schemas.openxmlformats.org/drawingml/2006/main" rot="0">
+            <a:off x="2028825" y="2602116"/>
+            <a:ext cx="866775" cy="260452"/>
           </a:xfrm>
           <a:prstGeom xmlns:a="http://schemas.openxmlformats.org/drawingml/2006/main" prst="rect">
             <a:avLst/>
@@ -2876,7 +2648,193 @@
           <a:p xmlns:a="http://schemas.openxmlformats.org/drawingml/2006/main">
             <a:pPr algn="l">
               <a:lnSpc>
-                <a:spcPct val="125000"/>
+                <a:spcPct val="108000"/>
+              </a:lnSpc>
+              <a:buNone/>
+              <a:defRPr sz="1900" b="1" i="0">
+                <a:solidFill>
+                  <a:srgbClr val="3B68AB"/>
+                </a:solidFill>
+                <a:latin typeface="Microsoft YaHei"/>
+                <a:ea typeface="Microsoft YaHei"/>
+                <a:cs typeface="Microsoft YaHei"/>
+              </a:defRPr>
+            </a:pPr>
+            <a:r>
+              <a:rPr sz="1900" b="1" i="0">
+                <a:solidFill>
+                  <a:srgbClr val="3B68AB"/>
+                </a:solidFill>
+                <a:latin typeface="Microsoft YaHei"/>
+                <a:ea typeface="Microsoft YaHei"/>
+                <a:cs typeface="Microsoft YaHei"/>
+              </a:rPr>
+              <a:t>2周</a:t>
+            </a:r>
+          </a:p>
+        </p:txBody>
+      </p:sp>
+      <p:sp>
+        <p:nvSpPr>
+          <p:cNvPr id="28" name="quadrant-0-detail-region-metric-0-label">
+            <a:extLst xmlns:a="http://schemas.openxmlformats.org/drawingml/2006/main">
+              <a:ext uri="{FF2B5EF4-FFF2-40B4-BE49-F238E27FC236}">
+                <a16:creationId xmlns:a16="http://schemas.microsoft.com/office/drawing/2014/main" id="{A9C5FF89-74BA-4DDC-8700-E228210859BB}"/>
+              </a:ext>
+            </a:extLst>
+          </p:cNvPr>
+          <p:cNvSpPr>
+            <a:spLocks xmlns:a="http://schemas.openxmlformats.org/drawingml/2006/main" noGrp="1"/>
+          </p:cNvSpPr>
+          <p:nvPr/>
+        </p:nvSpPr>
+        <p:spPr>
+          <a:xfrm xmlns:a="http://schemas.openxmlformats.org/drawingml/2006/main" rot="0">
+            <a:off x="2028825" y="2900658"/>
+            <a:ext cx="866775" cy="224733"/>
+          </a:xfrm>
+          <a:prstGeom xmlns:a="http://schemas.openxmlformats.org/drawingml/2006/main" prst="rect">
+            <a:avLst/>
+          </a:prstGeom>
+          <a:noFill xmlns:a="http://schemas.openxmlformats.org/drawingml/2006/main"/>
+          <a:ln xmlns:a="http://schemas.openxmlformats.org/drawingml/2006/main" w="0">
+            <a:noFill/>
+            <a:prstDash val="solid"/>
+          </a:ln>
+        </p:spPr>
+        <p:txBody>
+          <a:bodyPr xmlns:a="http://schemas.openxmlformats.org/drawingml/2006/main" wrap="none" lIns="0" tIns="0" rIns="0" bIns="0" anchor="ctr">
+            <a:noAutofit/>
+          </a:bodyPr>
+          <a:lstStyle xmlns:a="http://schemas.openxmlformats.org/drawingml/2006/main"/>
+          <a:p xmlns:a="http://schemas.openxmlformats.org/drawingml/2006/main">
+            <a:pPr algn="l">
+              <a:lnSpc>
+                <a:spcPct val="118000"/>
+              </a:lnSpc>
+              <a:buNone/>
+              <a:defRPr sz="1500" b="0" i="0">
+                <a:solidFill>
+                  <a:srgbClr val="586B80"/>
+                </a:solidFill>
+                <a:latin typeface="Microsoft YaHei"/>
+                <a:ea typeface="Microsoft YaHei"/>
+                <a:cs typeface="Microsoft YaHei"/>
+              </a:defRPr>
+            </a:pPr>
+            <a:r>
+              <a:rPr sz="1500" b="0" i="0">
+                <a:solidFill>
+                  <a:srgbClr val="586B80"/>
+                </a:solidFill>
+                <a:latin typeface="Microsoft YaHei"/>
+                <a:ea typeface="Microsoft YaHei"/>
+                <a:cs typeface="Microsoft YaHei"/>
+              </a:rPr>
+              <a:t>落地周期</a:t>
+            </a:r>
+          </a:p>
+        </p:txBody>
+      </p:sp>
+      <p:sp>
+        <p:nvSpPr>
+          <p:cNvPr id="29" name="quadrant-0-detail-region-metric-1">
+            <a:extLst xmlns:a="http://schemas.openxmlformats.org/drawingml/2006/main">
+              <a:ext uri="{FF2B5EF4-FFF2-40B4-BE49-F238E27FC236}">
+                <a16:creationId xmlns:a16="http://schemas.microsoft.com/office/drawing/2014/main" id="{A3AC0346-6391-4CB5-A2A0-576C8C91BDEF}"/>
+              </a:ext>
+            </a:extLst>
+          </p:cNvPr>
+          <p:cNvSpPr>
+            <a:spLocks xmlns:a="http://schemas.openxmlformats.org/drawingml/2006/main" noGrp="1"/>
+          </p:cNvSpPr>
+          <p:nvPr/>
+        </p:nvSpPr>
+        <p:spPr>
+          <a:xfrm xmlns:a="http://schemas.openxmlformats.org/drawingml/2006/main" rot="0">
+            <a:off x="2971800" y="2602116"/>
+            <a:ext cx="866775" cy="260452"/>
+          </a:xfrm>
+          <a:prstGeom xmlns:a="http://schemas.openxmlformats.org/drawingml/2006/main" prst="rect">
+            <a:avLst/>
+          </a:prstGeom>
+          <a:noFill xmlns:a="http://schemas.openxmlformats.org/drawingml/2006/main"/>
+          <a:ln xmlns:a="http://schemas.openxmlformats.org/drawingml/2006/main" w="0">
+            <a:noFill/>
+            <a:prstDash val="solid"/>
+          </a:ln>
+        </p:spPr>
+        <p:txBody>
+          <a:bodyPr xmlns:a="http://schemas.openxmlformats.org/drawingml/2006/main" wrap="none" lIns="0" tIns="0" rIns="0" bIns="0" anchor="ctr">
+            <a:noAutofit/>
+          </a:bodyPr>
+          <a:lstStyle xmlns:a="http://schemas.openxmlformats.org/drawingml/2006/main"/>
+          <a:p xmlns:a="http://schemas.openxmlformats.org/drawingml/2006/main">
+            <a:pPr algn="l">
+              <a:lnSpc>
+                <a:spcPct val="108000"/>
+              </a:lnSpc>
+              <a:buNone/>
+              <a:defRPr sz="1900" b="1" i="0">
+                <a:solidFill>
+                  <a:srgbClr val="3B68AB"/>
+                </a:solidFill>
+                <a:latin typeface="Microsoft YaHei"/>
+                <a:ea typeface="Microsoft YaHei"/>
+                <a:cs typeface="Microsoft YaHei"/>
+              </a:defRPr>
+            </a:pPr>
+            <a:r>
+              <a:rPr sz="1900" b="1" i="0">
+                <a:solidFill>
+                  <a:srgbClr val="3B68AB"/>
+                </a:solidFill>
+                <a:latin typeface="Microsoft YaHei"/>
+                <a:ea typeface="Microsoft YaHei"/>
+                <a:cs typeface="Microsoft YaHei"/>
+              </a:rPr>
+              <a:t>2组</a:t>
+            </a:r>
+          </a:p>
+        </p:txBody>
+      </p:sp>
+      <p:sp>
+        <p:nvSpPr>
+          <p:cNvPr id="30" name="quadrant-0-detail-region-metric-1-label">
+            <a:extLst xmlns:a="http://schemas.openxmlformats.org/drawingml/2006/main">
+              <a:ext uri="{FF2B5EF4-FFF2-40B4-BE49-F238E27FC236}">
+                <a16:creationId xmlns:a16="http://schemas.microsoft.com/office/drawing/2014/main" id="{615A47C3-4B72-42F5-99A3-765826BD6B86}"/>
+              </a:ext>
+            </a:extLst>
+          </p:cNvPr>
+          <p:cNvSpPr>
+            <a:spLocks xmlns:a="http://schemas.openxmlformats.org/drawingml/2006/main" noGrp="1"/>
+          </p:cNvSpPr>
+          <p:nvPr/>
+        </p:nvSpPr>
+        <p:spPr>
+          <a:xfrm xmlns:a="http://schemas.openxmlformats.org/drawingml/2006/main" rot="0">
+            <a:off x="2971800" y="2900658"/>
+            <a:ext cx="866775" cy="224733"/>
+          </a:xfrm>
+          <a:prstGeom xmlns:a="http://schemas.openxmlformats.org/drawingml/2006/main" prst="rect">
+            <a:avLst/>
+          </a:prstGeom>
+          <a:noFill xmlns:a="http://schemas.openxmlformats.org/drawingml/2006/main"/>
+          <a:ln xmlns:a="http://schemas.openxmlformats.org/drawingml/2006/main" w="0">
+            <a:noFill/>
+            <a:prstDash val="solid"/>
+          </a:ln>
+        </p:spPr>
+        <p:txBody>
+          <a:bodyPr xmlns:a="http://schemas.openxmlformats.org/drawingml/2006/main" wrap="none" lIns="0" tIns="0" rIns="0" bIns="0" anchor="ctr">
+            <a:noAutofit/>
+          </a:bodyPr>
+          <a:lstStyle xmlns:a="http://schemas.openxmlformats.org/drawingml/2006/main"/>
+          <a:p xmlns:a="http://schemas.openxmlformats.org/drawingml/2006/main">
+            <a:pPr algn="l">
+              <a:lnSpc>
+                <a:spcPct val="118000"/>
               </a:lnSpc>
               <a:buNone/>
               <a:defRPr sz="1500" b="0" i="0">
@@ -2904,22 +2862,22 @@
       </p:sp>
       <p:sp>
         <p:nvSpPr>
-          <p:cNvPr id="32" name="matrix-detail-metric-value-0-1">
-            <a:extLst xmlns:a="http://schemas.openxmlformats.org/drawingml/2006/main">
-              <a:ext uri="{FF2B5EF4-FFF2-40B4-BE49-F238E27FC236}">
-                <a16:creationId xmlns:a16="http://schemas.microsoft.com/office/drawing/2014/main" id="{24980545-B264-4A34-889D-7EBB27B5E575}"/>
-              </a:ext>
-            </a:extLst>
-          </p:cNvPr>
-          <p:cNvSpPr>
-            <a:spLocks xmlns:a="http://schemas.openxmlformats.org/drawingml/2006/main" noGrp="1"/>
-          </p:cNvSpPr>
-          <p:nvPr/>
-        </p:nvSpPr>
-        <p:spPr>
-          <a:xfrm xmlns:a="http://schemas.openxmlformats.org/drawingml/2006/main" rot="0">
-            <a:off x="2971800" y="3286125"/>
-            <a:ext cx="866775" cy="265357"/>
+          <p:cNvPr id="31" name="matrix-detail-title-1">
+            <a:extLst xmlns:a="http://schemas.openxmlformats.org/drawingml/2006/main">
+              <a:ext uri="{FF2B5EF4-FFF2-40B4-BE49-F238E27FC236}">
+                <a16:creationId xmlns:a16="http://schemas.microsoft.com/office/drawing/2014/main" id="{47CD40DF-04F0-410A-B0E4-0CE57622D051}"/>
+              </a:ext>
+            </a:extLst>
+          </p:cNvPr>
+          <p:cNvSpPr>
+            <a:spLocks xmlns:a="http://schemas.openxmlformats.org/drawingml/2006/main" noGrp="1"/>
+          </p:cNvSpPr>
+          <p:nvPr/>
+        </p:nvSpPr>
+        <p:spPr>
+          <a:xfrm xmlns:a="http://schemas.openxmlformats.org/drawingml/2006/main" rot="0">
+            <a:off x="8924925" y="1752600"/>
+            <a:ext cx="2571750" cy="209550"/>
           </a:xfrm>
           <a:prstGeom xmlns:a="http://schemas.openxmlformats.org/drawingml/2006/main" prst="rect">
             <a:avLst/>
@@ -2941,9 +2899,9 @@
                 <a:spcPct val="110000"/>
               </a:lnSpc>
               <a:buNone/>
-              <a:defRPr sz="1900" b="1" i="0">
-                <a:solidFill>
-                  <a:srgbClr val="3B68AB"/>
+              <a:defRPr sz="1500" b="1" i="0">
+                <a:solidFill>
+                  <a:srgbClr val="3E71B5"/>
                 </a:solidFill>
                 <a:latin typeface="Microsoft YaHei"/>
                 <a:ea typeface="Microsoft YaHei"/>
@@ -2951,69 +2909,7 @@
               </a:defRPr>
             </a:pPr>
             <a:r>
-              <a:rPr sz="1900" b="1" i="0">
-                <a:solidFill>
-                  <a:srgbClr val="3B68AB"/>
-                </a:solidFill>
-                <a:latin typeface="Microsoft YaHei"/>
-                <a:ea typeface="Microsoft YaHei"/>
-                <a:cs typeface="Microsoft YaHei"/>
-              </a:rPr>
-              <a:t>2组</a:t>
-            </a:r>
-          </a:p>
-        </p:txBody>
-      </p:sp>
-      <p:sp>
-        <p:nvSpPr>
-          <p:cNvPr id="33" name="matrix-detail-title-1">
-            <a:extLst xmlns:a="http://schemas.openxmlformats.org/drawingml/2006/main">
-              <a:ext uri="{FF2B5EF4-FFF2-40B4-BE49-F238E27FC236}">
-                <a16:creationId xmlns:a16="http://schemas.microsoft.com/office/drawing/2014/main" id="{2CF6F5C1-9E14-46E9-A524-35D38DF0C82F}"/>
-              </a:ext>
-            </a:extLst>
-          </p:cNvPr>
-          <p:cNvSpPr>
-            <a:spLocks xmlns:a="http://schemas.openxmlformats.org/drawingml/2006/main" noGrp="1"/>
-          </p:cNvSpPr>
-          <p:nvPr/>
-        </p:nvSpPr>
-        <p:spPr>
-          <a:xfrm xmlns:a="http://schemas.openxmlformats.org/drawingml/2006/main" rot="0">
-            <a:off x="8924925" y="1752600"/>
-            <a:ext cx="2571750" cy="293341"/>
-          </a:xfrm>
-          <a:prstGeom xmlns:a="http://schemas.openxmlformats.org/drawingml/2006/main" prst="rect">
-            <a:avLst/>
-          </a:prstGeom>
-          <a:noFill xmlns:a="http://schemas.openxmlformats.org/drawingml/2006/main"/>
-          <a:ln xmlns:a="http://schemas.openxmlformats.org/drawingml/2006/main" w="0">
-            <a:noFill/>
-            <a:prstDash val="solid"/>
-          </a:ln>
-        </p:spPr>
-        <p:txBody>
-          <a:bodyPr xmlns:a="http://schemas.openxmlformats.org/drawingml/2006/main" wrap="square" lIns="0" tIns="0" rIns="0" bIns="0" anchor="ctr">
-            <a:noAutofit/>
-          </a:bodyPr>
-          <a:lstStyle xmlns:a="http://schemas.openxmlformats.org/drawingml/2006/main"/>
-          <a:p xmlns:a="http://schemas.openxmlformats.org/drawingml/2006/main">
-            <a:pPr algn="l">
-              <a:lnSpc>
-                <a:spcPct val="110000"/>
-              </a:lnSpc>
-              <a:buNone/>
-              <a:defRPr sz="2100" b="1" i="0">
-                <a:solidFill>
-                  <a:srgbClr val="3E71B5"/>
-                </a:solidFill>
-                <a:latin typeface="Microsoft YaHei"/>
-                <a:ea typeface="Microsoft YaHei"/>
-                <a:cs typeface="Microsoft YaHei"/>
-              </a:defRPr>
-            </a:pPr>
-            <a:r>
-              <a:rPr sz="2100" b="1" i="0">
+              <a:rPr sz="1500" b="1" i="0">
                 <a:solidFill>
                   <a:srgbClr val="3E71B5"/>
                 </a:solidFill>
@@ -3028,144 +2924,22 @@
       </p:sp>
       <p:sp>
         <p:nvSpPr>
-          <p:cNvPr id="34" name="matrix-detail-body-1">
-            <a:extLst xmlns:a="http://schemas.openxmlformats.org/drawingml/2006/main">
-              <a:ext uri="{FF2B5EF4-FFF2-40B4-BE49-F238E27FC236}">
-                <a16:creationId xmlns:a16="http://schemas.microsoft.com/office/drawing/2014/main" id="{6CE851EC-4C5A-459C-AD74-4649938F8A00}"/>
-              </a:ext>
-            </a:extLst>
-          </p:cNvPr>
-          <p:cNvSpPr>
-            <a:spLocks xmlns:a="http://schemas.openxmlformats.org/drawingml/2006/main" noGrp="1"/>
-          </p:cNvSpPr>
-          <p:nvPr/>
-        </p:nvSpPr>
-        <p:spPr>
-          <a:xfrm xmlns:a="http://schemas.openxmlformats.org/drawingml/2006/main" rot="0">
-            <a:off x="8924925" y="2093566"/>
-            <a:ext cx="2571750" cy="570014"/>
-          </a:xfrm>
-          <a:prstGeom xmlns:a="http://schemas.openxmlformats.org/drawingml/2006/main" prst="rect">
-            <a:avLst/>
-          </a:prstGeom>
-          <a:noFill xmlns:a="http://schemas.openxmlformats.org/drawingml/2006/main"/>
-          <a:ln xmlns:a="http://schemas.openxmlformats.org/drawingml/2006/main" w="0">
-            <a:noFill/>
-            <a:prstDash val="solid"/>
-          </a:ln>
-        </p:spPr>
-        <p:txBody>
-          <a:bodyPr xmlns:a="http://schemas.openxmlformats.org/drawingml/2006/main" wrap="square" lIns="0" tIns="0" rIns="0" bIns="0" anchor="ctr">
-            <a:noAutofit/>
-          </a:bodyPr>
-          <a:lstStyle xmlns:a="http://schemas.openxmlformats.org/drawingml/2006/main"/>
-          <a:p xmlns:a="http://schemas.openxmlformats.org/drawingml/2006/main">
-            <a:pPr algn="l">
-              <a:lnSpc>
-                <a:spcPct val="132000"/>
-              </a:lnSpc>
-              <a:buNone/>
-              <a:defRPr sz="1700" b="0" i="0">
-                <a:solidFill>
-                  <a:srgbClr val="748495"/>
-                </a:solidFill>
-                <a:latin typeface="Microsoft YaHei"/>
-                <a:ea typeface="Microsoft YaHei"/>
-                <a:cs typeface="Microsoft YaHei"/>
-              </a:defRPr>
-            </a:pPr>
-            <a:r>
-              <a:rPr sz="1700" b="0" i="0">
-                <a:solidFill>
-                  <a:srgbClr val="748495"/>
-                </a:solidFill>
-                <a:latin typeface="Microsoft YaHei"/>
-                <a:ea typeface="Microsoft YaHei"/>
-                <a:cs typeface="Microsoft YaHei"/>
-              </a:rPr>
-              <a:t>围绕高价值项目集中资源</a:t>
-            </a:r>
-          </a:p>
-          <a:p xmlns:a="http://schemas.openxmlformats.org/drawingml/2006/main">
-            <a:pPr algn="l">
-              <a:lnSpc>
-                <a:spcPct val="132000"/>
-              </a:lnSpc>
-              <a:buNone/>
-              <a:defRPr sz="1700" b="0" i="0">
-                <a:solidFill>
-                  <a:srgbClr val="748495"/>
-                </a:solidFill>
-                <a:latin typeface="Microsoft YaHei"/>
-                <a:ea typeface="Microsoft YaHei"/>
-                <a:cs typeface="Microsoft YaHei"/>
-              </a:defRPr>
-            </a:pPr>
-            <a:r>
-              <a:rPr sz="1700" b="0" i="0">
-                <a:solidFill>
-                  <a:srgbClr val="748495"/>
-                </a:solidFill>
-                <a:latin typeface="Microsoft YaHei"/>
-                <a:ea typeface="Microsoft YaHei"/>
-                <a:cs typeface="Microsoft YaHei"/>
-              </a:rPr>
-              <a:t>建设</a:t>
-            </a:r>
-          </a:p>
-        </p:txBody>
-      </p:sp>
-      <p:sp>
-        <p:nvSpPr>
-          <p:cNvPr id="35" name="matrix-detail-divider-1">
-            <a:extLst xmlns:a="http://schemas.openxmlformats.org/drawingml/2006/main">
-              <a:ext uri="{FF2B5EF4-FFF2-40B4-BE49-F238E27FC236}">
-                <a16:creationId xmlns:a16="http://schemas.microsoft.com/office/drawing/2014/main" id="{F2B048C5-9DA8-4A21-B047-7EC969862711}"/>
-              </a:ext>
-            </a:extLst>
-          </p:cNvPr>
-          <p:cNvSpPr>
-            <a:spLocks xmlns:a="http://schemas.openxmlformats.org/drawingml/2006/main" noGrp="1"/>
-          </p:cNvSpPr>
-          <p:nvPr/>
-        </p:nvSpPr>
-        <p:spPr>
-          <a:xfrm xmlns:a="http://schemas.openxmlformats.org/drawingml/2006/main" rot="0">
-            <a:off x="8924925" y="2724150"/>
-            <a:ext cx="2571750" cy="9525"/>
-          </a:xfrm>
-          <a:prstGeom xmlns:a="http://schemas.openxmlformats.org/drawingml/2006/main" prst="line">
-            <a:avLst/>
-          </a:prstGeom>
-          <a:noFill xmlns:a="http://schemas.openxmlformats.org/drawingml/2006/main"/>
-          <a:ln xmlns:a="http://schemas.openxmlformats.org/drawingml/2006/main" w="9525">
-            <a:solidFill>
-              <a:srgbClr val="5B7089">
-                <a:alpha val="55000"/>
-              </a:srgbClr>
-            </a:solidFill>
-            <a:prstDash val="dash"/>
-          </a:ln>
-        </p:spPr>
-      </p:sp>
-      <p:sp>
-        <p:nvSpPr>
-          <p:cNvPr id="36" name="matrix-detail-caption-1">
-            <a:extLst xmlns:a="http://schemas.openxmlformats.org/drawingml/2006/main">
-              <a:ext uri="{FF2B5EF4-FFF2-40B4-BE49-F238E27FC236}">
-                <a16:creationId xmlns:a16="http://schemas.microsoft.com/office/drawing/2014/main" id="{36EDD244-7EE6-4E29-97C8-DBBA0D0CA8BD}"/>
-              </a:ext>
-            </a:extLst>
-          </p:cNvPr>
-          <p:cNvSpPr>
-            <a:spLocks xmlns:a="http://schemas.openxmlformats.org/drawingml/2006/main" noGrp="1"/>
-          </p:cNvSpPr>
-          <p:nvPr/>
-        </p:nvSpPr>
-        <p:spPr>
-          <a:xfrm xmlns:a="http://schemas.openxmlformats.org/drawingml/2006/main" rot="0">
-            <a:off x="8924925" y="2790825"/>
-            <a:ext cx="2571750" cy="190500"/>
+          <p:cNvPr id="32" name="matrix-detail-body-1">
+            <a:extLst xmlns:a="http://schemas.openxmlformats.org/drawingml/2006/main">
+              <a:ext uri="{FF2B5EF4-FFF2-40B4-BE49-F238E27FC236}">
+                <a16:creationId xmlns:a16="http://schemas.microsoft.com/office/drawing/2014/main" id="{A2D50724-B264-4C82-AAB2-B00583614FEA}"/>
+              </a:ext>
+            </a:extLst>
+          </p:cNvPr>
+          <p:cNvSpPr>
+            <a:spLocks xmlns:a="http://schemas.openxmlformats.org/drawingml/2006/main" noGrp="1"/>
+          </p:cNvSpPr>
+          <p:nvPr/>
+        </p:nvSpPr>
+        <p:spPr>
+          <a:xfrm xmlns:a="http://schemas.openxmlformats.org/drawingml/2006/main" rot="0">
+            <a:off x="8924925" y="2019300"/>
+            <a:ext cx="2571750" cy="243783"/>
           </a:xfrm>
           <a:prstGeom xmlns:a="http://schemas.openxmlformats.org/drawingml/2006/main" prst="rect">
             <a:avLst/>
@@ -3184,12 +2958,12 @@
           <a:p xmlns:a="http://schemas.openxmlformats.org/drawingml/2006/main">
             <a:pPr algn="l">
               <a:lnSpc>
-                <a:spcPct val="100000"/>
+                <a:spcPct val="128000"/>
               </a:lnSpc>
               <a:buNone/>
-              <a:defRPr sz="1500" b="1" i="0">
-                <a:solidFill>
-                  <a:srgbClr val="4E6278"/>
+              <a:defRPr sz="1500" b="0" i="0">
+                <a:solidFill>
+                  <a:srgbClr val="748495"/>
                 </a:solidFill>
                 <a:latin typeface="Microsoft YaHei"/>
                 <a:ea typeface="Microsoft YaHei"/>
@@ -3197,37 +2971,37 @@
               </a:defRPr>
             </a:pPr>
             <a:r>
-              <a:rPr sz="1500" b="1" i="0">
-                <a:solidFill>
-                  <a:srgbClr val="4E6278"/>
+              <a:rPr sz="1500" b="0" i="0">
+                <a:solidFill>
+                  <a:srgbClr val="748495"/>
                 </a:solidFill>
                 <a:latin typeface="Microsoft YaHei"/>
                 <a:ea typeface="Microsoft YaHei"/>
                 <a:cs typeface="Microsoft YaHei"/>
               </a:rPr>
-              <a:t>关键指标</a:t>
+              <a:t>围绕高价值项目集中资源建设</a:t>
             </a:r>
           </a:p>
         </p:txBody>
       </p:sp>
       <p:sp>
         <p:nvSpPr>
-          <p:cNvPr id="37" name="matrix-detail-metric-label-1-0">
-            <a:extLst xmlns:a="http://schemas.openxmlformats.org/drawingml/2006/main">
-              <a:ext uri="{FF2B5EF4-FFF2-40B4-BE49-F238E27FC236}">
-                <a16:creationId xmlns:a16="http://schemas.microsoft.com/office/drawing/2014/main" id="{586084F8-919F-4121-B4FB-8318180FF529}"/>
-              </a:ext>
-            </a:extLst>
-          </p:cNvPr>
-          <p:cNvSpPr>
-            <a:spLocks xmlns:a="http://schemas.openxmlformats.org/drawingml/2006/main" noGrp="1"/>
-          </p:cNvSpPr>
-          <p:nvPr/>
-        </p:nvSpPr>
-        <p:spPr>
-          <a:xfrm xmlns:a="http://schemas.openxmlformats.org/drawingml/2006/main" rot="0">
-            <a:off x="8924925" y="3028950"/>
-            <a:ext cx="1247775" cy="238125"/>
+          <p:cNvPr id="33" name="quadrant-1-detail-region-metric-0">
+            <a:extLst xmlns:a="http://schemas.openxmlformats.org/drawingml/2006/main">
+              <a:ext uri="{FF2B5EF4-FFF2-40B4-BE49-F238E27FC236}">
+                <a16:creationId xmlns:a16="http://schemas.microsoft.com/office/drawing/2014/main" id="{C5256B69-319E-428C-8A7E-29A39224A3D3}"/>
+              </a:ext>
+            </a:extLst>
+          </p:cNvPr>
+          <p:cNvSpPr>
+            <a:spLocks xmlns:a="http://schemas.openxmlformats.org/drawingml/2006/main" noGrp="1"/>
+          </p:cNvSpPr>
+          <p:nvPr/>
+        </p:nvSpPr>
+        <p:spPr>
+          <a:xfrm xmlns:a="http://schemas.openxmlformats.org/drawingml/2006/main" rot="0">
+            <a:off x="8924925" y="2358333"/>
+            <a:ext cx="1247775" cy="260452"/>
           </a:xfrm>
           <a:prstGeom xmlns:a="http://schemas.openxmlformats.org/drawingml/2006/main" prst="rect">
             <a:avLst/>
@@ -3246,7 +3020,69 @@
           <a:p xmlns:a="http://schemas.openxmlformats.org/drawingml/2006/main">
             <a:pPr algn="l">
               <a:lnSpc>
-                <a:spcPct val="125000"/>
+                <a:spcPct val="108000"/>
+              </a:lnSpc>
+              <a:buNone/>
+              <a:defRPr sz="1900" b="1" i="0">
+                <a:solidFill>
+                  <a:srgbClr val="3B68AB"/>
+                </a:solidFill>
+                <a:latin typeface="Microsoft YaHei"/>
+                <a:ea typeface="Microsoft YaHei"/>
+                <a:cs typeface="Microsoft YaHei"/>
+              </a:defRPr>
+            </a:pPr>
+            <a:r>
+              <a:rPr sz="1900" b="1" i="0">
+                <a:solidFill>
+                  <a:srgbClr val="3B68AB"/>
+                </a:solidFill>
+                <a:latin typeface="Microsoft YaHei"/>
+                <a:ea typeface="Microsoft YaHei"/>
+                <a:cs typeface="Microsoft YaHei"/>
+              </a:rPr>
+              <a:t>3月</a:t>
+            </a:r>
+          </a:p>
+        </p:txBody>
+      </p:sp>
+      <p:sp>
+        <p:nvSpPr>
+          <p:cNvPr id="34" name="quadrant-1-detail-region-metric-0-label">
+            <a:extLst xmlns:a="http://schemas.openxmlformats.org/drawingml/2006/main">
+              <a:ext uri="{FF2B5EF4-FFF2-40B4-BE49-F238E27FC236}">
+                <a16:creationId xmlns:a16="http://schemas.microsoft.com/office/drawing/2014/main" id="{2709F292-A1DC-4A7B-9EDD-B2E583223543}"/>
+              </a:ext>
+            </a:extLst>
+          </p:cNvPr>
+          <p:cNvSpPr>
+            <a:spLocks xmlns:a="http://schemas.openxmlformats.org/drawingml/2006/main" noGrp="1"/>
+          </p:cNvSpPr>
+          <p:nvPr/>
+        </p:nvSpPr>
+        <p:spPr>
+          <a:xfrm xmlns:a="http://schemas.openxmlformats.org/drawingml/2006/main" rot="0">
+            <a:off x="8924925" y="2656884"/>
+            <a:ext cx="1247775" cy="224733"/>
+          </a:xfrm>
+          <a:prstGeom xmlns:a="http://schemas.openxmlformats.org/drawingml/2006/main" prst="rect">
+            <a:avLst/>
+          </a:prstGeom>
+          <a:noFill xmlns:a="http://schemas.openxmlformats.org/drawingml/2006/main"/>
+          <a:ln xmlns:a="http://schemas.openxmlformats.org/drawingml/2006/main" w="0">
+            <a:noFill/>
+            <a:prstDash val="solid"/>
+          </a:ln>
+        </p:spPr>
+        <p:txBody>
+          <a:bodyPr xmlns:a="http://schemas.openxmlformats.org/drawingml/2006/main" wrap="none" lIns="0" tIns="0" rIns="0" bIns="0" anchor="ctr">
+            <a:noAutofit/>
+          </a:bodyPr>
+          <a:lstStyle xmlns:a="http://schemas.openxmlformats.org/drawingml/2006/main"/>
+          <a:p xmlns:a="http://schemas.openxmlformats.org/drawingml/2006/main">
+            <a:pPr algn="l">
+              <a:lnSpc>
+                <a:spcPct val="118000"/>
               </a:lnSpc>
               <a:buNone/>
               <a:defRPr sz="1500" b="0" i="0">
@@ -3274,22 +3110,146 @@
       </p:sp>
       <p:sp>
         <p:nvSpPr>
-          <p:cNvPr id="38" name="matrix-detail-metric-value-1-0">
-            <a:extLst xmlns:a="http://schemas.openxmlformats.org/drawingml/2006/main">
-              <a:ext uri="{FF2B5EF4-FFF2-40B4-BE49-F238E27FC236}">
-                <a16:creationId xmlns:a16="http://schemas.microsoft.com/office/drawing/2014/main" id="{7FC5DE0C-F9C5-488D-AA46-CFC1BF98FF39}"/>
-              </a:ext>
-            </a:extLst>
-          </p:cNvPr>
-          <p:cNvSpPr>
-            <a:spLocks xmlns:a="http://schemas.openxmlformats.org/drawingml/2006/main" noGrp="1"/>
-          </p:cNvSpPr>
-          <p:nvPr/>
-        </p:nvSpPr>
-        <p:spPr>
-          <a:xfrm xmlns:a="http://schemas.openxmlformats.org/drawingml/2006/main" rot="0">
-            <a:off x="8924925" y="3286125"/>
-            <a:ext cx="1247775" cy="265357"/>
+          <p:cNvPr id="35" name="quadrant-1-detail-region-metric-1">
+            <a:extLst xmlns:a="http://schemas.openxmlformats.org/drawingml/2006/main">
+              <a:ext uri="{FF2B5EF4-FFF2-40B4-BE49-F238E27FC236}">
+                <a16:creationId xmlns:a16="http://schemas.microsoft.com/office/drawing/2014/main" id="{89BF0FDD-7DCE-4112-937C-AF499B04BEB0}"/>
+              </a:ext>
+            </a:extLst>
+          </p:cNvPr>
+          <p:cNvSpPr>
+            <a:spLocks xmlns:a="http://schemas.openxmlformats.org/drawingml/2006/main" noGrp="1"/>
+          </p:cNvSpPr>
+          <p:nvPr/>
+        </p:nvSpPr>
+        <p:spPr>
+          <a:xfrm xmlns:a="http://schemas.openxmlformats.org/drawingml/2006/main" rot="0">
+            <a:off x="10248900" y="2358333"/>
+            <a:ext cx="1247775" cy="260452"/>
+          </a:xfrm>
+          <a:prstGeom xmlns:a="http://schemas.openxmlformats.org/drawingml/2006/main" prst="rect">
+            <a:avLst/>
+          </a:prstGeom>
+          <a:noFill xmlns:a="http://schemas.openxmlformats.org/drawingml/2006/main"/>
+          <a:ln xmlns:a="http://schemas.openxmlformats.org/drawingml/2006/main" w="0">
+            <a:noFill/>
+            <a:prstDash val="solid"/>
+          </a:ln>
+        </p:spPr>
+        <p:txBody>
+          <a:bodyPr xmlns:a="http://schemas.openxmlformats.org/drawingml/2006/main" wrap="none" lIns="0" tIns="0" rIns="0" bIns="0" anchor="ctr">
+            <a:noAutofit/>
+          </a:bodyPr>
+          <a:lstStyle xmlns:a="http://schemas.openxmlformats.org/drawingml/2006/main"/>
+          <a:p xmlns:a="http://schemas.openxmlformats.org/drawingml/2006/main">
+            <a:pPr algn="l">
+              <a:lnSpc>
+                <a:spcPct val="108000"/>
+              </a:lnSpc>
+              <a:buNone/>
+              <a:defRPr sz="1900" b="1" i="0">
+                <a:solidFill>
+                  <a:srgbClr val="3B68AB"/>
+                </a:solidFill>
+                <a:latin typeface="Microsoft YaHei"/>
+                <a:ea typeface="Microsoft YaHei"/>
+                <a:cs typeface="Microsoft YaHei"/>
+              </a:defRPr>
+            </a:pPr>
+            <a:r>
+              <a:rPr sz="1900" b="1" i="0">
+                <a:solidFill>
+                  <a:srgbClr val="3B68AB"/>
+                </a:solidFill>
+                <a:latin typeface="Microsoft YaHei"/>
+                <a:ea typeface="Microsoft YaHei"/>
+                <a:cs typeface="Microsoft YaHei"/>
+              </a:rPr>
+              <a:t>重点</a:t>
+            </a:r>
+          </a:p>
+        </p:txBody>
+      </p:sp>
+      <p:sp>
+        <p:nvSpPr>
+          <p:cNvPr id="36" name="quadrant-1-detail-region-metric-1-label">
+            <a:extLst xmlns:a="http://schemas.openxmlformats.org/drawingml/2006/main">
+              <a:ext uri="{FF2B5EF4-FFF2-40B4-BE49-F238E27FC236}">
+                <a16:creationId xmlns:a16="http://schemas.microsoft.com/office/drawing/2014/main" id="{0A3291CE-6922-4B02-B7E4-03137EC8AFE6}"/>
+              </a:ext>
+            </a:extLst>
+          </p:cNvPr>
+          <p:cNvSpPr>
+            <a:spLocks xmlns:a="http://schemas.openxmlformats.org/drawingml/2006/main" noGrp="1"/>
+          </p:cNvSpPr>
+          <p:nvPr/>
+        </p:nvSpPr>
+        <p:spPr>
+          <a:xfrm xmlns:a="http://schemas.openxmlformats.org/drawingml/2006/main" rot="0">
+            <a:off x="10248900" y="2656884"/>
+            <a:ext cx="1247775" cy="224733"/>
+          </a:xfrm>
+          <a:prstGeom xmlns:a="http://schemas.openxmlformats.org/drawingml/2006/main" prst="rect">
+            <a:avLst/>
+          </a:prstGeom>
+          <a:noFill xmlns:a="http://schemas.openxmlformats.org/drawingml/2006/main"/>
+          <a:ln xmlns:a="http://schemas.openxmlformats.org/drawingml/2006/main" w="0">
+            <a:noFill/>
+            <a:prstDash val="solid"/>
+          </a:ln>
+        </p:spPr>
+        <p:txBody>
+          <a:bodyPr xmlns:a="http://schemas.openxmlformats.org/drawingml/2006/main" wrap="none" lIns="0" tIns="0" rIns="0" bIns="0" anchor="ctr">
+            <a:noAutofit/>
+          </a:bodyPr>
+          <a:lstStyle xmlns:a="http://schemas.openxmlformats.org/drawingml/2006/main"/>
+          <a:p xmlns:a="http://schemas.openxmlformats.org/drawingml/2006/main">
+            <a:pPr algn="l">
+              <a:lnSpc>
+                <a:spcPct val="118000"/>
+              </a:lnSpc>
+              <a:buNone/>
+              <a:defRPr sz="1500" b="0" i="0">
+                <a:solidFill>
+                  <a:srgbClr val="586B80"/>
+                </a:solidFill>
+                <a:latin typeface="Microsoft YaHei"/>
+                <a:ea typeface="Microsoft YaHei"/>
+                <a:cs typeface="Microsoft YaHei"/>
+              </a:defRPr>
+            </a:pPr>
+            <a:r>
+              <a:rPr sz="1500" b="0" i="0">
+                <a:solidFill>
+                  <a:srgbClr val="586B80"/>
+                </a:solidFill>
+                <a:latin typeface="Microsoft YaHei"/>
+                <a:ea typeface="Microsoft YaHei"/>
+                <a:cs typeface="Microsoft YaHei"/>
+              </a:rPr>
+              <a:t>资源投入</a:t>
+            </a:r>
+          </a:p>
+        </p:txBody>
+      </p:sp>
+      <p:sp>
+        <p:nvSpPr>
+          <p:cNvPr id="37" name="matrix-detail-title-2">
+            <a:extLst xmlns:a="http://schemas.openxmlformats.org/drawingml/2006/main">
+              <a:ext uri="{FF2B5EF4-FFF2-40B4-BE49-F238E27FC236}">
+                <a16:creationId xmlns:a16="http://schemas.microsoft.com/office/drawing/2014/main" id="{D76E72FE-448E-44C9-BDE0-EEFC43B8DD40}"/>
+              </a:ext>
+            </a:extLst>
+          </p:cNvPr>
+          <p:cNvSpPr>
+            <a:spLocks xmlns:a="http://schemas.openxmlformats.org/drawingml/2006/main" noGrp="1"/>
+          </p:cNvSpPr>
+          <p:nvPr/>
+        </p:nvSpPr>
+        <p:spPr>
+          <a:xfrm xmlns:a="http://schemas.openxmlformats.org/drawingml/2006/main" rot="0">
+            <a:off x="2028825" y="4286250"/>
+            <a:ext cx="1809750" cy="209550"/>
           </a:xfrm>
           <a:prstGeom xmlns:a="http://schemas.openxmlformats.org/drawingml/2006/main" prst="rect">
             <a:avLst/>
@@ -3311,9 +3271,9 @@
                 <a:spcPct val="110000"/>
               </a:lnSpc>
               <a:buNone/>
-              <a:defRPr sz="1900" b="1" i="0">
-                <a:solidFill>
-                  <a:srgbClr val="3B68AB"/>
+              <a:defRPr sz="1500" b="1" i="0">
+                <a:solidFill>
+                  <a:srgbClr val="3E71B5"/>
                 </a:solidFill>
                 <a:latin typeface="Microsoft YaHei"/>
                 <a:ea typeface="Microsoft YaHei"/>
@@ -3321,37 +3281,126 @@
               </a:defRPr>
             </a:pPr>
             <a:r>
-              <a:rPr sz="1900" b="1" i="0">
-                <a:solidFill>
-                  <a:srgbClr val="3B68AB"/>
+              <a:rPr sz="1500" b="1" i="0">
+                <a:solidFill>
+                  <a:srgbClr val="3E71B5"/>
                 </a:solidFill>
                 <a:latin typeface="Microsoft YaHei"/>
                 <a:ea typeface="Microsoft YaHei"/>
                 <a:cs typeface="Microsoft YaHei"/>
               </a:rPr>
-              <a:t>3月</a:t>
+              <a:t>常规优化方案</a:t>
             </a:r>
           </a:p>
         </p:txBody>
       </p:sp>
       <p:sp>
         <p:nvSpPr>
-          <p:cNvPr id="39" name="matrix-detail-metric-label-1-1">
-            <a:extLst xmlns:a="http://schemas.openxmlformats.org/drawingml/2006/main">
-              <a:ext uri="{FF2B5EF4-FFF2-40B4-BE49-F238E27FC236}">
-                <a16:creationId xmlns:a16="http://schemas.microsoft.com/office/drawing/2014/main" id="{53ADE1B5-9E00-4545-A588-98267FB384A9}"/>
-              </a:ext>
-            </a:extLst>
-          </p:cNvPr>
-          <p:cNvSpPr>
-            <a:spLocks xmlns:a="http://schemas.openxmlformats.org/drawingml/2006/main" noGrp="1"/>
-          </p:cNvSpPr>
-          <p:nvPr/>
-        </p:nvSpPr>
-        <p:spPr>
-          <a:xfrm xmlns:a="http://schemas.openxmlformats.org/drawingml/2006/main" rot="0">
-            <a:off x="10248900" y="3028950"/>
-            <a:ext cx="1247775" cy="238125"/>
+          <p:cNvPr id="38" name="matrix-detail-body-2">
+            <a:extLst xmlns:a="http://schemas.openxmlformats.org/drawingml/2006/main">
+              <a:ext uri="{FF2B5EF4-FFF2-40B4-BE49-F238E27FC236}">
+                <a16:creationId xmlns:a16="http://schemas.microsoft.com/office/drawing/2014/main" id="{EE39F3C9-56BA-4760-8867-BE0631EC6C12}"/>
+              </a:ext>
+            </a:extLst>
+          </p:cNvPr>
+          <p:cNvSpPr>
+            <a:spLocks xmlns:a="http://schemas.openxmlformats.org/drawingml/2006/main" noGrp="1"/>
+          </p:cNvSpPr>
+          <p:nvPr/>
+        </p:nvSpPr>
+        <p:spPr>
+          <a:xfrm xmlns:a="http://schemas.openxmlformats.org/drawingml/2006/main" rot="0">
+            <a:off x="2028825" y="4552950"/>
+            <a:ext cx="1809750" cy="487566"/>
+          </a:xfrm>
+          <a:prstGeom xmlns:a="http://schemas.openxmlformats.org/drawingml/2006/main" prst="rect">
+            <a:avLst/>
+          </a:prstGeom>
+          <a:noFill xmlns:a="http://schemas.openxmlformats.org/drawingml/2006/main"/>
+          <a:ln xmlns:a="http://schemas.openxmlformats.org/drawingml/2006/main" w="0">
+            <a:noFill/>
+            <a:prstDash val="solid"/>
+          </a:ln>
+        </p:spPr>
+        <p:txBody>
+          <a:bodyPr xmlns:a="http://schemas.openxmlformats.org/drawingml/2006/main" wrap="square" lIns="0" tIns="0" rIns="0" bIns="0" anchor="ctr">
+            <a:noAutofit/>
+          </a:bodyPr>
+          <a:lstStyle xmlns:a="http://schemas.openxmlformats.org/drawingml/2006/main"/>
+          <a:p xmlns:a="http://schemas.openxmlformats.org/drawingml/2006/main">
+            <a:pPr algn="l">
+              <a:lnSpc>
+                <a:spcPct val="128000"/>
+              </a:lnSpc>
+              <a:buNone/>
+              <a:defRPr sz="1500" b="0" i="0">
+                <a:solidFill>
+                  <a:srgbClr val="748495"/>
+                </a:solidFill>
+                <a:latin typeface="Microsoft YaHei"/>
+                <a:ea typeface="Microsoft YaHei"/>
+                <a:cs typeface="Microsoft YaHei"/>
+              </a:defRPr>
+            </a:pPr>
+            <a:r>
+              <a:rPr sz="1500" b="0" i="0">
+                <a:solidFill>
+                  <a:srgbClr val="748495"/>
+                </a:solidFill>
+                <a:latin typeface="Microsoft YaHei"/>
+                <a:ea typeface="Microsoft YaHei"/>
+                <a:cs typeface="Microsoft YaHei"/>
+              </a:rPr>
+              <a:t>以低成本方式择机改</a:t>
+            </a:r>
+          </a:p>
+          <a:p xmlns:a="http://schemas.openxmlformats.org/drawingml/2006/main">
+            <a:pPr algn="l">
+              <a:lnSpc>
+                <a:spcPct val="128000"/>
+              </a:lnSpc>
+              <a:buNone/>
+              <a:defRPr sz="1500" b="0" i="0">
+                <a:solidFill>
+                  <a:srgbClr val="748495"/>
+                </a:solidFill>
+                <a:latin typeface="Microsoft YaHei"/>
+                <a:ea typeface="Microsoft YaHei"/>
+                <a:cs typeface="Microsoft YaHei"/>
+              </a:defRPr>
+            </a:pPr>
+            <a:r>
+              <a:rPr sz="1500" b="0" i="0">
+                <a:solidFill>
+                  <a:srgbClr val="748495"/>
+                </a:solidFill>
+                <a:latin typeface="Microsoft YaHei"/>
+                <a:ea typeface="Microsoft YaHei"/>
+                <a:cs typeface="Microsoft YaHei"/>
+              </a:rPr>
+              <a:t>善体验</a:t>
+            </a:r>
+          </a:p>
+        </p:txBody>
+      </p:sp>
+      <p:sp>
+        <p:nvSpPr>
+          <p:cNvPr id="39" name="quadrant-2-detail-region-metric-0">
+            <a:extLst xmlns:a="http://schemas.openxmlformats.org/drawingml/2006/main">
+              <a:ext uri="{FF2B5EF4-FFF2-40B4-BE49-F238E27FC236}">
+                <a16:creationId xmlns:a16="http://schemas.microsoft.com/office/drawing/2014/main" id="{6252B06F-ACED-44EA-9050-4B3DCAE8B9AC}"/>
+              </a:ext>
+            </a:extLst>
+          </p:cNvPr>
+          <p:cNvSpPr>
+            <a:spLocks xmlns:a="http://schemas.openxmlformats.org/drawingml/2006/main" noGrp="1"/>
+          </p:cNvSpPr>
+          <p:nvPr/>
+        </p:nvSpPr>
+        <p:spPr>
+          <a:xfrm xmlns:a="http://schemas.openxmlformats.org/drawingml/2006/main" rot="0">
+            <a:off x="2028825" y="5135766"/>
+            <a:ext cx="866775" cy="260452"/>
           </a:xfrm>
           <a:prstGeom xmlns:a="http://schemas.openxmlformats.org/drawingml/2006/main" prst="rect">
             <a:avLst/>
@@ -3370,7 +3419,69 @@
           <a:p xmlns:a="http://schemas.openxmlformats.org/drawingml/2006/main">
             <a:pPr algn="l">
               <a:lnSpc>
-                <a:spcPct val="125000"/>
+                <a:spcPct val="108000"/>
+              </a:lnSpc>
+              <a:buNone/>
+              <a:defRPr sz="1900" b="1" i="0">
+                <a:solidFill>
+                  <a:srgbClr val="3B68AB"/>
+                </a:solidFill>
+                <a:latin typeface="Microsoft YaHei"/>
+                <a:ea typeface="Microsoft YaHei"/>
+                <a:cs typeface="Microsoft YaHei"/>
+              </a:defRPr>
+            </a:pPr>
+            <a:r>
+              <a:rPr sz="1900" b="1" i="0">
+                <a:solidFill>
+                  <a:srgbClr val="3B68AB"/>
+                </a:solidFill>
+                <a:latin typeface="Microsoft YaHei"/>
+                <a:ea typeface="Microsoft YaHei"/>
+                <a:cs typeface="Microsoft YaHei"/>
+              </a:rPr>
+              <a:t>季度</a:t>
+            </a:r>
+          </a:p>
+        </p:txBody>
+      </p:sp>
+      <p:sp>
+        <p:nvSpPr>
+          <p:cNvPr id="40" name="quadrant-2-detail-region-metric-0-label">
+            <a:extLst xmlns:a="http://schemas.openxmlformats.org/drawingml/2006/main">
+              <a:ext uri="{FF2B5EF4-FFF2-40B4-BE49-F238E27FC236}">
+                <a16:creationId xmlns:a16="http://schemas.microsoft.com/office/drawing/2014/main" id="{46773D2B-D7D4-4960-9259-E26AF40AE692}"/>
+              </a:ext>
+            </a:extLst>
+          </p:cNvPr>
+          <p:cNvSpPr>
+            <a:spLocks xmlns:a="http://schemas.openxmlformats.org/drawingml/2006/main" noGrp="1"/>
+          </p:cNvSpPr>
+          <p:nvPr/>
+        </p:nvSpPr>
+        <p:spPr>
+          <a:xfrm xmlns:a="http://schemas.openxmlformats.org/drawingml/2006/main" rot="0">
+            <a:off x="2028825" y="5434308"/>
+            <a:ext cx="866775" cy="224733"/>
+          </a:xfrm>
+          <a:prstGeom xmlns:a="http://schemas.openxmlformats.org/drawingml/2006/main" prst="rect">
+            <a:avLst/>
+          </a:prstGeom>
+          <a:noFill xmlns:a="http://schemas.openxmlformats.org/drawingml/2006/main"/>
+          <a:ln xmlns:a="http://schemas.openxmlformats.org/drawingml/2006/main" w="0">
+            <a:noFill/>
+            <a:prstDash val="solid"/>
+          </a:ln>
+        </p:spPr>
+        <p:txBody>
+          <a:bodyPr xmlns:a="http://schemas.openxmlformats.org/drawingml/2006/main" wrap="none" lIns="0" tIns="0" rIns="0" bIns="0" anchor="ctr">
+            <a:noAutofit/>
+          </a:bodyPr>
+          <a:lstStyle xmlns:a="http://schemas.openxmlformats.org/drawingml/2006/main"/>
+          <a:p xmlns:a="http://schemas.openxmlformats.org/drawingml/2006/main">
+            <a:pPr algn="l">
+              <a:lnSpc>
+                <a:spcPct val="118000"/>
               </a:lnSpc>
               <a:buNone/>
               <a:defRPr sz="1500" b="0" i="0">
@@ -3391,29 +3502,153 @@
                 <a:ea typeface="Microsoft YaHei"/>
                 <a:cs typeface="Microsoft YaHei"/>
               </a:rPr>
-              <a:t>资源投入</a:t>
+              <a:t>优化频率</a:t>
             </a:r>
           </a:p>
         </p:txBody>
       </p:sp>
       <p:sp>
         <p:nvSpPr>
-          <p:cNvPr id="40" name="matrix-detail-metric-value-1-1">
-            <a:extLst xmlns:a="http://schemas.openxmlformats.org/drawingml/2006/main">
-              <a:ext uri="{FF2B5EF4-FFF2-40B4-BE49-F238E27FC236}">
-                <a16:creationId xmlns:a16="http://schemas.microsoft.com/office/drawing/2014/main" id="{20E1FED7-F985-4D72-9035-911071B5EB5A}"/>
-              </a:ext>
-            </a:extLst>
-          </p:cNvPr>
-          <p:cNvSpPr>
-            <a:spLocks xmlns:a="http://schemas.openxmlformats.org/drawingml/2006/main" noGrp="1"/>
-          </p:cNvSpPr>
-          <p:nvPr/>
-        </p:nvSpPr>
-        <p:spPr>
-          <a:xfrm xmlns:a="http://schemas.openxmlformats.org/drawingml/2006/main" rot="0">
-            <a:off x="10248900" y="3286125"/>
-            <a:ext cx="1247775" cy="265357"/>
+          <p:cNvPr id="41" name="quadrant-2-detail-region-metric-1">
+            <a:extLst xmlns:a="http://schemas.openxmlformats.org/drawingml/2006/main">
+              <a:ext uri="{FF2B5EF4-FFF2-40B4-BE49-F238E27FC236}">
+                <a16:creationId xmlns:a16="http://schemas.microsoft.com/office/drawing/2014/main" id="{577DA264-50F2-4887-87B1-4BF12606F8EE}"/>
+              </a:ext>
+            </a:extLst>
+          </p:cNvPr>
+          <p:cNvSpPr>
+            <a:spLocks xmlns:a="http://schemas.openxmlformats.org/drawingml/2006/main" noGrp="1"/>
+          </p:cNvSpPr>
+          <p:nvPr/>
+        </p:nvSpPr>
+        <p:spPr>
+          <a:xfrm xmlns:a="http://schemas.openxmlformats.org/drawingml/2006/main" rot="0">
+            <a:off x="2971800" y="5135766"/>
+            <a:ext cx="866775" cy="260452"/>
+          </a:xfrm>
+          <a:prstGeom xmlns:a="http://schemas.openxmlformats.org/drawingml/2006/main" prst="rect">
+            <a:avLst/>
+          </a:prstGeom>
+          <a:noFill xmlns:a="http://schemas.openxmlformats.org/drawingml/2006/main"/>
+          <a:ln xmlns:a="http://schemas.openxmlformats.org/drawingml/2006/main" w="0">
+            <a:noFill/>
+            <a:prstDash val="solid"/>
+          </a:ln>
+        </p:spPr>
+        <p:txBody>
+          <a:bodyPr xmlns:a="http://schemas.openxmlformats.org/drawingml/2006/main" wrap="none" lIns="0" tIns="0" rIns="0" bIns="0" anchor="ctr">
+            <a:noAutofit/>
+          </a:bodyPr>
+          <a:lstStyle xmlns:a="http://schemas.openxmlformats.org/drawingml/2006/main"/>
+          <a:p xmlns:a="http://schemas.openxmlformats.org/drawingml/2006/main">
+            <a:pPr algn="l">
+              <a:lnSpc>
+                <a:spcPct val="108000"/>
+              </a:lnSpc>
+              <a:buNone/>
+              <a:defRPr sz="1900" b="1" i="0">
+                <a:solidFill>
+                  <a:srgbClr val="3B68AB"/>
+                </a:solidFill>
+                <a:latin typeface="Microsoft YaHei"/>
+                <a:ea typeface="Microsoft YaHei"/>
+                <a:cs typeface="Microsoft YaHei"/>
+              </a:defRPr>
+            </a:pPr>
+            <a:r>
+              <a:rPr sz="1900" b="1" i="0">
+                <a:solidFill>
+                  <a:srgbClr val="3B68AB"/>
+                </a:solidFill>
+                <a:latin typeface="Microsoft YaHei"/>
+                <a:ea typeface="Microsoft YaHei"/>
+                <a:cs typeface="Microsoft YaHei"/>
+              </a:rPr>
+              <a:t>常规</a:t>
+            </a:r>
+          </a:p>
+        </p:txBody>
+      </p:sp>
+      <p:sp>
+        <p:nvSpPr>
+          <p:cNvPr id="42" name="quadrant-2-detail-region-metric-1-label">
+            <a:extLst xmlns:a="http://schemas.openxmlformats.org/drawingml/2006/main">
+              <a:ext uri="{FF2B5EF4-FFF2-40B4-BE49-F238E27FC236}">
+                <a16:creationId xmlns:a16="http://schemas.microsoft.com/office/drawing/2014/main" id="{6BAA4357-D388-4735-9DD2-DBE9BD4E0745}"/>
+              </a:ext>
+            </a:extLst>
+          </p:cNvPr>
+          <p:cNvSpPr>
+            <a:spLocks xmlns:a="http://schemas.openxmlformats.org/drawingml/2006/main" noGrp="1"/>
+          </p:cNvSpPr>
+          <p:nvPr/>
+        </p:nvSpPr>
+        <p:spPr>
+          <a:xfrm xmlns:a="http://schemas.openxmlformats.org/drawingml/2006/main" rot="0">
+            <a:off x="2971800" y="5434308"/>
+            <a:ext cx="866775" cy="224733"/>
+          </a:xfrm>
+          <a:prstGeom xmlns:a="http://schemas.openxmlformats.org/drawingml/2006/main" prst="rect">
+            <a:avLst/>
+          </a:prstGeom>
+          <a:noFill xmlns:a="http://schemas.openxmlformats.org/drawingml/2006/main"/>
+          <a:ln xmlns:a="http://schemas.openxmlformats.org/drawingml/2006/main" w="0">
+            <a:noFill/>
+            <a:prstDash val="solid"/>
+          </a:ln>
+        </p:spPr>
+        <p:txBody>
+          <a:bodyPr xmlns:a="http://schemas.openxmlformats.org/drawingml/2006/main" wrap="none" lIns="0" tIns="0" rIns="0" bIns="0" anchor="ctr">
+            <a:noAutofit/>
+          </a:bodyPr>
+          <a:lstStyle xmlns:a="http://schemas.openxmlformats.org/drawingml/2006/main"/>
+          <a:p xmlns:a="http://schemas.openxmlformats.org/drawingml/2006/main">
+            <a:pPr algn="l">
+              <a:lnSpc>
+                <a:spcPct val="118000"/>
+              </a:lnSpc>
+              <a:buNone/>
+              <a:defRPr sz="1500" b="0" i="0">
+                <a:solidFill>
+                  <a:srgbClr val="586B80"/>
+                </a:solidFill>
+                <a:latin typeface="Microsoft YaHei"/>
+                <a:ea typeface="Microsoft YaHei"/>
+                <a:cs typeface="Microsoft YaHei"/>
+              </a:defRPr>
+            </a:pPr>
+            <a:r>
+              <a:rPr sz="1500" b="0" i="0">
+                <a:solidFill>
+                  <a:srgbClr val="586B80"/>
+                </a:solidFill>
+                <a:latin typeface="Microsoft YaHei"/>
+                <a:ea typeface="Microsoft YaHei"/>
+                <a:cs typeface="Microsoft YaHei"/>
+              </a:rPr>
+              <a:t>投入等级</a:t>
+            </a:r>
+          </a:p>
+        </p:txBody>
+      </p:sp>
+      <p:sp>
+        <p:nvSpPr>
+          <p:cNvPr id="43" name="matrix-detail-title-3">
+            <a:extLst xmlns:a="http://schemas.openxmlformats.org/drawingml/2006/main">
+              <a:ext uri="{FF2B5EF4-FFF2-40B4-BE49-F238E27FC236}">
+                <a16:creationId xmlns:a16="http://schemas.microsoft.com/office/drawing/2014/main" id="{BCFCA43D-C07D-447A-90C2-E32508787979}"/>
+              </a:ext>
+            </a:extLst>
+          </p:cNvPr>
+          <p:cNvSpPr>
+            <a:spLocks xmlns:a="http://schemas.openxmlformats.org/drawingml/2006/main" noGrp="1"/>
+          </p:cNvSpPr>
+          <p:nvPr/>
+        </p:nvSpPr>
+        <p:spPr>
+          <a:xfrm xmlns:a="http://schemas.openxmlformats.org/drawingml/2006/main" rot="0">
+            <a:off x="8924925" y="4286250"/>
+            <a:ext cx="2571750" cy="209550"/>
           </a:xfrm>
           <a:prstGeom xmlns:a="http://schemas.openxmlformats.org/drawingml/2006/main" prst="rect">
             <a:avLst/>
@@ -3435,9 +3670,9 @@
                 <a:spcPct val="110000"/>
               </a:lnSpc>
               <a:buNone/>
-              <a:defRPr sz="1900" b="1" i="0">
-                <a:solidFill>
-                  <a:srgbClr val="3B68AB"/>
+              <a:defRPr sz="1500" b="1" i="0">
+                <a:solidFill>
+                  <a:srgbClr val="3E71B5"/>
                 </a:solidFill>
                 <a:latin typeface="Microsoft YaHei"/>
                 <a:ea typeface="Microsoft YaHei"/>
@@ -3445,221 +3680,37 @@
               </a:defRPr>
             </a:pPr>
             <a:r>
-              <a:rPr sz="1900" b="1" i="0">
-                <a:solidFill>
-                  <a:srgbClr val="3B68AB"/>
+              <a:rPr sz="1500" b="1" i="0">
+                <a:solidFill>
+                  <a:srgbClr val="3E71B5"/>
                 </a:solidFill>
                 <a:latin typeface="Microsoft YaHei"/>
                 <a:ea typeface="Microsoft YaHei"/>
                 <a:cs typeface="Microsoft YaHei"/>
               </a:rPr>
-              <a:t>重点</a:t>
+              <a:t>审慎评估方案</a:t>
             </a:r>
           </a:p>
         </p:txBody>
       </p:sp>
       <p:sp>
         <p:nvSpPr>
-          <p:cNvPr id="41" name="matrix-detail-title-2">
-            <a:extLst xmlns:a="http://schemas.openxmlformats.org/drawingml/2006/main">
-              <a:ext uri="{FF2B5EF4-FFF2-40B4-BE49-F238E27FC236}">
-                <a16:creationId xmlns:a16="http://schemas.microsoft.com/office/drawing/2014/main" id="{DA75AA5E-E8EE-416C-9DB7-3ADFC3E6EE7A}"/>
-              </a:ext>
-            </a:extLst>
-          </p:cNvPr>
-          <p:cNvSpPr>
-            <a:spLocks xmlns:a="http://schemas.openxmlformats.org/drawingml/2006/main" noGrp="1"/>
-          </p:cNvSpPr>
-          <p:nvPr/>
-        </p:nvSpPr>
-        <p:spPr>
-          <a:xfrm xmlns:a="http://schemas.openxmlformats.org/drawingml/2006/main" rot="0">
-            <a:off x="2028825" y="4286250"/>
-            <a:ext cx="1809750" cy="293341"/>
-          </a:xfrm>
-          <a:prstGeom xmlns:a="http://schemas.openxmlformats.org/drawingml/2006/main" prst="rect">
-            <a:avLst/>
-          </a:prstGeom>
-          <a:noFill xmlns:a="http://schemas.openxmlformats.org/drawingml/2006/main"/>
-          <a:ln xmlns:a="http://schemas.openxmlformats.org/drawingml/2006/main" w="0">
-            <a:noFill/>
-            <a:prstDash val="solid"/>
-          </a:ln>
-        </p:spPr>
-        <p:txBody>
-          <a:bodyPr xmlns:a="http://schemas.openxmlformats.org/drawingml/2006/main" wrap="square" lIns="0" tIns="0" rIns="0" bIns="0" anchor="ctr">
-            <a:noAutofit/>
-          </a:bodyPr>
-          <a:lstStyle xmlns:a="http://schemas.openxmlformats.org/drawingml/2006/main"/>
-          <a:p xmlns:a="http://schemas.openxmlformats.org/drawingml/2006/main">
-            <a:pPr algn="l">
-              <a:lnSpc>
-                <a:spcPct val="110000"/>
-              </a:lnSpc>
-              <a:buNone/>
-              <a:defRPr sz="2100" b="1" i="0">
-                <a:solidFill>
-                  <a:srgbClr val="3E71B5"/>
-                </a:solidFill>
-                <a:latin typeface="Microsoft YaHei"/>
-                <a:ea typeface="Microsoft YaHei"/>
-                <a:cs typeface="Microsoft YaHei"/>
-              </a:defRPr>
-            </a:pPr>
-            <a:r>
-              <a:rPr sz="2100" b="1" i="0">
-                <a:solidFill>
-                  <a:srgbClr val="3E71B5"/>
-                </a:solidFill>
-                <a:latin typeface="Microsoft YaHei"/>
-                <a:ea typeface="Microsoft YaHei"/>
-                <a:cs typeface="Microsoft YaHei"/>
-              </a:rPr>
-              <a:t>常规优化方案</a:t>
-            </a:r>
-          </a:p>
-        </p:txBody>
-      </p:sp>
-      <p:sp>
-        <p:nvSpPr>
-          <p:cNvPr id="42" name="matrix-detail-body-2">
-            <a:extLst xmlns:a="http://schemas.openxmlformats.org/drawingml/2006/main">
-              <a:ext uri="{FF2B5EF4-FFF2-40B4-BE49-F238E27FC236}">
-                <a16:creationId xmlns:a16="http://schemas.microsoft.com/office/drawing/2014/main" id="{EC88DA1C-6D25-4F86-8AA7-D955B6C5B9FB}"/>
-              </a:ext>
-            </a:extLst>
-          </p:cNvPr>
-          <p:cNvSpPr>
-            <a:spLocks xmlns:a="http://schemas.openxmlformats.org/drawingml/2006/main" noGrp="1"/>
-          </p:cNvSpPr>
-          <p:nvPr/>
-        </p:nvSpPr>
-        <p:spPr>
-          <a:xfrm xmlns:a="http://schemas.openxmlformats.org/drawingml/2006/main" rot="0">
-            <a:off x="2028825" y="4627216"/>
-            <a:ext cx="1809750" cy="570014"/>
-          </a:xfrm>
-          <a:prstGeom xmlns:a="http://schemas.openxmlformats.org/drawingml/2006/main" prst="rect">
-            <a:avLst/>
-          </a:prstGeom>
-          <a:noFill xmlns:a="http://schemas.openxmlformats.org/drawingml/2006/main"/>
-          <a:ln xmlns:a="http://schemas.openxmlformats.org/drawingml/2006/main" w="0">
-            <a:noFill/>
-            <a:prstDash val="solid"/>
-          </a:ln>
-        </p:spPr>
-        <p:txBody>
-          <a:bodyPr xmlns:a="http://schemas.openxmlformats.org/drawingml/2006/main" wrap="square" lIns="0" tIns="0" rIns="0" bIns="0" anchor="ctr">
-            <a:noAutofit/>
-          </a:bodyPr>
-          <a:lstStyle xmlns:a="http://schemas.openxmlformats.org/drawingml/2006/main"/>
-          <a:p xmlns:a="http://schemas.openxmlformats.org/drawingml/2006/main">
-            <a:pPr algn="l">
-              <a:lnSpc>
-                <a:spcPct val="132000"/>
-              </a:lnSpc>
-              <a:buNone/>
-              <a:defRPr sz="1700" b="0" i="0">
-                <a:solidFill>
-                  <a:srgbClr val="748495"/>
-                </a:solidFill>
-                <a:latin typeface="Microsoft YaHei"/>
-                <a:ea typeface="Microsoft YaHei"/>
-                <a:cs typeface="Microsoft YaHei"/>
-              </a:defRPr>
-            </a:pPr>
-            <a:r>
-              <a:rPr sz="1700" b="0" i="0">
-                <a:solidFill>
-                  <a:srgbClr val="748495"/>
-                </a:solidFill>
-                <a:latin typeface="Microsoft YaHei"/>
-                <a:ea typeface="Microsoft YaHei"/>
-                <a:cs typeface="Microsoft YaHei"/>
-              </a:rPr>
-              <a:t>以低成本方式择机</a:t>
-            </a:r>
-          </a:p>
-          <a:p xmlns:a="http://schemas.openxmlformats.org/drawingml/2006/main">
-            <a:pPr algn="l">
-              <a:lnSpc>
-                <a:spcPct val="132000"/>
-              </a:lnSpc>
-              <a:buNone/>
-              <a:defRPr sz="1700" b="0" i="0">
-                <a:solidFill>
-                  <a:srgbClr val="748495"/>
-                </a:solidFill>
-                <a:latin typeface="Microsoft YaHei"/>
-                <a:ea typeface="Microsoft YaHei"/>
-                <a:cs typeface="Microsoft YaHei"/>
-              </a:defRPr>
-            </a:pPr>
-            <a:r>
-              <a:rPr sz="1700" b="0" i="0">
-                <a:solidFill>
-                  <a:srgbClr val="748495"/>
-                </a:solidFill>
-                <a:latin typeface="Microsoft YaHei"/>
-                <a:ea typeface="Microsoft YaHei"/>
-                <a:cs typeface="Microsoft YaHei"/>
-              </a:rPr>
-              <a:t>改善体验</a:t>
-            </a:r>
-          </a:p>
-        </p:txBody>
-      </p:sp>
-      <p:sp>
-        <p:nvSpPr>
-          <p:cNvPr id="43" name="matrix-detail-divider-2">
-            <a:extLst xmlns:a="http://schemas.openxmlformats.org/drawingml/2006/main">
-              <a:ext uri="{FF2B5EF4-FFF2-40B4-BE49-F238E27FC236}">
-                <a16:creationId xmlns:a16="http://schemas.microsoft.com/office/drawing/2014/main" id="{4EAC7757-59D4-4EB5-BE27-B62480F8CC2E}"/>
-              </a:ext>
-            </a:extLst>
-          </p:cNvPr>
-          <p:cNvSpPr>
-            <a:spLocks xmlns:a="http://schemas.openxmlformats.org/drawingml/2006/main" noGrp="1"/>
-          </p:cNvSpPr>
-          <p:nvPr/>
-        </p:nvSpPr>
-        <p:spPr>
-          <a:xfrm xmlns:a="http://schemas.openxmlformats.org/drawingml/2006/main" rot="0">
-            <a:off x="2028825" y="5257800"/>
-            <a:ext cx="1809750" cy="9525"/>
-          </a:xfrm>
-          <a:prstGeom xmlns:a="http://schemas.openxmlformats.org/drawingml/2006/main" prst="line">
-            <a:avLst/>
-          </a:prstGeom>
-          <a:noFill xmlns:a="http://schemas.openxmlformats.org/drawingml/2006/main"/>
-          <a:ln xmlns:a="http://schemas.openxmlformats.org/drawingml/2006/main" w="9525">
-            <a:solidFill>
-              <a:srgbClr val="5B7089">
-                <a:alpha val="55000"/>
-              </a:srgbClr>
-            </a:solidFill>
-            <a:prstDash val="dash"/>
-          </a:ln>
-        </p:spPr>
-      </p:sp>
-      <p:sp>
-        <p:nvSpPr>
-          <p:cNvPr id="44" name="matrix-detail-caption-2">
-            <a:extLst xmlns:a="http://schemas.openxmlformats.org/drawingml/2006/main">
-              <a:ext uri="{FF2B5EF4-FFF2-40B4-BE49-F238E27FC236}">
-                <a16:creationId xmlns:a16="http://schemas.microsoft.com/office/drawing/2014/main" id="{CAA8CC76-DD32-4677-BD6A-A71642034027}"/>
-              </a:ext>
-            </a:extLst>
-          </p:cNvPr>
-          <p:cNvSpPr>
-            <a:spLocks xmlns:a="http://schemas.openxmlformats.org/drawingml/2006/main" noGrp="1"/>
-          </p:cNvSpPr>
-          <p:nvPr/>
-        </p:nvSpPr>
-        <p:spPr>
-          <a:xfrm xmlns:a="http://schemas.openxmlformats.org/drawingml/2006/main" rot="0">
-            <a:off x="2028825" y="5324475"/>
-            <a:ext cx="1809750" cy="190500"/>
+          <p:cNvPr id="44" name="matrix-detail-body-3">
+            <a:extLst xmlns:a="http://schemas.openxmlformats.org/drawingml/2006/main">
+              <a:ext uri="{FF2B5EF4-FFF2-40B4-BE49-F238E27FC236}">
+                <a16:creationId xmlns:a16="http://schemas.microsoft.com/office/drawing/2014/main" id="{2006BDCA-E27D-4BFF-B95C-2460C65E7BD7}"/>
+              </a:ext>
+            </a:extLst>
+          </p:cNvPr>
+          <p:cNvSpPr>
+            <a:spLocks xmlns:a="http://schemas.openxmlformats.org/drawingml/2006/main" noGrp="1"/>
+          </p:cNvSpPr>
+          <p:nvPr/>
+        </p:nvSpPr>
+        <p:spPr>
+          <a:xfrm xmlns:a="http://schemas.openxmlformats.org/drawingml/2006/main" rot="0">
+            <a:off x="8924925" y="4552950"/>
+            <a:ext cx="2571750" cy="243783"/>
           </a:xfrm>
           <a:prstGeom xmlns:a="http://schemas.openxmlformats.org/drawingml/2006/main" prst="rect">
             <a:avLst/>
@@ -3678,12 +3729,12 @@
           <a:p xmlns:a="http://schemas.openxmlformats.org/drawingml/2006/main">
             <a:pPr algn="l">
               <a:lnSpc>
-                <a:spcPct val="100000"/>
+                <a:spcPct val="128000"/>
               </a:lnSpc>
               <a:buNone/>
-              <a:defRPr sz="1500" b="1" i="0">
-                <a:solidFill>
-                  <a:srgbClr val="4E6278"/>
+              <a:defRPr sz="1500" b="0" i="0">
+                <a:solidFill>
+                  <a:srgbClr val="748495"/>
                 </a:solidFill>
                 <a:latin typeface="Microsoft YaHei"/>
                 <a:ea typeface="Microsoft YaHei"/>
@@ -3691,37 +3742,37 @@
               </a:defRPr>
             </a:pPr>
             <a:r>
-              <a:rPr sz="1500" b="1" i="0">
-                <a:solidFill>
-                  <a:srgbClr val="4E6278"/>
+              <a:rPr sz="1500" b="0" i="0">
+                <a:solidFill>
+                  <a:srgbClr val="748495"/>
                 </a:solidFill>
                 <a:latin typeface="Microsoft YaHei"/>
                 <a:ea typeface="Microsoft YaHei"/>
                 <a:cs typeface="Microsoft YaHei"/>
               </a:rPr>
-              <a:t>关键指标</a:t>
+              <a:t>投入前验证收益与复用边界</a:t>
             </a:r>
           </a:p>
         </p:txBody>
       </p:sp>
       <p:sp>
         <p:nvSpPr>
-          <p:cNvPr id="45" name="matrix-detail-metric-label-2-0">
-            <a:extLst xmlns:a="http://schemas.openxmlformats.org/drawingml/2006/main">
-              <a:ext uri="{FF2B5EF4-FFF2-40B4-BE49-F238E27FC236}">
-                <a16:creationId xmlns:a16="http://schemas.microsoft.com/office/drawing/2014/main" id="{0E7DE704-7EBE-49A3-ADDA-477A7BB5458B}"/>
-              </a:ext>
-            </a:extLst>
-          </p:cNvPr>
-          <p:cNvSpPr>
-            <a:spLocks xmlns:a="http://schemas.openxmlformats.org/drawingml/2006/main" noGrp="1"/>
-          </p:cNvSpPr>
-          <p:nvPr/>
-        </p:nvSpPr>
-        <p:spPr>
-          <a:xfrm xmlns:a="http://schemas.openxmlformats.org/drawingml/2006/main" rot="0">
-            <a:off x="2028825" y="5562600"/>
-            <a:ext cx="866775" cy="238125"/>
+          <p:cNvPr id="45" name="quadrant-3-detail-region-metric-0">
+            <a:extLst xmlns:a="http://schemas.openxmlformats.org/drawingml/2006/main">
+              <a:ext uri="{FF2B5EF4-FFF2-40B4-BE49-F238E27FC236}">
+                <a16:creationId xmlns:a16="http://schemas.microsoft.com/office/drawing/2014/main" id="{B3232E1A-7150-4C74-BB01-81C49BB9BB02}"/>
+              </a:ext>
+            </a:extLst>
+          </p:cNvPr>
+          <p:cNvSpPr>
+            <a:spLocks xmlns:a="http://schemas.openxmlformats.org/drawingml/2006/main" noGrp="1"/>
+          </p:cNvSpPr>
+          <p:nvPr/>
+        </p:nvSpPr>
+        <p:spPr>
+          <a:xfrm xmlns:a="http://schemas.openxmlformats.org/drawingml/2006/main" rot="0">
+            <a:off x="8924925" y="4891983"/>
+            <a:ext cx="1247775" cy="260452"/>
           </a:xfrm>
           <a:prstGeom xmlns:a="http://schemas.openxmlformats.org/drawingml/2006/main" prst="rect">
             <a:avLst/>
@@ -3740,12 +3791,12 @@
           <a:p xmlns:a="http://schemas.openxmlformats.org/drawingml/2006/main">
             <a:pPr algn="l">
               <a:lnSpc>
-                <a:spcPct val="125000"/>
+                <a:spcPct val="108000"/>
               </a:lnSpc>
               <a:buNone/>
-              <a:defRPr sz="1500" b="0" i="0">
-                <a:solidFill>
-                  <a:srgbClr val="586B80"/>
+              <a:defRPr sz="1900" b="1" i="0">
+                <a:solidFill>
+                  <a:srgbClr val="3B68AB"/>
                 </a:solidFill>
                 <a:latin typeface="Microsoft YaHei"/>
                 <a:ea typeface="Microsoft YaHei"/>
@@ -3753,37 +3804,37 @@
               </a:defRPr>
             </a:pPr>
             <a:r>
-              <a:rPr sz="1500" b="0" i="0">
-                <a:solidFill>
-                  <a:srgbClr val="586B80"/>
+              <a:rPr sz="1900" b="1" i="0">
+                <a:solidFill>
+                  <a:srgbClr val="3B68AB"/>
                 </a:solidFill>
                 <a:latin typeface="Microsoft YaHei"/>
                 <a:ea typeface="Microsoft YaHei"/>
                 <a:cs typeface="Microsoft YaHei"/>
               </a:rPr>
-              <a:t>优化频率</a:t>
+              <a:t>1月</a:t>
             </a:r>
           </a:p>
         </p:txBody>
       </p:sp>
       <p:sp>
         <p:nvSpPr>
-          <p:cNvPr id="46" name="matrix-detail-metric-value-2-0">
-            <a:extLst xmlns:a="http://schemas.openxmlformats.org/drawingml/2006/main">
-              <a:ext uri="{FF2B5EF4-FFF2-40B4-BE49-F238E27FC236}">
-                <a16:creationId xmlns:a16="http://schemas.microsoft.com/office/drawing/2014/main" id="{928B0925-4DF5-44E2-A496-71D9DDA2611F}"/>
-              </a:ext>
-            </a:extLst>
-          </p:cNvPr>
-          <p:cNvSpPr>
-            <a:spLocks xmlns:a="http://schemas.openxmlformats.org/drawingml/2006/main" noGrp="1"/>
-          </p:cNvSpPr>
-          <p:nvPr/>
-        </p:nvSpPr>
-        <p:spPr>
-          <a:xfrm xmlns:a="http://schemas.openxmlformats.org/drawingml/2006/main" rot="0">
-            <a:off x="2028825" y="5819775"/>
-            <a:ext cx="866775" cy="265357"/>
+          <p:cNvPr id="46" name="quadrant-3-detail-region-metric-0-label">
+            <a:extLst xmlns:a="http://schemas.openxmlformats.org/drawingml/2006/main">
+              <a:ext uri="{FF2B5EF4-FFF2-40B4-BE49-F238E27FC236}">
+                <a16:creationId xmlns:a16="http://schemas.microsoft.com/office/drawing/2014/main" id="{F235AAC5-715D-4E23-B203-9EC449915935}"/>
+              </a:ext>
+            </a:extLst>
+          </p:cNvPr>
+          <p:cNvSpPr>
+            <a:spLocks xmlns:a="http://schemas.openxmlformats.org/drawingml/2006/main" noGrp="1"/>
+          </p:cNvSpPr>
+          <p:nvPr/>
+        </p:nvSpPr>
+        <p:spPr>
+          <a:xfrm xmlns:a="http://schemas.openxmlformats.org/drawingml/2006/main" rot="0">
+            <a:off x="8924925" y="5190534"/>
+            <a:ext cx="1247775" cy="224733"/>
           </a:xfrm>
           <a:prstGeom xmlns:a="http://schemas.openxmlformats.org/drawingml/2006/main" prst="rect">
             <a:avLst/>
@@ -3802,12 +3853,12 @@
           <a:p xmlns:a="http://schemas.openxmlformats.org/drawingml/2006/main">
             <a:pPr algn="l">
               <a:lnSpc>
-                <a:spcPct val="110000"/>
+                <a:spcPct val="118000"/>
               </a:lnSpc>
               <a:buNone/>
-              <a:defRPr sz="1900" b="1" i="0">
-                <a:solidFill>
-                  <a:srgbClr val="3B68AB"/>
+              <a:defRPr sz="1500" b="0" i="0">
+                <a:solidFill>
+                  <a:srgbClr val="586B80"/>
                 </a:solidFill>
                 <a:latin typeface="Microsoft YaHei"/>
                 <a:ea typeface="Microsoft YaHei"/>
@@ -3815,37 +3866,37 @@
               </a:defRPr>
             </a:pPr>
             <a:r>
-              <a:rPr sz="1900" b="1" i="0">
-                <a:solidFill>
-                  <a:srgbClr val="3B68AB"/>
+              <a:rPr sz="1500" b="0" i="0">
+                <a:solidFill>
+                  <a:srgbClr val="586B80"/>
                 </a:solidFill>
                 <a:latin typeface="Microsoft YaHei"/>
                 <a:ea typeface="Microsoft YaHei"/>
                 <a:cs typeface="Microsoft YaHei"/>
               </a:rPr>
-              <a:t>季度</a:t>
+              <a:t>评估周期</a:t>
             </a:r>
           </a:p>
         </p:txBody>
       </p:sp>
       <p:sp>
         <p:nvSpPr>
-          <p:cNvPr id="47" name="matrix-detail-metric-label-2-1">
-            <a:extLst xmlns:a="http://schemas.openxmlformats.org/drawingml/2006/main">
-              <a:ext uri="{FF2B5EF4-FFF2-40B4-BE49-F238E27FC236}">
-                <a16:creationId xmlns:a16="http://schemas.microsoft.com/office/drawing/2014/main" id="{7BF512CE-E7C2-4A5B-A9B6-828DB9D56277}"/>
-              </a:ext>
-            </a:extLst>
-          </p:cNvPr>
-          <p:cNvSpPr>
-            <a:spLocks xmlns:a="http://schemas.openxmlformats.org/drawingml/2006/main" noGrp="1"/>
-          </p:cNvSpPr>
-          <p:nvPr/>
-        </p:nvSpPr>
-        <p:spPr>
-          <a:xfrm xmlns:a="http://schemas.openxmlformats.org/drawingml/2006/main" rot="0">
-            <a:off x="2971800" y="5562600"/>
-            <a:ext cx="866775" cy="238125"/>
+          <p:cNvPr id="47" name="quadrant-3-detail-region-metric-1">
+            <a:extLst xmlns:a="http://schemas.openxmlformats.org/drawingml/2006/main">
+              <a:ext uri="{FF2B5EF4-FFF2-40B4-BE49-F238E27FC236}">
+                <a16:creationId xmlns:a16="http://schemas.microsoft.com/office/drawing/2014/main" id="{286A588E-A2E7-4440-9B6E-A38E047C634E}"/>
+              </a:ext>
+            </a:extLst>
+          </p:cNvPr>
+          <p:cNvSpPr>
+            <a:spLocks xmlns:a="http://schemas.openxmlformats.org/drawingml/2006/main" noGrp="1"/>
+          </p:cNvSpPr>
+          <p:nvPr/>
+        </p:nvSpPr>
+        <p:spPr>
+          <a:xfrm xmlns:a="http://schemas.openxmlformats.org/drawingml/2006/main" rot="0">
+            <a:off x="10248900" y="4891983"/>
+            <a:ext cx="1247775" cy="260452"/>
           </a:xfrm>
           <a:prstGeom xmlns:a="http://schemas.openxmlformats.org/drawingml/2006/main" prst="rect">
             <a:avLst/>
@@ -3864,12 +3915,12 @@
           <a:p xmlns:a="http://schemas.openxmlformats.org/drawingml/2006/main">
             <a:pPr algn="l">
               <a:lnSpc>
-                <a:spcPct val="125000"/>
+                <a:spcPct val="108000"/>
               </a:lnSpc>
               <a:buNone/>
-              <a:defRPr sz="1500" b="0" i="0">
-                <a:solidFill>
-                  <a:srgbClr val="586B80"/>
+              <a:defRPr sz="1900" b="1" i="0">
+                <a:solidFill>
+                  <a:srgbClr val="3B68AB"/>
                 </a:solidFill>
                 <a:latin typeface="Microsoft YaHei"/>
                 <a:ea typeface="Microsoft YaHei"/>
@@ -3877,37 +3928,37 @@
               </a:defRPr>
             </a:pPr>
             <a:r>
-              <a:rPr sz="1500" b="0" i="0">
-                <a:solidFill>
-                  <a:srgbClr val="586B80"/>
+              <a:rPr sz="1900" b="1" i="0">
+                <a:solidFill>
+                  <a:srgbClr val="3B68AB"/>
                 </a:solidFill>
                 <a:latin typeface="Microsoft YaHei"/>
                 <a:ea typeface="Microsoft YaHei"/>
                 <a:cs typeface="Microsoft YaHei"/>
               </a:rPr>
-              <a:t>投入等级</a:t>
+              <a:t>较高</a:t>
             </a:r>
           </a:p>
         </p:txBody>
       </p:sp>
       <p:sp>
         <p:nvSpPr>
-          <p:cNvPr id="48" name="matrix-detail-metric-value-2-1">
-            <a:extLst xmlns:a="http://schemas.openxmlformats.org/drawingml/2006/main">
-              <a:ext uri="{FF2B5EF4-FFF2-40B4-BE49-F238E27FC236}">
-                <a16:creationId xmlns:a16="http://schemas.microsoft.com/office/drawing/2014/main" id="{84CB6CAA-AFF4-4EF3-9C46-D12C0CF3BFD3}"/>
-              </a:ext>
-            </a:extLst>
-          </p:cNvPr>
-          <p:cNvSpPr>
-            <a:spLocks xmlns:a="http://schemas.openxmlformats.org/drawingml/2006/main" noGrp="1"/>
-          </p:cNvSpPr>
-          <p:nvPr/>
-        </p:nvSpPr>
-        <p:spPr>
-          <a:xfrm xmlns:a="http://schemas.openxmlformats.org/drawingml/2006/main" rot="0">
-            <a:off x="2971800" y="5819775"/>
-            <a:ext cx="866775" cy="265357"/>
+          <p:cNvPr id="48" name="quadrant-3-detail-region-metric-1-label">
+            <a:extLst xmlns:a="http://schemas.openxmlformats.org/drawingml/2006/main">
+              <a:ext uri="{FF2B5EF4-FFF2-40B4-BE49-F238E27FC236}">
+                <a16:creationId xmlns:a16="http://schemas.microsoft.com/office/drawing/2014/main" id="{5B2FA315-A0BD-4814-AD46-98CDCCE44A30}"/>
+              </a:ext>
+            </a:extLst>
+          </p:cNvPr>
+          <p:cNvSpPr>
+            <a:spLocks xmlns:a="http://schemas.openxmlformats.org/drawingml/2006/main" noGrp="1"/>
+          </p:cNvSpPr>
+          <p:nvPr/>
+        </p:nvSpPr>
+        <p:spPr>
+          <a:xfrm xmlns:a="http://schemas.openxmlformats.org/drawingml/2006/main" rot="0">
+            <a:off x="10248900" y="5190534"/>
+            <a:ext cx="1247775" cy="224733"/>
           </a:xfrm>
           <a:prstGeom xmlns:a="http://schemas.openxmlformats.org/drawingml/2006/main" prst="rect">
             <a:avLst/>
@@ -3926,439 +3977,7 @@
           <a:p xmlns:a="http://schemas.openxmlformats.org/drawingml/2006/main">
             <a:pPr algn="l">
               <a:lnSpc>
-                <a:spcPct val="110000"/>
-              </a:lnSpc>
-              <a:buNone/>
-              <a:defRPr sz="1900" b="1" i="0">
-                <a:solidFill>
-                  <a:srgbClr val="3B68AB"/>
-                </a:solidFill>
-                <a:latin typeface="Microsoft YaHei"/>
-                <a:ea typeface="Microsoft YaHei"/>
-                <a:cs typeface="Microsoft YaHei"/>
-              </a:defRPr>
-            </a:pPr>
-            <a:r>
-              <a:rPr sz="1900" b="1" i="0">
-                <a:solidFill>
-                  <a:srgbClr val="3B68AB"/>
-                </a:solidFill>
-                <a:latin typeface="Microsoft YaHei"/>
-                <a:ea typeface="Microsoft YaHei"/>
-                <a:cs typeface="Microsoft YaHei"/>
-              </a:rPr>
-              <a:t>常规</a:t>
-            </a:r>
-          </a:p>
-        </p:txBody>
-      </p:sp>
-      <p:sp>
-        <p:nvSpPr>
-          <p:cNvPr id="49" name="matrix-detail-title-3">
-            <a:extLst xmlns:a="http://schemas.openxmlformats.org/drawingml/2006/main">
-              <a:ext uri="{FF2B5EF4-FFF2-40B4-BE49-F238E27FC236}">
-                <a16:creationId xmlns:a16="http://schemas.microsoft.com/office/drawing/2014/main" id="{F100EF23-F6B7-41ED-A237-AA5AF7EDE1A8}"/>
-              </a:ext>
-            </a:extLst>
-          </p:cNvPr>
-          <p:cNvSpPr>
-            <a:spLocks xmlns:a="http://schemas.openxmlformats.org/drawingml/2006/main" noGrp="1"/>
-          </p:cNvSpPr>
-          <p:nvPr/>
-        </p:nvSpPr>
-        <p:spPr>
-          <a:xfrm xmlns:a="http://schemas.openxmlformats.org/drawingml/2006/main" rot="0">
-            <a:off x="8924925" y="4286250"/>
-            <a:ext cx="2571750" cy="293341"/>
-          </a:xfrm>
-          <a:prstGeom xmlns:a="http://schemas.openxmlformats.org/drawingml/2006/main" prst="rect">
-            <a:avLst/>
-          </a:prstGeom>
-          <a:noFill xmlns:a="http://schemas.openxmlformats.org/drawingml/2006/main"/>
-          <a:ln xmlns:a="http://schemas.openxmlformats.org/drawingml/2006/main" w="0">
-            <a:noFill/>
-            <a:prstDash val="solid"/>
-          </a:ln>
-        </p:spPr>
-        <p:txBody>
-          <a:bodyPr xmlns:a="http://schemas.openxmlformats.org/drawingml/2006/main" wrap="square" lIns="0" tIns="0" rIns="0" bIns="0" anchor="ctr">
-            <a:noAutofit/>
-          </a:bodyPr>
-          <a:lstStyle xmlns:a="http://schemas.openxmlformats.org/drawingml/2006/main"/>
-          <a:p xmlns:a="http://schemas.openxmlformats.org/drawingml/2006/main">
-            <a:pPr algn="l">
-              <a:lnSpc>
-                <a:spcPct val="110000"/>
-              </a:lnSpc>
-              <a:buNone/>
-              <a:defRPr sz="2100" b="1" i="0">
-                <a:solidFill>
-                  <a:srgbClr val="3E71B5"/>
-                </a:solidFill>
-                <a:latin typeface="Microsoft YaHei"/>
-                <a:ea typeface="Microsoft YaHei"/>
-                <a:cs typeface="Microsoft YaHei"/>
-              </a:defRPr>
-            </a:pPr>
-            <a:r>
-              <a:rPr sz="2100" b="1" i="0">
-                <a:solidFill>
-                  <a:srgbClr val="3E71B5"/>
-                </a:solidFill>
-                <a:latin typeface="Microsoft YaHei"/>
-                <a:ea typeface="Microsoft YaHei"/>
-                <a:cs typeface="Microsoft YaHei"/>
-              </a:rPr>
-              <a:t>审慎评估方案</a:t>
-            </a:r>
-          </a:p>
-        </p:txBody>
-      </p:sp>
-      <p:sp>
-        <p:nvSpPr>
-          <p:cNvPr id="50" name="matrix-detail-body-3">
-            <a:extLst xmlns:a="http://schemas.openxmlformats.org/drawingml/2006/main">
-              <a:ext uri="{FF2B5EF4-FFF2-40B4-BE49-F238E27FC236}">
-                <a16:creationId xmlns:a16="http://schemas.microsoft.com/office/drawing/2014/main" id="{F4034539-00A3-4A69-9B56-CB079E6DA947}"/>
-              </a:ext>
-            </a:extLst>
-          </p:cNvPr>
-          <p:cNvSpPr>
-            <a:spLocks xmlns:a="http://schemas.openxmlformats.org/drawingml/2006/main" noGrp="1"/>
-          </p:cNvSpPr>
-          <p:nvPr/>
-        </p:nvSpPr>
-        <p:spPr>
-          <a:xfrm xmlns:a="http://schemas.openxmlformats.org/drawingml/2006/main" rot="0">
-            <a:off x="8924925" y="4627216"/>
-            <a:ext cx="2571750" cy="570014"/>
-          </a:xfrm>
-          <a:prstGeom xmlns:a="http://schemas.openxmlformats.org/drawingml/2006/main" prst="rect">
-            <a:avLst/>
-          </a:prstGeom>
-          <a:noFill xmlns:a="http://schemas.openxmlformats.org/drawingml/2006/main"/>
-          <a:ln xmlns:a="http://schemas.openxmlformats.org/drawingml/2006/main" w="0">
-            <a:noFill/>
-            <a:prstDash val="solid"/>
-          </a:ln>
-        </p:spPr>
-        <p:txBody>
-          <a:bodyPr xmlns:a="http://schemas.openxmlformats.org/drawingml/2006/main" wrap="square" lIns="0" tIns="0" rIns="0" bIns="0" anchor="ctr">
-            <a:noAutofit/>
-          </a:bodyPr>
-          <a:lstStyle xmlns:a="http://schemas.openxmlformats.org/drawingml/2006/main"/>
-          <a:p xmlns:a="http://schemas.openxmlformats.org/drawingml/2006/main">
-            <a:pPr algn="l">
-              <a:lnSpc>
-                <a:spcPct val="132000"/>
-              </a:lnSpc>
-              <a:buNone/>
-              <a:defRPr sz="1700" b="0" i="0">
-                <a:solidFill>
-                  <a:srgbClr val="748495"/>
-                </a:solidFill>
-                <a:latin typeface="Microsoft YaHei"/>
-                <a:ea typeface="Microsoft YaHei"/>
-                <a:cs typeface="Microsoft YaHei"/>
-              </a:defRPr>
-            </a:pPr>
-            <a:r>
-              <a:rPr sz="1700" b="0" i="0">
-                <a:solidFill>
-                  <a:srgbClr val="748495"/>
-                </a:solidFill>
-                <a:latin typeface="Microsoft YaHei"/>
-                <a:ea typeface="Microsoft YaHei"/>
-                <a:cs typeface="Microsoft YaHei"/>
-              </a:rPr>
-              <a:t>投入前验证收益与复用边</a:t>
-            </a:r>
-          </a:p>
-          <a:p xmlns:a="http://schemas.openxmlformats.org/drawingml/2006/main">
-            <a:pPr algn="l">
-              <a:lnSpc>
-                <a:spcPct val="132000"/>
-              </a:lnSpc>
-              <a:buNone/>
-              <a:defRPr sz="1700" b="0" i="0">
-                <a:solidFill>
-                  <a:srgbClr val="748495"/>
-                </a:solidFill>
-                <a:latin typeface="Microsoft YaHei"/>
-                <a:ea typeface="Microsoft YaHei"/>
-                <a:cs typeface="Microsoft YaHei"/>
-              </a:defRPr>
-            </a:pPr>
-            <a:r>
-              <a:rPr sz="1700" b="0" i="0">
-                <a:solidFill>
-                  <a:srgbClr val="748495"/>
-                </a:solidFill>
-                <a:latin typeface="Microsoft YaHei"/>
-                <a:ea typeface="Microsoft YaHei"/>
-                <a:cs typeface="Microsoft YaHei"/>
-              </a:rPr>
-              <a:t>界</a:t>
-            </a:r>
-          </a:p>
-        </p:txBody>
-      </p:sp>
-      <p:sp>
-        <p:nvSpPr>
-          <p:cNvPr id="51" name="matrix-detail-divider-3">
-            <a:extLst xmlns:a="http://schemas.openxmlformats.org/drawingml/2006/main">
-              <a:ext uri="{FF2B5EF4-FFF2-40B4-BE49-F238E27FC236}">
-                <a16:creationId xmlns:a16="http://schemas.microsoft.com/office/drawing/2014/main" id="{BC7AC5E3-9071-4E26-90B3-8FC320AA990C}"/>
-              </a:ext>
-            </a:extLst>
-          </p:cNvPr>
-          <p:cNvSpPr>
-            <a:spLocks xmlns:a="http://schemas.openxmlformats.org/drawingml/2006/main" noGrp="1"/>
-          </p:cNvSpPr>
-          <p:nvPr/>
-        </p:nvSpPr>
-        <p:spPr>
-          <a:xfrm xmlns:a="http://schemas.openxmlformats.org/drawingml/2006/main" rot="0">
-            <a:off x="8924925" y="5257800"/>
-            <a:ext cx="2571750" cy="9525"/>
-          </a:xfrm>
-          <a:prstGeom xmlns:a="http://schemas.openxmlformats.org/drawingml/2006/main" prst="line">
-            <a:avLst/>
-          </a:prstGeom>
-          <a:noFill xmlns:a="http://schemas.openxmlformats.org/drawingml/2006/main"/>
-          <a:ln xmlns:a="http://schemas.openxmlformats.org/drawingml/2006/main" w="9525">
-            <a:solidFill>
-              <a:srgbClr val="5B7089">
-                <a:alpha val="55000"/>
-              </a:srgbClr>
-            </a:solidFill>
-            <a:prstDash val="dash"/>
-          </a:ln>
-        </p:spPr>
-      </p:sp>
-      <p:sp>
-        <p:nvSpPr>
-          <p:cNvPr id="52" name="matrix-detail-caption-3">
-            <a:extLst xmlns:a="http://schemas.openxmlformats.org/drawingml/2006/main">
-              <a:ext uri="{FF2B5EF4-FFF2-40B4-BE49-F238E27FC236}">
-                <a16:creationId xmlns:a16="http://schemas.microsoft.com/office/drawing/2014/main" id="{A19E0247-D51C-41E8-92BC-1DE88CC311B0}"/>
-              </a:ext>
-            </a:extLst>
-          </p:cNvPr>
-          <p:cNvSpPr>
-            <a:spLocks xmlns:a="http://schemas.openxmlformats.org/drawingml/2006/main" noGrp="1"/>
-          </p:cNvSpPr>
-          <p:nvPr/>
-        </p:nvSpPr>
-        <p:spPr>
-          <a:xfrm xmlns:a="http://schemas.openxmlformats.org/drawingml/2006/main" rot="0">
-            <a:off x="8924925" y="5324475"/>
-            <a:ext cx="2571750" cy="190500"/>
-          </a:xfrm>
-          <a:prstGeom xmlns:a="http://schemas.openxmlformats.org/drawingml/2006/main" prst="rect">
-            <a:avLst/>
-          </a:prstGeom>
-          <a:noFill xmlns:a="http://schemas.openxmlformats.org/drawingml/2006/main"/>
-          <a:ln xmlns:a="http://schemas.openxmlformats.org/drawingml/2006/main" w="0">
-            <a:noFill/>
-            <a:prstDash val="solid"/>
-          </a:ln>
-        </p:spPr>
-        <p:txBody>
-          <a:bodyPr xmlns:a="http://schemas.openxmlformats.org/drawingml/2006/main" wrap="none" lIns="0" tIns="0" rIns="0" bIns="0" anchor="ctr">
-            <a:noAutofit/>
-          </a:bodyPr>
-          <a:lstStyle xmlns:a="http://schemas.openxmlformats.org/drawingml/2006/main"/>
-          <a:p xmlns:a="http://schemas.openxmlformats.org/drawingml/2006/main">
-            <a:pPr algn="l">
-              <a:lnSpc>
-                <a:spcPct val="100000"/>
-              </a:lnSpc>
-              <a:buNone/>
-              <a:defRPr sz="1500" b="1" i="0">
-                <a:solidFill>
-                  <a:srgbClr val="4E6278"/>
-                </a:solidFill>
-                <a:latin typeface="Microsoft YaHei"/>
-                <a:ea typeface="Microsoft YaHei"/>
-                <a:cs typeface="Microsoft YaHei"/>
-              </a:defRPr>
-            </a:pPr>
-            <a:r>
-              <a:rPr sz="1500" b="1" i="0">
-                <a:solidFill>
-                  <a:srgbClr val="4E6278"/>
-                </a:solidFill>
-                <a:latin typeface="Microsoft YaHei"/>
-                <a:ea typeface="Microsoft YaHei"/>
-                <a:cs typeface="Microsoft YaHei"/>
-              </a:rPr>
-              <a:t>关键指标</a:t>
-            </a:r>
-          </a:p>
-        </p:txBody>
-      </p:sp>
-      <p:sp>
-        <p:nvSpPr>
-          <p:cNvPr id="53" name="matrix-detail-metric-label-3-0">
-            <a:extLst xmlns:a="http://schemas.openxmlformats.org/drawingml/2006/main">
-              <a:ext uri="{FF2B5EF4-FFF2-40B4-BE49-F238E27FC236}">
-                <a16:creationId xmlns:a16="http://schemas.microsoft.com/office/drawing/2014/main" id="{4C92071E-AC72-454B-9004-1C57ABF275A1}"/>
-              </a:ext>
-            </a:extLst>
-          </p:cNvPr>
-          <p:cNvSpPr>
-            <a:spLocks xmlns:a="http://schemas.openxmlformats.org/drawingml/2006/main" noGrp="1"/>
-          </p:cNvSpPr>
-          <p:nvPr/>
-        </p:nvSpPr>
-        <p:spPr>
-          <a:xfrm xmlns:a="http://schemas.openxmlformats.org/drawingml/2006/main" rot="0">
-            <a:off x="8924925" y="5562600"/>
-            <a:ext cx="1247775" cy="238125"/>
-          </a:xfrm>
-          <a:prstGeom xmlns:a="http://schemas.openxmlformats.org/drawingml/2006/main" prst="rect">
-            <a:avLst/>
-          </a:prstGeom>
-          <a:noFill xmlns:a="http://schemas.openxmlformats.org/drawingml/2006/main"/>
-          <a:ln xmlns:a="http://schemas.openxmlformats.org/drawingml/2006/main" w="0">
-            <a:noFill/>
-            <a:prstDash val="solid"/>
-          </a:ln>
-        </p:spPr>
-        <p:txBody>
-          <a:bodyPr xmlns:a="http://schemas.openxmlformats.org/drawingml/2006/main" wrap="none" lIns="0" tIns="0" rIns="0" bIns="0" anchor="ctr">
-            <a:noAutofit/>
-          </a:bodyPr>
-          <a:lstStyle xmlns:a="http://schemas.openxmlformats.org/drawingml/2006/main"/>
-          <a:p xmlns:a="http://schemas.openxmlformats.org/drawingml/2006/main">
-            <a:pPr algn="l">
-              <a:lnSpc>
-                <a:spcPct val="125000"/>
-              </a:lnSpc>
-              <a:buNone/>
-              <a:defRPr sz="1500" b="0" i="0">
-                <a:solidFill>
-                  <a:srgbClr val="586B80"/>
-                </a:solidFill>
-                <a:latin typeface="Microsoft YaHei"/>
-                <a:ea typeface="Microsoft YaHei"/>
-                <a:cs typeface="Microsoft YaHei"/>
-              </a:defRPr>
-            </a:pPr>
-            <a:r>
-              <a:rPr sz="1500" b="0" i="0">
-                <a:solidFill>
-                  <a:srgbClr val="586B80"/>
-                </a:solidFill>
-                <a:latin typeface="Microsoft YaHei"/>
-                <a:ea typeface="Microsoft YaHei"/>
-                <a:cs typeface="Microsoft YaHei"/>
-              </a:rPr>
-              <a:t>评估周期</a:t>
-            </a:r>
-          </a:p>
-        </p:txBody>
-      </p:sp>
-      <p:sp>
-        <p:nvSpPr>
-          <p:cNvPr id="54" name="matrix-detail-metric-value-3-0">
-            <a:extLst xmlns:a="http://schemas.openxmlformats.org/drawingml/2006/main">
-              <a:ext uri="{FF2B5EF4-FFF2-40B4-BE49-F238E27FC236}">
-                <a16:creationId xmlns:a16="http://schemas.microsoft.com/office/drawing/2014/main" id="{D48BB27F-DB18-4724-9CF0-194007610764}"/>
-              </a:ext>
-            </a:extLst>
-          </p:cNvPr>
-          <p:cNvSpPr>
-            <a:spLocks xmlns:a="http://schemas.openxmlformats.org/drawingml/2006/main" noGrp="1"/>
-          </p:cNvSpPr>
-          <p:nvPr/>
-        </p:nvSpPr>
-        <p:spPr>
-          <a:xfrm xmlns:a="http://schemas.openxmlformats.org/drawingml/2006/main" rot="0">
-            <a:off x="8924925" y="5819775"/>
-            <a:ext cx="1247775" cy="265357"/>
-          </a:xfrm>
-          <a:prstGeom xmlns:a="http://schemas.openxmlformats.org/drawingml/2006/main" prst="rect">
-            <a:avLst/>
-          </a:prstGeom>
-          <a:noFill xmlns:a="http://schemas.openxmlformats.org/drawingml/2006/main"/>
-          <a:ln xmlns:a="http://schemas.openxmlformats.org/drawingml/2006/main" w="0">
-            <a:noFill/>
-            <a:prstDash val="solid"/>
-          </a:ln>
-        </p:spPr>
-        <p:txBody>
-          <a:bodyPr xmlns:a="http://schemas.openxmlformats.org/drawingml/2006/main" wrap="none" lIns="0" tIns="0" rIns="0" bIns="0" anchor="ctr">
-            <a:noAutofit/>
-          </a:bodyPr>
-          <a:lstStyle xmlns:a="http://schemas.openxmlformats.org/drawingml/2006/main"/>
-          <a:p xmlns:a="http://schemas.openxmlformats.org/drawingml/2006/main">
-            <a:pPr algn="l">
-              <a:lnSpc>
-                <a:spcPct val="110000"/>
-              </a:lnSpc>
-              <a:buNone/>
-              <a:defRPr sz="1900" b="1" i="0">
-                <a:solidFill>
-                  <a:srgbClr val="3B68AB"/>
-                </a:solidFill>
-                <a:latin typeface="Microsoft YaHei"/>
-                <a:ea typeface="Microsoft YaHei"/>
-                <a:cs typeface="Microsoft YaHei"/>
-              </a:defRPr>
-            </a:pPr>
-            <a:r>
-              <a:rPr sz="1900" b="1" i="0">
-                <a:solidFill>
-                  <a:srgbClr val="3B68AB"/>
-                </a:solidFill>
-                <a:latin typeface="Microsoft YaHei"/>
-                <a:ea typeface="Microsoft YaHei"/>
-                <a:cs typeface="Microsoft YaHei"/>
-              </a:rPr>
-              <a:t>1月</a:t>
-            </a:r>
-          </a:p>
-        </p:txBody>
-      </p:sp>
-      <p:sp>
-        <p:nvSpPr>
-          <p:cNvPr id="55" name="matrix-detail-metric-label-3-1">
-            <a:extLst xmlns:a="http://schemas.openxmlformats.org/drawingml/2006/main">
-              <a:ext uri="{FF2B5EF4-FFF2-40B4-BE49-F238E27FC236}">
-                <a16:creationId xmlns:a16="http://schemas.microsoft.com/office/drawing/2014/main" id="{564F029C-9D04-492B-9417-F0AE02EA1F3D}"/>
-              </a:ext>
-            </a:extLst>
-          </p:cNvPr>
-          <p:cNvSpPr>
-            <a:spLocks xmlns:a="http://schemas.openxmlformats.org/drawingml/2006/main" noGrp="1"/>
-          </p:cNvSpPr>
-          <p:nvPr/>
-        </p:nvSpPr>
-        <p:spPr>
-          <a:xfrm xmlns:a="http://schemas.openxmlformats.org/drawingml/2006/main" rot="0">
-            <a:off x="10248900" y="5562600"/>
-            <a:ext cx="1247775" cy="238125"/>
-          </a:xfrm>
-          <a:prstGeom xmlns:a="http://schemas.openxmlformats.org/drawingml/2006/main" prst="rect">
-            <a:avLst/>
-          </a:prstGeom>
-          <a:noFill xmlns:a="http://schemas.openxmlformats.org/drawingml/2006/main"/>
-          <a:ln xmlns:a="http://schemas.openxmlformats.org/drawingml/2006/main" w="0">
-            <a:noFill/>
-            <a:prstDash val="solid"/>
-          </a:ln>
-        </p:spPr>
-        <p:txBody>
-          <a:bodyPr xmlns:a="http://schemas.openxmlformats.org/drawingml/2006/main" wrap="none" lIns="0" tIns="0" rIns="0" bIns="0" anchor="ctr">
-            <a:noAutofit/>
-          </a:bodyPr>
-          <a:lstStyle xmlns:a="http://schemas.openxmlformats.org/drawingml/2006/main"/>
-          <a:p xmlns:a="http://schemas.openxmlformats.org/drawingml/2006/main">
-            <a:pPr algn="l">
-              <a:lnSpc>
-                <a:spcPct val="125000"/>
+                <a:spcPct val="118000"/>
               </a:lnSpc>
               <a:buNone/>
               <a:defRPr sz="1500" b="0" i="0">
@@ -4386,72 +4005,10 @@
       </p:sp>
       <p:sp>
         <p:nvSpPr>
-          <p:cNvPr id="56" name="matrix-detail-metric-value-3-1">
-            <a:extLst xmlns:a="http://schemas.openxmlformats.org/drawingml/2006/main">
-              <a:ext uri="{FF2B5EF4-FFF2-40B4-BE49-F238E27FC236}">
-                <a16:creationId xmlns:a16="http://schemas.microsoft.com/office/drawing/2014/main" id="{597AF368-CD97-4930-9D9E-40739CF14D21}"/>
-              </a:ext>
-            </a:extLst>
-          </p:cNvPr>
-          <p:cNvSpPr>
-            <a:spLocks xmlns:a="http://schemas.openxmlformats.org/drawingml/2006/main" noGrp="1"/>
-          </p:cNvSpPr>
-          <p:nvPr/>
-        </p:nvSpPr>
-        <p:spPr>
-          <a:xfrm xmlns:a="http://schemas.openxmlformats.org/drawingml/2006/main" rot="0">
-            <a:off x="10248900" y="5819775"/>
-            <a:ext cx="1247775" cy="265357"/>
-          </a:xfrm>
-          <a:prstGeom xmlns:a="http://schemas.openxmlformats.org/drawingml/2006/main" prst="rect">
-            <a:avLst/>
-          </a:prstGeom>
-          <a:noFill xmlns:a="http://schemas.openxmlformats.org/drawingml/2006/main"/>
-          <a:ln xmlns:a="http://schemas.openxmlformats.org/drawingml/2006/main" w="0">
-            <a:noFill/>
-            <a:prstDash val="solid"/>
-          </a:ln>
-        </p:spPr>
-        <p:txBody>
-          <a:bodyPr xmlns:a="http://schemas.openxmlformats.org/drawingml/2006/main" wrap="none" lIns="0" tIns="0" rIns="0" bIns="0" anchor="ctr">
-            <a:noAutofit/>
-          </a:bodyPr>
-          <a:lstStyle xmlns:a="http://schemas.openxmlformats.org/drawingml/2006/main"/>
-          <a:p xmlns:a="http://schemas.openxmlformats.org/drawingml/2006/main">
-            <a:pPr algn="l">
-              <a:lnSpc>
-                <a:spcPct val="110000"/>
-              </a:lnSpc>
-              <a:buNone/>
-              <a:defRPr sz="1900" b="1" i="0">
-                <a:solidFill>
-                  <a:srgbClr val="3B68AB"/>
-                </a:solidFill>
-                <a:latin typeface="Microsoft YaHei"/>
-                <a:ea typeface="Microsoft YaHei"/>
-                <a:cs typeface="Microsoft YaHei"/>
-              </a:defRPr>
-            </a:pPr>
-            <a:r>
-              <a:rPr sz="1900" b="1" i="0">
-                <a:solidFill>
-                  <a:srgbClr val="3B68AB"/>
-                </a:solidFill>
-                <a:latin typeface="Microsoft YaHei"/>
-                <a:ea typeface="Microsoft YaHei"/>
-                <a:cs typeface="Microsoft YaHei"/>
-              </a:rPr>
-              <a:t>较高</a:t>
-            </a:r>
-          </a:p>
-        </p:txBody>
-      </p:sp>
-      <p:sp>
-        <p:nvSpPr>
-          <p:cNvPr id="57" name="matrix-high-band">
-            <a:extLst xmlns:a="http://schemas.openxmlformats.org/drawingml/2006/main">
-              <a:ext uri="{FF2B5EF4-FFF2-40B4-BE49-F238E27FC236}">
-                <a16:creationId xmlns:a16="http://schemas.microsoft.com/office/drawing/2014/main" id="{04E2BC0F-2372-4EB4-AB6C-321D171049A0}"/>
+          <p:cNvPr id="49" name="matrix-high-band">
+            <a:extLst xmlns:a="http://schemas.openxmlformats.org/drawingml/2006/main">
+              <a:ext uri="{FF2B5EF4-FFF2-40B4-BE49-F238E27FC236}">
+                <a16:creationId xmlns:a16="http://schemas.microsoft.com/office/drawing/2014/main" id="{699254C1-CDBE-41A0-876E-BF651D8166B7}"/>
               </a:ext>
             </a:extLst>
           </p:cNvPr>
@@ -4497,16 +4054,16 @@
         <p:style>
           <a:lnRef xmlns:a="http://schemas.openxmlformats.org/drawingml/2006/main" idx="0"/>
           <a:fillRef xmlns:a="http://schemas.openxmlformats.org/drawingml/2006/main" idx="0"/>
-          <a:effectRef xmlns:a="http://schemas.openxmlformats.org/drawingml/2006/main" idx="20"/>
+          <a:effectRef xmlns:a="http://schemas.openxmlformats.org/drawingml/2006/main" idx="12"/>
           <a:fontRef xmlns:a="http://schemas.openxmlformats.org/drawingml/2006/main" idx="major"/>
         </p:style>
       </p:sp>
       <p:sp>
         <p:nvSpPr>
-          <p:cNvPr id="58" name="matrix-high-band-title">
-            <a:extLst xmlns:a="http://schemas.openxmlformats.org/drawingml/2006/main">
-              <a:ext uri="{FF2B5EF4-FFF2-40B4-BE49-F238E27FC236}">
-                <a16:creationId xmlns:a16="http://schemas.microsoft.com/office/drawing/2014/main" id="{6FDA8C49-3FD4-4E37-9E2F-B8956F7A3EEB}"/>
+          <p:cNvPr id="50" name="matrix-high-band-title">
+            <a:extLst xmlns:a="http://schemas.openxmlformats.org/drawingml/2006/main">
+              <a:ext uri="{FF2B5EF4-FFF2-40B4-BE49-F238E27FC236}">
+                <a16:creationId xmlns:a16="http://schemas.microsoft.com/office/drawing/2014/main" id="{8762CD4D-0B3E-46A1-AD1A-02839D402B1D}"/>
               </a:ext>
             </a:extLst>
           </p:cNvPr>
@@ -4565,17 +4122,17 @@
       </p:sp>
       <p:pic>
         <p:nvPicPr>
-          <p:cNvPr id="132" name=""/>
+          <p:cNvPr id="116" name=""/>
           <p:cNvPicPr>
             <a:picLocks xmlns:a="http://schemas.openxmlformats.org/drawingml/2006/main" noChangeAspect="1"/>
           </p:cNvPicPr>
           <p:nvPr/>
         </p:nvPicPr>
         <p:blipFill>
-          <a:blip xmlns:r="http://schemas.openxmlformats.org/officeDocument/2006/relationships" xmlns:a="http://schemas.openxmlformats.org/drawingml/2006/main" r:embed="Ra25167b1530f4550">
+          <a:blip xmlns:r="http://schemas.openxmlformats.org/officeDocument/2006/relationships" xmlns:a="http://schemas.openxmlformats.org/drawingml/2006/main" r:embed="R243a334ae5f1419f">
             <a:extLst>
               <a:ext uri="{96DAC541-7B7A-43D3-8B79-37D633B846F1}">
-                <asvg:svgBlip xmlns:asvg="http://schemas.microsoft.com/office/drawing/2016/SVG/main" r:embed="R84c852d65c954d59"/>
+                <asvg:svgBlip xmlns:asvg="http://schemas.microsoft.com/office/drawing/2016/SVG/main" r:embed="R57d8465e2a7f4646"/>
               </a:ext>
             </a:extLst>
           </a:blip>
@@ -4593,10 +4150,10 @@
       </p:pic>
       <p:sp>
         <p:nvSpPr>
-          <p:cNvPr id="60" name="matrix-low-band">
-            <a:extLst xmlns:a="http://schemas.openxmlformats.org/drawingml/2006/main">
-              <a:ext uri="{FF2B5EF4-FFF2-40B4-BE49-F238E27FC236}">
-                <a16:creationId xmlns:a16="http://schemas.microsoft.com/office/drawing/2014/main" id="{9D525591-B2A7-43ED-9636-1CECB241B784}"/>
+          <p:cNvPr id="52" name="matrix-low-band">
+            <a:extLst xmlns:a="http://schemas.openxmlformats.org/drawingml/2006/main">
+              <a:ext uri="{FF2B5EF4-FFF2-40B4-BE49-F238E27FC236}">
+                <a16:creationId xmlns:a16="http://schemas.microsoft.com/office/drawing/2014/main" id="{ABB20691-ECDE-4C18-AF4B-5D6DD181C000}"/>
               </a:ext>
             </a:extLst>
           </p:cNvPr>
@@ -4642,16 +4199,16 @@
         <p:style>
           <a:lnRef xmlns:a="http://schemas.openxmlformats.org/drawingml/2006/main" idx="0"/>
           <a:fillRef xmlns:a="http://schemas.openxmlformats.org/drawingml/2006/main" idx="0"/>
-          <a:effectRef xmlns:a="http://schemas.openxmlformats.org/drawingml/2006/main" idx="20"/>
+          <a:effectRef xmlns:a="http://schemas.openxmlformats.org/drawingml/2006/main" idx="12"/>
           <a:fontRef xmlns:a="http://schemas.openxmlformats.org/drawingml/2006/main" idx="major"/>
         </p:style>
       </p:sp>
       <p:sp>
         <p:nvSpPr>
-          <p:cNvPr id="61" name="matrix-low-band-title">
-            <a:extLst xmlns:a="http://schemas.openxmlformats.org/drawingml/2006/main">
-              <a:ext uri="{FF2B5EF4-FFF2-40B4-BE49-F238E27FC236}">
-                <a16:creationId xmlns:a16="http://schemas.microsoft.com/office/drawing/2014/main" id="{97812C09-A623-4634-ABE5-1E0605F597C9}"/>
+          <p:cNvPr id="53" name="matrix-low-band-title">
+            <a:extLst xmlns:a="http://schemas.openxmlformats.org/drawingml/2006/main">
+              <a:ext uri="{FF2B5EF4-FFF2-40B4-BE49-F238E27FC236}">
+                <a16:creationId xmlns:a16="http://schemas.microsoft.com/office/drawing/2014/main" id="{C3DBE5A0-2E68-4512-B9C0-871D54B52B02}"/>
               </a:ext>
             </a:extLst>
           </p:cNvPr>
@@ -4710,17 +4267,17 @@
       </p:sp>
       <p:pic>
         <p:nvPicPr>
-          <p:cNvPr id="135" name=""/>
+          <p:cNvPr id="119" name=""/>
           <p:cNvPicPr>
             <a:picLocks xmlns:a="http://schemas.openxmlformats.org/drawingml/2006/main" noChangeAspect="1"/>
           </p:cNvPicPr>
           <p:nvPr/>
         </p:nvPicPr>
         <p:blipFill>
-          <a:blip xmlns:r="http://schemas.openxmlformats.org/officeDocument/2006/relationships" xmlns:a="http://schemas.openxmlformats.org/drawingml/2006/main" r:embed="R68eaff5d5acc4fe0">
+          <a:blip xmlns:r="http://schemas.openxmlformats.org/officeDocument/2006/relationships" xmlns:a="http://schemas.openxmlformats.org/drawingml/2006/main" r:embed="R1323e96acf014f39">
             <a:extLst>
               <a:ext uri="{96DAC541-7B7A-43D3-8B79-37D633B846F1}">
-                <asvg:svgBlip xmlns:asvg="http://schemas.microsoft.com/office/drawing/2016/SVG/main" r:embed="R524c8db7aaae4a38"/>
+                <asvg:svgBlip xmlns:asvg="http://schemas.microsoft.com/office/drawing/2016/SVG/main" r:embed="R8e648fe3d2df40e7"/>
               </a:ext>
             </a:extLst>
           </a:blip>
@@ -4738,10 +4295,10 @@
       </p:pic>
       <p:sp>
         <p:nvSpPr>
-          <p:cNvPr id="63" name="matrix-x-axis">
-            <a:extLst xmlns:a="http://schemas.openxmlformats.org/drawingml/2006/main">
-              <a:ext uri="{FF2B5EF4-FFF2-40B4-BE49-F238E27FC236}">
-                <a16:creationId xmlns:a16="http://schemas.microsoft.com/office/drawing/2014/main" id="{F4A4F2F2-48B0-415E-A255-4C0F09DE1B67}"/>
+          <p:cNvPr id="55" name="matrix-x-axis">
+            <a:extLst xmlns:a="http://schemas.openxmlformats.org/drawingml/2006/main">
+              <a:ext uri="{FF2B5EF4-FFF2-40B4-BE49-F238E27FC236}">
+                <a16:creationId xmlns:a16="http://schemas.microsoft.com/office/drawing/2014/main" id="{8F54BDE6-2E2E-44B0-87E6-1845D7249F5F}"/>
               </a:ext>
             </a:extLst>
           </p:cNvPr>
@@ -4769,10 +4326,10 @@
       </p:sp>
       <p:sp>
         <p:nvSpPr>
-          <p:cNvPr id="64" name="matrix-x-low-arrow">
-            <a:extLst xmlns:a="http://schemas.openxmlformats.org/drawingml/2006/main">
-              <a:ext uri="{FF2B5EF4-FFF2-40B4-BE49-F238E27FC236}">
-                <a16:creationId xmlns:a16="http://schemas.microsoft.com/office/drawing/2014/main" id="{0388A414-9584-40FB-9664-C1996BB3ED3D}"/>
+          <p:cNvPr id="56" name="matrix-x-low-arrow">
+            <a:extLst xmlns:a="http://schemas.openxmlformats.org/drawingml/2006/main">
+              <a:ext uri="{FF2B5EF4-FFF2-40B4-BE49-F238E27FC236}">
+                <a16:creationId xmlns:a16="http://schemas.microsoft.com/office/drawing/2014/main" id="{B0B30C28-67FC-42CC-94BE-A1D51BBCD0D7}"/>
               </a:ext>
             </a:extLst>
           </p:cNvPr>
@@ -4903,10 +4460,10 @@
       </p:sp>
       <p:sp>
         <p:nvSpPr>
-          <p:cNvPr id="65" name="matrix-x-high-arrow">
-            <a:extLst xmlns:a="http://schemas.openxmlformats.org/drawingml/2006/main">
-              <a:ext uri="{FF2B5EF4-FFF2-40B4-BE49-F238E27FC236}">
-                <a16:creationId xmlns:a16="http://schemas.microsoft.com/office/drawing/2014/main" id="{84593F9B-904C-4C32-B1D7-021B0962CAB0}"/>
+          <p:cNvPr id="57" name="matrix-x-high-arrow">
+            <a:extLst xmlns:a="http://schemas.openxmlformats.org/drawingml/2006/main">
+              <a:ext uri="{FF2B5EF4-FFF2-40B4-BE49-F238E27FC236}">
+                <a16:creationId xmlns:a16="http://schemas.microsoft.com/office/drawing/2014/main" id="{6C285CA4-8946-4F5B-8E79-6409146F3368}"/>
               </a:ext>
             </a:extLst>
           </p:cNvPr>
@@ -5037,10 +4594,10 @@
       </p:sp>
       <p:sp>
         <p:nvSpPr>
-          <p:cNvPr id="66" name="matrix-y-axis">
-            <a:extLst xmlns:a="http://schemas.openxmlformats.org/drawingml/2006/main">
-              <a:ext uri="{FF2B5EF4-FFF2-40B4-BE49-F238E27FC236}">
-                <a16:creationId xmlns:a16="http://schemas.microsoft.com/office/drawing/2014/main" id="{F4FF7084-576E-469C-A31C-CECD9B842C19}"/>
+          <p:cNvPr id="58" name="matrix-y-axis">
+            <a:extLst xmlns:a="http://schemas.openxmlformats.org/drawingml/2006/main">
+              <a:ext uri="{FF2B5EF4-FFF2-40B4-BE49-F238E27FC236}">
+                <a16:creationId xmlns:a16="http://schemas.microsoft.com/office/drawing/2014/main" id="{4BC00001-60BD-49D4-9E9F-6D295553BC96}"/>
               </a:ext>
             </a:extLst>
           </p:cNvPr>
@@ -5068,10 +4625,10 @@
       </p:sp>
       <p:sp>
         <p:nvSpPr>
-          <p:cNvPr id="67" name="matrix-y-high-arrow">
-            <a:extLst xmlns:a="http://schemas.openxmlformats.org/drawingml/2006/main">
-              <a:ext uri="{FF2B5EF4-FFF2-40B4-BE49-F238E27FC236}">
-                <a16:creationId xmlns:a16="http://schemas.microsoft.com/office/drawing/2014/main" id="{CEE8F16D-A7BF-4DFE-B5AF-7743B65FDA2B}"/>
+          <p:cNvPr id="59" name="matrix-y-high-arrow">
+            <a:extLst xmlns:a="http://schemas.openxmlformats.org/drawingml/2006/main">
+              <a:ext uri="{FF2B5EF4-FFF2-40B4-BE49-F238E27FC236}">
+                <a16:creationId xmlns:a16="http://schemas.microsoft.com/office/drawing/2014/main" id="{21E226E7-476F-4964-BB94-F31DDD431412}"/>
               </a:ext>
             </a:extLst>
           </p:cNvPr>
@@ -5202,10 +4759,10 @@
       </p:sp>
       <p:sp>
         <p:nvSpPr>
-          <p:cNvPr id="68" name="matrix-y-low-arrow">
-            <a:extLst xmlns:a="http://schemas.openxmlformats.org/drawingml/2006/main">
-              <a:ext uri="{FF2B5EF4-FFF2-40B4-BE49-F238E27FC236}">
-                <a16:creationId xmlns:a16="http://schemas.microsoft.com/office/drawing/2014/main" id="{7EEF1DAA-E9D8-4B05-84BB-17BA668F3180}"/>
+          <p:cNvPr id="60" name="matrix-y-low-arrow">
+            <a:extLst xmlns:a="http://schemas.openxmlformats.org/drawingml/2006/main">
+              <a:ext uri="{FF2B5EF4-FFF2-40B4-BE49-F238E27FC236}">
+                <a16:creationId xmlns:a16="http://schemas.microsoft.com/office/drawing/2014/main" id="{028C177C-B124-473A-B56D-DD51D53CFE56}"/>
               </a:ext>
             </a:extLst>
           </p:cNvPr>
@@ -5336,10 +4893,10 @@
       </p:sp>
       <p:sp>
         <p:nvSpPr>
-          <p:cNvPr id="69" name="matrix-origin">
-            <a:extLst xmlns:a="http://schemas.openxmlformats.org/drawingml/2006/main">
-              <a:ext uri="{FF2B5EF4-FFF2-40B4-BE49-F238E27FC236}">
-                <a16:creationId xmlns:a16="http://schemas.microsoft.com/office/drawing/2014/main" id="{47D25C1F-D37C-45D7-81DC-CC49ACD6ADFC}"/>
+          <p:cNvPr id="61" name="matrix-origin">
+            <a:extLst xmlns:a="http://schemas.openxmlformats.org/drawingml/2006/main">
+              <a:ext uri="{FF2B5EF4-FFF2-40B4-BE49-F238E27FC236}">
+                <a16:creationId xmlns:a16="http://schemas.microsoft.com/office/drawing/2014/main" id="{05E9C1A9-E29F-40A4-B126-388B6692CD01}"/>
               </a:ext>
             </a:extLst>
           </p:cNvPr>
@@ -5369,10 +4926,10 @@
       </p:sp>
       <p:sp>
         <p:nvSpPr>
-          <p:cNvPr id="70" name="axis-x-low">
-            <a:extLst xmlns:a="http://schemas.openxmlformats.org/drawingml/2006/main">
-              <a:ext uri="{FF2B5EF4-FFF2-40B4-BE49-F238E27FC236}">
-                <a16:creationId xmlns:a16="http://schemas.microsoft.com/office/drawing/2014/main" id="{FD3D1C76-865B-42D6-A44D-D5C5223C4713}"/>
+          <p:cNvPr id="62" name="axis-x-low">
+            <a:extLst xmlns:a="http://schemas.openxmlformats.org/drawingml/2006/main">
+              <a:ext uri="{FF2B5EF4-FFF2-40B4-BE49-F238E27FC236}">
+                <a16:creationId xmlns:a16="http://schemas.microsoft.com/office/drawing/2014/main" id="{18F3C26F-29D8-4657-A357-CD178D850CF3}"/>
               </a:ext>
             </a:extLst>
           </p:cNvPr>
@@ -5431,10 +4988,10 @@
       </p:sp>
       <p:sp>
         <p:nvSpPr>
-          <p:cNvPr id="71" name="axis-x-high">
-            <a:extLst xmlns:a="http://schemas.openxmlformats.org/drawingml/2006/main">
-              <a:ext uri="{FF2B5EF4-FFF2-40B4-BE49-F238E27FC236}">
-                <a16:creationId xmlns:a16="http://schemas.microsoft.com/office/drawing/2014/main" id="{A356C37F-F765-429A-921F-8EAFFC775949}"/>
+          <p:cNvPr id="63" name="axis-x-high">
+            <a:extLst xmlns:a="http://schemas.openxmlformats.org/drawingml/2006/main">
+              <a:ext uri="{FF2B5EF4-FFF2-40B4-BE49-F238E27FC236}">
+                <a16:creationId xmlns:a16="http://schemas.microsoft.com/office/drawing/2014/main" id="{B7BD9290-E80C-4E0E-A567-09BB22FBD1DE}"/>
               </a:ext>
             </a:extLst>
           </p:cNvPr>
@@ -5493,10 +5050,10 @@
       </p:sp>
       <p:sp>
         <p:nvSpPr>
-          <p:cNvPr id="72" name="axis-y-high">
-            <a:extLst xmlns:a="http://schemas.openxmlformats.org/drawingml/2006/main">
-              <a:ext uri="{FF2B5EF4-FFF2-40B4-BE49-F238E27FC236}">
-                <a16:creationId xmlns:a16="http://schemas.microsoft.com/office/drawing/2014/main" id="{DB74BB10-475E-43FF-A11E-435AD731F18E}"/>
+          <p:cNvPr id="64" name="axis-y-high">
+            <a:extLst xmlns:a="http://schemas.openxmlformats.org/drawingml/2006/main">
+              <a:ext uri="{FF2B5EF4-FFF2-40B4-BE49-F238E27FC236}">
+                <a16:creationId xmlns:a16="http://schemas.microsoft.com/office/drawing/2014/main" id="{E16FBA5A-7EA3-4EEE-BAB4-65F810D91968}"/>
               </a:ext>
             </a:extLst>
           </p:cNvPr>
@@ -5555,10 +5112,10 @@
       </p:sp>
       <p:sp>
         <p:nvSpPr>
-          <p:cNvPr id="73" name="axis-y-low">
-            <a:extLst xmlns:a="http://schemas.openxmlformats.org/drawingml/2006/main">
-              <a:ext uri="{FF2B5EF4-FFF2-40B4-BE49-F238E27FC236}">
-                <a16:creationId xmlns:a16="http://schemas.microsoft.com/office/drawing/2014/main" id="{2B3BE7AC-E1DC-4384-B2C9-405D3CE8C8E2}"/>
+          <p:cNvPr id="65" name="axis-y-low">
+            <a:extLst xmlns:a="http://schemas.openxmlformats.org/drawingml/2006/main">
+              <a:ext uri="{FF2B5EF4-FFF2-40B4-BE49-F238E27FC236}">
+                <a16:creationId xmlns:a16="http://schemas.microsoft.com/office/drawing/2014/main" id="{3C75314D-6AFF-4CA3-B37F-60B91DAEA033}"/>
               </a:ext>
             </a:extLst>
           </p:cNvPr>
@@ -5618,7 +5175,7 @@
     </p:spTree>
     <p:extLst>
       <p:ext uri="{BB962C8B-B14F-4D97-AF65-F5344CB8AC3E}">
-        <p14:creationId xmlns:p14="http://schemas.microsoft.com/office/powerpoint/2010/main" val="142761219"/>
+        <p14:creationId xmlns:p14="http://schemas.microsoft.com/office/powerpoint/2010/main" val="439155223"/>
       </p:ext>
     </p:extLst>
   </p:cSld>
@@ -5828,78 +5385,6 @@
         </a:effectStyle>
         <a:effectStyle>
           <a:effectLst>
-            <a:outerShdw blurRad="266700" dist="114300" dir="5400000">
-              <a:srgbClr val="2F5EA8">
-                <a:alpha val="22000"/>
-              </a:srgbClr>
-            </a:outerShdw>
-          </a:effectLst>
-        </a:effectStyle>
-        <a:effectStyle>
-          <a:effectLst>
-            <a:outerShdw blurRad="152400" dist="66675" dir="5400000">
-              <a:srgbClr val="2F5EA8">
-                <a:alpha val="9000"/>
-              </a:srgbClr>
-            </a:outerShdw>
-          </a:effectLst>
-        </a:effectStyle>
-        <a:effectStyle>
-          <a:effectLst>
-            <a:outerShdw blurRad="152400" dist="66675" dir="5400000">
-              <a:srgbClr val="2F5EA8">
-                <a:alpha val="10000"/>
-              </a:srgbClr>
-            </a:outerShdw>
-          </a:effectLst>
-        </a:effectStyle>
-        <a:effectStyle>
-          <a:effectLst>
-            <a:outerShdw blurRad="171450" dist="76200" dir="5400000">
-              <a:srgbClr val="2F5EA8">
-                <a:alpha val="16000"/>
-              </a:srgbClr>
-            </a:outerShdw>
-          </a:effectLst>
-        </a:effectStyle>
-        <a:effectStyle>
-          <a:effectLst>
-            <a:outerShdw blurRad="114300" dist="47625" dir="5400000">
-              <a:srgbClr val="2F5EA8">
-                <a:alpha val="7000"/>
-              </a:srgbClr>
-            </a:outerShdw>
-          </a:effectLst>
-        </a:effectStyle>
-        <a:effectStyle>
-          <a:effectLst>
-            <a:outerShdw blurRad="95250" dist="38100" dir="5400000">
-              <a:srgbClr val="2F5EA8">
-                <a:alpha val="8000"/>
-              </a:srgbClr>
-            </a:outerShdw>
-          </a:effectLst>
-        </a:effectStyle>
-        <a:effectStyle>
-          <a:effectLst>
-            <a:outerShdw blurRad="209550" dist="95250" dir="5400000">
-              <a:srgbClr val="2F5EA8">
-                <a:alpha val="8000"/>
-              </a:srgbClr>
-            </a:outerShdw>
-          </a:effectLst>
-        </a:effectStyle>
-        <a:effectStyle>
-          <a:effectLst>
-            <a:outerShdw blurRad="133350" dist="57150" dir="5400000">
-              <a:srgbClr val="2F5EA8">
-                <a:alpha val="18000"/>
-              </a:srgbClr>
-            </a:outerShdw>
-          </a:effectLst>
-        </a:effectStyle>
-        <a:effectStyle>
-          <a:effectLst>
             <a:outerShdw blurRad="200025" dist="85725" dir="5400000">
               <a:srgbClr val="2F5EA8">
                 <a:alpha val="14000"/>
